--- a/public/a-eye-presentation/A-Eye_midterm_data_collection_forecast.pptx
+++ b/public/a-eye-presentation/A-Eye_midterm_data_collection_forecast.pptx
@@ -12,10 +12,6 @@
     <p:sldId id="260" r:id="rId11"/>
     <p:sldId id="261" r:id="rId12"/>
     <p:sldId id="262" r:id="rId13"/>
-    <p:sldId id="263" r:id="rId14"/>
-    <p:sldId id="264" r:id="rId15"/>
-    <p:sldId id="265" r:id="rId16"/>
-    <p:sldId id="266" r:id="rId17"/>
   </p:sldIdLst>
   <p:sldSz cx="12191695" cy="6858000" type="screen4x3"/>
   <p:notesSz cx="6858000" cy="9144000"/>
@@ -3094,7 +3090,7 @@
     <p:bg>
       <p:bgPr>
         <a:solidFill>
-          <a:srgbClr val="F6F7F9"/>
+          <a:srgbClr val="F7F8FA"/>
         </a:solidFill>
         <a:effectLst/>
       </p:bgPr>
@@ -3114,8 +3110,8 @@
         </p:nvSpPr>
         <p:spPr>
           <a:xfrm>
-            <a:off x="566928" y="530352"/>
-            <a:ext cx="1828800" cy="411480"/>
+            <a:off x="621792" y="566928"/>
+            <a:ext cx="1828800" cy="384048"/>
           </a:xfrm>
           <a:prstGeom prst="rect">
             <a:avLst/>
@@ -3123,14 +3119,14 @@
           <a:noFill/>
         </p:spPr>
         <p:txBody>
-          <a:bodyPr wrap="square" anchor="t" lIns="18288" rIns="18288" tIns="18288" bIns="18288">
+          <a:bodyPr wrap="square" lIns="18288" rIns="18288" tIns="18288" bIns="18288">
             <a:spAutoFit/>
           </a:bodyPr>
           <a:lstStyle/>
           <a:p>
             <a:pPr algn="l"/>
             <a:r>
-              <a:rPr sz="1900" b="1">
+              <a:rPr sz="2000" b="1">
                 <a:solidFill>
                   <a:srgbClr val="2563EB"/>
                 </a:solidFill>
@@ -3149,8 +3145,8 @@
         </p:nvSpPr>
         <p:spPr>
           <a:xfrm>
-            <a:off x="548640" y="1097280"/>
-            <a:ext cx="7863840" cy="1417320"/>
+            <a:off x="594360" y="1170432"/>
+            <a:ext cx="7863840" cy="1325880"/>
           </a:xfrm>
           <a:prstGeom prst="rect">
             <a:avLst/>
@@ -3158,21 +3154,21 @@
           <a:noFill/>
         </p:spPr>
         <p:txBody>
-          <a:bodyPr wrap="square" anchor="t" lIns="18288" rIns="18288" tIns="18288" bIns="18288">
+          <a:bodyPr wrap="square" lIns="18288" rIns="18288" tIns="18288" bIns="18288">
             <a:spAutoFit/>
           </a:bodyPr>
           <a:lstStyle/>
           <a:p>
             <a:pPr algn="l"/>
             <a:r>
-              <a:rPr sz="3800" b="1">
-                <a:solidFill>
-                  <a:srgbClr val="1F2937"/>
+              <a:rPr sz="3600" b="1">
+                <a:solidFill>
+                  <a:srgbClr val="18202D"/>
                 </a:solidFill>
                 <a:latin typeface="Malgun Gothic"/>
               </a:rPr>
-              <a:t>데이터 수집 개선과
-근미래 이동 수요 예측</a:t>
+              <a:t>공개 데이터로 만든
+강남 근미래 이동 수요 예측</a:t>
             </a:r>
           </a:p>
         </p:txBody>
@@ -3185,8 +3181,8 @@
         </p:nvSpPr>
         <p:spPr>
           <a:xfrm>
-            <a:off x="594360" y="2852928"/>
-            <a:ext cx="7132320" cy="777240"/>
+            <a:off x="621792" y="2852928"/>
+            <a:ext cx="6583680" cy="365760"/>
           </a:xfrm>
           <a:prstGeom prst="rect">
             <a:avLst/>
@@ -3194,21 +3190,20 @@
           <a:noFill/>
         </p:spPr>
         <p:txBody>
-          <a:bodyPr wrap="square" anchor="t" lIns="18288" rIns="18288" tIns="18288" bIns="18288">
+          <a:bodyPr wrap="square" lIns="18288" rIns="18288" tIns="18288" bIns="18288">
             <a:spAutoFit/>
           </a:bodyPr>
           <a:lstStyle/>
           <a:p>
             <a:pPr algn="l"/>
             <a:r>
-              <a:rPr sz="1700" b="0">
-                <a:solidFill>
-                  <a:srgbClr val="5A6577"/>
+              <a:rPr sz="1800" b="0">
+                <a:solidFill>
+                  <a:srgbClr val="525E70"/>
                 </a:solidFill>
                 <a:latin typeface="Malgun Gothic"/>
               </a:rPr>
-              <a:t>중간발표용 정리
-공개 데이터로 강남 9개 동의 다음 1시간 이동 수요를 추정한 과정</a:t>
+              <a:t>데이터 수집 개선 과정과 Colab 학습 결과를 중심으로</a:t>
             </a:r>
           </a:p>
         </p:txBody>
@@ -3221,8 +3216,8 @@
         </p:nvSpPr>
         <p:spPr>
           <a:xfrm>
-            <a:off x="8229600" y="777240"/>
-            <a:ext cx="3246120" cy="5120640"/>
+            <a:off x="8092440" y="932688"/>
+            <a:ext cx="3337560" cy="4434840"/>
           </a:xfrm>
           <a:prstGeom prst="roundRect">
             <a:avLst/>
@@ -3232,7 +3227,7 @@
           </a:solidFill>
           <a:ln w="12700">
             <a:solidFill>
-              <a:srgbClr val="D8E1EC"/>
+              <a:srgbClr val="DAE2ED"/>
             </a:solidFill>
           </a:ln>
         </p:spPr>
@@ -3266,8 +3261,8 @@
         </p:nvSpPr>
         <p:spPr>
           <a:xfrm>
-            <a:off x="8522208" y="1115568"/>
-            <a:ext cx="2560320" cy="320040"/>
+            <a:off x="8394192" y="1261872"/>
+            <a:ext cx="2194560" cy="274320"/>
           </a:xfrm>
           <a:prstGeom prst="rect">
             <a:avLst/>
@@ -3275,20 +3270,20 @@
           <a:noFill/>
         </p:spPr>
         <p:txBody>
-          <a:bodyPr wrap="square" anchor="t" lIns="18288" rIns="18288" tIns="18288" bIns="18288">
+          <a:bodyPr wrap="square" lIns="18288" rIns="18288" tIns="18288" bIns="18288">
             <a:spAutoFit/>
           </a:bodyPr>
           <a:lstStyle/>
           <a:p>
             <a:pPr algn="l"/>
             <a:r>
-              <a:rPr sz="1700" b="1">
-                <a:solidFill>
-                  <a:srgbClr val="1F2937"/>
+              <a:rPr sz="1800" b="1">
+                <a:solidFill>
+                  <a:srgbClr val="18202D"/>
                 </a:solidFill>
                 <a:latin typeface="Malgun Gothic"/>
               </a:rPr>
-              <a:t>오늘 발표의 핵심</a:t>
+              <a:t>오늘 말할 것</a:t>
             </a:r>
           </a:p>
         </p:txBody>
@@ -3301,8 +3296,8 @@
         </p:nvSpPr>
         <p:spPr>
           <a:xfrm>
-            <a:off x="8522208" y="1664208"/>
-            <a:ext cx="2514600" cy="2377440"/>
+            <a:off x="8394192" y="1783080"/>
+            <a:ext cx="2514600" cy="2240280"/>
           </a:xfrm>
           <a:prstGeom prst="rect">
             <a:avLst/>
@@ -3317,65 +3312,65 @@
           <a:p>
             <a:pPr>
               <a:spcAft>
-                <a:spcPts val="600"/>
+                <a:spcPts val="800"/>
               </a:spcAft>
               <a:defRPr sz="1400">
                 <a:solidFill>
-                  <a:srgbClr val="1F2937"/>
+                  <a:srgbClr val="18202D"/>
                 </a:solidFill>
                 <a:latin typeface="Malgun Gothic"/>
               </a:defRPr>
             </a:pPr>
             <a:r>
-              <a:t>택시 호출 데이터 부재를 공개 데이터 proxy로 보완</a:t>
+              <a:t>택시 호출 데이터 부재를 어떻게 보완했는지</a:t>
             </a:r>
           </a:p>
           <a:p>
             <a:pPr>
               <a:spcAft>
-                <a:spcPts val="600"/>
+                <a:spcPts val="800"/>
               </a:spcAft>
               <a:defRPr sz="1400">
                 <a:solidFill>
-                  <a:srgbClr val="1F2937"/>
+                  <a:srgbClr val="18202D"/>
                 </a:solidFill>
                 <a:latin typeface="Malgun Gothic"/>
               </a:defRPr>
             </a:pPr>
             <a:r>
-              <a:t>2024~2025년 대중교통 + 날씨 + 휴일 결합</a:t>
+              <a:t>어떤 공개 데이터를 수집하고 결합했는지</a:t>
             </a:r>
           </a:p>
           <a:p>
             <a:pPr>
               <a:spcAft>
-                <a:spcPts val="600"/>
+                <a:spcPts val="800"/>
               </a:spcAft>
               <a:defRPr sz="1400">
                 <a:solidFill>
-                  <a:srgbClr val="1F2937"/>
+                  <a:srgbClr val="18202D"/>
                 </a:solidFill>
                 <a:latin typeface="Malgun Gothic"/>
               </a:defRPr>
             </a:pPr>
             <a:r>
-              <a:t>다음 1시간 강남 9개 동 수요 예측 모델 학습</a:t>
+              <a:t>대중교통 수요 proxy 모델이 무엇을 예측했는지</a:t>
             </a:r>
           </a:p>
           <a:p>
             <a:pPr>
               <a:spcAft>
-                <a:spcPts val="600"/>
+                <a:spcPts val="800"/>
               </a:spcAft>
               <a:defRPr sz="1400">
                 <a:solidFill>
-                  <a:srgbClr val="1F2937"/>
+                  <a:srgbClr val="18202D"/>
                 </a:solidFill>
                 <a:latin typeface="Malgun Gothic"/>
               </a:defRPr>
             </a:pPr>
             <a:r>
-              <a:t>지도 서비스에 붙일 수 있는 결과 페이지까지 구성</a:t>
+              <a:t>지도 서비스에 어떻게 연결할 수 있는지</a:t>
             </a:r>
           </a:p>
         </p:txBody>
@@ -3388,8 +3383,8 @@
         </p:nvSpPr>
         <p:spPr>
           <a:xfrm>
-            <a:off x="8549640" y="4617720"/>
-            <a:ext cx="1417320" cy="347472"/>
+            <a:off x="8412480" y="4645152"/>
+            <a:ext cx="2697480" cy="438912"/>
           </a:xfrm>
           <a:prstGeom prst="roundRect">
             <a:avLst/>
@@ -3433,8 +3428,8 @@
         </p:nvSpPr>
         <p:spPr>
           <a:xfrm>
-            <a:off x="8668512" y="4709160"/>
-            <a:ext cx="1143000" cy="164592"/>
+            <a:off x="8522208" y="4773168"/>
+            <a:ext cx="2468880" cy="164592"/>
           </a:xfrm>
           <a:prstGeom prst="rect">
             <a:avLst/>
@@ -3442,79 +3437,34 @@
           <a:noFill/>
         </p:spPr>
         <p:txBody>
-          <a:bodyPr wrap="square" anchor="t" lIns="18288" rIns="18288" tIns="18288" bIns="18288">
+          <a:bodyPr wrap="square" lIns="18288" rIns="18288" tIns="18288" bIns="18288">
             <a:spAutoFit/>
           </a:bodyPr>
           <a:lstStyle/>
           <a:p>
             <a:pPr algn="ctr"/>
             <a:r>
-              <a:rPr sz="1000" b="1">
+              <a:rPr sz="1100" b="1">
                 <a:solidFill>
                   <a:srgbClr val="2563EB"/>
                 </a:solidFill>
                 <a:latin typeface="Malgun Gothic"/>
               </a:rPr>
-              <a:t>R2 0.9854</a:t>
-            </a:r>
-          </a:p>
-        </p:txBody>
-      </p:sp>
-      <p:sp>
-        <p:nvSpPr>
-          <p:cNvPr id="10" name="Rounded Rectangle 9"/>
-          <p:cNvSpPr/>
-          <p:nvPr/>
-        </p:nvSpPr>
-        <p:spPr>
-          <a:xfrm>
-            <a:off x="10040112" y="4617720"/>
-            <a:ext cx="1234440" cy="347472"/>
-          </a:xfrm>
-          <a:prstGeom prst="roundRect">
-            <a:avLst/>
-          </a:prstGeom>
-          <a:solidFill>
-            <a:srgbClr val="E8F7F0"/>
-          </a:solidFill>
-          <a:ln w="12700">
-            <a:solidFill>
-              <a:srgbClr val="E8F7F0"/>
-            </a:solidFill>
-          </a:ln>
-        </p:spPr>
-        <p:style>
-          <a:lnRef idx="1">
-            <a:schemeClr val="accent1"/>
-          </a:lnRef>
-          <a:fillRef idx="3">
-            <a:schemeClr val="accent1"/>
-          </a:fillRef>
-          <a:effectRef idx="2">
-            <a:schemeClr val="accent1"/>
-          </a:effectRef>
-          <a:fontRef idx="minor">
-            <a:schemeClr val="lt1"/>
-          </a:fontRef>
-        </p:style>
-        <p:txBody>
-          <a:bodyPr rtlCol="0" anchor="ctr"/>
-          <a:lstStyle/>
-          <a:p>
-            <a:pPr algn="ctr"/>
-          </a:p>
-        </p:txBody>
-      </p:sp>
-      <p:sp>
-        <p:nvSpPr>
-          <p:cNvPr id="11" name="TextBox 10"/>
+              <a:t>Test R2 0.9854 · MAE 약 166명</a:t>
+            </a:r>
+          </a:p>
+        </p:txBody>
+      </p:sp>
+      <p:sp>
+        <p:nvSpPr>
+          <p:cNvPr id="10" name="TextBox 9"/>
           <p:cNvSpPr txBox="1"/>
           <p:nvPr/>
         </p:nvSpPr>
         <p:spPr>
           <a:xfrm>
-            <a:off x="10131552" y="4709160"/>
-            <a:ext cx="960120" cy="164592"/>
+            <a:off x="548640" y="6473952"/>
+            <a:ext cx="4572000" cy="201168"/>
           </a:xfrm>
           <a:prstGeom prst="rect">
             <a:avLst/>
@@ -3522,1224 +3472,16 @@
           <a:noFill/>
         </p:spPr>
         <p:txBody>
-          <a:bodyPr wrap="square" anchor="t" lIns="18288" rIns="18288" tIns="18288" bIns="18288">
+          <a:bodyPr wrap="square" lIns="18288" rIns="18288" tIns="18288" bIns="18288">
             <a:spAutoFit/>
           </a:bodyPr>
           <a:lstStyle/>
           <a:p>
-            <a:pPr algn="ctr"/>
-            <a:r>
-              <a:rPr sz="1000" b="1">
-                <a:solidFill>
-                  <a:srgbClr val="16805F"/>
-                </a:solidFill>
-                <a:latin typeface="Malgun Gothic"/>
-              </a:rPr>
-              <a:t>MAE 166명</a:t>
-            </a:r>
-          </a:p>
-        </p:txBody>
-      </p:sp>
-      <p:sp>
-        <p:nvSpPr>
-          <p:cNvPr id="12" name="TextBox 11"/>
-          <p:cNvSpPr txBox="1"/>
-          <p:nvPr/>
-        </p:nvSpPr>
-        <p:spPr>
-          <a:xfrm>
-            <a:off x="502920" y="6446520"/>
-            <a:ext cx="5029200" cy="228600"/>
-          </a:xfrm>
-          <a:prstGeom prst="rect">
-            <a:avLst/>
-          </a:prstGeom>
-          <a:noFill/>
-        </p:spPr>
-        <p:txBody>
-          <a:bodyPr wrap="square" anchor="t" lIns="18288" rIns="18288" tIns="18288" bIns="18288">
-            <a:spAutoFit/>
-          </a:bodyPr>
-          <a:lstStyle/>
-          <a:p>
             <a:pPr algn="l"/>
             <a:r>
               <a:rPr sz="900" b="0">
                 <a:solidFill>
-                  <a:srgbClr val="5A6577"/>
-                </a:solidFill>
-                <a:latin typeface="Malgun Gothic"/>
-              </a:rPr>
-              <a:t>공개 데이터 기반 근미래 이동 수요 예측</a:t>
-            </a:r>
-          </a:p>
-        </p:txBody>
-      </p:sp>
-    </p:spTree>
-  </p:cSld>
-  <p:clrMapOvr>
-    <a:masterClrMapping/>
-  </p:clrMapOvr>
-</p:sld>
-</file>
-
-<file path=ppt/slides/slide10.xml><?xml version="1.0" encoding="utf-8"?>
-<p:sld xmlns:a="http://schemas.openxmlformats.org/drawingml/2006/main" xmlns:p="http://schemas.openxmlformats.org/presentationml/2006/main" xmlns:r="http://schemas.openxmlformats.org/officeDocument/2006/relationships">
-  <p:cSld>
-    <p:bg>
-      <p:bgPr>
-        <a:solidFill>
-          <a:srgbClr val="F6F7F9"/>
-        </a:solidFill>
-        <a:effectLst/>
-      </p:bgPr>
-    </p:bg>
-    <p:spTree>
-      <p:nvGrpSpPr>
-        <p:cNvPr id="1" name=""/>
-        <p:cNvGrpSpPr/>
-        <p:nvPr/>
-      </p:nvGrpSpPr>
-      <p:grpSpPr/>
-      <p:sp>
-        <p:nvSpPr>
-          <p:cNvPr id="2" name="TextBox 1"/>
-          <p:cNvSpPr txBox="1"/>
-          <p:nvPr/>
-        </p:nvSpPr>
-        <p:spPr>
-          <a:xfrm>
-            <a:off x="502920" y="320040"/>
-            <a:ext cx="2743200" cy="274320"/>
-          </a:xfrm>
-          <a:prstGeom prst="rect">
-            <a:avLst/>
-          </a:prstGeom>
-          <a:noFill/>
-        </p:spPr>
-        <p:txBody>
-          <a:bodyPr wrap="square" anchor="t" lIns="18288" rIns="18288" tIns="18288" bIns="18288">
-            <a:spAutoFit/>
-          </a:bodyPr>
-          <a:lstStyle/>
-          <a:p>
-            <a:pPr algn="l"/>
-            <a:r>
-              <a:rPr sz="1200" b="1">
-                <a:solidFill>
-                  <a:srgbClr val="2563EB"/>
-                </a:solidFill>
-                <a:latin typeface="Malgun Gothic"/>
-              </a:rPr>
-              <a:t>A-Eye 중간발표</a:t>
-            </a:r>
-          </a:p>
-        </p:txBody>
-      </p:sp>
-      <p:sp>
-        <p:nvSpPr>
-          <p:cNvPr id="3" name="TextBox 2"/>
-          <p:cNvSpPr txBox="1"/>
-          <p:nvPr/>
-        </p:nvSpPr>
-        <p:spPr>
-          <a:xfrm>
-            <a:off x="502920" y="685800"/>
-            <a:ext cx="9875520" cy="621792"/>
-          </a:xfrm>
-          <a:prstGeom prst="rect">
-            <a:avLst/>
-          </a:prstGeom>
-          <a:noFill/>
-        </p:spPr>
-        <p:txBody>
-          <a:bodyPr wrap="square" anchor="t" lIns="18288" rIns="18288" tIns="18288" bIns="18288">
-            <a:spAutoFit/>
-          </a:bodyPr>
-          <a:lstStyle/>
-          <a:p>
-            <a:pPr algn="l"/>
-            <a:r>
-              <a:rPr sz="2800" b="1">
-                <a:solidFill>
-                  <a:srgbClr val="1F2937"/>
-                </a:solidFill>
-                <a:latin typeface="Malgun Gothic"/>
-              </a:rPr>
-              <a:t>서비스 연결: 지도에서 결과 페이지로 바로 이동</a:t>
-            </a:r>
-          </a:p>
-        </p:txBody>
-      </p:sp>
-      <p:sp>
-        <p:nvSpPr>
-          <p:cNvPr id="4" name="Rectangle 3"/>
-          <p:cNvSpPr/>
-          <p:nvPr/>
-        </p:nvSpPr>
-        <p:spPr>
-          <a:xfrm>
-            <a:off x="502920" y="1810512"/>
-            <a:ext cx="11155680" cy="10972"/>
-          </a:xfrm>
-          <a:prstGeom prst="rect">
-            <a:avLst/>
-          </a:prstGeom>
-          <a:solidFill>
-            <a:srgbClr val="D8E1EC"/>
-          </a:solidFill>
-          <a:ln>
-            <a:noFill/>
-          </a:ln>
-        </p:spPr>
-        <p:style>
-          <a:lnRef idx="1">
-            <a:schemeClr val="accent1"/>
-          </a:lnRef>
-          <a:fillRef idx="3">
-            <a:schemeClr val="accent1"/>
-          </a:fillRef>
-          <a:effectRef idx="2">
-            <a:schemeClr val="accent1"/>
-          </a:effectRef>
-          <a:fontRef idx="minor">
-            <a:schemeClr val="lt1"/>
-          </a:fontRef>
-        </p:style>
-        <p:txBody>
-          <a:bodyPr rtlCol="0" anchor="ctr"/>
-          <a:lstStyle/>
-          <a:p>
-            <a:pPr algn="ctr"/>
-          </a:p>
-        </p:txBody>
-      </p:sp>
-      <p:sp>
-        <p:nvSpPr>
-          <p:cNvPr id="5" name="Rounded Rectangle 4"/>
-          <p:cNvSpPr/>
-          <p:nvPr/>
-        </p:nvSpPr>
-        <p:spPr>
-          <a:xfrm>
-            <a:off x="685800" y="2057400"/>
-            <a:ext cx="4846320" cy="3200400"/>
-          </a:xfrm>
-          <a:prstGeom prst="roundRect">
-            <a:avLst/>
-          </a:prstGeom>
-          <a:solidFill>
-            <a:srgbClr val="FFFFFF"/>
-          </a:solidFill>
-          <a:ln w="12700">
-            <a:solidFill>
-              <a:srgbClr val="D8E1EC"/>
-            </a:solidFill>
-          </a:ln>
-        </p:spPr>
-        <p:style>
-          <a:lnRef idx="1">
-            <a:schemeClr val="accent1"/>
-          </a:lnRef>
-          <a:fillRef idx="3">
-            <a:schemeClr val="accent1"/>
-          </a:fillRef>
-          <a:effectRef idx="2">
-            <a:schemeClr val="accent1"/>
-          </a:effectRef>
-          <a:fontRef idx="minor">
-            <a:schemeClr val="lt1"/>
-          </a:fontRef>
-        </p:style>
-        <p:txBody>
-          <a:bodyPr rtlCol="0" anchor="ctr"/>
-          <a:lstStyle/>
-          <a:p>
-            <a:pPr algn="ctr"/>
-          </a:p>
-        </p:txBody>
-      </p:sp>
-      <p:sp>
-        <p:nvSpPr>
-          <p:cNvPr id="6" name="TextBox 5"/>
-          <p:cNvSpPr txBox="1"/>
-          <p:nvPr/>
-        </p:nvSpPr>
-        <p:spPr>
-          <a:xfrm>
-            <a:off x="960120" y="2395728"/>
-            <a:ext cx="2103120" cy="320040"/>
-          </a:xfrm>
-          <a:prstGeom prst="rect">
-            <a:avLst/>
-          </a:prstGeom>
-          <a:noFill/>
-        </p:spPr>
-        <p:txBody>
-          <a:bodyPr wrap="square" anchor="t" lIns="18288" rIns="18288" tIns="18288" bIns="18288">
-            <a:spAutoFit/>
-          </a:bodyPr>
-          <a:lstStyle/>
-          <a:p>
-            <a:pPr algn="l"/>
-            <a:r>
-              <a:rPr sz="2000" b="1">
-                <a:solidFill>
-                  <a:srgbClr val="1F2937"/>
-                </a:solidFill>
-                <a:latin typeface="Malgun Gothic"/>
-              </a:rPr>
-              <a:t>현재 사이트 반영</a:t>
-            </a:r>
-          </a:p>
-        </p:txBody>
-      </p:sp>
-      <p:sp>
-        <p:nvSpPr>
-          <p:cNvPr id="7" name="TextBox 6"/>
-          <p:cNvSpPr txBox="1"/>
-          <p:nvPr/>
-        </p:nvSpPr>
-        <p:spPr>
-          <a:xfrm>
-            <a:off x="960120" y="2880360"/>
-            <a:ext cx="3977639" cy="1508760"/>
-          </a:xfrm>
-          <a:prstGeom prst="rect">
-            <a:avLst/>
-          </a:prstGeom>
-          <a:noFill/>
-        </p:spPr>
-        <p:txBody>
-          <a:bodyPr wrap="square" lIns="18288" rIns="18288">
-            <a:spAutoFit/>
-          </a:bodyPr>
-          <a:lstStyle/>
-          <a:p>
-            <a:pPr>
-              <a:spcAft>
-                <a:spcPts val="600"/>
-              </a:spcAft>
-              <a:defRPr sz="1400">
-                <a:solidFill>
-                  <a:srgbClr val="1F2937"/>
-                </a:solidFill>
-                <a:latin typeface="Malgun Gothic"/>
-              </a:defRPr>
-            </a:pPr>
-            <a:r>
-              <a:t>메인 지도 화면 상단에 “A-Eye 발표 자료” 버튼 추가</a:t>
-            </a:r>
-          </a:p>
-          <a:p>
-            <a:pPr>
-              <a:spcAft>
-                <a:spcPts val="600"/>
-              </a:spcAft>
-              <a:defRPr sz="1400">
-                <a:solidFill>
-                  <a:srgbClr val="1F2937"/>
-                </a:solidFill>
-                <a:latin typeface="Malgun Gothic"/>
-              </a:defRPr>
-            </a:pPr>
-            <a:r>
-              <a:t>/presentation 경로에 데이터 출처, 학습 결과, 결론 정리</a:t>
-            </a:r>
-          </a:p>
-          <a:p>
-            <a:pPr>
-              <a:spcAft>
-                <a:spcPts val="600"/>
-              </a:spcAft>
-              <a:defRPr sz="1400">
-                <a:solidFill>
-                  <a:srgbClr val="1F2937"/>
-                </a:solidFill>
-                <a:latin typeface="Malgun Gothic"/>
-              </a:defRPr>
-            </a:pPr>
-            <a:r>
-              <a:t>Cloudflare 배포 부담을 줄이기 위해 가벼운 asset만 public에 포함</a:t>
-            </a:r>
-          </a:p>
-        </p:txBody>
-      </p:sp>
-      <p:sp>
-        <p:nvSpPr>
-          <p:cNvPr id="8" name="Rounded Rectangle 7"/>
-          <p:cNvSpPr/>
-          <p:nvPr/>
-        </p:nvSpPr>
-        <p:spPr>
-          <a:xfrm>
-            <a:off x="5989320" y="2057400"/>
-            <a:ext cx="5166360" cy="3200400"/>
-          </a:xfrm>
-          <a:prstGeom prst="roundRect">
-            <a:avLst/>
-          </a:prstGeom>
-          <a:solidFill>
-            <a:srgbClr val="E8F0FE"/>
-          </a:solidFill>
-          <a:ln w="12700">
-            <a:solidFill>
-              <a:srgbClr val="E8F0FE"/>
-            </a:solidFill>
-          </a:ln>
-        </p:spPr>
-        <p:style>
-          <a:lnRef idx="1">
-            <a:schemeClr val="accent1"/>
-          </a:lnRef>
-          <a:fillRef idx="3">
-            <a:schemeClr val="accent1"/>
-          </a:fillRef>
-          <a:effectRef idx="2">
-            <a:schemeClr val="accent1"/>
-          </a:effectRef>
-          <a:fontRef idx="minor">
-            <a:schemeClr val="lt1"/>
-          </a:fontRef>
-        </p:style>
-        <p:txBody>
-          <a:bodyPr rtlCol="0" anchor="ctr"/>
-          <a:lstStyle/>
-          <a:p>
-            <a:pPr algn="ctr"/>
-          </a:p>
-        </p:txBody>
-      </p:sp>
-      <p:sp>
-        <p:nvSpPr>
-          <p:cNvPr id="9" name="TextBox 8"/>
-          <p:cNvSpPr txBox="1"/>
-          <p:nvPr/>
-        </p:nvSpPr>
-        <p:spPr>
-          <a:xfrm>
-            <a:off x="6291072" y="2395728"/>
-            <a:ext cx="2103120" cy="320040"/>
-          </a:xfrm>
-          <a:prstGeom prst="rect">
-            <a:avLst/>
-          </a:prstGeom>
-          <a:noFill/>
-        </p:spPr>
-        <p:txBody>
-          <a:bodyPr wrap="square" anchor="t" lIns="18288" rIns="18288" tIns="18288" bIns="18288">
-            <a:spAutoFit/>
-          </a:bodyPr>
-          <a:lstStyle/>
-          <a:p>
-            <a:pPr algn="l"/>
-            <a:r>
-              <a:rPr sz="2000" b="1">
-                <a:solidFill>
-                  <a:srgbClr val="2563EB"/>
-                </a:solidFill>
-                <a:latin typeface="Malgun Gothic"/>
-              </a:rPr>
-              <a:t>다음 연결 방향</a:t>
-            </a:r>
-          </a:p>
-        </p:txBody>
-      </p:sp>
-      <p:sp>
-        <p:nvSpPr>
-          <p:cNvPr id="10" name="TextBox 9"/>
-          <p:cNvSpPr txBox="1"/>
-          <p:nvPr/>
-        </p:nvSpPr>
-        <p:spPr>
-          <a:xfrm>
-            <a:off x="6291072" y="2880360"/>
-            <a:ext cx="4069080" cy="1508760"/>
-          </a:xfrm>
-          <a:prstGeom prst="rect">
-            <a:avLst/>
-          </a:prstGeom>
-          <a:noFill/>
-        </p:spPr>
-        <p:txBody>
-          <a:bodyPr wrap="square" lIns="18288" rIns="18288">
-            <a:spAutoFit/>
-          </a:bodyPr>
-          <a:lstStyle/>
-          <a:p>
-            <a:pPr>
-              <a:spcAft>
-                <a:spcPts val="600"/>
-              </a:spcAft>
-              <a:defRPr sz="1400">
-                <a:solidFill>
-                  <a:srgbClr val="1F2937"/>
-                </a:solidFill>
-                <a:latin typeface="Malgun Gothic"/>
-              </a:defRPr>
-            </a:pPr>
-            <a:r>
-              <a:t>지도 위 행정동별 수요 색상/랭킹 overlay</a:t>
-            </a:r>
-          </a:p>
-          <a:p>
-            <a:pPr>
-              <a:spcAft>
-                <a:spcPts val="600"/>
-              </a:spcAft>
-              <a:defRPr sz="1400">
-                <a:solidFill>
-                  <a:srgbClr val="1F2937"/>
-                </a:solidFill>
-                <a:latin typeface="Malgun Gothic"/>
-              </a:defRPr>
-            </a:pPr>
-            <a:r>
-              <a:t>실시간 citydata와 예측 모델 결과를 함께 표시</a:t>
-            </a:r>
-          </a:p>
-          <a:p>
-            <a:pPr>
-              <a:spcAft>
-                <a:spcPts val="600"/>
-              </a:spcAft>
-              <a:defRPr sz="1400">
-                <a:solidFill>
-                  <a:srgbClr val="1F2937"/>
-                </a:solidFill>
-                <a:latin typeface="Malgun Gothic"/>
-              </a:defRPr>
-            </a:pPr>
-            <a:r>
-              <a:t>향후 실제 택시 호출 데이터 확보 시 proxy 보정</a:t>
-            </a:r>
-          </a:p>
-        </p:txBody>
-      </p:sp>
-      <p:sp>
-        <p:nvSpPr>
-          <p:cNvPr id="11" name="TextBox 10"/>
-          <p:cNvSpPr txBox="1"/>
-          <p:nvPr/>
-        </p:nvSpPr>
-        <p:spPr>
-          <a:xfrm>
-            <a:off x="502920" y="6446520"/>
-            <a:ext cx="5029200" cy="228600"/>
-          </a:xfrm>
-          <a:prstGeom prst="rect">
-            <a:avLst/>
-          </a:prstGeom>
-          <a:noFill/>
-        </p:spPr>
-        <p:txBody>
-          <a:bodyPr wrap="square" anchor="t" lIns="18288" rIns="18288" tIns="18288" bIns="18288">
-            <a:spAutoFit/>
-          </a:bodyPr>
-          <a:lstStyle/>
-          <a:p>
-            <a:pPr algn="l"/>
-            <a:r>
-              <a:rPr sz="900" b="0">
-                <a:solidFill>
-                  <a:srgbClr val="5A6577"/>
-                </a:solidFill>
-                <a:latin typeface="Malgun Gothic"/>
-              </a:rPr>
-              <a:t>공개 데이터 기반 근미래 이동 수요 예측</a:t>
-            </a:r>
-          </a:p>
-        </p:txBody>
-      </p:sp>
-    </p:spTree>
-  </p:cSld>
-  <p:clrMapOvr>
-    <a:masterClrMapping/>
-  </p:clrMapOvr>
-</p:sld>
-</file>
-
-<file path=ppt/slides/slide11.xml><?xml version="1.0" encoding="utf-8"?>
-<p:sld xmlns:a="http://schemas.openxmlformats.org/drawingml/2006/main" xmlns:p="http://schemas.openxmlformats.org/presentationml/2006/main" xmlns:r="http://schemas.openxmlformats.org/officeDocument/2006/relationships">
-  <p:cSld>
-    <p:bg>
-      <p:bgPr>
-        <a:solidFill>
-          <a:srgbClr val="F6F7F9"/>
-        </a:solidFill>
-        <a:effectLst/>
-      </p:bgPr>
-    </p:bg>
-    <p:spTree>
-      <p:nvGrpSpPr>
-        <p:cNvPr id="1" name=""/>
-        <p:cNvGrpSpPr/>
-        <p:nvPr/>
-      </p:nvGrpSpPr>
-      <p:grpSpPr/>
-      <p:sp>
-        <p:nvSpPr>
-          <p:cNvPr id="2" name="TextBox 1"/>
-          <p:cNvSpPr txBox="1"/>
-          <p:nvPr/>
-        </p:nvSpPr>
-        <p:spPr>
-          <a:xfrm>
-            <a:off x="502920" y="320040"/>
-            <a:ext cx="2743200" cy="274320"/>
-          </a:xfrm>
-          <a:prstGeom prst="rect">
-            <a:avLst/>
-          </a:prstGeom>
-          <a:noFill/>
-        </p:spPr>
-        <p:txBody>
-          <a:bodyPr wrap="square" anchor="t" lIns="18288" rIns="18288" tIns="18288" bIns="18288">
-            <a:spAutoFit/>
-          </a:bodyPr>
-          <a:lstStyle/>
-          <a:p>
-            <a:pPr algn="l"/>
-            <a:r>
-              <a:rPr sz="1200" b="1">
-                <a:solidFill>
-                  <a:srgbClr val="2563EB"/>
-                </a:solidFill>
-                <a:latin typeface="Malgun Gothic"/>
-              </a:rPr>
-              <a:t>A-Eye 중간발표</a:t>
-            </a:r>
-          </a:p>
-        </p:txBody>
-      </p:sp>
-      <p:sp>
-        <p:nvSpPr>
-          <p:cNvPr id="3" name="TextBox 2"/>
-          <p:cNvSpPr txBox="1"/>
-          <p:nvPr/>
-        </p:nvSpPr>
-        <p:spPr>
-          <a:xfrm>
-            <a:off x="502920" y="685800"/>
-            <a:ext cx="9875520" cy="621792"/>
-          </a:xfrm>
-          <a:prstGeom prst="rect">
-            <a:avLst/>
-          </a:prstGeom>
-          <a:noFill/>
-        </p:spPr>
-        <p:txBody>
-          <a:bodyPr wrap="square" anchor="t" lIns="18288" rIns="18288" tIns="18288" bIns="18288">
-            <a:spAutoFit/>
-          </a:bodyPr>
-          <a:lstStyle/>
-          <a:p>
-            <a:pPr algn="l"/>
-            <a:r>
-              <a:rPr sz="2800" b="1">
-                <a:solidFill>
-                  <a:srgbClr val="1F2937"/>
-                </a:solidFill>
-                <a:latin typeface="Malgun Gothic"/>
-              </a:rPr>
-              <a:t>한계와 다음 개선점</a:t>
-            </a:r>
-          </a:p>
-        </p:txBody>
-      </p:sp>
-      <p:sp>
-        <p:nvSpPr>
-          <p:cNvPr id="4" name="Rectangle 3"/>
-          <p:cNvSpPr/>
-          <p:nvPr/>
-        </p:nvSpPr>
-        <p:spPr>
-          <a:xfrm>
-            <a:off x="502920" y="1810512"/>
-            <a:ext cx="11155680" cy="10972"/>
-          </a:xfrm>
-          <a:prstGeom prst="rect">
-            <a:avLst/>
-          </a:prstGeom>
-          <a:solidFill>
-            <a:srgbClr val="D8E1EC"/>
-          </a:solidFill>
-          <a:ln>
-            <a:noFill/>
-          </a:ln>
-        </p:spPr>
-        <p:style>
-          <a:lnRef idx="1">
-            <a:schemeClr val="accent1"/>
-          </a:lnRef>
-          <a:fillRef idx="3">
-            <a:schemeClr val="accent1"/>
-          </a:fillRef>
-          <a:effectRef idx="2">
-            <a:schemeClr val="accent1"/>
-          </a:effectRef>
-          <a:fontRef idx="minor">
-            <a:schemeClr val="lt1"/>
-          </a:fontRef>
-        </p:style>
-        <p:txBody>
-          <a:bodyPr rtlCol="0" anchor="ctr"/>
-          <a:lstStyle/>
-          <a:p>
-            <a:pPr algn="ctr"/>
-          </a:p>
-        </p:txBody>
-      </p:sp>
-      <p:sp>
-        <p:nvSpPr>
-          <p:cNvPr id="5" name="Rounded Rectangle 4"/>
-          <p:cNvSpPr/>
-          <p:nvPr/>
-        </p:nvSpPr>
-        <p:spPr>
-          <a:xfrm>
-            <a:off x="685800" y="2148840"/>
-            <a:ext cx="3246120" cy="3474720"/>
-          </a:xfrm>
-          <a:prstGeom prst="roundRect">
-            <a:avLst/>
-          </a:prstGeom>
-          <a:solidFill>
-            <a:srgbClr val="FFFFFF"/>
-          </a:solidFill>
-          <a:ln w="12700">
-            <a:solidFill>
-              <a:srgbClr val="D8E1EC"/>
-            </a:solidFill>
-          </a:ln>
-        </p:spPr>
-        <p:style>
-          <a:lnRef idx="1">
-            <a:schemeClr val="accent1"/>
-          </a:lnRef>
-          <a:fillRef idx="3">
-            <a:schemeClr val="accent1"/>
-          </a:fillRef>
-          <a:effectRef idx="2">
-            <a:schemeClr val="accent1"/>
-          </a:effectRef>
-          <a:fontRef idx="minor">
-            <a:schemeClr val="lt1"/>
-          </a:fontRef>
-        </p:style>
-        <p:txBody>
-          <a:bodyPr rtlCol="0" anchor="ctr"/>
-          <a:lstStyle/>
-          <a:p>
-            <a:pPr algn="ctr"/>
-          </a:p>
-        </p:txBody>
-      </p:sp>
-      <p:sp>
-        <p:nvSpPr>
-          <p:cNvPr id="6" name="TextBox 5"/>
-          <p:cNvSpPr txBox="1"/>
-          <p:nvPr/>
-        </p:nvSpPr>
-        <p:spPr>
-          <a:xfrm>
-            <a:off x="941832" y="2487168"/>
-            <a:ext cx="2286000" cy="320040"/>
-          </a:xfrm>
-          <a:prstGeom prst="rect">
-            <a:avLst/>
-          </a:prstGeom>
-          <a:noFill/>
-        </p:spPr>
-        <p:txBody>
-          <a:bodyPr wrap="square" anchor="t" lIns="18288" rIns="18288" tIns="18288" bIns="18288">
-            <a:spAutoFit/>
-          </a:bodyPr>
-          <a:lstStyle/>
-          <a:p>
-            <a:pPr algn="l"/>
-            <a:r>
-              <a:rPr sz="2000" b="1">
-                <a:solidFill>
-                  <a:srgbClr val="1F2937"/>
-                </a:solidFill>
-                <a:latin typeface="Malgun Gothic"/>
-              </a:rPr>
-              <a:t>한계</a:t>
-            </a:r>
-          </a:p>
-        </p:txBody>
-      </p:sp>
-      <p:sp>
-        <p:nvSpPr>
-          <p:cNvPr id="7" name="TextBox 6"/>
-          <p:cNvSpPr txBox="1"/>
-          <p:nvPr/>
-        </p:nvSpPr>
-        <p:spPr>
-          <a:xfrm>
-            <a:off x="941832" y="2999232"/>
-            <a:ext cx="2606040" cy="1965960"/>
-          </a:xfrm>
-          <a:prstGeom prst="rect">
-            <a:avLst/>
-          </a:prstGeom>
-          <a:noFill/>
-        </p:spPr>
-        <p:txBody>
-          <a:bodyPr wrap="square" lIns="18288" rIns="18288">
-            <a:spAutoFit/>
-          </a:bodyPr>
-          <a:lstStyle/>
-          <a:p>
-            <a:pPr>
-              <a:spcAft>
-                <a:spcPts val="600"/>
-              </a:spcAft>
-              <a:defRPr sz="1300">
-                <a:solidFill>
-                  <a:srgbClr val="1F2937"/>
-                </a:solidFill>
-                <a:latin typeface="Malgun Gothic"/>
-              </a:defRPr>
-            </a:pPr>
-            <a:r>
-              <a:t>실제 택시 호출량 데이터가 아님</a:t>
-            </a:r>
-          </a:p>
-          <a:p>
-            <a:pPr>
-              <a:spcAft>
-                <a:spcPts val="600"/>
-              </a:spcAft>
-              <a:defRPr sz="1300">
-                <a:solidFill>
-                  <a:srgbClr val="1F2937"/>
-                </a:solidFill>
-                <a:latin typeface="Malgun Gothic"/>
-              </a:defRPr>
-            </a:pPr>
-            <a:r>
-              <a:t>대중교통 수요가 택시 수요와 항상 같지는 않음</a:t>
-            </a:r>
-          </a:p>
-          <a:p>
-            <a:pPr>
-              <a:spcAft>
-                <a:spcPts val="600"/>
-              </a:spcAft>
-              <a:defRPr sz="1300">
-                <a:solidFill>
-                  <a:srgbClr val="1F2937"/>
-                </a:solidFill>
-                <a:latin typeface="Malgun Gothic"/>
-              </a:defRPr>
-            </a:pPr>
-            <a:r>
-              <a:t>날씨의 영향은 요일/시간보다 약하게 나타남</a:t>
-            </a:r>
-          </a:p>
-        </p:txBody>
-      </p:sp>
-      <p:sp>
-        <p:nvSpPr>
-          <p:cNvPr id="8" name="Rounded Rectangle 7"/>
-          <p:cNvSpPr/>
-          <p:nvPr/>
-        </p:nvSpPr>
-        <p:spPr>
-          <a:xfrm>
-            <a:off x="4434840" y="2148840"/>
-            <a:ext cx="3246120" cy="3474720"/>
-          </a:xfrm>
-          <a:prstGeom prst="roundRect">
-            <a:avLst/>
-          </a:prstGeom>
-          <a:solidFill>
-            <a:srgbClr val="FFFFFF"/>
-          </a:solidFill>
-          <a:ln w="12700">
-            <a:solidFill>
-              <a:srgbClr val="D8E1EC"/>
-            </a:solidFill>
-          </a:ln>
-        </p:spPr>
-        <p:style>
-          <a:lnRef idx="1">
-            <a:schemeClr val="accent1"/>
-          </a:lnRef>
-          <a:fillRef idx="3">
-            <a:schemeClr val="accent1"/>
-          </a:fillRef>
-          <a:effectRef idx="2">
-            <a:schemeClr val="accent1"/>
-          </a:effectRef>
-          <a:fontRef idx="minor">
-            <a:schemeClr val="lt1"/>
-          </a:fontRef>
-        </p:style>
-        <p:txBody>
-          <a:bodyPr rtlCol="0" anchor="ctr"/>
-          <a:lstStyle/>
-          <a:p>
-            <a:pPr algn="ctr"/>
-          </a:p>
-        </p:txBody>
-      </p:sp>
-      <p:sp>
-        <p:nvSpPr>
-          <p:cNvPr id="9" name="TextBox 8"/>
-          <p:cNvSpPr txBox="1"/>
-          <p:nvPr/>
-        </p:nvSpPr>
-        <p:spPr>
-          <a:xfrm>
-            <a:off x="4690872" y="2487168"/>
-            <a:ext cx="2286000" cy="320040"/>
-          </a:xfrm>
-          <a:prstGeom prst="rect">
-            <a:avLst/>
-          </a:prstGeom>
-          <a:noFill/>
-        </p:spPr>
-        <p:txBody>
-          <a:bodyPr wrap="square" anchor="t" lIns="18288" rIns="18288" tIns="18288" bIns="18288">
-            <a:spAutoFit/>
-          </a:bodyPr>
-          <a:lstStyle/>
-          <a:p>
-            <a:pPr algn="l"/>
-            <a:r>
-              <a:rPr sz="2000" b="1">
-                <a:solidFill>
-                  <a:srgbClr val="2563EB"/>
-                </a:solidFill>
-                <a:latin typeface="Malgun Gothic"/>
-              </a:rPr>
-              <a:t>개선</a:t>
-            </a:r>
-          </a:p>
-        </p:txBody>
-      </p:sp>
-      <p:sp>
-        <p:nvSpPr>
-          <p:cNvPr id="10" name="TextBox 9"/>
-          <p:cNvSpPr txBox="1"/>
-          <p:nvPr/>
-        </p:nvSpPr>
-        <p:spPr>
-          <a:xfrm>
-            <a:off x="4690872" y="2999232"/>
-            <a:ext cx="2606040" cy="1965960"/>
-          </a:xfrm>
-          <a:prstGeom prst="rect">
-            <a:avLst/>
-          </a:prstGeom>
-          <a:noFill/>
-        </p:spPr>
-        <p:txBody>
-          <a:bodyPr wrap="square" lIns="18288" rIns="18288">
-            <a:spAutoFit/>
-          </a:bodyPr>
-          <a:lstStyle/>
-          <a:p>
-            <a:pPr>
-              <a:spcAft>
-                <a:spcPts val="600"/>
-              </a:spcAft>
-              <a:defRPr sz="1300">
-                <a:solidFill>
-                  <a:srgbClr val="1F2937"/>
-                </a:solidFill>
-                <a:latin typeface="Malgun Gothic"/>
-              </a:defRPr>
-            </a:pPr>
-            <a:r>
-              <a:t>실제 호출/승하차 데이터 확보 시 보정</a:t>
-            </a:r>
-          </a:p>
-          <a:p>
-            <a:pPr>
-              <a:spcAft>
-                <a:spcPts val="600"/>
-              </a:spcAft>
-              <a:defRPr sz="1300">
-                <a:solidFill>
-                  <a:srgbClr val="1F2937"/>
-                </a:solidFill>
-                <a:latin typeface="Malgun Gothic"/>
-              </a:defRPr>
-            </a:pPr>
-            <a:r>
-              <a:t>5분/15분 등 예측 horizon 확장</a:t>
-            </a:r>
-          </a:p>
-          <a:p>
-            <a:pPr>
-              <a:spcAft>
-                <a:spcPts val="600"/>
-              </a:spcAft>
-              <a:defRPr sz="1300">
-                <a:solidFill>
-                  <a:srgbClr val="1F2937"/>
-                </a:solidFill>
-                <a:latin typeface="Malgun Gothic"/>
-              </a:defRPr>
-            </a:pPr>
-            <a:r>
-              <a:t>지도 UI에서 동별 수요와 신뢰도 함께 표시</a:t>
-            </a:r>
-          </a:p>
-        </p:txBody>
-      </p:sp>
-      <p:sp>
-        <p:nvSpPr>
-          <p:cNvPr id="11" name="Rounded Rectangle 10"/>
-          <p:cNvSpPr/>
-          <p:nvPr/>
-        </p:nvSpPr>
-        <p:spPr>
-          <a:xfrm>
-            <a:off x="8183879" y="2148840"/>
-            <a:ext cx="3246120" cy="3474720"/>
-          </a:xfrm>
-          <a:prstGeom prst="roundRect">
-            <a:avLst/>
-          </a:prstGeom>
-          <a:solidFill>
-            <a:srgbClr val="FFFFFF"/>
-          </a:solidFill>
-          <a:ln w="12700">
-            <a:solidFill>
-              <a:srgbClr val="D8E1EC"/>
-            </a:solidFill>
-          </a:ln>
-        </p:spPr>
-        <p:style>
-          <a:lnRef idx="1">
-            <a:schemeClr val="accent1"/>
-          </a:lnRef>
-          <a:fillRef idx="3">
-            <a:schemeClr val="accent1"/>
-          </a:fillRef>
-          <a:effectRef idx="2">
-            <a:schemeClr val="accent1"/>
-          </a:effectRef>
-          <a:fontRef idx="minor">
-            <a:schemeClr val="lt1"/>
-          </a:fontRef>
-        </p:style>
-        <p:txBody>
-          <a:bodyPr rtlCol="0" anchor="ctr"/>
-          <a:lstStyle/>
-          <a:p>
-            <a:pPr algn="ctr"/>
-          </a:p>
-        </p:txBody>
-      </p:sp>
-      <p:sp>
-        <p:nvSpPr>
-          <p:cNvPr id="12" name="TextBox 11"/>
-          <p:cNvSpPr txBox="1"/>
-          <p:nvPr/>
-        </p:nvSpPr>
-        <p:spPr>
-          <a:xfrm>
-            <a:off x="8439911" y="2487168"/>
-            <a:ext cx="2286000" cy="320040"/>
-          </a:xfrm>
-          <a:prstGeom prst="rect">
-            <a:avLst/>
-          </a:prstGeom>
-          <a:noFill/>
-        </p:spPr>
-        <p:txBody>
-          <a:bodyPr wrap="square" anchor="t" lIns="18288" rIns="18288" tIns="18288" bIns="18288">
-            <a:spAutoFit/>
-          </a:bodyPr>
-          <a:lstStyle/>
-          <a:p>
-            <a:pPr algn="l"/>
-            <a:r>
-              <a:rPr sz="2000" b="1">
-                <a:solidFill>
-                  <a:srgbClr val="1F2937"/>
-                </a:solidFill>
-                <a:latin typeface="Malgun Gothic"/>
-              </a:rPr>
-              <a:t>발표 결론</a:t>
-            </a:r>
-          </a:p>
-        </p:txBody>
-      </p:sp>
-      <p:sp>
-        <p:nvSpPr>
-          <p:cNvPr id="13" name="TextBox 12"/>
-          <p:cNvSpPr txBox="1"/>
-          <p:nvPr/>
-        </p:nvSpPr>
-        <p:spPr>
-          <a:xfrm>
-            <a:off x="8439911" y="2999232"/>
-            <a:ext cx="2606040" cy="1965960"/>
-          </a:xfrm>
-          <a:prstGeom prst="rect">
-            <a:avLst/>
-          </a:prstGeom>
-          <a:noFill/>
-        </p:spPr>
-        <p:txBody>
-          <a:bodyPr wrap="square" lIns="18288" rIns="18288">
-            <a:spAutoFit/>
-          </a:bodyPr>
-          <a:lstStyle/>
-          <a:p>
-            <a:pPr>
-              <a:spcAft>
-                <a:spcPts val="600"/>
-              </a:spcAft>
-              <a:defRPr sz="1300">
-                <a:solidFill>
-                  <a:srgbClr val="1F2937"/>
-                </a:solidFill>
-                <a:latin typeface="Malgun Gothic"/>
-              </a:defRPr>
-            </a:pPr>
-            <a:r>
-              <a:t>공개 데이터만으로도 근미래 이동 수요 신호를 만들 수 있음</a:t>
-            </a:r>
-          </a:p>
-          <a:p>
-            <a:pPr>
-              <a:spcAft>
-                <a:spcPts val="600"/>
-              </a:spcAft>
-              <a:defRPr sz="1300">
-                <a:solidFill>
-                  <a:srgbClr val="1F2937"/>
-                </a:solidFill>
-                <a:latin typeface="Malgun Gothic"/>
-              </a:defRPr>
-            </a:pPr>
-            <a:r>
-              <a:t>데이터 수집 파이프라인과 모델 연결 구조를 확보함</a:t>
-            </a:r>
-          </a:p>
-          <a:p>
-            <a:pPr>
-              <a:spcAft>
-                <a:spcPts val="600"/>
-              </a:spcAft>
-              <a:defRPr sz="1300">
-                <a:solidFill>
-                  <a:srgbClr val="1F2937"/>
-                </a:solidFill>
-                <a:latin typeface="Malgun Gothic"/>
-              </a:defRPr>
-            </a:pPr>
-            <a:r>
-              <a:t>다음 단계는 서비스 지도에 예측 결과를 자연스럽게 붙이는 것</a:t>
-            </a:r>
-          </a:p>
-        </p:txBody>
-      </p:sp>
-      <p:sp>
-        <p:nvSpPr>
-          <p:cNvPr id="14" name="TextBox 13"/>
-          <p:cNvSpPr txBox="1"/>
-          <p:nvPr/>
-        </p:nvSpPr>
-        <p:spPr>
-          <a:xfrm>
-            <a:off x="777240" y="5989320"/>
-            <a:ext cx="1645920" cy="228600"/>
-          </a:xfrm>
-          <a:prstGeom prst="rect">
-            <a:avLst/>
-          </a:prstGeom>
-          <a:noFill/>
-        </p:spPr>
-        <p:txBody>
-          <a:bodyPr wrap="square" anchor="t" lIns="18288" rIns="18288" tIns="18288" bIns="18288">
-            <a:spAutoFit/>
-          </a:bodyPr>
-          <a:lstStyle/>
-          <a:p>
-            <a:pPr algn="l"/>
-            <a:r>
-              <a:rPr sz="1300" b="1">
-                <a:solidFill>
-                  <a:srgbClr val="16805F"/>
-                </a:solidFill>
-                <a:latin typeface="Malgun Gothic"/>
-              </a:rPr>
-              <a:t>마무리 문장</a:t>
-            </a:r>
-          </a:p>
-        </p:txBody>
-      </p:sp>
-      <p:sp>
-        <p:nvSpPr>
-          <p:cNvPr id="15" name="TextBox 14"/>
-          <p:cNvSpPr txBox="1"/>
-          <p:nvPr/>
-        </p:nvSpPr>
-        <p:spPr>
-          <a:xfrm>
-            <a:off x="2057400" y="5961888"/>
-            <a:ext cx="9052560" cy="274320"/>
-          </a:xfrm>
-          <a:prstGeom prst="rect">
-            <a:avLst/>
-          </a:prstGeom>
-          <a:noFill/>
-        </p:spPr>
-        <p:txBody>
-          <a:bodyPr wrap="square" anchor="t" lIns="18288" rIns="18288" tIns="18288" bIns="18288">
-            <a:spAutoFit/>
-          </a:bodyPr>
-          <a:lstStyle/>
-          <a:p>
-            <a:pPr algn="l"/>
-            <a:r>
-              <a:rPr sz="1300" b="0">
-                <a:solidFill>
-                  <a:srgbClr val="1F2937"/>
-                </a:solidFill>
-                <a:latin typeface="Malgun Gothic"/>
-              </a:rPr>
-              <a:t>이번 중간 결과는 완성된 택시 수요 모델보다, A-Eye가 공개 데이터로 수요 신호를 만들고 지도에 연결할 수 있음을 검증한 단계입니다.</a:t>
-            </a:r>
-          </a:p>
-        </p:txBody>
-      </p:sp>
-      <p:sp>
-        <p:nvSpPr>
-          <p:cNvPr id="16" name="TextBox 15"/>
-          <p:cNvSpPr txBox="1"/>
-          <p:nvPr/>
-        </p:nvSpPr>
-        <p:spPr>
-          <a:xfrm>
-            <a:off x="502920" y="6446520"/>
-            <a:ext cx="5029200" cy="228600"/>
-          </a:xfrm>
-          <a:prstGeom prst="rect">
-            <a:avLst/>
-          </a:prstGeom>
-          <a:noFill/>
-        </p:spPr>
-        <p:txBody>
-          <a:bodyPr wrap="square" anchor="t" lIns="18288" rIns="18288" tIns="18288" bIns="18288">
-            <a:spAutoFit/>
-          </a:bodyPr>
-          <a:lstStyle/>
-          <a:p>
-            <a:pPr algn="l"/>
-            <a:r>
-              <a:rPr sz="900" b="0">
-                <a:solidFill>
-                  <a:srgbClr val="5A6577"/>
+                  <a:srgbClr val="525E70"/>
                 </a:solidFill>
                 <a:latin typeface="Malgun Gothic"/>
               </a:rPr>
@@ -4762,7 +3504,7 @@
     <p:bg>
       <p:bgPr>
         <a:solidFill>
-          <a:srgbClr val="F6F7F9"/>
+          <a:srgbClr val="F7F8FA"/>
         </a:solidFill>
         <a:effectLst/>
       </p:bgPr>
@@ -4782,8 +3524,8 @@
         </p:nvSpPr>
         <p:spPr>
           <a:xfrm>
-            <a:off x="502920" y="320040"/>
-            <a:ext cx="2743200" cy="274320"/>
+            <a:off x="548640" y="329184"/>
+            <a:ext cx="2743200" cy="256032"/>
           </a:xfrm>
           <a:prstGeom prst="rect">
             <a:avLst/>
@@ -4791,7 +3533,7 @@
           <a:noFill/>
         </p:spPr>
         <p:txBody>
-          <a:bodyPr wrap="square" anchor="t" lIns="18288" rIns="18288" tIns="18288" bIns="18288">
+          <a:bodyPr wrap="square" lIns="18288" rIns="18288" tIns="18288" bIns="18288">
             <a:spAutoFit/>
           </a:bodyPr>
           <a:lstStyle/>
@@ -4817,8 +3559,8 @@
         </p:nvSpPr>
         <p:spPr>
           <a:xfrm>
-            <a:off x="502920" y="685800"/>
-            <a:ext cx="9875520" cy="621792"/>
+            <a:off x="548640" y="713232"/>
+            <a:ext cx="9875520" cy="603504"/>
           </a:xfrm>
           <a:prstGeom prst="rect">
             <a:avLst/>
@@ -4826,20 +3568,20 @@
           <a:noFill/>
         </p:spPr>
         <p:txBody>
-          <a:bodyPr wrap="square" anchor="t" lIns="18288" rIns="18288" tIns="18288" bIns="18288">
+          <a:bodyPr wrap="square" lIns="18288" rIns="18288" tIns="18288" bIns="18288">
             <a:spAutoFit/>
           </a:bodyPr>
           <a:lstStyle/>
           <a:p>
             <a:pPr algn="l"/>
             <a:r>
-              <a:rPr sz="2800" b="1">
-                <a:solidFill>
-                  <a:srgbClr val="1F2937"/>
+              <a:rPr sz="2900" b="1">
+                <a:solidFill>
+                  <a:srgbClr val="18202D"/>
                 </a:solidFill>
                 <a:latin typeface="Malgun Gothic"/>
               </a:rPr>
-              <a:t>문제 정의: 택시 호출 데이터가 없을 때 어떻게 수요를 볼 것인가</a:t>
+              <a:t>문제: 실제 택시 호출량은 아직 확보하기 어렵습니다</a:t>
             </a:r>
           </a:p>
         </p:txBody>
@@ -4852,14 +3594,14 @@
         </p:nvSpPr>
         <p:spPr>
           <a:xfrm>
-            <a:off x="502920" y="1810512"/>
-            <a:ext cx="11155680" cy="10972"/>
+            <a:off x="548640" y="1828800"/>
+            <a:ext cx="11018520" cy="10972"/>
           </a:xfrm>
           <a:prstGeom prst="rect">
             <a:avLst/>
           </a:prstGeom>
           <a:solidFill>
-            <a:srgbClr val="D8E1EC"/>
+            <a:srgbClr val="DAE2ED"/>
           </a:solidFill>
           <a:ln>
             <a:noFill/>
@@ -4895,8 +3637,8 @@
         </p:nvSpPr>
         <p:spPr>
           <a:xfrm>
-            <a:off x="640080" y="2148840"/>
-            <a:ext cx="3246120" cy="3429000"/>
+            <a:off x="731520" y="2240280"/>
+            <a:ext cx="3383280" cy="3200400"/>
           </a:xfrm>
           <a:prstGeom prst="roundRect">
             <a:avLst/>
@@ -4906,7 +3648,7 @@
           </a:solidFill>
           <a:ln w="12700">
             <a:solidFill>
-              <a:srgbClr val="D8E1EC"/>
+              <a:srgbClr val="DAE2ED"/>
             </a:solidFill>
           </a:ln>
         </p:spPr>
@@ -4940,8 +3682,8 @@
         </p:nvSpPr>
         <p:spPr>
           <a:xfrm>
-            <a:off x="896112" y="2487168"/>
-            <a:ext cx="2286000" cy="320040"/>
+            <a:off x="1024128" y="2578608"/>
+            <a:ext cx="2194560" cy="292608"/>
           </a:xfrm>
           <a:prstGeom prst="rect">
             <a:avLst/>
@@ -4949,7 +3691,7 @@
           <a:noFill/>
         </p:spPr>
         <p:txBody>
-          <a:bodyPr wrap="square" anchor="t" lIns="18288" rIns="18288" tIns="18288" bIns="18288">
+          <a:bodyPr wrap="square" lIns="18288" rIns="18288" tIns="18288" bIns="18288">
             <a:spAutoFit/>
           </a:bodyPr>
           <a:lstStyle/>
@@ -4958,11 +3700,11 @@
             <a:r>
               <a:rPr sz="2000" b="1">
                 <a:solidFill>
-                  <a:srgbClr val="1F2937"/>
+                  <a:srgbClr val="18202D"/>
                 </a:solidFill>
                 <a:latin typeface="Malgun Gothic"/>
               </a:rPr>
-              <a:t>기존 한계</a:t>
+              <a:t>그래서 생긴 문제</a:t>
             </a:r>
           </a:p>
         </p:txBody>
@@ -4975,8 +3717,8 @@
         </p:nvSpPr>
         <p:spPr>
           <a:xfrm>
-            <a:off x="896112" y="2971800"/>
-            <a:ext cx="2560320" cy="2057400"/>
+            <a:off x="1024128" y="3090672"/>
+            <a:ext cx="2651760" cy="1645920"/>
           </a:xfrm>
           <a:prstGeom prst="rect">
             <a:avLst/>
@@ -4991,49 +3733,49 @@
           <a:p>
             <a:pPr>
               <a:spcAft>
-                <a:spcPts val="600"/>
+                <a:spcPts val="800"/>
               </a:spcAft>
               <a:defRPr sz="1400">
                 <a:solidFill>
-                  <a:srgbClr val="1F2937"/>
+                  <a:srgbClr val="18202D"/>
                 </a:solidFill>
                 <a:latin typeface="Malgun Gothic"/>
               </a:defRPr>
             </a:pPr>
             <a:r>
-              <a:t>실제 택시 호출량은 공개 데이터로 확보하기 어려움</a:t>
+              <a:t>실제 호출량을 target으로 바로 학습하기 어려움</a:t>
             </a:r>
           </a:p>
           <a:p>
             <a:pPr>
               <a:spcAft>
-                <a:spcPts val="600"/>
+                <a:spcPts val="800"/>
               </a:spcAft>
               <a:defRPr sz="1400">
                 <a:solidFill>
-                  <a:srgbClr val="1F2937"/>
+                  <a:srgbClr val="18202D"/>
                 </a:solidFill>
                 <a:latin typeface="Malgun Gothic"/>
               </a:defRPr>
             </a:pPr>
             <a:r>
-              <a:t>생활인구 proxy만으로는 이동 흐름 설명이 부족함</a:t>
+              <a:t>생활인구만으로는 시간대별 이동 흐름 설명이 부족함</a:t>
             </a:r>
           </a:p>
           <a:p>
             <a:pPr>
               <a:spcAft>
-                <a:spcPts val="600"/>
+                <a:spcPts val="800"/>
               </a:spcAft>
               <a:defRPr sz="1400">
                 <a:solidFill>
-                  <a:srgbClr val="1F2937"/>
+                  <a:srgbClr val="18202D"/>
                 </a:solidFill>
                 <a:latin typeface="Malgun Gothic"/>
               </a:defRPr>
             </a:pPr>
             <a:r>
-              <a:t>발표/서비스에서 수요 근거가 필요함</a:t>
+              <a:t>지도에서 수요가 높은 이유를 설명할 근거가 필요함</a:t>
             </a:r>
           </a:p>
         </p:txBody>
@@ -5046,159 +3788,8 @@
         </p:nvSpPr>
         <p:spPr>
           <a:xfrm>
-            <a:off x="4434840" y="2148840"/>
-            <a:ext cx="3246120" cy="3429000"/>
-          </a:xfrm>
-          <a:prstGeom prst="roundRect">
-            <a:avLst/>
-          </a:prstGeom>
-          <a:solidFill>
-            <a:srgbClr val="FFFFFF"/>
-          </a:solidFill>
-          <a:ln w="12700">
-            <a:solidFill>
-              <a:srgbClr val="D8E1EC"/>
-            </a:solidFill>
-          </a:ln>
-        </p:spPr>
-        <p:style>
-          <a:lnRef idx="1">
-            <a:schemeClr val="accent1"/>
-          </a:lnRef>
-          <a:fillRef idx="3">
-            <a:schemeClr val="accent1"/>
-          </a:fillRef>
-          <a:effectRef idx="2">
-            <a:schemeClr val="accent1"/>
-          </a:effectRef>
-          <a:fontRef idx="minor">
-            <a:schemeClr val="lt1"/>
-          </a:fontRef>
-        </p:style>
-        <p:txBody>
-          <a:bodyPr rtlCol="0" anchor="ctr"/>
-          <a:lstStyle/>
-          <a:p>
-            <a:pPr algn="ctr"/>
-          </a:p>
-        </p:txBody>
-      </p:sp>
-      <p:sp>
-        <p:nvSpPr>
-          <p:cNvPr id="9" name="TextBox 8"/>
-          <p:cNvSpPr txBox="1"/>
-          <p:nvPr/>
-        </p:nvSpPr>
-        <p:spPr>
-          <a:xfrm>
-            <a:off x="4690872" y="2487168"/>
-            <a:ext cx="2286000" cy="320040"/>
-          </a:xfrm>
-          <a:prstGeom prst="rect">
-            <a:avLst/>
-          </a:prstGeom>
-          <a:noFill/>
-        </p:spPr>
-        <p:txBody>
-          <a:bodyPr wrap="square" anchor="t" lIns="18288" rIns="18288" tIns="18288" bIns="18288">
-            <a:spAutoFit/>
-          </a:bodyPr>
-          <a:lstStyle/>
-          <a:p>
-            <a:pPr algn="l"/>
-            <a:r>
-              <a:rPr sz="2000" b="1">
-                <a:solidFill>
-                  <a:srgbClr val="1F2937"/>
-                </a:solidFill>
-                <a:latin typeface="Malgun Gothic"/>
-              </a:rPr>
-              <a:t>이번 개선</a:t>
-            </a:r>
-          </a:p>
-        </p:txBody>
-      </p:sp>
-      <p:sp>
-        <p:nvSpPr>
-          <p:cNvPr id="10" name="TextBox 9"/>
-          <p:cNvSpPr txBox="1"/>
-          <p:nvPr/>
-        </p:nvSpPr>
-        <p:spPr>
-          <a:xfrm>
-            <a:off x="4690872" y="2971800"/>
-            <a:ext cx="2560320" cy="2057400"/>
-          </a:xfrm>
-          <a:prstGeom prst="rect">
-            <a:avLst/>
-          </a:prstGeom>
-          <a:noFill/>
-        </p:spPr>
-        <p:txBody>
-          <a:bodyPr wrap="square" lIns="18288" rIns="18288">
-            <a:spAutoFit/>
-          </a:bodyPr>
-          <a:lstStyle/>
-          <a:p>
-            <a:pPr>
-              <a:spcAft>
-                <a:spcPts val="600"/>
-              </a:spcAft>
-              <a:defRPr sz="1400">
-                <a:solidFill>
-                  <a:srgbClr val="1F2937"/>
-                </a:solidFill>
-                <a:latin typeface="Malgun Gothic"/>
-              </a:defRPr>
-            </a:pPr>
-            <a:r>
-              <a:t>관측 가능한 대중교통 승차량을 이동 수요 proxy로 사용</a:t>
-            </a:r>
-          </a:p>
-          <a:p>
-            <a:pPr>
-              <a:spcAft>
-                <a:spcPts val="600"/>
-              </a:spcAft>
-              <a:defRPr sz="1400">
-                <a:solidFill>
-                  <a:srgbClr val="1F2937"/>
-                </a:solidFill>
-                <a:latin typeface="Malgun Gothic"/>
-              </a:defRPr>
-            </a:pPr>
-            <a:r>
-              <a:t>요일, 시간, 휴일, 날씨, 과거 수요를 함께 반영</a:t>
-            </a:r>
-          </a:p>
-          <a:p>
-            <a:pPr>
-              <a:spcAft>
-                <a:spcPts val="600"/>
-              </a:spcAft>
-              <a:defRPr sz="1400">
-                <a:solidFill>
-                  <a:srgbClr val="1F2937"/>
-                </a:solidFill>
-                <a:latin typeface="Malgun Gothic"/>
-              </a:defRPr>
-            </a:pPr>
-            <a:r>
-              <a:t>다음 1시간 수요를 동 단위로 예측</a:t>
-            </a:r>
-          </a:p>
-        </p:txBody>
-      </p:sp>
-      <p:sp>
-        <p:nvSpPr>
-          <p:cNvPr id="11" name="Rounded Rectangle 10"/>
-          <p:cNvSpPr/>
-          <p:nvPr/>
-        </p:nvSpPr>
-        <p:spPr>
-          <a:xfrm>
-            <a:off x="8229600" y="2148840"/>
-            <a:ext cx="3246120" cy="3429000"/>
+            <a:off x="4462272" y="2240280"/>
+            <a:ext cx="3383280" cy="3200400"/>
           </a:xfrm>
           <a:prstGeom prst="roundRect">
             <a:avLst/>
@@ -5236,14 +3827,14 @@
       </p:sp>
       <p:sp>
         <p:nvSpPr>
-          <p:cNvPr id="12" name="TextBox 11"/>
+          <p:cNvPr id="9" name="TextBox 8"/>
           <p:cNvSpPr txBox="1"/>
           <p:nvPr/>
         </p:nvSpPr>
         <p:spPr>
           <a:xfrm>
-            <a:off x="8485632" y="2487168"/>
-            <a:ext cx="2286000" cy="320040"/>
+            <a:off x="4754880" y="2578608"/>
+            <a:ext cx="2194560" cy="292608"/>
           </a:xfrm>
           <a:prstGeom prst="rect">
             <a:avLst/>
@@ -5251,7 +3842,7 @@
           <a:noFill/>
         </p:spPr>
         <p:txBody>
-          <a:bodyPr wrap="square" anchor="t" lIns="18288" rIns="18288" tIns="18288" bIns="18288">
+          <a:bodyPr wrap="square" lIns="18288" rIns="18288" tIns="18288" bIns="18288">
             <a:spAutoFit/>
           </a:bodyPr>
           <a:lstStyle/>
@@ -5260,25 +3851,25 @@
             <a:r>
               <a:rPr sz="2000" b="1">
                 <a:solidFill>
-                  <a:srgbClr val="1F2937"/>
+                  <a:srgbClr val="2563EB"/>
                 </a:solidFill>
                 <a:latin typeface="Malgun Gothic"/>
               </a:rPr>
-              <a:t>정확한 표현</a:t>
-            </a:r>
-          </a:p>
-        </p:txBody>
-      </p:sp>
-      <p:sp>
-        <p:nvSpPr>
-          <p:cNvPr id="13" name="TextBox 12"/>
+              <a:t>이번 접근</a:t>
+            </a:r>
+          </a:p>
+        </p:txBody>
+      </p:sp>
+      <p:sp>
+        <p:nvSpPr>
+          <p:cNvPr id="10" name="TextBox 9"/>
           <p:cNvSpPr txBox="1"/>
           <p:nvPr/>
         </p:nvSpPr>
         <p:spPr>
           <a:xfrm>
-            <a:off x="8485632" y="2971800"/>
-            <a:ext cx="2560320" cy="2057400"/>
+            <a:off x="4754880" y="3090672"/>
+            <a:ext cx="2651760" cy="1645920"/>
           </a:xfrm>
           <a:prstGeom prst="rect">
             <a:avLst/>
@@ -5293,49 +3884,165 @@
           <a:p>
             <a:pPr>
               <a:spcAft>
-                <a:spcPts val="600"/>
+                <a:spcPts val="800"/>
               </a:spcAft>
               <a:defRPr sz="1400">
                 <a:solidFill>
-                  <a:srgbClr val="1F2937"/>
+                  <a:srgbClr val="18202D"/>
                 </a:solidFill>
                 <a:latin typeface="Malgun Gothic"/>
               </a:defRPr>
             </a:pPr>
             <a:r>
-              <a:t>택시 수요를 직접 맞힌 모델이 아님</a:t>
+              <a:t>공개적으로 관측 가능한 대중교통 승차량 사용</a:t>
             </a:r>
           </a:p>
           <a:p>
             <a:pPr>
               <a:spcAft>
-                <a:spcPts val="600"/>
+                <a:spcPts val="800"/>
               </a:spcAft>
               <a:defRPr sz="1400">
                 <a:solidFill>
-                  <a:srgbClr val="1F2937"/>
+                  <a:srgbClr val="18202D"/>
                 </a:solidFill>
                 <a:latin typeface="Malgun Gothic"/>
               </a:defRPr>
             </a:pPr>
             <a:r>
-              <a:t>공개 데이터로 만든 근미래 이동 수요 신호</a:t>
+              <a:t>이 값을 이동 수요의 proxy로 둠</a:t>
             </a:r>
           </a:p>
           <a:p>
             <a:pPr>
               <a:spcAft>
-                <a:spcPts val="600"/>
+                <a:spcPts val="800"/>
               </a:spcAft>
               <a:defRPr sz="1400">
                 <a:solidFill>
-                  <a:srgbClr val="1F2937"/>
+                  <a:srgbClr val="18202D"/>
                 </a:solidFill>
                 <a:latin typeface="Malgun Gothic"/>
               </a:defRPr>
             </a:pPr>
             <a:r>
-              <a:t>지도에서 우선순위를 보는 근거</a:t>
+              <a:t>다음 1시간의 동별 수요 방향을 예측</a:t>
+            </a:r>
+          </a:p>
+        </p:txBody>
+      </p:sp>
+      <p:sp>
+        <p:nvSpPr>
+          <p:cNvPr id="11" name="Rounded Rectangle 10"/>
+          <p:cNvSpPr/>
+          <p:nvPr/>
+        </p:nvSpPr>
+        <p:spPr>
+          <a:xfrm>
+            <a:off x="8183879" y="2240280"/>
+            <a:ext cx="3063240" cy="3200400"/>
+          </a:xfrm>
+          <a:prstGeom prst="roundRect">
+            <a:avLst/>
+          </a:prstGeom>
+          <a:solidFill>
+            <a:srgbClr val="FFF6E6"/>
+          </a:solidFill>
+          <a:ln w="12700">
+            <a:solidFill>
+              <a:srgbClr val="FFF6E6"/>
+            </a:solidFill>
+          </a:ln>
+        </p:spPr>
+        <p:style>
+          <a:lnRef idx="1">
+            <a:schemeClr val="accent1"/>
+          </a:lnRef>
+          <a:fillRef idx="3">
+            <a:schemeClr val="accent1"/>
+          </a:fillRef>
+          <a:effectRef idx="2">
+            <a:schemeClr val="accent1"/>
+          </a:effectRef>
+          <a:fontRef idx="minor">
+            <a:schemeClr val="lt1"/>
+          </a:fontRef>
+        </p:style>
+        <p:txBody>
+          <a:bodyPr rtlCol="0" anchor="ctr"/>
+          <a:lstStyle/>
+          <a:p>
+            <a:pPr algn="ctr"/>
+          </a:p>
+        </p:txBody>
+      </p:sp>
+      <p:sp>
+        <p:nvSpPr>
+          <p:cNvPr id="12" name="TextBox 11"/>
+          <p:cNvSpPr txBox="1"/>
+          <p:nvPr/>
+        </p:nvSpPr>
+        <p:spPr>
+          <a:xfrm>
+            <a:off x="8458200" y="2578608"/>
+            <a:ext cx="2194560" cy="292608"/>
+          </a:xfrm>
+          <a:prstGeom prst="rect">
+            <a:avLst/>
+          </a:prstGeom>
+          <a:noFill/>
+        </p:spPr>
+        <p:txBody>
+          <a:bodyPr wrap="square" lIns="18288" rIns="18288" tIns="18288" bIns="18288">
+            <a:spAutoFit/>
+          </a:bodyPr>
+          <a:lstStyle/>
+          <a:p>
+            <a:pPr algn="l"/>
+            <a:r>
+              <a:rPr sz="2000" b="1">
+                <a:solidFill>
+                  <a:srgbClr val="B45309"/>
+                </a:solidFill>
+                <a:latin typeface="Malgun Gothic"/>
+              </a:rPr>
+              <a:t>발표에서 주의</a:t>
+            </a:r>
+          </a:p>
+        </p:txBody>
+      </p:sp>
+      <p:sp>
+        <p:nvSpPr>
+          <p:cNvPr id="13" name="TextBox 12"/>
+          <p:cNvSpPr txBox="1"/>
+          <p:nvPr/>
+        </p:nvSpPr>
+        <p:spPr>
+          <a:xfrm>
+            <a:off x="8458200" y="3154680"/>
+            <a:ext cx="2377440" cy="1097280"/>
+          </a:xfrm>
+          <a:prstGeom prst="rect">
+            <a:avLst/>
+          </a:prstGeom>
+          <a:noFill/>
+        </p:spPr>
+        <p:txBody>
+          <a:bodyPr wrap="square" lIns="18288" rIns="18288" tIns="18288" bIns="18288">
+            <a:spAutoFit/>
+          </a:bodyPr>
+          <a:lstStyle/>
+          <a:p>
+            <a:pPr algn="l"/>
+            <a:r>
+              <a:rPr sz="1600" b="1">
+                <a:solidFill>
+                  <a:srgbClr val="18202D"/>
+                </a:solidFill>
+                <a:latin typeface="Malgun Gothic"/>
+              </a:rPr>
+              <a:t>이 모델은 택시 호출량을 직접 맞힌 모델이 아니라,
+공개 데이터로 만든 이동 수요 신호입니다.</a:t>
             </a:r>
           </a:p>
         </p:txBody>
@@ -5348,8 +4055,8 @@
         </p:nvSpPr>
         <p:spPr>
           <a:xfrm>
-            <a:off x="502920" y="6446520"/>
-            <a:ext cx="5029200" cy="228600"/>
+            <a:off x="548640" y="6473952"/>
+            <a:ext cx="4572000" cy="201168"/>
           </a:xfrm>
           <a:prstGeom prst="rect">
             <a:avLst/>
@@ -5357,7 +4064,7 @@
           <a:noFill/>
         </p:spPr>
         <p:txBody>
-          <a:bodyPr wrap="square" anchor="t" lIns="18288" rIns="18288" tIns="18288" bIns="18288">
+          <a:bodyPr wrap="square" lIns="18288" rIns="18288" tIns="18288" bIns="18288">
             <a:spAutoFit/>
           </a:bodyPr>
           <a:lstStyle/>
@@ -5366,7 +4073,7 @@
             <a:r>
               <a:rPr sz="900" b="0">
                 <a:solidFill>
-                  <a:srgbClr val="5A6577"/>
+                  <a:srgbClr val="525E70"/>
                 </a:solidFill>
                 <a:latin typeface="Malgun Gothic"/>
               </a:rPr>
@@ -5389,7 +4096,7 @@
     <p:bg>
       <p:bgPr>
         <a:solidFill>
-          <a:srgbClr val="F6F7F9"/>
+          <a:srgbClr val="F7F8FA"/>
         </a:solidFill>
         <a:effectLst/>
       </p:bgPr>
@@ -5409,8 +4116,8 @@
         </p:nvSpPr>
         <p:spPr>
           <a:xfrm>
-            <a:off x="502920" y="320040"/>
-            <a:ext cx="2743200" cy="274320"/>
+            <a:off x="548640" y="329184"/>
+            <a:ext cx="2743200" cy="256032"/>
           </a:xfrm>
           <a:prstGeom prst="rect">
             <a:avLst/>
@@ -5418,7 +4125,7 @@
           <a:noFill/>
         </p:spPr>
         <p:txBody>
-          <a:bodyPr wrap="square" anchor="t" lIns="18288" rIns="18288" tIns="18288" bIns="18288">
+          <a:bodyPr wrap="square" lIns="18288" rIns="18288" tIns="18288" bIns="18288">
             <a:spAutoFit/>
           </a:bodyPr>
           <a:lstStyle/>
@@ -5444,8 +4151,8 @@
         </p:nvSpPr>
         <p:spPr>
           <a:xfrm>
-            <a:off x="502920" y="685800"/>
-            <a:ext cx="9875520" cy="621792"/>
+            <a:off x="548640" y="713232"/>
+            <a:ext cx="9875520" cy="603504"/>
           </a:xfrm>
           <a:prstGeom prst="rect">
             <a:avLst/>
@@ -5453,20 +4160,20 @@
           <a:noFill/>
         </p:spPr>
         <p:txBody>
-          <a:bodyPr wrap="square" anchor="t" lIns="18288" rIns="18288" tIns="18288" bIns="18288">
+          <a:bodyPr wrap="square" lIns="18288" rIns="18288" tIns="18288" bIns="18288">
             <a:spAutoFit/>
           </a:bodyPr>
           <a:lstStyle/>
           <a:p>
             <a:pPr algn="l"/>
             <a:r>
-              <a:rPr sz="2800" b="1">
-                <a:solidFill>
-                  <a:srgbClr val="1F2937"/>
+              <a:rPr sz="2900" b="1">
+                <a:solidFill>
+                  <a:srgbClr val="18202D"/>
                 </a:solidFill>
                 <a:latin typeface="Malgun Gothic"/>
               </a:rPr>
-              <a:t>개선점: proxy를 넓히고, 시간 축을 늘렸습니다</a:t>
+              <a:t>데이터 수집 개선: 수요, 날씨, 휴일을 시간 단위로 결합</a:t>
             </a:r>
           </a:p>
         </p:txBody>
@@ -5479,14 +4186,14 @@
         </p:nvSpPr>
         <p:spPr>
           <a:xfrm>
-            <a:off x="502920" y="1810512"/>
-            <a:ext cx="11155680" cy="10972"/>
+            <a:off x="548640" y="1828800"/>
+            <a:ext cx="11018520" cy="10972"/>
           </a:xfrm>
           <a:prstGeom prst="rect">
             <a:avLst/>
           </a:prstGeom>
           <a:solidFill>
-            <a:srgbClr val="D8E1EC"/>
+            <a:srgbClr val="DAE2ED"/>
           </a:solidFill>
           <a:ln>
             <a:noFill/>
@@ -5522,8 +4229,8 @@
         </p:nvSpPr>
         <p:spPr>
           <a:xfrm>
-            <a:off x="685800" y="2148840"/>
-            <a:ext cx="2423160" cy="2971800"/>
+            <a:off x="749808" y="2176272"/>
+            <a:ext cx="10744200" cy="603504"/>
           </a:xfrm>
           <a:prstGeom prst="roundRect">
             <a:avLst/>
@@ -5533,7 +4240,7 @@
           </a:solidFill>
           <a:ln w="12700">
             <a:solidFill>
-              <a:srgbClr val="D8E1EC"/>
+              <a:srgbClr val="DAE2ED"/>
             </a:solidFill>
           </a:ln>
         </p:spPr>
@@ -5567,8 +4274,8 @@
         </p:nvSpPr>
         <p:spPr>
           <a:xfrm>
-            <a:off x="886968" y="2450592"/>
-            <a:ext cx="731520" cy="274320"/>
+            <a:off x="1024128" y="2331720"/>
+            <a:ext cx="2331720" cy="219456"/>
           </a:xfrm>
           <a:prstGeom prst="rect">
             <a:avLst/>
@@ -5576,20 +4283,20 @@
           <a:noFill/>
         </p:spPr>
         <p:txBody>
-          <a:bodyPr wrap="square" anchor="t" lIns="18288" rIns="18288" tIns="18288" bIns="18288">
+          <a:bodyPr wrap="square" lIns="18288" rIns="18288" tIns="18288" bIns="18288">
             <a:spAutoFit/>
           </a:bodyPr>
           <a:lstStyle/>
           <a:p>
             <a:pPr algn="l"/>
             <a:r>
-              <a:rPr sz="1300" b="1">
-                <a:solidFill>
-                  <a:srgbClr val="2563EB"/>
+              <a:rPr sz="1400" b="1">
+                <a:solidFill>
+                  <a:srgbClr val="18202D"/>
                 </a:solidFill>
                 <a:latin typeface="Malgun Gothic"/>
               </a:rPr>
-              <a:t>1차</a:t>
+              <a:t>서울시 대중교통 OD</a:t>
             </a:r>
           </a:p>
         </p:txBody>
@@ -5602,8 +4309,8 @@
         </p:nvSpPr>
         <p:spPr>
           <a:xfrm>
-            <a:off x="886968" y="2834640"/>
-            <a:ext cx="1965960" cy="502920"/>
+            <a:off x="3840480" y="2331720"/>
+            <a:ext cx="2971800" cy="219456"/>
           </a:xfrm>
           <a:prstGeom prst="rect">
             <a:avLst/>
@@ -5611,20 +4318,20 @@
           <a:noFill/>
         </p:spPr>
         <p:txBody>
-          <a:bodyPr wrap="square" anchor="t" lIns="18288" rIns="18288" tIns="18288" bIns="18288">
+          <a:bodyPr wrap="square" lIns="18288" rIns="18288" tIns="18288" bIns="18288">
             <a:spAutoFit/>
           </a:bodyPr>
           <a:lstStyle/>
           <a:p>
             <a:pPr algn="l"/>
             <a:r>
-              <a:rPr sz="1900" b="1">
-                <a:solidFill>
-                  <a:srgbClr val="1F2937"/>
+              <a:rPr sz="1300" b="0">
+                <a:solidFill>
+                  <a:srgbClr val="525E70"/>
                 </a:solidFill>
                 <a:latin typeface="Malgun Gothic"/>
               </a:rPr>
-              <a:t>생활인구 기반 proxy</a:t>
+              <a:t>행정동별 시간대 승차량</a:t>
             </a:r>
           </a:p>
         </p:txBody>
@@ -5637,8 +4344,8 @@
         </p:nvSpPr>
         <p:spPr>
           <a:xfrm>
-            <a:off x="886968" y="3657600"/>
-            <a:ext cx="1920240" cy="1051560"/>
+            <a:off x="7360920" y="2331720"/>
+            <a:ext cx="2971800" cy="219456"/>
           </a:xfrm>
           <a:prstGeom prst="rect">
             <a:avLst/>
@@ -5646,20 +4353,20 @@
           <a:noFill/>
         </p:spPr>
         <p:txBody>
-          <a:bodyPr wrap="square" anchor="t" lIns="18288" rIns="18288" tIns="18288" bIns="18288">
+          <a:bodyPr wrap="square" lIns="18288" rIns="18288" tIns="18288" bIns="18288">
             <a:spAutoFit/>
           </a:bodyPr>
           <a:lstStyle/>
           <a:p>
             <a:pPr algn="l"/>
             <a:r>
-              <a:rPr sz="1300" b="0">
-                <a:solidFill>
-                  <a:srgbClr val="5A6577"/>
+              <a:rPr sz="1300" b="1">
+                <a:solidFill>
+                  <a:srgbClr val="2563EB"/>
                 </a:solidFill>
                 <a:latin typeface="Malgun Gothic"/>
               </a:rPr>
-              <a:t>행정동별 유동인구와 주변 신호로 상대 수요 점수 구성</a:t>
+              <a:t>예측 target, lag feature</a:t>
             </a:r>
           </a:p>
         </p:txBody>
@@ -5672,8 +4379,8 @@
         </p:nvSpPr>
         <p:spPr>
           <a:xfrm>
-            <a:off x="3520440" y="2148840"/>
-            <a:ext cx="2423160" cy="2971800"/>
+            <a:off x="749808" y="2999232"/>
+            <a:ext cx="10744200" cy="603504"/>
           </a:xfrm>
           <a:prstGeom prst="roundRect">
             <a:avLst/>
@@ -5683,7 +4390,7 @@
           </a:solidFill>
           <a:ln w="12700">
             <a:solidFill>
-              <a:srgbClr val="D8E1EC"/>
+              <a:srgbClr val="DAE2ED"/>
             </a:solidFill>
           </a:ln>
         </p:spPr>
@@ -5717,8 +4424,8 @@
         </p:nvSpPr>
         <p:spPr>
           <a:xfrm>
-            <a:off x="3721608" y="2450592"/>
-            <a:ext cx="731520" cy="274320"/>
+            <a:off x="1024128" y="3154679"/>
+            <a:ext cx="2331720" cy="219456"/>
           </a:xfrm>
           <a:prstGeom prst="rect">
             <a:avLst/>
@@ -5726,20 +4433,20 @@
           <a:noFill/>
         </p:spPr>
         <p:txBody>
-          <a:bodyPr wrap="square" anchor="t" lIns="18288" rIns="18288" tIns="18288" bIns="18288">
+          <a:bodyPr wrap="square" lIns="18288" rIns="18288" tIns="18288" bIns="18288">
             <a:spAutoFit/>
           </a:bodyPr>
           <a:lstStyle/>
           <a:p>
             <a:pPr algn="l"/>
             <a:r>
-              <a:rPr sz="1300" b="1">
-                <a:solidFill>
-                  <a:srgbClr val="2563EB"/>
+              <a:rPr sz="1400" b="1">
+                <a:solidFill>
+                  <a:srgbClr val="18202D"/>
                 </a:solidFill>
                 <a:latin typeface="Malgun Gothic"/>
               </a:rPr>
-              <a:t>2차</a:t>
+              <a:t>행정동 마스터</a:t>
             </a:r>
           </a:p>
         </p:txBody>
@@ -5752,8 +4459,8 @@
         </p:nvSpPr>
         <p:spPr>
           <a:xfrm>
-            <a:off x="3721608" y="2834640"/>
-            <a:ext cx="1965960" cy="502920"/>
+            <a:off x="3840480" y="3154679"/>
+            <a:ext cx="2971800" cy="219456"/>
           </a:xfrm>
           <a:prstGeom prst="rect">
             <a:avLst/>
@@ -5761,20 +4468,20 @@
           <a:noFill/>
         </p:spPr>
         <p:txBody>
-          <a:bodyPr wrap="square" anchor="t" lIns="18288" rIns="18288" tIns="18288" bIns="18288">
+          <a:bodyPr wrap="square" lIns="18288" rIns="18288" tIns="18288" bIns="18288">
             <a:spAutoFit/>
           </a:bodyPr>
           <a:lstStyle/>
           <a:p>
             <a:pPr algn="l"/>
             <a:r>
-              <a:rPr sz="1900" b="1">
-                <a:solidFill>
-                  <a:srgbClr val="1F2937"/>
+              <a:rPr sz="1300" b="0">
+                <a:solidFill>
+                  <a:srgbClr val="525E70"/>
                 </a:solidFill>
                 <a:latin typeface="Malgun Gothic"/>
               </a:rPr>
-              <a:t>대중교통 수요 proxy</a:t>
+              <a:t>행정동 코드/이름</a:t>
             </a:r>
           </a:p>
         </p:txBody>
@@ -5787,8 +4494,8 @@
         </p:nvSpPr>
         <p:spPr>
           <a:xfrm>
-            <a:off x="3721608" y="3657600"/>
-            <a:ext cx="1920240" cy="1051560"/>
+            <a:off x="7360920" y="3154679"/>
+            <a:ext cx="2971800" cy="219456"/>
           </a:xfrm>
           <a:prstGeom prst="rect">
             <a:avLst/>
@@ -5796,20 +4503,20 @@
           <a:noFill/>
         </p:spPr>
         <p:txBody>
-          <a:bodyPr wrap="square" anchor="t" lIns="18288" rIns="18288" tIns="18288" bIns="18288">
+          <a:bodyPr wrap="square" lIns="18288" rIns="18288" tIns="18288" bIns="18288">
             <a:spAutoFit/>
           </a:bodyPr>
           <a:lstStyle/>
           <a:p>
             <a:pPr algn="l"/>
             <a:r>
-              <a:rPr sz="1300" b="0">
-                <a:solidFill>
-                  <a:srgbClr val="5A6577"/>
+              <a:rPr sz="1300" b="1">
+                <a:solidFill>
+                  <a:srgbClr val="2563EB"/>
                 </a:solidFill>
                 <a:latin typeface="Malgun Gothic"/>
               </a:rPr>
-              <a:t>버스/지하철 승차량을 실제 관측 가능한 이동 수요로 사용</a:t>
+              <a:t>강남 9개 동 필터링</a:t>
             </a:r>
           </a:p>
         </p:txBody>
@@ -5822,8 +4529,8 @@
         </p:nvSpPr>
         <p:spPr>
           <a:xfrm>
-            <a:off x="6355080" y="2148840"/>
-            <a:ext cx="2423160" cy="2971800"/>
+            <a:off x="749808" y="3822191"/>
+            <a:ext cx="10744200" cy="603504"/>
           </a:xfrm>
           <a:prstGeom prst="roundRect">
             <a:avLst/>
@@ -5833,7 +4540,7 @@
           </a:solidFill>
           <a:ln w="12700">
             <a:solidFill>
-              <a:srgbClr val="D8E1EC"/>
+              <a:srgbClr val="DAE2ED"/>
             </a:solidFill>
           </a:ln>
         </p:spPr>
@@ -5867,8 +4574,8 @@
         </p:nvSpPr>
         <p:spPr>
           <a:xfrm>
-            <a:off x="6556248" y="2450592"/>
-            <a:ext cx="731520" cy="274320"/>
+            <a:off x="1024128" y="3977639"/>
+            <a:ext cx="2331720" cy="219456"/>
           </a:xfrm>
           <a:prstGeom prst="rect">
             <a:avLst/>
@@ -5876,20 +4583,20 @@
           <a:noFill/>
         </p:spPr>
         <p:txBody>
-          <a:bodyPr wrap="square" anchor="t" lIns="18288" rIns="18288" tIns="18288" bIns="18288">
+          <a:bodyPr wrap="square" lIns="18288" rIns="18288" tIns="18288" bIns="18288">
             <a:spAutoFit/>
           </a:bodyPr>
           <a:lstStyle/>
           <a:p>
             <a:pPr algn="l"/>
             <a:r>
-              <a:rPr sz="1300" b="1">
-                <a:solidFill>
-                  <a:srgbClr val="2563EB"/>
+              <a:rPr sz="1400" b="1">
+                <a:solidFill>
+                  <a:srgbClr val="18202D"/>
                 </a:solidFill>
                 <a:latin typeface="Malgun Gothic"/>
               </a:rPr>
-              <a:t>3차</a:t>
+              <a:t>기상청 ASOS</a:t>
             </a:r>
           </a:p>
         </p:txBody>
@@ -5902,8 +4609,8 @@
         </p:nvSpPr>
         <p:spPr>
           <a:xfrm>
-            <a:off x="6556248" y="2834640"/>
-            <a:ext cx="1965960" cy="502920"/>
+            <a:off x="3840480" y="3977639"/>
+            <a:ext cx="2971800" cy="219456"/>
           </a:xfrm>
           <a:prstGeom prst="rect">
             <a:avLst/>
@@ -5911,20 +4618,20 @@
           <a:noFill/>
         </p:spPr>
         <p:txBody>
-          <a:bodyPr wrap="square" anchor="t" lIns="18288" rIns="18288" tIns="18288" bIns="18288">
+          <a:bodyPr wrap="square" lIns="18288" rIns="18288" tIns="18288" bIns="18288">
             <a:spAutoFit/>
           </a:bodyPr>
           <a:lstStyle/>
           <a:p>
             <a:pPr algn="l"/>
             <a:r>
-              <a:rPr sz="1900" b="1">
-                <a:solidFill>
-                  <a:srgbClr val="1F2937"/>
+              <a:rPr sz="1300" b="0">
+                <a:solidFill>
+                  <a:srgbClr val="525E70"/>
                 </a:solidFill>
                 <a:latin typeface="Malgun Gothic"/>
               </a:rPr>
-              <a:t>날씨·휴일 결합</a:t>
+              <a:t>기온, 강수, 습도, 풍속, 적설</a:t>
             </a:r>
           </a:p>
         </p:txBody>
@@ -5937,8 +4644,8 @@
         </p:nvSpPr>
         <p:spPr>
           <a:xfrm>
-            <a:off x="6556248" y="3657600"/>
-            <a:ext cx="1920240" cy="1051560"/>
+            <a:off x="7360920" y="3977639"/>
+            <a:ext cx="2971800" cy="219456"/>
           </a:xfrm>
           <a:prstGeom prst="rect">
             <a:avLst/>
@@ -5946,20 +4653,20 @@
           <a:noFill/>
         </p:spPr>
         <p:txBody>
-          <a:bodyPr wrap="square" anchor="t" lIns="18288" rIns="18288" tIns="18288" bIns="18288">
+          <a:bodyPr wrap="square" lIns="18288" rIns="18288" tIns="18288" bIns="18288">
             <a:spAutoFit/>
           </a:bodyPr>
           <a:lstStyle/>
           <a:p>
             <a:pPr algn="l"/>
             <a:r>
-              <a:rPr sz="1300" b="0">
-                <a:solidFill>
-                  <a:srgbClr val="5A6577"/>
+              <a:rPr sz="1300" b="1">
+                <a:solidFill>
+                  <a:srgbClr val="2563EB"/>
                 </a:solidFill>
                 <a:latin typeface="Malgun Gothic"/>
               </a:rPr>
-              <a:t>기상청 ASOS, 공휴일, 공휴일 전날 feature를 시간 단위로 결합</a:t>
+              <a:t>날씨 feature</a:t>
             </a:r>
           </a:p>
         </p:txBody>
@@ -5972,8 +4679,8 @@
         </p:nvSpPr>
         <p:spPr>
           <a:xfrm>
-            <a:off x="9189720" y="2148840"/>
-            <a:ext cx="2423160" cy="2971800"/>
+            <a:off x="749808" y="4645152"/>
+            <a:ext cx="10744200" cy="603504"/>
           </a:xfrm>
           <a:prstGeom prst="roundRect">
             <a:avLst/>
@@ -5983,7 +4690,7 @@
           </a:solidFill>
           <a:ln w="12700">
             <a:solidFill>
-              <a:srgbClr val="D8E1EC"/>
+              <a:srgbClr val="DAE2ED"/>
             </a:solidFill>
           </a:ln>
         </p:spPr>
@@ -6017,8 +4724,8 @@
         </p:nvSpPr>
         <p:spPr>
           <a:xfrm>
-            <a:off x="9390888" y="2450592"/>
-            <a:ext cx="731520" cy="274320"/>
+            <a:off x="1024128" y="4800600"/>
+            <a:ext cx="2331720" cy="219456"/>
           </a:xfrm>
           <a:prstGeom prst="rect">
             <a:avLst/>
@@ -6026,20 +4733,20 @@
           <a:noFill/>
         </p:spPr>
         <p:txBody>
-          <a:bodyPr wrap="square" anchor="t" lIns="18288" rIns="18288" tIns="18288" bIns="18288">
+          <a:bodyPr wrap="square" lIns="18288" rIns="18288" tIns="18288" bIns="18288">
             <a:spAutoFit/>
           </a:bodyPr>
           <a:lstStyle/>
           <a:p>
             <a:pPr algn="l"/>
             <a:r>
-              <a:rPr sz="1300" b="1">
-                <a:solidFill>
-                  <a:srgbClr val="2563EB"/>
+              <a:rPr sz="1400" b="1">
+                <a:solidFill>
+                  <a:srgbClr val="18202D"/>
                 </a:solidFill>
                 <a:latin typeface="Malgun Gothic"/>
               </a:rPr>
-              <a:t>4차</a:t>
+              <a:t>특일 정보</a:t>
             </a:r>
           </a:p>
         </p:txBody>
@@ -6052,8 +4759,8 @@
         </p:nvSpPr>
         <p:spPr>
           <a:xfrm>
-            <a:off x="9390888" y="2834640"/>
-            <a:ext cx="1965960" cy="502920"/>
+            <a:off x="3840480" y="4800600"/>
+            <a:ext cx="2971800" cy="219456"/>
           </a:xfrm>
           <a:prstGeom prst="rect">
             <a:avLst/>
@@ -6061,20 +4768,20 @@
           <a:noFill/>
         </p:spPr>
         <p:txBody>
-          <a:bodyPr wrap="square" anchor="t" lIns="18288" rIns="18288" tIns="18288" bIns="18288">
+          <a:bodyPr wrap="square" lIns="18288" rIns="18288" tIns="18288" bIns="18288">
             <a:spAutoFit/>
           </a:bodyPr>
           <a:lstStyle/>
           <a:p>
             <a:pPr algn="l"/>
             <a:r>
-              <a:rPr sz="1900" b="1">
-                <a:solidFill>
-                  <a:srgbClr val="1F2937"/>
+              <a:rPr sz="1300" b="0">
+                <a:solidFill>
+                  <a:srgbClr val="525E70"/>
                 </a:solidFill>
                 <a:latin typeface="Malgun Gothic"/>
               </a:rPr>
-              <a:t>2024~2025년 확장</a:t>
+              <a:t>공휴일, 공휴일 전날</a:t>
             </a:r>
           </a:p>
         </p:txBody>
@@ -6087,8 +4794,8 @@
         </p:nvSpPr>
         <p:spPr>
           <a:xfrm>
-            <a:off x="9390888" y="3657600"/>
-            <a:ext cx="1920240" cy="1051560"/>
+            <a:off x="7360920" y="4800600"/>
+            <a:ext cx="2971800" cy="219456"/>
           </a:xfrm>
           <a:prstGeom prst="rect">
             <a:avLst/>
@@ -6096,34 +4803,79 @@
           <a:noFill/>
         </p:spPr>
         <p:txBody>
-          <a:bodyPr wrap="square" anchor="t" lIns="18288" rIns="18288" tIns="18288" bIns="18288">
+          <a:bodyPr wrap="square" lIns="18288" rIns="18288" tIns="18288" bIns="18288">
             <a:spAutoFit/>
           </a:bodyPr>
           <a:lstStyle/>
           <a:p>
             <a:pPr algn="l"/>
             <a:r>
-              <a:rPr sz="1300" b="0">
-                <a:solidFill>
-                  <a:srgbClr val="5A6577"/>
+              <a:rPr sz="1300" b="1">
+                <a:solidFill>
+                  <a:srgbClr val="2563EB"/>
                 </a:solidFill>
                 <a:latin typeface="Malgun Gothic"/>
               </a:rPr>
-              <a:t>짧은 기간 실험에서 2년치 학습 데이터로 확장</a:t>
-            </a:r>
-          </a:p>
-        </p:txBody>
-      </p:sp>
-      <p:sp>
-        <p:nvSpPr>
-          <p:cNvPr id="21" name="TextBox 20"/>
+              <a:t>휴일 feature</a:t>
+            </a:r>
+          </a:p>
+        </p:txBody>
+      </p:sp>
+      <p:sp>
+        <p:nvSpPr>
+          <p:cNvPr id="21" name="Rounded Rectangle 20"/>
+          <p:cNvSpPr/>
+          <p:nvPr/>
+        </p:nvSpPr>
+        <p:spPr>
+          <a:xfrm>
+            <a:off x="749808" y="5577840"/>
+            <a:ext cx="10744200" cy="566928"/>
+          </a:xfrm>
+          <a:prstGeom prst="roundRect">
+            <a:avLst/>
+          </a:prstGeom>
+          <a:solidFill>
+            <a:srgbClr val="E8F7F0"/>
+          </a:solidFill>
+          <a:ln w="12700">
+            <a:solidFill>
+              <a:srgbClr val="E8F7F0"/>
+            </a:solidFill>
+          </a:ln>
+        </p:spPr>
+        <p:style>
+          <a:lnRef idx="1">
+            <a:schemeClr val="accent1"/>
+          </a:lnRef>
+          <a:fillRef idx="3">
+            <a:schemeClr val="accent1"/>
+          </a:fillRef>
+          <a:effectRef idx="2">
+            <a:schemeClr val="accent1"/>
+          </a:effectRef>
+          <a:fontRef idx="minor">
+            <a:schemeClr val="lt1"/>
+          </a:fontRef>
+        </p:style>
+        <p:txBody>
+          <a:bodyPr rtlCol="0" anchor="ctr"/>
+          <a:lstStyle/>
+          <a:p>
+            <a:pPr algn="ctr"/>
+          </a:p>
+        </p:txBody>
+      </p:sp>
+      <p:sp>
+        <p:nvSpPr>
+          <p:cNvPr id="22" name="TextBox 21"/>
           <p:cNvSpPr txBox="1"/>
           <p:nvPr/>
         </p:nvSpPr>
         <p:spPr>
           <a:xfrm>
-            <a:off x="777240" y="5650992"/>
-            <a:ext cx="10607040" cy="502920"/>
+            <a:off x="1005840" y="5742432"/>
+            <a:ext cx="1097280" cy="201168"/>
           </a:xfrm>
           <a:prstGeom prst="rect">
             <a:avLst/>
@@ -6131,34 +4883,34 @@
           <a:noFill/>
         </p:spPr>
         <p:txBody>
-          <a:bodyPr wrap="square" anchor="t" lIns="18288" rIns="18288" tIns="18288" bIns="18288">
+          <a:bodyPr wrap="square" lIns="18288" rIns="18288" tIns="18288" bIns="18288">
             <a:spAutoFit/>
           </a:bodyPr>
           <a:lstStyle/>
           <a:p>
             <a:pPr algn="l"/>
             <a:r>
-              <a:rPr sz="1800" b="1">
-                <a:solidFill>
-                  <a:srgbClr val="1F2937"/>
+              <a:rPr sz="1300" b="1">
+                <a:solidFill>
+                  <a:srgbClr val="14805F"/>
                 </a:solidFill>
                 <a:latin typeface="Malgun Gothic"/>
               </a:rPr>
-              <a:t>질문을 “어느 동이 지금 붐비는가”에서 “다음 1시간에 어느 동의 이동 수요가 커질 수 있는가”로 바꿨습니다.</a:t>
-            </a:r>
-          </a:p>
-        </p:txBody>
-      </p:sp>
-      <p:sp>
-        <p:nvSpPr>
-          <p:cNvPr id="22" name="TextBox 21"/>
+              <a:t>처리 흐름</a:t>
+            </a:r>
+          </a:p>
+        </p:txBody>
+      </p:sp>
+      <p:sp>
+        <p:nvSpPr>
+          <p:cNvPr id="23" name="TextBox 22"/>
           <p:cNvSpPr txBox="1"/>
           <p:nvPr/>
         </p:nvSpPr>
         <p:spPr>
           <a:xfrm>
-            <a:off x="502920" y="6446520"/>
-            <a:ext cx="5029200" cy="228600"/>
+            <a:off x="2057400" y="5724144"/>
+            <a:ext cx="8595360" cy="228600"/>
           </a:xfrm>
           <a:prstGeom prst="rect">
             <a:avLst/>
@@ -6166,16 +4918,51 @@
           <a:noFill/>
         </p:spPr>
         <p:txBody>
-          <a:bodyPr wrap="square" anchor="t" lIns="18288" rIns="18288" tIns="18288" bIns="18288">
+          <a:bodyPr wrap="square" lIns="18288" rIns="18288" tIns="18288" bIns="18288">
             <a:spAutoFit/>
           </a:bodyPr>
           <a:lstStyle/>
           <a:p>
             <a:pPr algn="l"/>
             <a:r>
+              <a:rPr sz="1300" b="0">
+                <a:solidFill>
+                  <a:srgbClr val="18202D"/>
+                </a:solidFill>
+                <a:latin typeface="Malgun Gothic"/>
+              </a:rPr>
+              <a:t>시간 기준 정렬 → 강남 9개 동 필터링 → 날씨/휴일 결합 → lag feature 생성 → Colab 학습용 CSV export</a:t>
+            </a:r>
+          </a:p>
+        </p:txBody>
+      </p:sp>
+      <p:sp>
+        <p:nvSpPr>
+          <p:cNvPr id="24" name="TextBox 23"/>
+          <p:cNvSpPr txBox="1"/>
+          <p:nvPr/>
+        </p:nvSpPr>
+        <p:spPr>
+          <a:xfrm>
+            <a:off x="548640" y="6473952"/>
+            <a:ext cx="4572000" cy="201168"/>
+          </a:xfrm>
+          <a:prstGeom prst="rect">
+            <a:avLst/>
+          </a:prstGeom>
+          <a:noFill/>
+        </p:spPr>
+        <p:txBody>
+          <a:bodyPr wrap="square" lIns="18288" rIns="18288" tIns="18288" bIns="18288">
+            <a:spAutoFit/>
+          </a:bodyPr>
+          <a:lstStyle/>
+          <a:p>
+            <a:pPr algn="l"/>
+            <a:r>
               <a:rPr sz="900" b="0">
                 <a:solidFill>
-                  <a:srgbClr val="5A6577"/>
+                  <a:srgbClr val="525E70"/>
                 </a:solidFill>
                 <a:latin typeface="Malgun Gothic"/>
               </a:rPr>
@@ -6198,7 +4985,7 @@
     <p:bg>
       <p:bgPr>
         <a:solidFill>
-          <a:srgbClr val="F6F7F9"/>
+          <a:srgbClr val="F7F8FA"/>
         </a:solidFill>
         <a:effectLst/>
       </p:bgPr>
@@ -6218,8 +5005,8 @@
         </p:nvSpPr>
         <p:spPr>
           <a:xfrm>
-            <a:off x="502920" y="320040"/>
-            <a:ext cx="2743200" cy="274320"/>
+            <a:off x="548640" y="329184"/>
+            <a:ext cx="2743200" cy="256032"/>
           </a:xfrm>
           <a:prstGeom prst="rect">
             <a:avLst/>
@@ -6227,7 +5014,7 @@
           <a:noFill/>
         </p:spPr>
         <p:txBody>
-          <a:bodyPr wrap="square" anchor="t" lIns="18288" rIns="18288" tIns="18288" bIns="18288">
+          <a:bodyPr wrap="square" lIns="18288" rIns="18288" tIns="18288" bIns="18288">
             <a:spAutoFit/>
           </a:bodyPr>
           <a:lstStyle/>
@@ -6253,8 +5040,8 @@
         </p:nvSpPr>
         <p:spPr>
           <a:xfrm>
-            <a:off x="502920" y="685800"/>
-            <a:ext cx="9875520" cy="621792"/>
+            <a:off x="548640" y="713232"/>
+            <a:ext cx="9875520" cy="603504"/>
           </a:xfrm>
           <a:prstGeom prst="rect">
             <a:avLst/>
@@ -6262,20 +5049,20 @@
           <a:noFill/>
         </p:spPr>
         <p:txBody>
-          <a:bodyPr wrap="square" anchor="t" lIns="18288" rIns="18288" tIns="18288" bIns="18288">
+          <a:bodyPr wrap="square" lIns="18288" rIns="18288" tIns="18288" bIns="18288">
             <a:spAutoFit/>
           </a:bodyPr>
           <a:lstStyle/>
           <a:p>
             <a:pPr algn="l"/>
             <a:r>
-              <a:rPr sz="2800" b="1">
-                <a:solidFill>
-                  <a:srgbClr val="1F2937"/>
+              <a:rPr sz="2900" b="1">
+                <a:solidFill>
+                  <a:srgbClr val="18202D"/>
                 </a:solidFill>
                 <a:latin typeface="Malgun Gothic"/>
               </a:rPr>
-              <a:t>데이터 수집: 공개 API와 파일 데이터를 시간 단위로 맞췄습니다</a:t>
+              <a:t>학습 데이터셋: 2024~2025년 강남 9개 동 시간대 데이터</a:t>
             </a:r>
           </a:p>
         </p:txBody>
@@ -6288,14 +5075,14 @@
         </p:nvSpPr>
         <p:spPr>
           <a:xfrm>
-            <a:off x="502920" y="1810512"/>
-            <a:ext cx="11155680" cy="10972"/>
+            <a:off x="548640" y="1828800"/>
+            <a:ext cx="11018520" cy="10972"/>
           </a:xfrm>
           <a:prstGeom prst="rect">
             <a:avLst/>
           </a:prstGeom>
           <a:solidFill>
-            <a:srgbClr val="D8E1EC"/>
+            <a:srgbClr val="DAE2ED"/>
           </a:solidFill>
           <a:ln>
             <a:noFill/>
@@ -6331,8 +5118,8 @@
         </p:nvSpPr>
         <p:spPr>
           <a:xfrm>
-            <a:off x="685800" y="2057400"/>
-            <a:ext cx="10789920" cy="640080"/>
+            <a:off x="749808" y="2148840"/>
+            <a:ext cx="2331720" cy="1234440"/>
           </a:xfrm>
           <a:prstGeom prst="roundRect">
             <a:avLst/>
@@ -6342,7 +5129,7 @@
           </a:solidFill>
           <a:ln w="12700">
             <a:solidFill>
-              <a:srgbClr val="D8E1EC"/>
+              <a:srgbClr val="DAE2ED"/>
             </a:solidFill>
           </a:ln>
         </p:spPr>
@@ -6376,8 +5163,8 @@
         </p:nvSpPr>
         <p:spPr>
           <a:xfrm>
-            <a:off x="960120" y="2221992"/>
-            <a:ext cx="2286000" cy="228600"/>
+            <a:off x="969264" y="2395728"/>
+            <a:ext cx="1828800" cy="347472"/>
           </a:xfrm>
           <a:prstGeom prst="rect">
             <a:avLst/>
@@ -6385,20 +5172,20 @@
           <a:noFill/>
         </p:spPr>
         <p:txBody>
-          <a:bodyPr wrap="square" anchor="t" lIns="18288" rIns="18288" tIns="18288" bIns="18288">
+          <a:bodyPr wrap="square" lIns="18288" rIns="18288" tIns="18288" bIns="18288">
             <a:spAutoFit/>
           </a:bodyPr>
           <a:lstStyle/>
           <a:p>
             <a:pPr algn="l"/>
             <a:r>
-              <a:rPr sz="1400" b="1">
-                <a:solidFill>
-                  <a:srgbClr val="1F2937"/>
+              <a:rPr sz="2500" b="1">
+                <a:solidFill>
+                  <a:srgbClr val="18202D"/>
                 </a:solidFill>
                 <a:latin typeface="Malgun Gothic"/>
               </a:rPr>
-              <a:t>서울시 대중교통 OD</a:t>
+              <a:t>153,783</a:t>
             </a:r>
           </a:p>
         </p:txBody>
@@ -6411,8 +5198,8 @@
         </p:nvSpPr>
         <p:spPr>
           <a:xfrm>
-            <a:off x="3657600" y="2221992"/>
-            <a:ext cx="3108960" cy="228600"/>
+            <a:off x="969264" y="2871216"/>
+            <a:ext cx="1828800" cy="201168"/>
           </a:xfrm>
           <a:prstGeom prst="rect">
             <a:avLst/>
@@ -6420,69 +5207,34 @@
           <a:noFill/>
         </p:spPr>
         <p:txBody>
-          <a:bodyPr wrap="square" anchor="t" lIns="18288" rIns="18288" tIns="18288" bIns="18288">
+          <a:bodyPr wrap="square" lIns="18288" rIns="18288" tIns="18288" bIns="18288">
             <a:spAutoFit/>
           </a:bodyPr>
           <a:lstStyle/>
           <a:p>
             <a:pPr algn="l"/>
             <a:r>
-              <a:rPr sz="1300" b="0">
-                <a:solidFill>
-                  <a:srgbClr val="5A6577"/>
+              <a:rPr sz="1200" b="0">
+                <a:solidFill>
+                  <a:srgbClr val="525E70"/>
                 </a:solidFill>
                 <a:latin typeface="Malgun Gothic"/>
               </a:rPr>
-              <a:t>행정동별 출발/도착 승객수</a:t>
-            </a:r>
-          </a:p>
-        </p:txBody>
-      </p:sp>
-      <p:sp>
-        <p:nvSpPr>
-          <p:cNvPr id="8" name="TextBox 7"/>
-          <p:cNvSpPr txBox="1"/>
-          <p:nvPr/>
-        </p:nvSpPr>
-        <p:spPr>
-          <a:xfrm>
-            <a:off x="7406640" y="2221992"/>
-            <a:ext cx="2926080" cy="228600"/>
-          </a:xfrm>
-          <a:prstGeom prst="rect">
-            <a:avLst/>
-          </a:prstGeom>
-          <a:noFill/>
-        </p:spPr>
-        <p:txBody>
-          <a:bodyPr wrap="square" anchor="t" lIns="18288" rIns="18288" tIns="18288" bIns="18288">
-            <a:spAutoFit/>
-          </a:bodyPr>
-          <a:lstStyle/>
-          <a:p>
-            <a:pPr algn="l"/>
-            <a:r>
-              <a:rPr sz="1300" b="1">
-                <a:solidFill>
-                  <a:srgbClr val="2563EB"/>
-                </a:solidFill>
-                <a:latin typeface="Malgun Gothic"/>
-              </a:rPr>
-              <a:t>target과 lag feature</a:t>
-            </a:r>
-          </a:p>
-        </p:txBody>
-      </p:sp>
-      <p:sp>
-        <p:nvSpPr>
-          <p:cNvPr id="9" name="Rounded Rectangle 8"/>
+              <a:t>학습 가능 row</a:t>
+            </a:r>
+          </a:p>
+        </p:txBody>
+      </p:sp>
+      <p:sp>
+        <p:nvSpPr>
+          <p:cNvPr id="8" name="Rounded Rectangle 7"/>
           <p:cNvSpPr/>
           <p:nvPr/>
         </p:nvSpPr>
         <p:spPr>
           <a:xfrm>
-            <a:off x="685800" y="2926080"/>
-            <a:ext cx="10789920" cy="640080"/>
+            <a:off x="3520439" y="2148840"/>
+            <a:ext cx="2331720" cy="1234440"/>
           </a:xfrm>
           <a:prstGeom prst="roundRect">
             <a:avLst/>
@@ -6492,7 +5244,7 @@
           </a:solidFill>
           <a:ln w="12700">
             <a:solidFill>
-              <a:srgbClr val="D8E1EC"/>
+              <a:srgbClr val="DAE2ED"/>
             </a:solidFill>
           </a:ln>
         </p:spPr>
@@ -6520,14 +5272,49 @@
       </p:sp>
       <p:sp>
         <p:nvSpPr>
+          <p:cNvPr id="9" name="TextBox 8"/>
+          <p:cNvSpPr txBox="1"/>
+          <p:nvPr/>
+        </p:nvSpPr>
+        <p:spPr>
+          <a:xfrm>
+            <a:off x="3739896" y="2395728"/>
+            <a:ext cx="1828800" cy="347472"/>
+          </a:xfrm>
+          <a:prstGeom prst="rect">
+            <a:avLst/>
+          </a:prstGeom>
+          <a:noFill/>
+        </p:spPr>
+        <p:txBody>
+          <a:bodyPr wrap="square" lIns="18288" rIns="18288" tIns="18288" bIns="18288">
+            <a:spAutoFit/>
+          </a:bodyPr>
+          <a:lstStyle/>
+          <a:p>
+            <a:pPr algn="l"/>
+            <a:r>
+              <a:rPr sz="2500" b="1">
+                <a:solidFill>
+                  <a:srgbClr val="18202D"/>
+                </a:solidFill>
+                <a:latin typeface="Malgun Gothic"/>
+              </a:rPr>
+              <a:t>712일</a:t>
+            </a:r>
+          </a:p>
+        </p:txBody>
+      </p:sp>
+      <p:sp>
+        <p:nvSpPr>
           <p:cNvPr id="10" name="TextBox 9"/>
           <p:cNvSpPr txBox="1"/>
           <p:nvPr/>
         </p:nvSpPr>
         <p:spPr>
           <a:xfrm>
-            <a:off x="960120" y="3090672"/>
-            <a:ext cx="2286000" cy="228600"/>
+            <a:off x="3739896" y="2871216"/>
+            <a:ext cx="1828800" cy="201168"/>
           </a:xfrm>
           <a:prstGeom prst="rect">
             <a:avLst/>
@@ -6535,104 +5322,34 @@
           <a:noFill/>
         </p:spPr>
         <p:txBody>
-          <a:bodyPr wrap="square" anchor="t" lIns="18288" rIns="18288" tIns="18288" bIns="18288">
+          <a:bodyPr wrap="square" lIns="18288" rIns="18288" tIns="18288" bIns="18288">
             <a:spAutoFit/>
           </a:bodyPr>
           <a:lstStyle/>
           <a:p>
             <a:pPr algn="l"/>
             <a:r>
-              <a:rPr sz="1400" b="1">
-                <a:solidFill>
-                  <a:srgbClr val="1F2937"/>
+              <a:rPr sz="1200" b="0">
+                <a:solidFill>
+                  <a:srgbClr val="525E70"/>
                 </a:solidFill>
                 <a:latin typeface="Malgun Gothic"/>
               </a:rPr>
-              <a:t>행정동 마스터</a:t>
-            </a:r>
-          </a:p>
-        </p:txBody>
-      </p:sp>
-      <p:sp>
-        <p:nvSpPr>
-          <p:cNvPr id="11" name="TextBox 10"/>
-          <p:cNvSpPr txBox="1"/>
-          <p:nvPr/>
-        </p:nvSpPr>
-        <p:spPr>
-          <a:xfrm>
-            <a:off x="3657600" y="3090672"/>
-            <a:ext cx="3108960" cy="228600"/>
-          </a:xfrm>
-          <a:prstGeom prst="rect">
-            <a:avLst/>
-          </a:prstGeom>
-          <a:noFill/>
-        </p:spPr>
-        <p:txBody>
-          <a:bodyPr wrap="square" anchor="t" lIns="18288" rIns="18288" tIns="18288" bIns="18288">
-            <a:spAutoFit/>
-          </a:bodyPr>
-          <a:lstStyle/>
-          <a:p>
-            <a:pPr algn="l"/>
-            <a:r>
-              <a:rPr sz="1300" b="0">
-                <a:solidFill>
-                  <a:srgbClr val="5A6577"/>
-                </a:solidFill>
-                <a:latin typeface="Malgun Gothic"/>
-              </a:rPr>
-              <a:t>행정동 코드와 이름</a:t>
-            </a:r>
-          </a:p>
-        </p:txBody>
-      </p:sp>
-      <p:sp>
-        <p:nvSpPr>
-          <p:cNvPr id="12" name="TextBox 11"/>
-          <p:cNvSpPr txBox="1"/>
-          <p:nvPr/>
-        </p:nvSpPr>
-        <p:spPr>
-          <a:xfrm>
-            <a:off x="7406640" y="3090672"/>
-            <a:ext cx="2926080" cy="228600"/>
-          </a:xfrm>
-          <a:prstGeom prst="rect">
-            <a:avLst/>
-          </a:prstGeom>
-          <a:noFill/>
-        </p:spPr>
-        <p:txBody>
-          <a:bodyPr wrap="square" anchor="t" lIns="18288" rIns="18288" tIns="18288" bIns="18288">
-            <a:spAutoFit/>
-          </a:bodyPr>
-          <a:lstStyle/>
-          <a:p>
-            <a:pPr algn="l"/>
-            <a:r>
-              <a:rPr sz="1300" b="1">
-                <a:solidFill>
-                  <a:srgbClr val="2563EB"/>
-                </a:solidFill>
-                <a:latin typeface="Malgun Gothic"/>
-              </a:rPr>
-              <a:t>강남 9개 동 필터링</a:t>
-            </a:r>
-          </a:p>
-        </p:txBody>
-      </p:sp>
-      <p:sp>
-        <p:nvSpPr>
-          <p:cNvPr id="13" name="Rounded Rectangle 12"/>
+              <a:t>분석 날짜</a:t>
+            </a:r>
+          </a:p>
+        </p:txBody>
+      </p:sp>
+      <p:sp>
+        <p:nvSpPr>
+          <p:cNvPr id="11" name="Rounded Rectangle 10"/>
           <p:cNvSpPr/>
           <p:nvPr/>
         </p:nvSpPr>
         <p:spPr>
           <a:xfrm>
-            <a:off x="685800" y="3794760"/>
-            <a:ext cx="10789920" cy="640080"/>
+            <a:off x="6291072" y="2148840"/>
+            <a:ext cx="2331720" cy="1234440"/>
           </a:xfrm>
           <a:prstGeom prst="roundRect">
             <a:avLst/>
@@ -6642,7 +5359,7 @@
           </a:solidFill>
           <a:ln w="12700">
             <a:solidFill>
-              <a:srgbClr val="D8E1EC"/>
+              <a:srgbClr val="DAE2ED"/>
             </a:solidFill>
           </a:ln>
         </p:spPr>
@@ -6670,14 +5387,14 @@
       </p:sp>
       <p:sp>
         <p:nvSpPr>
-          <p:cNvPr id="14" name="TextBox 13"/>
+          <p:cNvPr id="12" name="TextBox 11"/>
           <p:cNvSpPr txBox="1"/>
           <p:nvPr/>
         </p:nvSpPr>
         <p:spPr>
           <a:xfrm>
-            <a:off x="960120" y="3959352"/>
-            <a:ext cx="2286000" cy="228600"/>
+            <a:off x="6510528" y="2395728"/>
+            <a:ext cx="1828800" cy="347472"/>
           </a:xfrm>
           <a:prstGeom prst="rect">
             <a:avLst/>
@@ -6685,34 +5402,34 @@
           <a:noFill/>
         </p:spPr>
         <p:txBody>
-          <a:bodyPr wrap="square" anchor="t" lIns="18288" rIns="18288" tIns="18288" bIns="18288">
+          <a:bodyPr wrap="square" lIns="18288" rIns="18288" tIns="18288" bIns="18288">
             <a:spAutoFit/>
           </a:bodyPr>
           <a:lstStyle/>
           <a:p>
             <a:pPr algn="l"/>
             <a:r>
-              <a:rPr sz="1400" b="1">
-                <a:solidFill>
-                  <a:srgbClr val="1F2937"/>
+              <a:rPr sz="2500" b="1">
+                <a:solidFill>
+                  <a:srgbClr val="18202D"/>
                 </a:solidFill>
                 <a:latin typeface="Malgun Gothic"/>
               </a:rPr>
-              <a:t>기상청 ASOS</a:t>
-            </a:r>
-          </a:p>
-        </p:txBody>
-      </p:sp>
-      <p:sp>
-        <p:nvSpPr>
-          <p:cNvPr id="15" name="TextBox 14"/>
+              <a:t>9개 동</a:t>
+            </a:r>
+          </a:p>
+        </p:txBody>
+      </p:sp>
+      <p:sp>
+        <p:nvSpPr>
+          <p:cNvPr id="13" name="TextBox 12"/>
           <p:cNvSpPr txBox="1"/>
           <p:nvPr/>
         </p:nvSpPr>
         <p:spPr>
           <a:xfrm>
-            <a:off x="3657600" y="3959352"/>
-            <a:ext cx="3108960" cy="228600"/>
+            <a:off x="6510528" y="2871216"/>
+            <a:ext cx="1828800" cy="201168"/>
           </a:xfrm>
           <a:prstGeom prst="rect">
             <a:avLst/>
@@ -6720,69 +5437,34 @@
           <a:noFill/>
         </p:spPr>
         <p:txBody>
-          <a:bodyPr wrap="square" anchor="t" lIns="18288" rIns="18288" tIns="18288" bIns="18288">
+          <a:bodyPr wrap="square" lIns="18288" rIns="18288" tIns="18288" bIns="18288">
             <a:spAutoFit/>
           </a:bodyPr>
           <a:lstStyle/>
           <a:p>
             <a:pPr algn="l"/>
             <a:r>
-              <a:rPr sz="1300" b="0">
-                <a:solidFill>
-                  <a:srgbClr val="5A6577"/>
+              <a:rPr sz="1200" b="0">
+                <a:solidFill>
+                  <a:srgbClr val="525E70"/>
                 </a:solidFill>
                 <a:latin typeface="Malgun Gothic"/>
               </a:rPr>
-              <a:t>기온, 강수, 습도, 풍속, 적설</a:t>
-            </a:r>
-          </a:p>
-        </p:txBody>
-      </p:sp>
-      <p:sp>
-        <p:nvSpPr>
-          <p:cNvPr id="16" name="TextBox 15"/>
-          <p:cNvSpPr txBox="1"/>
-          <p:nvPr/>
-        </p:nvSpPr>
-        <p:spPr>
-          <a:xfrm>
-            <a:off x="7406640" y="3959352"/>
-            <a:ext cx="2926080" cy="228600"/>
-          </a:xfrm>
-          <a:prstGeom prst="rect">
-            <a:avLst/>
-          </a:prstGeom>
-          <a:noFill/>
-        </p:spPr>
-        <p:txBody>
-          <a:bodyPr wrap="square" anchor="t" lIns="18288" rIns="18288" tIns="18288" bIns="18288">
-            <a:spAutoFit/>
-          </a:bodyPr>
-          <a:lstStyle/>
-          <a:p>
-            <a:pPr algn="l"/>
-            <a:r>
-              <a:rPr sz="1300" b="1">
-                <a:solidFill>
-                  <a:srgbClr val="2563EB"/>
-                </a:solidFill>
-                <a:latin typeface="Malgun Gothic"/>
-              </a:rPr>
-              <a:t>날씨 feature</a:t>
-            </a:r>
-          </a:p>
-        </p:txBody>
-      </p:sp>
-      <p:sp>
-        <p:nvSpPr>
-          <p:cNvPr id="17" name="Rounded Rectangle 16"/>
+              <a:t>예측 단위</a:t>
+            </a:r>
+          </a:p>
+        </p:txBody>
+      </p:sp>
+      <p:sp>
+        <p:nvSpPr>
+          <p:cNvPr id="14" name="Rounded Rectangle 13"/>
           <p:cNvSpPr/>
           <p:nvPr/>
         </p:nvSpPr>
         <p:spPr>
           <a:xfrm>
-            <a:off x="685800" y="4663440"/>
-            <a:ext cx="10789920" cy="640080"/>
+            <a:off x="9061704" y="2148840"/>
+            <a:ext cx="2331720" cy="1234440"/>
           </a:xfrm>
           <a:prstGeom prst="roundRect">
             <a:avLst/>
@@ -6792,7 +5474,7 @@
           </a:solidFill>
           <a:ln w="12700">
             <a:solidFill>
-              <a:srgbClr val="D8E1EC"/>
+              <a:srgbClr val="DAE2ED"/>
             </a:solidFill>
           </a:ln>
         </p:spPr>
@@ -6820,14 +5502,129 @@
       </p:sp>
       <p:sp>
         <p:nvSpPr>
+          <p:cNvPr id="15" name="TextBox 14"/>
+          <p:cNvSpPr txBox="1"/>
+          <p:nvPr/>
+        </p:nvSpPr>
+        <p:spPr>
+          <a:xfrm>
+            <a:off x="9281160" y="2395728"/>
+            <a:ext cx="1828800" cy="347472"/>
+          </a:xfrm>
+          <a:prstGeom prst="rect">
+            <a:avLst/>
+          </a:prstGeom>
+          <a:noFill/>
+        </p:spPr>
+        <p:txBody>
+          <a:bodyPr wrap="square" lIns="18288" rIns="18288" tIns="18288" bIns="18288">
+            <a:spAutoFit/>
+          </a:bodyPr>
+          <a:lstStyle/>
+          <a:p>
+            <a:pPr algn="l"/>
+            <a:r>
+              <a:rPr sz="2500" b="1">
+                <a:solidFill>
+                  <a:srgbClr val="18202D"/>
+                </a:solidFill>
+                <a:latin typeface="Malgun Gothic"/>
+              </a:rPr>
+              <a:t>1시간 뒤</a:t>
+            </a:r>
+          </a:p>
+        </p:txBody>
+      </p:sp>
+      <p:sp>
+        <p:nvSpPr>
+          <p:cNvPr id="16" name="TextBox 15"/>
+          <p:cNvSpPr txBox="1"/>
+          <p:nvPr/>
+        </p:nvSpPr>
+        <p:spPr>
+          <a:xfrm>
+            <a:off x="9281160" y="2871216"/>
+            <a:ext cx="1828800" cy="201168"/>
+          </a:xfrm>
+          <a:prstGeom prst="rect">
+            <a:avLst/>
+          </a:prstGeom>
+          <a:noFill/>
+        </p:spPr>
+        <p:txBody>
+          <a:bodyPr wrap="square" lIns="18288" rIns="18288" tIns="18288" bIns="18288">
+            <a:spAutoFit/>
+          </a:bodyPr>
+          <a:lstStyle/>
+          <a:p>
+            <a:pPr algn="l"/>
+            <a:r>
+              <a:rPr sz="1200" b="0">
+                <a:solidFill>
+                  <a:srgbClr val="525E70"/>
+                </a:solidFill>
+                <a:latin typeface="Malgun Gothic"/>
+              </a:rPr>
+              <a:t>예측 horizon</a:t>
+            </a:r>
+          </a:p>
+        </p:txBody>
+      </p:sp>
+      <p:sp>
+        <p:nvSpPr>
+          <p:cNvPr id="17" name="Rounded Rectangle 16"/>
+          <p:cNvSpPr/>
+          <p:nvPr/>
+        </p:nvSpPr>
+        <p:spPr>
+          <a:xfrm>
+            <a:off x="749808" y="3977639"/>
+            <a:ext cx="5166360" cy="1417320"/>
+          </a:xfrm>
+          <a:prstGeom prst="roundRect">
+            <a:avLst/>
+          </a:prstGeom>
+          <a:solidFill>
+            <a:srgbClr val="FFFFFF"/>
+          </a:solidFill>
+          <a:ln w="12700">
+            <a:solidFill>
+              <a:srgbClr val="DAE2ED"/>
+            </a:solidFill>
+          </a:ln>
+        </p:spPr>
+        <p:style>
+          <a:lnRef idx="1">
+            <a:schemeClr val="accent1"/>
+          </a:lnRef>
+          <a:fillRef idx="3">
+            <a:schemeClr val="accent1"/>
+          </a:fillRef>
+          <a:effectRef idx="2">
+            <a:schemeClr val="accent1"/>
+          </a:effectRef>
+          <a:fontRef idx="minor">
+            <a:schemeClr val="lt1"/>
+          </a:fontRef>
+        </p:style>
+        <p:txBody>
+          <a:bodyPr rtlCol="0" anchor="ctr"/>
+          <a:lstStyle/>
+          <a:p>
+            <a:pPr algn="ctr"/>
+          </a:p>
+        </p:txBody>
+      </p:sp>
+      <p:sp>
+        <p:nvSpPr>
           <p:cNvPr id="18" name="TextBox 17"/>
           <p:cNvSpPr txBox="1"/>
           <p:nvPr/>
         </p:nvSpPr>
         <p:spPr>
           <a:xfrm>
-            <a:off x="960120" y="4828031"/>
-            <a:ext cx="2286000" cy="228600"/>
+            <a:off x="1024128" y="4224528"/>
+            <a:ext cx="1828800" cy="274320"/>
           </a:xfrm>
           <a:prstGeom prst="rect">
             <a:avLst/>
@@ -6835,20 +5632,20 @@
           <a:noFill/>
         </p:spPr>
         <p:txBody>
-          <a:bodyPr wrap="square" anchor="t" lIns="18288" rIns="18288" tIns="18288" bIns="18288">
+          <a:bodyPr wrap="square" lIns="18288" rIns="18288" tIns="18288" bIns="18288">
             <a:spAutoFit/>
           </a:bodyPr>
           <a:lstStyle/>
           <a:p>
             <a:pPr algn="l"/>
             <a:r>
-              <a:rPr sz="1400" b="1">
-                <a:solidFill>
-                  <a:srgbClr val="1F2937"/>
+              <a:rPr sz="1800" b="1">
+                <a:solidFill>
+                  <a:srgbClr val="18202D"/>
                 </a:solidFill>
                 <a:latin typeface="Malgun Gothic"/>
               </a:rPr>
-              <a:t>특일 정보</a:t>
+              <a:t>입력 feature</a:t>
             </a:r>
           </a:p>
         </p:txBody>
@@ -6861,8 +5658,8 @@
         </p:nvSpPr>
         <p:spPr>
           <a:xfrm>
-            <a:off x="3657600" y="4828031"/>
-            <a:ext cx="3108960" cy="228600"/>
+            <a:off x="1024128" y="4590288"/>
+            <a:ext cx="4206240" cy="658368"/>
           </a:xfrm>
           <a:prstGeom prst="rect">
             <a:avLst/>
@@ -6870,19 +5667,71 @@
           <a:noFill/>
         </p:spPr>
         <p:txBody>
-          <a:bodyPr wrap="square" anchor="t" lIns="18288" rIns="18288" tIns="18288" bIns="18288">
+          <a:bodyPr wrap="square" lIns="18288" rIns="18288">
             <a:spAutoFit/>
           </a:bodyPr>
           <a:lstStyle/>
           <a:p>
-            <a:pPr algn="l"/>
-            <a:r>
-              <a:rPr sz="1300" b="0">
-                <a:solidFill>
-                  <a:srgbClr val="5A6577"/>
-                </a:solidFill>
-                <a:latin typeface="Malgun Gothic"/>
-              </a:rPr>
+            <a:pPr>
+              <a:spcAft>
+                <a:spcPts val="800"/>
+              </a:spcAft>
+              <a:defRPr sz="1200">
+                <a:solidFill>
+                  <a:srgbClr val="18202D"/>
+                </a:solidFill>
+                <a:latin typeface="Malgun Gothic"/>
+              </a:defRPr>
+            </a:pPr>
+            <a:r>
+              <a:t>동, 시간, 요일, 주말 여부</a:t>
+            </a:r>
+          </a:p>
+          <a:p>
+            <a:pPr>
+              <a:spcAft>
+                <a:spcPts val="800"/>
+              </a:spcAft>
+              <a:defRPr sz="1200">
+                <a:solidFill>
+                  <a:srgbClr val="18202D"/>
+                </a:solidFill>
+                <a:latin typeface="Malgun Gothic"/>
+              </a:defRPr>
+            </a:pPr>
+            <a:r>
+              <a:t>현재/직전/전날/전주 같은 시간 수요</a:t>
+            </a:r>
+          </a:p>
+          <a:p>
+            <a:pPr>
+              <a:spcAft>
+                <a:spcPts val="800"/>
+              </a:spcAft>
+              <a:defRPr sz="1200">
+                <a:solidFill>
+                  <a:srgbClr val="18202D"/>
+                </a:solidFill>
+                <a:latin typeface="Malgun Gothic"/>
+              </a:defRPr>
+            </a:pPr>
+            <a:r>
+              <a:t>기온, 강수량, 적설, 습도, 풍속</a:t>
+            </a:r>
+          </a:p>
+          <a:p>
+            <a:pPr>
+              <a:spcAft>
+                <a:spcPts val="800"/>
+              </a:spcAft>
+              <a:defRPr sz="1200">
+                <a:solidFill>
+                  <a:srgbClr val="18202D"/>
+                </a:solidFill>
+                <a:latin typeface="Malgun Gothic"/>
+              </a:defRPr>
+            </a:pPr>
+            <a:r>
               <a:t>공휴일, 공휴일 전날</a:t>
             </a:r>
           </a:p>
@@ -6890,14 +5739,59 @@
       </p:sp>
       <p:sp>
         <p:nvSpPr>
-          <p:cNvPr id="20" name="TextBox 19"/>
+          <p:cNvPr id="20" name="Rounded Rectangle 19"/>
+          <p:cNvSpPr/>
+          <p:nvPr/>
+        </p:nvSpPr>
+        <p:spPr>
+          <a:xfrm>
+            <a:off x="6263640" y="3977639"/>
+            <a:ext cx="4800600" cy="1417320"/>
+          </a:xfrm>
+          <a:prstGeom prst="roundRect">
+            <a:avLst/>
+          </a:prstGeom>
+          <a:solidFill>
+            <a:srgbClr val="E8F0FE"/>
+          </a:solidFill>
+          <a:ln w="12700">
+            <a:solidFill>
+              <a:srgbClr val="E8F0FE"/>
+            </a:solidFill>
+          </a:ln>
+        </p:spPr>
+        <p:style>
+          <a:lnRef idx="1">
+            <a:schemeClr val="accent1"/>
+          </a:lnRef>
+          <a:fillRef idx="3">
+            <a:schemeClr val="accent1"/>
+          </a:fillRef>
+          <a:effectRef idx="2">
+            <a:schemeClr val="accent1"/>
+          </a:effectRef>
+          <a:fontRef idx="minor">
+            <a:schemeClr val="lt1"/>
+          </a:fontRef>
+        </p:style>
+        <p:txBody>
+          <a:bodyPr rtlCol="0" anchor="ctr"/>
+          <a:lstStyle/>
+          <a:p>
+            <a:pPr algn="ctr"/>
+          </a:p>
+        </p:txBody>
+      </p:sp>
+      <p:sp>
+        <p:nvSpPr>
+          <p:cNvPr id="21" name="TextBox 20"/>
           <p:cNvSpPr txBox="1"/>
           <p:nvPr/>
         </p:nvSpPr>
         <p:spPr>
           <a:xfrm>
-            <a:off x="7406640" y="4828031"/>
-            <a:ext cx="2926080" cy="228600"/>
+            <a:off x="6537960" y="4224528"/>
+            <a:ext cx="1097280" cy="274320"/>
           </a:xfrm>
           <a:prstGeom prst="rect">
             <a:avLst/>
@@ -6905,34 +5799,34 @@
           <a:noFill/>
         </p:spPr>
         <p:txBody>
-          <a:bodyPr wrap="square" anchor="t" lIns="18288" rIns="18288" tIns="18288" bIns="18288">
+          <a:bodyPr wrap="square" lIns="18288" rIns="18288" tIns="18288" bIns="18288">
             <a:spAutoFit/>
           </a:bodyPr>
           <a:lstStyle/>
           <a:p>
             <a:pPr algn="l"/>
             <a:r>
-              <a:rPr sz="1300" b="1">
+              <a:rPr sz="1800" b="1">
                 <a:solidFill>
                   <a:srgbClr val="2563EB"/>
                 </a:solidFill>
                 <a:latin typeface="Malgun Gothic"/>
               </a:rPr>
-              <a:t>휴일 feature</a:t>
-            </a:r>
-          </a:p>
-        </p:txBody>
-      </p:sp>
-      <p:sp>
-        <p:nvSpPr>
-          <p:cNvPr id="21" name="TextBox 20"/>
+              <a:t>Target</a:t>
+            </a:r>
+          </a:p>
+        </p:txBody>
+      </p:sp>
+      <p:sp>
+        <p:nvSpPr>
+          <p:cNvPr id="22" name="TextBox 21"/>
           <p:cNvSpPr txBox="1"/>
           <p:nvPr/>
         </p:nvSpPr>
         <p:spPr>
           <a:xfrm>
-            <a:off x="777240" y="5650992"/>
-            <a:ext cx="1554480" cy="274320"/>
+            <a:off x="6537960" y="4617720"/>
+            <a:ext cx="3474720" cy="530352"/>
           </a:xfrm>
           <a:prstGeom prst="rect">
             <a:avLst/>
@@ -6940,34 +5834,35 @@
           <a:noFill/>
         </p:spPr>
         <p:txBody>
-          <a:bodyPr wrap="square" anchor="t" lIns="18288" rIns="18288" tIns="18288" bIns="18288">
+          <a:bodyPr wrap="square" lIns="18288" rIns="18288" tIns="18288" bIns="18288">
             <a:spAutoFit/>
           </a:bodyPr>
           <a:lstStyle/>
           <a:p>
             <a:pPr algn="l"/>
             <a:r>
-              <a:rPr sz="1500" b="1">
-                <a:solidFill>
-                  <a:srgbClr val="16805F"/>
+              <a:rPr sz="1700" b="1">
+                <a:solidFill>
+                  <a:srgbClr val="18202D"/>
                 </a:solidFill>
                 <a:latin typeface="Malgun Gothic"/>
               </a:rPr>
-              <a:t>수집 후 처리</a:t>
-            </a:r>
-          </a:p>
-        </p:txBody>
-      </p:sp>
-      <p:sp>
-        <p:nvSpPr>
-          <p:cNvPr id="22" name="TextBox 21"/>
+              <a:t>각 시점에서 1시간 뒤
+동별 대중교통 승차량</a:t>
+            </a:r>
+          </a:p>
+        </p:txBody>
+      </p:sp>
+      <p:sp>
+        <p:nvSpPr>
+          <p:cNvPr id="23" name="TextBox 22"/>
           <p:cNvSpPr txBox="1"/>
           <p:nvPr/>
         </p:nvSpPr>
         <p:spPr>
           <a:xfrm>
-            <a:off x="2148840" y="5650992"/>
-            <a:ext cx="8869680" cy="320040"/>
+            <a:off x="548640" y="6473952"/>
+            <a:ext cx="4572000" cy="201168"/>
           </a:xfrm>
           <a:prstGeom prst="rect">
             <a:avLst/>
@@ -6975,51 +5870,16 @@
           <a:noFill/>
         </p:spPr>
         <p:txBody>
-          <a:bodyPr wrap="square" anchor="t" lIns="18288" rIns="18288" tIns="18288" bIns="18288">
+          <a:bodyPr wrap="square" lIns="18288" rIns="18288" tIns="18288" bIns="18288">
             <a:spAutoFit/>
           </a:bodyPr>
           <a:lstStyle/>
           <a:p>
             <a:pPr algn="l"/>
             <a:r>
-              <a:rPr sz="1500" b="0">
-                <a:solidFill>
-                  <a:srgbClr val="1F2937"/>
-                </a:solidFill>
-                <a:latin typeface="Malgun Gothic"/>
-              </a:rPr>
-              <a:t>시간대 기준 정렬 → 강남 9개 동 필터링 → 날씨/휴일 join → lag feature 생성 → Colab 학습용 CSV export</a:t>
-            </a:r>
-          </a:p>
-        </p:txBody>
-      </p:sp>
-      <p:sp>
-        <p:nvSpPr>
-          <p:cNvPr id="23" name="TextBox 22"/>
-          <p:cNvSpPr txBox="1"/>
-          <p:nvPr/>
-        </p:nvSpPr>
-        <p:spPr>
-          <a:xfrm>
-            <a:off x="502920" y="6446520"/>
-            <a:ext cx="5029200" cy="228600"/>
-          </a:xfrm>
-          <a:prstGeom prst="rect">
-            <a:avLst/>
-          </a:prstGeom>
-          <a:noFill/>
-        </p:spPr>
-        <p:txBody>
-          <a:bodyPr wrap="square" anchor="t" lIns="18288" rIns="18288" tIns="18288" bIns="18288">
-            <a:spAutoFit/>
-          </a:bodyPr>
-          <a:lstStyle/>
-          <a:p>
-            <a:pPr algn="l"/>
-            <a:r>
               <a:rPr sz="900" b="0">
                 <a:solidFill>
-                  <a:srgbClr val="5A6577"/>
+                  <a:srgbClr val="525E70"/>
                 </a:solidFill>
                 <a:latin typeface="Malgun Gothic"/>
               </a:rPr>
@@ -7042,7 +5902,7 @@
     <p:bg>
       <p:bgPr>
         <a:solidFill>
-          <a:srgbClr val="F6F7F9"/>
+          <a:srgbClr val="F7F8FA"/>
         </a:solidFill>
         <a:effectLst/>
       </p:bgPr>
@@ -7062,8 +5922,8 @@
         </p:nvSpPr>
         <p:spPr>
           <a:xfrm>
-            <a:off x="502920" y="320040"/>
-            <a:ext cx="2743200" cy="274320"/>
+            <a:off x="548640" y="329184"/>
+            <a:ext cx="2743200" cy="256032"/>
           </a:xfrm>
           <a:prstGeom prst="rect">
             <a:avLst/>
@@ -7071,7 +5931,7 @@
           <a:noFill/>
         </p:spPr>
         <p:txBody>
-          <a:bodyPr wrap="square" anchor="t" lIns="18288" rIns="18288" tIns="18288" bIns="18288">
+          <a:bodyPr wrap="square" lIns="18288" rIns="18288" tIns="18288" bIns="18288">
             <a:spAutoFit/>
           </a:bodyPr>
           <a:lstStyle/>
@@ -7097,8 +5957,8 @@
         </p:nvSpPr>
         <p:spPr>
           <a:xfrm>
-            <a:off x="502920" y="685800"/>
-            <a:ext cx="9875520" cy="621792"/>
+            <a:off x="548640" y="713232"/>
+            <a:ext cx="9875520" cy="603504"/>
           </a:xfrm>
           <a:prstGeom prst="rect">
             <a:avLst/>
@@ -7106,20 +5966,20 @@
           <a:noFill/>
         </p:spPr>
         <p:txBody>
-          <a:bodyPr wrap="square" anchor="t" lIns="18288" rIns="18288" tIns="18288" bIns="18288">
+          <a:bodyPr wrap="square" lIns="18288" rIns="18288" tIns="18288" bIns="18288">
             <a:spAutoFit/>
           </a:bodyPr>
           <a:lstStyle/>
           <a:p>
             <a:pPr algn="l"/>
             <a:r>
-              <a:rPr sz="2800" b="1">
-                <a:solidFill>
-                  <a:srgbClr val="1F2937"/>
+              <a:rPr sz="2900" b="1">
+                <a:solidFill>
+                  <a:srgbClr val="18202D"/>
                 </a:solidFill>
                 <a:latin typeface="Malgun Gothic"/>
               </a:rPr>
-              <a:t>학습 데이터셋: 2년치 시간대별 이동 수요 테이블</a:t>
+              <a:t>모델 검증: 실제 승차량과 예측 승차량을 비교</a:t>
             </a:r>
           </a:p>
         </p:txBody>
@@ -7132,14 +5992,14 @@
         </p:nvSpPr>
         <p:spPr>
           <a:xfrm>
-            <a:off x="502920" y="1810512"/>
-            <a:ext cx="11155680" cy="10972"/>
+            <a:off x="548640" y="1828800"/>
+            <a:ext cx="11018520" cy="10972"/>
           </a:xfrm>
           <a:prstGeom prst="rect">
             <a:avLst/>
           </a:prstGeom>
           <a:solidFill>
-            <a:srgbClr val="D8E1EC"/>
+            <a:srgbClr val="DAE2ED"/>
           </a:solidFill>
           <a:ln>
             <a:noFill/>
@@ -7167,16 +6027,64 @@
           </a:p>
         </p:txBody>
       </p:sp>
-      <p:sp>
-        <p:nvSpPr>
-          <p:cNvPr id="5" name="Rounded Rectangle 4"/>
+      <p:pic>
+        <p:nvPicPr>
+          <p:cNvPr id="5" name="Picture 4" descr="06_model_metrics_summary.png"/>
+          <p:cNvPicPr>
+            <a:picLocks noChangeAspect="1"/>
+          </p:cNvPicPr>
+          <p:nvPr/>
+        </p:nvPicPr>
+        <p:blipFill>
+          <a:blip r:embed="rId2"/>
+          <a:stretch>
+            <a:fillRect/>
+          </a:stretch>
+        </p:blipFill>
+        <p:spPr>
+          <a:xfrm>
+            <a:off x="502920" y="1938528"/>
+            <a:ext cx="5349240" cy="3276410"/>
+          </a:xfrm>
+          <a:prstGeom prst="rect">
+            <a:avLst/>
+          </a:prstGeom>
+        </p:spPr>
+      </p:pic>
+      <p:pic>
+        <p:nvPicPr>
+          <p:cNvPr id="6" name="Picture 5" descr="07_actual_vs_predicted_scatter.png"/>
+          <p:cNvPicPr>
+            <a:picLocks noChangeAspect="1"/>
+          </p:cNvPicPr>
+          <p:nvPr/>
+        </p:nvPicPr>
+        <p:blipFill>
+          <a:blip r:embed="rId3"/>
+          <a:stretch>
+            <a:fillRect/>
+          </a:stretch>
+        </p:blipFill>
+        <p:spPr>
+          <a:xfrm>
+            <a:off x="6126480" y="1938528"/>
+            <a:ext cx="5349240" cy="3276410"/>
+          </a:xfrm>
+          <a:prstGeom prst="rect">
+            <a:avLst/>
+          </a:prstGeom>
+        </p:spPr>
+      </p:pic>
+      <p:sp>
+        <p:nvSpPr>
+          <p:cNvPr id="7" name="Rounded Rectangle 6"/>
           <p:cNvSpPr/>
           <p:nvPr/>
         </p:nvSpPr>
         <p:spPr>
           <a:xfrm>
-            <a:off x="685800" y="2057400"/>
-            <a:ext cx="2423160" cy="1234440"/>
+            <a:off x="749808" y="5788152"/>
+            <a:ext cx="10469880" cy="438912"/>
           </a:xfrm>
           <a:prstGeom prst="roundRect">
             <a:avLst/>
@@ -7186,7 +6094,7 @@
           </a:solidFill>
           <a:ln w="12700">
             <a:solidFill>
-              <a:srgbClr val="D8E1EC"/>
+              <a:srgbClr val="DAE2ED"/>
             </a:solidFill>
           </a:ln>
         </p:spPr>
@@ -7214,14 +6122,14 @@
       </p:sp>
       <p:sp>
         <p:nvSpPr>
-          <p:cNvPr id="6" name="TextBox 5"/>
+          <p:cNvPr id="8" name="TextBox 7"/>
           <p:cNvSpPr txBox="1"/>
           <p:nvPr/>
         </p:nvSpPr>
         <p:spPr>
           <a:xfrm>
-            <a:off x="886968" y="2304288"/>
-            <a:ext cx="1920240" cy="365760"/>
+            <a:off x="987552" y="5907024"/>
+            <a:ext cx="685800" cy="164592"/>
           </a:xfrm>
           <a:prstGeom prst="rect">
             <a:avLst/>
@@ -7229,34 +6137,34 @@
           <a:noFill/>
         </p:spPr>
         <p:txBody>
-          <a:bodyPr wrap="square" anchor="t" lIns="18288" rIns="18288" tIns="18288" bIns="18288">
+          <a:bodyPr wrap="square" lIns="18288" rIns="18288" tIns="18288" bIns="18288">
             <a:spAutoFit/>
           </a:bodyPr>
           <a:lstStyle/>
           <a:p>
             <a:pPr algn="l"/>
             <a:r>
-              <a:rPr sz="2500" b="1">
-                <a:solidFill>
-                  <a:srgbClr val="1F2937"/>
+              <a:rPr sz="1100" b="1">
+                <a:solidFill>
+                  <a:srgbClr val="2563EB"/>
                 </a:solidFill>
                 <a:latin typeface="Malgun Gothic"/>
               </a:rPr>
-              <a:t>153,792</a:t>
-            </a:r>
-          </a:p>
-        </p:txBody>
-      </p:sp>
-      <p:sp>
-        <p:nvSpPr>
-          <p:cNvPr id="7" name="TextBox 6"/>
+              <a:t>해석</a:t>
+            </a:r>
+          </a:p>
+        </p:txBody>
+      </p:sp>
+      <p:sp>
+        <p:nvSpPr>
+          <p:cNvPr id="9" name="TextBox 8"/>
           <p:cNvSpPr txBox="1"/>
           <p:nvPr/>
         </p:nvSpPr>
         <p:spPr>
           <a:xfrm>
-            <a:off x="886968" y="2788920"/>
-            <a:ext cx="1920240" cy="228600"/>
+            <a:off x="1627632" y="5888736"/>
+            <a:ext cx="9052560" cy="201168"/>
           </a:xfrm>
           <a:prstGeom prst="rect">
             <a:avLst/>
@@ -7264,7 +6172,7 @@
           <a:noFill/>
         </p:spPr>
         <p:txBody>
-          <a:bodyPr wrap="square" anchor="t" lIns="18288" rIns="18288" tIns="18288" bIns="18288">
+          <a:bodyPr wrap="square" lIns="18288" rIns="18288" tIns="18288" bIns="18288">
             <a:spAutoFit/>
           </a:bodyPr>
           <a:lstStyle/>
@@ -7273,70 +6181,25 @@
             <a:r>
               <a:rPr sz="1200" b="0">
                 <a:solidFill>
-                  <a:srgbClr val="5A6577"/>
+                  <a:srgbClr val="18202D"/>
                 </a:solidFill>
                 <a:latin typeface="Malgun Gothic"/>
               </a:rPr>
-              <a:t>원천 join rows</a:t>
-            </a:r>
-          </a:p>
-        </p:txBody>
-      </p:sp>
-      <p:sp>
-        <p:nvSpPr>
-          <p:cNvPr id="8" name="Rounded Rectangle 7"/>
-          <p:cNvSpPr/>
-          <p:nvPr/>
-        </p:nvSpPr>
-        <p:spPr>
-          <a:xfrm>
-            <a:off x="3520440" y="2057400"/>
-            <a:ext cx="2423160" cy="1234440"/>
-          </a:xfrm>
-          <a:prstGeom prst="roundRect">
-            <a:avLst/>
-          </a:prstGeom>
-          <a:solidFill>
-            <a:srgbClr val="FFFFFF"/>
-          </a:solidFill>
-          <a:ln w="12700">
-            <a:solidFill>
-              <a:srgbClr val="D8E1EC"/>
-            </a:solidFill>
-          </a:ln>
-        </p:spPr>
-        <p:style>
-          <a:lnRef idx="1">
-            <a:schemeClr val="accent1"/>
-          </a:lnRef>
-          <a:fillRef idx="3">
-            <a:schemeClr val="accent1"/>
-          </a:fillRef>
-          <a:effectRef idx="2">
-            <a:schemeClr val="accent1"/>
-          </a:effectRef>
-          <a:fontRef idx="minor">
-            <a:schemeClr val="lt1"/>
-          </a:fontRef>
-        </p:style>
-        <p:txBody>
-          <a:bodyPr rtlCol="0" anchor="ctr"/>
-          <a:lstStyle/>
-          <a:p>
-            <a:pPr algn="ctr"/>
-          </a:p>
-        </p:txBody>
-      </p:sp>
-      <p:sp>
-        <p:nvSpPr>
-          <p:cNvPr id="9" name="TextBox 8"/>
+              <a:t>각 점은 특정 동의 특정 시간대입니다. x축은 실제 대중교통 승차량, y축은 예측 대중교통 승차량입니다.</a:t>
+            </a:r>
+          </a:p>
+        </p:txBody>
+      </p:sp>
+      <p:sp>
+        <p:nvSpPr>
+          <p:cNvPr id="10" name="TextBox 9"/>
           <p:cNvSpPr txBox="1"/>
           <p:nvPr/>
         </p:nvSpPr>
         <p:spPr>
           <a:xfrm>
-            <a:off x="3721608" y="2304288"/>
-            <a:ext cx="1920240" cy="365760"/>
+            <a:off x="548640" y="6473952"/>
+            <a:ext cx="4572000" cy="201168"/>
           </a:xfrm>
           <a:prstGeom prst="rect">
             <a:avLst/>
@@ -7344,599 +6207,16 @@
           <a:noFill/>
         </p:spPr>
         <p:txBody>
-          <a:bodyPr wrap="square" anchor="t" lIns="18288" rIns="18288" tIns="18288" bIns="18288">
+          <a:bodyPr wrap="square" lIns="18288" rIns="18288" tIns="18288" bIns="18288">
             <a:spAutoFit/>
           </a:bodyPr>
           <a:lstStyle/>
           <a:p>
             <a:pPr algn="l"/>
             <a:r>
-              <a:rPr sz="2500" b="1">
-                <a:solidFill>
-                  <a:srgbClr val="1F2937"/>
-                </a:solidFill>
-                <a:latin typeface="Malgun Gothic"/>
-              </a:rPr>
-              <a:t>153,783</a:t>
-            </a:r>
-          </a:p>
-        </p:txBody>
-      </p:sp>
-      <p:sp>
-        <p:nvSpPr>
-          <p:cNvPr id="10" name="TextBox 9"/>
-          <p:cNvSpPr txBox="1"/>
-          <p:nvPr/>
-        </p:nvSpPr>
-        <p:spPr>
-          <a:xfrm>
-            <a:off x="3721608" y="2788920"/>
-            <a:ext cx="1920240" cy="228600"/>
-          </a:xfrm>
-          <a:prstGeom prst="rect">
-            <a:avLst/>
-          </a:prstGeom>
-          <a:noFill/>
-        </p:spPr>
-        <p:txBody>
-          <a:bodyPr wrap="square" anchor="t" lIns="18288" rIns="18288" tIns="18288" bIns="18288">
-            <a:spAutoFit/>
-          </a:bodyPr>
-          <a:lstStyle/>
-          <a:p>
-            <a:pPr algn="l"/>
-            <a:r>
-              <a:rPr sz="1200" b="0">
-                <a:solidFill>
-                  <a:srgbClr val="5A6577"/>
-                </a:solidFill>
-                <a:latin typeface="Malgun Gothic"/>
-              </a:rPr>
-              <a:t>target 생성 후 rows</a:t>
-            </a:r>
-          </a:p>
-        </p:txBody>
-      </p:sp>
-      <p:sp>
-        <p:nvSpPr>
-          <p:cNvPr id="11" name="Rounded Rectangle 10"/>
-          <p:cNvSpPr/>
-          <p:nvPr/>
-        </p:nvSpPr>
-        <p:spPr>
-          <a:xfrm>
-            <a:off x="6355080" y="2057400"/>
-            <a:ext cx="2423160" cy="1234440"/>
-          </a:xfrm>
-          <a:prstGeom prst="roundRect">
-            <a:avLst/>
-          </a:prstGeom>
-          <a:solidFill>
-            <a:srgbClr val="FFFFFF"/>
-          </a:solidFill>
-          <a:ln w="12700">
-            <a:solidFill>
-              <a:srgbClr val="D8E1EC"/>
-            </a:solidFill>
-          </a:ln>
-        </p:spPr>
-        <p:style>
-          <a:lnRef idx="1">
-            <a:schemeClr val="accent1"/>
-          </a:lnRef>
-          <a:fillRef idx="3">
-            <a:schemeClr val="accent1"/>
-          </a:fillRef>
-          <a:effectRef idx="2">
-            <a:schemeClr val="accent1"/>
-          </a:effectRef>
-          <a:fontRef idx="minor">
-            <a:schemeClr val="lt1"/>
-          </a:fontRef>
-        </p:style>
-        <p:txBody>
-          <a:bodyPr rtlCol="0" anchor="ctr"/>
-          <a:lstStyle/>
-          <a:p>
-            <a:pPr algn="ctr"/>
-          </a:p>
-        </p:txBody>
-      </p:sp>
-      <p:sp>
-        <p:nvSpPr>
-          <p:cNvPr id="12" name="TextBox 11"/>
-          <p:cNvSpPr txBox="1"/>
-          <p:nvPr/>
-        </p:nvSpPr>
-        <p:spPr>
-          <a:xfrm>
-            <a:off x="6556248" y="2304288"/>
-            <a:ext cx="1920240" cy="365760"/>
-          </a:xfrm>
-          <a:prstGeom prst="rect">
-            <a:avLst/>
-          </a:prstGeom>
-          <a:noFill/>
-        </p:spPr>
-        <p:txBody>
-          <a:bodyPr wrap="square" anchor="t" lIns="18288" rIns="18288" tIns="18288" bIns="18288">
-            <a:spAutoFit/>
-          </a:bodyPr>
-          <a:lstStyle/>
-          <a:p>
-            <a:pPr algn="l"/>
-            <a:r>
-              <a:rPr sz="2500" b="1">
-                <a:solidFill>
-                  <a:srgbClr val="1F2937"/>
-                </a:solidFill>
-                <a:latin typeface="Malgun Gothic"/>
-              </a:rPr>
-              <a:t>712일</a:t>
-            </a:r>
-          </a:p>
-        </p:txBody>
-      </p:sp>
-      <p:sp>
-        <p:nvSpPr>
-          <p:cNvPr id="13" name="TextBox 12"/>
-          <p:cNvSpPr txBox="1"/>
-          <p:nvPr/>
-        </p:nvSpPr>
-        <p:spPr>
-          <a:xfrm>
-            <a:off x="6556248" y="2788920"/>
-            <a:ext cx="1920240" cy="228600"/>
-          </a:xfrm>
-          <a:prstGeom prst="rect">
-            <a:avLst/>
-          </a:prstGeom>
-          <a:noFill/>
-        </p:spPr>
-        <p:txBody>
-          <a:bodyPr wrap="square" anchor="t" lIns="18288" rIns="18288" tIns="18288" bIns="18288">
-            <a:spAutoFit/>
-          </a:bodyPr>
-          <a:lstStyle/>
-          <a:p>
-            <a:pPr algn="l"/>
-            <a:r>
-              <a:rPr sz="1200" b="0">
-                <a:solidFill>
-                  <a:srgbClr val="5A6577"/>
-                </a:solidFill>
-                <a:latin typeface="Malgun Gothic"/>
-              </a:rPr>
-              <a:t>분석 가능한 날짜</a:t>
-            </a:r>
-          </a:p>
-        </p:txBody>
-      </p:sp>
-      <p:sp>
-        <p:nvSpPr>
-          <p:cNvPr id="14" name="Rounded Rectangle 13"/>
-          <p:cNvSpPr/>
-          <p:nvPr/>
-        </p:nvSpPr>
-        <p:spPr>
-          <a:xfrm>
-            <a:off x="9189720" y="2057400"/>
-            <a:ext cx="2423160" cy="1234440"/>
-          </a:xfrm>
-          <a:prstGeom prst="roundRect">
-            <a:avLst/>
-          </a:prstGeom>
-          <a:solidFill>
-            <a:srgbClr val="FFFFFF"/>
-          </a:solidFill>
-          <a:ln w="12700">
-            <a:solidFill>
-              <a:srgbClr val="D8E1EC"/>
-            </a:solidFill>
-          </a:ln>
-        </p:spPr>
-        <p:style>
-          <a:lnRef idx="1">
-            <a:schemeClr val="accent1"/>
-          </a:lnRef>
-          <a:fillRef idx="3">
-            <a:schemeClr val="accent1"/>
-          </a:fillRef>
-          <a:effectRef idx="2">
-            <a:schemeClr val="accent1"/>
-          </a:effectRef>
-          <a:fontRef idx="minor">
-            <a:schemeClr val="lt1"/>
-          </a:fontRef>
-        </p:style>
-        <p:txBody>
-          <a:bodyPr rtlCol="0" anchor="ctr"/>
-          <a:lstStyle/>
-          <a:p>
-            <a:pPr algn="ctr"/>
-          </a:p>
-        </p:txBody>
-      </p:sp>
-      <p:sp>
-        <p:nvSpPr>
-          <p:cNvPr id="15" name="TextBox 14"/>
-          <p:cNvSpPr txBox="1"/>
-          <p:nvPr/>
-        </p:nvSpPr>
-        <p:spPr>
-          <a:xfrm>
-            <a:off x="9390888" y="2304288"/>
-            <a:ext cx="1920240" cy="365760"/>
-          </a:xfrm>
-          <a:prstGeom prst="rect">
-            <a:avLst/>
-          </a:prstGeom>
-          <a:noFill/>
-        </p:spPr>
-        <p:txBody>
-          <a:bodyPr wrap="square" anchor="t" lIns="18288" rIns="18288" tIns="18288" bIns="18288">
-            <a:spAutoFit/>
-          </a:bodyPr>
-          <a:lstStyle/>
-          <a:p>
-            <a:pPr algn="l"/>
-            <a:r>
-              <a:rPr sz="2500" b="1">
-                <a:solidFill>
-                  <a:srgbClr val="1F2937"/>
-                </a:solidFill>
-                <a:latin typeface="Malgun Gothic"/>
-              </a:rPr>
-              <a:t>9개 동</a:t>
-            </a:r>
-          </a:p>
-        </p:txBody>
-      </p:sp>
-      <p:sp>
-        <p:nvSpPr>
-          <p:cNvPr id="16" name="TextBox 15"/>
-          <p:cNvSpPr txBox="1"/>
-          <p:nvPr/>
-        </p:nvSpPr>
-        <p:spPr>
-          <a:xfrm>
-            <a:off x="9390888" y="2788920"/>
-            <a:ext cx="1920240" cy="228600"/>
-          </a:xfrm>
-          <a:prstGeom prst="rect">
-            <a:avLst/>
-          </a:prstGeom>
-          <a:noFill/>
-        </p:spPr>
-        <p:txBody>
-          <a:bodyPr wrap="square" anchor="t" lIns="18288" rIns="18288" tIns="18288" bIns="18288">
-            <a:spAutoFit/>
-          </a:bodyPr>
-          <a:lstStyle/>
-          <a:p>
-            <a:pPr algn="l"/>
-            <a:r>
-              <a:rPr sz="1200" b="0">
-                <a:solidFill>
-                  <a:srgbClr val="5A6577"/>
-                </a:solidFill>
-                <a:latin typeface="Malgun Gothic"/>
-              </a:rPr>
-              <a:t>예측 지역 단위</a:t>
-            </a:r>
-          </a:p>
-        </p:txBody>
-      </p:sp>
-      <p:sp>
-        <p:nvSpPr>
-          <p:cNvPr id="17" name="Rounded Rectangle 16"/>
-          <p:cNvSpPr/>
-          <p:nvPr/>
-        </p:nvSpPr>
-        <p:spPr>
-          <a:xfrm>
-            <a:off x="685800" y="3794760"/>
-            <a:ext cx="5257800" cy="1645920"/>
-          </a:xfrm>
-          <a:prstGeom prst="roundRect">
-            <a:avLst/>
-          </a:prstGeom>
-          <a:solidFill>
-            <a:srgbClr val="FFFFFF"/>
-          </a:solidFill>
-          <a:ln w="12700">
-            <a:solidFill>
-              <a:srgbClr val="D8E1EC"/>
-            </a:solidFill>
-          </a:ln>
-        </p:spPr>
-        <p:style>
-          <a:lnRef idx="1">
-            <a:schemeClr val="accent1"/>
-          </a:lnRef>
-          <a:fillRef idx="3">
-            <a:schemeClr val="accent1"/>
-          </a:fillRef>
-          <a:effectRef idx="2">
-            <a:schemeClr val="accent1"/>
-          </a:effectRef>
-          <a:fontRef idx="minor">
-            <a:schemeClr val="lt1"/>
-          </a:fontRef>
-        </p:style>
-        <p:txBody>
-          <a:bodyPr rtlCol="0" anchor="ctr"/>
-          <a:lstStyle/>
-          <a:p>
-            <a:pPr algn="ctr"/>
-          </a:p>
-        </p:txBody>
-      </p:sp>
-      <p:sp>
-        <p:nvSpPr>
-          <p:cNvPr id="18" name="TextBox 17"/>
-          <p:cNvSpPr txBox="1"/>
-          <p:nvPr/>
-        </p:nvSpPr>
-        <p:spPr>
-          <a:xfrm>
-            <a:off x="960120" y="4069080"/>
-            <a:ext cx="2194560" cy="256032"/>
-          </a:xfrm>
-          <a:prstGeom prst="rect">
-            <a:avLst/>
-          </a:prstGeom>
-          <a:noFill/>
-        </p:spPr>
-        <p:txBody>
-          <a:bodyPr wrap="square" anchor="t" lIns="18288" rIns="18288" tIns="18288" bIns="18288">
-            <a:spAutoFit/>
-          </a:bodyPr>
-          <a:lstStyle/>
-          <a:p>
-            <a:pPr algn="l"/>
-            <a:r>
-              <a:rPr sz="1800" b="1">
-                <a:solidFill>
-                  <a:srgbClr val="1F2937"/>
-                </a:solidFill>
-                <a:latin typeface="Malgun Gothic"/>
-              </a:rPr>
-              <a:t>주요 입력 feature</a:t>
-            </a:r>
-          </a:p>
-        </p:txBody>
-      </p:sp>
-      <p:sp>
-        <p:nvSpPr>
-          <p:cNvPr id="19" name="TextBox 18"/>
-          <p:cNvSpPr txBox="1"/>
-          <p:nvPr/>
-        </p:nvSpPr>
-        <p:spPr>
-          <a:xfrm>
-            <a:off x="960120" y="4434840"/>
-            <a:ext cx="4251960" cy="868680"/>
-          </a:xfrm>
-          <a:prstGeom prst="rect">
-            <a:avLst/>
-          </a:prstGeom>
-          <a:noFill/>
-        </p:spPr>
-        <p:txBody>
-          <a:bodyPr wrap="square" lIns="18288" rIns="18288">
-            <a:spAutoFit/>
-          </a:bodyPr>
-          <a:lstStyle/>
-          <a:p>
-            <a:pPr>
-              <a:spcAft>
-                <a:spcPts val="600"/>
-              </a:spcAft>
-              <a:defRPr sz="1300">
-                <a:solidFill>
-                  <a:srgbClr val="1F2937"/>
-                </a:solidFill>
-                <a:latin typeface="Malgun Gothic"/>
-              </a:defRPr>
-            </a:pPr>
-            <a:r>
-              <a:t>행정동, 시간, 요일, 주말 여부</a:t>
-            </a:r>
-          </a:p>
-          <a:p>
-            <a:pPr>
-              <a:spcAft>
-                <a:spcPts val="600"/>
-              </a:spcAft>
-              <a:defRPr sz="1300">
-                <a:solidFill>
-                  <a:srgbClr val="1F2937"/>
-                </a:solidFill>
-                <a:latin typeface="Malgun Gothic"/>
-              </a:defRPr>
-            </a:pPr>
-            <a:r>
-              <a:t>현재/직전/전날/전주 같은 시간 수요</a:t>
-            </a:r>
-          </a:p>
-          <a:p>
-            <a:pPr>
-              <a:spcAft>
-                <a:spcPts val="600"/>
-              </a:spcAft>
-              <a:defRPr sz="1300">
-                <a:solidFill>
-                  <a:srgbClr val="1F2937"/>
-                </a:solidFill>
-                <a:latin typeface="Malgun Gothic"/>
-              </a:defRPr>
-            </a:pPr>
-            <a:r>
-              <a:t>기온, 강수, 적설, 습도, 풍속</a:t>
-            </a:r>
-          </a:p>
-          <a:p>
-            <a:pPr>
-              <a:spcAft>
-                <a:spcPts val="600"/>
-              </a:spcAft>
-              <a:defRPr sz="1300">
-                <a:solidFill>
-                  <a:srgbClr val="1F2937"/>
-                </a:solidFill>
-                <a:latin typeface="Malgun Gothic"/>
-              </a:defRPr>
-            </a:pPr>
-            <a:r>
-              <a:t>공휴일, 공휴일 전날</a:t>
-            </a:r>
-          </a:p>
-        </p:txBody>
-      </p:sp>
-      <p:sp>
-        <p:nvSpPr>
-          <p:cNvPr id="20" name="Rounded Rectangle 19"/>
-          <p:cNvSpPr/>
-          <p:nvPr/>
-        </p:nvSpPr>
-        <p:spPr>
-          <a:xfrm>
-            <a:off x="6263640" y="3794760"/>
-            <a:ext cx="4800600" cy="1645920"/>
-          </a:xfrm>
-          <a:prstGeom prst="roundRect">
-            <a:avLst/>
-          </a:prstGeom>
-          <a:solidFill>
-            <a:srgbClr val="E8F7F0"/>
-          </a:solidFill>
-          <a:ln w="12700">
-            <a:solidFill>
-              <a:srgbClr val="E8F7F0"/>
-            </a:solidFill>
-          </a:ln>
-        </p:spPr>
-        <p:style>
-          <a:lnRef idx="1">
-            <a:schemeClr val="accent1"/>
-          </a:lnRef>
-          <a:fillRef idx="3">
-            <a:schemeClr val="accent1"/>
-          </a:fillRef>
-          <a:effectRef idx="2">
-            <a:schemeClr val="accent1"/>
-          </a:effectRef>
-          <a:fontRef idx="minor">
-            <a:schemeClr val="lt1"/>
-          </a:fontRef>
-        </p:style>
-        <p:txBody>
-          <a:bodyPr rtlCol="0" anchor="ctr"/>
-          <a:lstStyle/>
-          <a:p>
-            <a:pPr algn="ctr"/>
-          </a:p>
-        </p:txBody>
-      </p:sp>
-      <p:sp>
-        <p:nvSpPr>
-          <p:cNvPr id="21" name="TextBox 20"/>
-          <p:cNvSpPr txBox="1"/>
-          <p:nvPr/>
-        </p:nvSpPr>
-        <p:spPr>
-          <a:xfrm>
-            <a:off x="6537960" y="4069080"/>
-            <a:ext cx="1463040" cy="256032"/>
-          </a:xfrm>
-          <a:prstGeom prst="rect">
-            <a:avLst/>
-          </a:prstGeom>
-          <a:noFill/>
-        </p:spPr>
-        <p:txBody>
-          <a:bodyPr wrap="square" anchor="t" lIns="18288" rIns="18288" tIns="18288" bIns="18288">
-            <a:spAutoFit/>
-          </a:bodyPr>
-          <a:lstStyle/>
-          <a:p>
-            <a:pPr algn="l"/>
-            <a:r>
-              <a:rPr sz="1800" b="1">
-                <a:solidFill>
-                  <a:srgbClr val="16805F"/>
-                </a:solidFill>
-                <a:latin typeface="Malgun Gothic"/>
-              </a:rPr>
-              <a:t>Target</a:t>
-            </a:r>
-          </a:p>
-        </p:txBody>
-      </p:sp>
-      <p:sp>
-        <p:nvSpPr>
-          <p:cNvPr id="22" name="TextBox 21"/>
-          <p:cNvSpPr txBox="1"/>
-          <p:nvPr/>
-        </p:nvSpPr>
-        <p:spPr>
-          <a:xfrm>
-            <a:off x="6537960" y="4480560"/>
-            <a:ext cx="3840480" cy="685800"/>
-          </a:xfrm>
-          <a:prstGeom prst="rect">
-            <a:avLst/>
-          </a:prstGeom>
-          <a:noFill/>
-        </p:spPr>
-        <p:txBody>
-          <a:bodyPr wrap="square" anchor="t" lIns="18288" rIns="18288" tIns="18288" bIns="18288">
-            <a:spAutoFit/>
-          </a:bodyPr>
-          <a:lstStyle/>
-          <a:p>
-            <a:pPr algn="l"/>
-            <a:r>
-              <a:rPr sz="1500" b="1">
-                <a:solidFill>
-                  <a:srgbClr val="1F2937"/>
-                </a:solidFill>
-                <a:latin typeface="Malgun Gothic"/>
-              </a:rPr>
-              <a:t>target_transit_boardings_t_plus_1h
-다음 1시간 동별 대중교통 승차량</a:t>
-            </a:r>
-          </a:p>
-        </p:txBody>
-      </p:sp>
-      <p:sp>
-        <p:nvSpPr>
-          <p:cNvPr id="23" name="TextBox 22"/>
-          <p:cNvSpPr txBox="1"/>
-          <p:nvPr/>
-        </p:nvSpPr>
-        <p:spPr>
-          <a:xfrm>
-            <a:off x="502920" y="6446520"/>
-            <a:ext cx="5029200" cy="228600"/>
-          </a:xfrm>
-          <a:prstGeom prst="rect">
-            <a:avLst/>
-          </a:prstGeom>
-          <a:noFill/>
-        </p:spPr>
-        <p:txBody>
-          <a:bodyPr wrap="square" anchor="t" lIns="18288" rIns="18288" tIns="18288" bIns="18288">
-            <a:spAutoFit/>
-          </a:bodyPr>
-          <a:lstStyle/>
-          <a:p>
-            <a:pPr algn="l"/>
-            <a:r>
               <a:rPr sz="900" b="0">
                 <a:solidFill>
-                  <a:srgbClr val="5A6577"/>
+                  <a:srgbClr val="525E70"/>
                 </a:solidFill>
                 <a:latin typeface="Malgun Gothic"/>
               </a:rPr>
@@ -7959,7 +6239,7 @@
     <p:bg>
       <p:bgPr>
         <a:solidFill>
-          <a:srgbClr val="F6F7F9"/>
+          <a:srgbClr val="F7F8FA"/>
         </a:solidFill>
         <a:effectLst/>
       </p:bgPr>
@@ -7979,8 +6259,8 @@
         </p:nvSpPr>
         <p:spPr>
           <a:xfrm>
-            <a:off x="502920" y="320040"/>
-            <a:ext cx="2743200" cy="274320"/>
+            <a:off x="548640" y="329184"/>
+            <a:ext cx="2743200" cy="256032"/>
           </a:xfrm>
           <a:prstGeom prst="rect">
             <a:avLst/>
@@ -7988,7 +6268,7 @@
           <a:noFill/>
         </p:spPr>
         <p:txBody>
-          <a:bodyPr wrap="square" anchor="t" lIns="18288" rIns="18288" tIns="18288" bIns="18288">
+          <a:bodyPr wrap="square" lIns="18288" rIns="18288" tIns="18288" bIns="18288">
             <a:spAutoFit/>
           </a:bodyPr>
           <a:lstStyle/>
@@ -8014,8 +6294,8 @@
         </p:nvSpPr>
         <p:spPr>
           <a:xfrm>
-            <a:off x="502920" y="685800"/>
-            <a:ext cx="9875520" cy="621792"/>
+            <a:off x="548640" y="713232"/>
+            <a:ext cx="9875520" cy="603504"/>
           </a:xfrm>
           <a:prstGeom prst="rect">
             <a:avLst/>
@@ -8023,20 +6303,20 @@
           <a:noFill/>
         </p:spPr>
         <p:txBody>
-          <a:bodyPr wrap="square" anchor="t" lIns="18288" rIns="18288" tIns="18288" bIns="18288">
+          <a:bodyPr wrap="square" lIns="18288" rIns="18288" tIns="18288" bIns="18288">
             <a:spAutoFit/>
           </a:bodyPr>
           <a:lstStyle/>
           <a:p>
             <a:pPr algn="l"/>
             <a:r>
-              <a:rPr sz="2800" b="1">
-                <a:solidFill>
-                  <a:srgbClr val="1F2937"/>
+              <a:rPr sz="2900" b="1">
+                <a:solidFill>
+                  <a:srgbClr val="18202D"/>
                 </a:solidFill>
                 <a:latin typeface="Malgun Gothic"/>
               </a:rPr>
-              <a:t>데이터에서 보인 패턴: 요일과 시간대가 가장 강했습니다</a:t>
+              <a:t>예측 흐름과 서비스 연결</a:t>
             </a:r>
           </a:p>
         </p:txBody>
@@ -8049,14 +6329,14 @@
         </p:nvSpPr>
         <p:spPr>
           <a:xfrm>
-            <a:off x="502920" y="1810512"/>
-            <a:ext cx="11155680" cy="10972"/>
+            <a:off x="548640" y="1828800"/>
+            <a:ext cx="11018520" cy="10972"/>
           </a:xfrm>
           <a:prstGeom prst="rect">
             <a:avLst/>
           </a:prstGeom>
           <a:solidFill>
-            <a:srgbClr val="D8E1EC"/>
+            <a:srgbClr val="DAE2ED"/>
           </a:solidFill>
           <a:ln>
             <a:noFill/>
@@ -8086,7 +6366,7 @@
       </p:sp>
       <p:pic>
         <p:nvPicPr>
-          <p:cNvPr id="5" name="Picture 4" descr="02_transit_hourly_pattern.png"/>
+          <p:cNvPr id="5" name="Picture 4" descr="08_prediction_timeseries_sample.png"/>
           <p:cNvPicPr>
             <a:picLocks noChangeAspect="1"/>
           </p:cNvPicPr>
@@ -8100,48 +6380,24 @@
         </p:blipFill>
         <p:spPr>
           <a:xfrm>
-            <a:off x="685800" y="2029968"/>
-            <a:ext cx="5029200" cy="2828925"/>
+            <a:off x="594360" y="1938528"/>
+            <a:ext cx="6172200" cy="3780472"/>
           </a:xfrm>
           <a:prstGeom prst="rect">
             <a:avLst/>
           </a:prstGeom>
         </p:spPr>
       </p:pic>
-      <p:pic>
-        <p:nvPicPr>
-          <p:cNvPr id="6" name="Picture 5" descr="03_transit_dong_ranking.png"/>
-          <p:cNvPicPr>
-            <a:picLocks noChangeAspect="1"/>
-          </p:cNvPicPr>
-          <p:nvPr/>
-        </p:nvPicPr>
-        <p:blipFill>
-          <a:blip r:embed="rId3"/>
-          <a:stretch>
-            <a:fillRect/>
-          </a:stretch>
-        </p:blipFill>
-        <p:spPr>
-          <a:xfrm>
-            <a:off x="6172200" y="2029968"/>
-            <a:ext cx="5029200" cy="2828925"/>
-          </a:xfrm>
-          <a:prstGeom prst="rect">
-            <a:avLst/>
-          </a:prstGeom>
-        </p:spPr>
-      </p:pic>
-      <p:sp>
-        <p:nvSpPr>
-          <p:cNvPr id="7" name="Rounded Rectangle 6"/>
+      <p:sp>
+        <p:nvSpPr>
+          <p:cNvPr id="6" name="Rounded Rectangle 5"/>
           <p:cNvSpPr/>
           <p:nvPr/>
         </p:nvSpPr>
         <p:spPr>
           <a:xfrm>
-            <a:off x="685800" y="5532120"/>
-            <a:ext cx="10515600" cy="640080"/>
+            <a:off x="7086600" y="2057400"/>
+            <a:ext cx="4160520" cy="2971800"/>
           </a:xfrm>
           <a:prstGeom prst="roundRect">
             <a:avLst/>
@@ -8151,7 +6407,7 @@
           </a:solidFill>
           <a:ln w="12700">
             <a:solidFill>
-              <a:srgbClr val="D8E1EC"/>
+              <a:srgbClr val="DAE2ED"/>
             </a:solidFill>
           </a:ln>
         </p:spPr>
@@ -8179,14 +6435,49 @@
       </p:sp>
       <p:sp>
         <p:nvSpPr>
+          <p:cNvPr id="7" name="TextBox 6"/>
+          <p:cNvSpPr txBox="1"/>
+          <p:nvPr/>
+        </p:nvSpPr>
+        <p:spPr>
+          <a:xfrm>
+            <a:off x="7388352" y="2395728"/>
+            <a:ext cx="2377440" cy="292608"/>
+          </a:xfrm>
+          <a:prstGeom prst="rect">
+            <a:avLst/>
+          </a:prstGeom>
+          <a:noFill/>
+        </p:spPr>
+        <p:txBody>
+          <a:bodyPr wrap="square" lIns="18288" rIns="18288" tIns="18288" bIns="18288">
+            <a:spAutoFit/>
+          </a:bodyPr>
+          <a:lstStyle/>
+          <a:p>
+            <a:pPr algn="l"/>
+            <a:r>
+              <a:rPr sz="2000" b="1">
+                <a:solidFill>
+                  <a:srgbClr val="18202D"/>
+                </a:solidFill>
+                <a:latin typeface="Malgun Gothic"/>
+              </a:rPr>
+              <a:t>지도에 붙이는 방향</a:t>
+            </a:r>
+          </a:p>
+        </p:txBody>
+      </p:sp>
+      <p:sp>
+        <p:nvSpPr>
           <p:cNvPr id="8" name="TextBox 7"/>
           <p:cNvSpPr txBox="1"/>
           <p:nvPr/>
         </p:nvSpPr>
         <p:spPr>
           <a:xfrm>
-            <a:off x="932688" y="5696712"/>
-            <a:ext cx="640080" cy="201168"/>
+            <a:off x="7388352" y="2926080"/>
+            <a:ext cx="3154680" cy="1325880"/>
           </a:xfrm>
           <a:prstGeom prst="rect">
             <a:avLst/>
@@ -8194,20 +6485,56 @@
           <a:noFill/>
         </p:spPr>
         <p:txBody>
-          <a:bodyPr wrap="square" anchor="t" lIns="18288" rIns="18288" tIns="18288" bIns="18288">
+          <a:bodyPr wrap="square" lIns="18288" rIns="18288">
             <a:spAutoFit/>
           </a:bodyPr>
           <a:lstStyle/>
           <a:p>
-            <a:pPr algn="l"/>
-            <a:r>
-              <a:rPr sz="1300" b="1">
-                <a:solidFill>
-                  <a:srgbClr val="2563EB"/>
-                </a:solidFill>
-                <a:latin typeface="Malgun Gothic"/>
-              </a:rPr>
-              <a:t>해석</a:t>
+            <a:pPr>
+              <a:spcAft>
+                <a:spcPts val="800"/>
+              </a:spcAft>
+              <a:defRPr sz="1400">
+                <a:solidFill>
+                  <a:srgbClr val="18202D"/>
+                </a:solidFill>
+                <a:latin typeface="Malgun Gothic"/>
+              </a:defRPr>
+            </a:pPr>
+            <a:r>
+              <a:t>행정동별 수요를 색상/랭킹으로 표시</a:t>
+            </a:r>
+          </a:p>
+          <a:p>
+            <a:pPr>
+              <a:spcAft>
+                <a:spcPts val="800"/>
+              </a:spcAft>
+              <a:defRPr sz="1400">
+                <a:solidFill>
+                  <a:srgbClr val="18202D"/>
+                </a:solidFill>
+                <a:latin typeface="Malgun Gothic"/>
+              </a:defRPr>
+            </a:pPr>
+            <a:r>
+              <a:t>실시간 citydata와 예측 결과를 함께 보여줌</a:t>
+            </a:r>
+          </a:p>
+          <a:p>
+            <a:pPr>
+              <a:spcAft>
+                <a:spcPts val="800"/>
+              </a:spcAft>
+              <a:defRPr sz="1400">
+                <a:solidFill>
+                  <a:srgbClr val="18202D"/>
+                </a:solidFill>
+                <a:latin typeface="Malgun Gothic"/>
+              </a:defRPr>
+            </a:pPr>
+            <a:r>
+              <a:t>수요가 커질 가능성이 높은 지역을 먼저 확인</a:t>
             </a:r>
           </a:p>
         </p:txBody>
@@ -8220,8 +6547,8 @@
         </p:nvSpPr>
         <p:spPr>
           <a:xfrm>
-            <a:off x="1600200" y="5669280"/>
-            <a:ext cx="9144000" cy="274320"/>
+            <a:off x="7388352" y="4736592"/>
+            <a:ext cx="3108960" cy="411480"/>
           </a:xfrm>
           <a:prstGeom prst="rect">
             <a:avLst/>
@@ -8229,20 +6556,20 @@
           <a:noFill/>
         </p:spPr>
         <p:txBody>
-          <a:bodyPr wrap="square" anchor="t" lIns="18288" rIns="18288" tIns="18288" bIns="18288">
+          <a:bodyPr wrap="square" lIns="18288" rIns="18288" tIns="18288" bIns="18288">
             <a:spAutoFit/>
           </a:bodyPr>
           <a:lstStyle/>
           <a:p>
             <a:pPr algn="l"/>
             <a:r>
-              <a:rPr sz="1300" b="0">
-                <a:solidFill>
-                  <a:srgbClr val="1F2937"/>
+              <a:rPr sz="1200" b="0">
+                <a:solidFill>
+                  <a:srgbClr val="525E70"/>
                 </a:solidFill>
                 <a:latin typeface="Malgun Gothic"/>
               </a:rPr>
-              <a:t>금요일·목요일·화요일 수요가 높고, 일요일·공휴일은 낮았습니다. 날씨는 보조 신호였고, 반복되는 생활 패턴이 더 강했습니다.</a:t>
+              <a:t>현재 사이트에는 /presentation 결과 페이지와 PPT 다운로드 버튼을 연결했습니다.</a:t>
             </a:r>
           </a:p>
         </p:txBody>
@@ -8255,8 +6582,8 @@
         </p:nvSpPr>
         <p:spPr>
           <a:xfrm>
-            <a:off x="502920" y="6446520"/>
-            <a:ext cx="5029200" cy="228600"/>
+            <a:off x="548640" y="6473952"/>
+            <a:ext cx="4572000" cy="201168"/>
           </a:xfrm>
           <a:prstGeom prst="rect">
             <a:avLst/>
@@ -8264,7 +6591,7 @@
           <a:noFill/>
         </p:spPr>
         <p:txBody>
-          <a:bodyPr wrap="square" anchor="t" lIns="18288" rIns="18288" tIns="18288" bIns="18288">
+          <a:bodyPr wrap="square" lIns="18288" rIns="18288" tIns="18288" bIns="18288">
             <a:spAutoFit/>
           </a:bodyPr>
           <a:lstStyle/>
@@ -8273,7 +6600,7 @@
             <a:r>
               <a:rPr sz="900" b="0">
                 <a:solidFill>
-                  <a:srgbClr val="5A6577"/>
+                  <a:srgbClr val="525E70"/>
                 </a:solidFill>
                 <a:latin typeface="Malgun Gothic"/>
               </a:rPr>
@@ -8296,7 +6623,7 @@
     <p:bg>
       <p:bgPr>
         <a:solidFill>
-          <a:srgbClr val="F6F7F9"/>
+          <a:srgbClr val="F7F8FA"/>
         </a:solidFill>
         <a:effectLst/>
       </p:bgPr>
@@ -8316,8 +6643,8 @@
         </p:nvSpPr>
         <p:spPr>
           <a:xfrm>
-            <a:off x="502920" y="320040"/>
-            <a:ext cx="2743200" cy="274320"/>
+            <a:off x="548640" y="329184"/>
+            <a:ext cx="2743200" cy="256032"/>
           </a:xfrm>
           <a:prstGeom prst="rect">
             <a:avLst/>
@@ -8325,7 +6652,7 @@
           <a:noFill/>
         </p:spPr>
         <p:txBody>
-          <a:bodyPr wrap="square" anchor="t" lIns="18288" rIns="18288" tIns="18288" bIns="18288">
+          <a:bodyPr wrap="square" lIns="18288" rIns="18288" tIns="18288" bIns="18288">
             <a:spAutoFit/>
           </a:bodyPr>
           <a:lstStyle/>
@@ -8351,8 +6678,8 @@
         </p:nvSpPr>
         <p:spPr>
           <a:xfrm>
-            <a:off x="502920" y="685800"/>
-            <a:ext cx="9875520" cy="621792"/>
+            <a:off x="548640" y="713232"/>
+            <a:ext cx="9875520" cy="603504"/>
           </a:xfrm>
           <a:prstGeom prst="rect">
             <a:avLst/>
@@ -8360,20 +6687,20 @@
           <a:noFill/>
         </p:spPr>
         <p:txBody>
-          <a:bodyPr wrap="square" anchor="t" lIns="18288" rIns="18288" tIns="18288" bIns="18288">
+          <a:bodyPr wrap="square" lIns="18288" rIns="18288" tIns="18288" bIns="18288">
             <a:spAutoFit/>
           </a:bodyPr>
           <a:lstStyle/>
           <a:p>
             <a:pPr algn="l"/>
             <a:r>
-              <a:rPr sz="2800" b="1">
-                <a:solidFill>
-                  <a:srgbClr val="1F2937"/>
+              <a:rPr sz="2900" b="1">
+                <a:solidFill>
+                  <a:srgbClr val="18202D"/>
                 </a:solidFill>
                 <a:latin typeface="Malgun Gothic"/>
               </a:rPr>
-              <a:t>모델 학습: 다음 1시간 수요를 동 단위로 예측</a:t>
+              <a:t>한계와 다음 단계</a:t>
             </a:r>
           </a:p>
         </p:txBody>
@@ -8386,14 +6713,14 @@
         </p:nvSpPr>
         <p:spPr>
           <a:xfrm>
-            <a:off x="502920" y="1810512"/>
-            <a:ext cx="11155680" cy="10972"/>
+            <a:off x="548640" y="1828800"/>
+            <a:ext cx="11018520" cy="10972"/>
           </a:xfrm>
           <a:prstGeom prst="rect">
             <a:avLst/>
           </a:prstGeom>
           <a:solidFill>
-            <a:srgbClr val="D8E1EC"/>
+            <a:srgbClr val="DAE2ED"/>
           </a:solidFill>
           <a:ln>
             <a:noFill/>
@@ -8421,40 +6748,16 @@
           </a:p>
         </p:txBody>
       </p:sp>
-      <p:pic>
-        <p:nvPicPr>
-          <p:cNvPr id="5" name="Picture 4" descr="09_model_feature_pipeline.png"/>
-          <p:cNvPicPr>
-            <a:picLocks noChangeAspect="1"/>
-          </p:cNvPicPr>
-          <p:nvPr/>
-        </p:nvPicPr>
-        <p:blipFill>
-          <a:blip r:embed="rId2"/>
-          <a:stretch>
-            <a:fillRect/>
-          </a:stretch>
-        </p:blipFill>
-        <p:spPr>
-          <a:xfrm>
-            <a:off x="685800" y="1920240"/>
-            <a:ext cx="6629400" cy="4060508"/>
-          </a:xfrm>
-          <a:prstGeom prst="rect">
-            <a:avLst/>
-          </a:prstGeom>
-        </p:spPr>
-      </p:pic>
-      <p:sp>
-        <p:nvSpPr>
-          <p:cNvPr id="6" name="Rounded Rectangle 5"/>
+      <p:sp>
+        <p:nvSpPr>
+          <p:cNvPr id="5" name="Rounded Rectangle 4"/>
           <p:cNvSpPr/>
           <p:nvPr/>
         </p:nvSpPr>
         <p:spPr>
           <a:xfrm>
-            <a:off x="7635240" y="1920240"/>
-            <a:ext cx="3566160" cy="3611880"/>
+            <a:off x="713232" y="2240280"/>
+            <a:ext cx="3200400" cy="3246120"/>
           </a:xfrm>
           <a:prstGeom prst="roundRect">
             <a:avLst/>
@@ -8464,7 +6767,7 @@
           </a:solidFill>
           <a:ln w="12700">
             <a:solidFill>
-              <a:srgbClr val="D8E1EC"/>
+              <a:srgbClr val="DAE2ED"/>
             </a:solidFill>
           </a:ln>
         </p:spPr>
@@ -8492,49 +6795,49 @@
       </p:sp>
       <p:sp>
         <p:nvSpPr>
+          <p:cNvPr id="6" name="TextBox 5"/>
+          <p:cNvSpPr txBox="1"/>
+          <p:nvPr/>
+        </p:nvSpPr>
+        <p:spPr>
+          <a:xfrm>
+            <a:off x="969264" y="2578608"/>
+            <a:ext cx="2194560" cy="274320"/>
+          </a:xfrm>
+          <a:prstGeom prst="rect">
+            <a:avLst/>
+          </a:prstGeom>
+          <a:noFill/>
+        </p:spPr>
+        <p:txBody>
+          <a:bodyPr wrap="square" lIns="18288" rIns="18288" tIns="18288" bIns="18288">
+            <a:spAutoFit/>
+          </a:bodyPr>
+          <a:lstStyle/>
+          <a:p>
+            <a:pPr algn="l"/>
+            <a:r>
+              <a:rPr sz="2000" b="1">
+                <a:solidFill>
+                  <a:srgbClr val="18202D"/>
+                </a:solidFill>
+                <a:latin typeface="Malgun Gothic"/>
+              </a:rPr>
+              <a:t>한계</a:t>
+            </a:r>
+          </a:p>
+        </p:txBody>
+      </p:sp>
+      <p:sp>
+        <p:nvSpPr>
           <p:cNvPr id="7" name="TextBox 6"/>
           <p:cNvSpPr txBox="1"/>
           <p:nvPr/>
         </p:nvSpPr>
         <p:spPr>
           <a:xfrm>
-            <a:off x="7936992" y="2240280"/>
-            <a:ext cx="2011680" cy="274320"/>
-          </a:xfrm>
-          <a:prstGeom prst="rect">
-            <a:avLst/>
-          </a:prstGeom>
-          <a:noFill/>
-        </p:spPr>
-        <p:txBody>
-          <a:bodyPr wrap="square" anchor="t" lIns="18288" rIns="18288" tIns="18288" bIns="18288">
-            <a:spAutoFit/>
-          </a:bodyPr>
-          <a:lstStyle/>
-          <a:p>
-            <a:pPr algn="l"/>
-            <a:r>
-              <a:rPr sz="2000" b="1">
-                <a:solidFill>
-                  <a:srgbClr val="1F2937"/>
-                </a:solidFill>
-                <a:latin typeface="Malgun Gothic"/>
-              </a:rPr>
-              <a:t>학습 방식</a:t>
-            </a:r>
-          </a:p>
-        </p:txBody>
-      </p:sp>
-      <p:sp>
-        <p:nvSpPr>
-          <p:cNvPr id="8" name="TextBox 7"/>
-          <p:cNvSpPr txBox="1"/>
-          <p:nvPr/>
-        </p:nvSpPr>
-        <p:spPr>
-          <a:xfrm>
-            <a:off x="7936992" y="2743200"/>
-            <a:ext cx="2788920" cy="1645920"/>
+            <a:off x="969264" y="3063240"/>
+            <a:ext cx="2560320" cy="1737360"/>
           </a:xfrm>
           <a:prstGeom prst="rect">
             <a:avLst/>
@@ -8549,289 +6852,74 @@
           <a:p>
             <a:pPr>
               <a:spcAft>
-                <a:spcPts val="600"/>
+                <a:spcPts val="800"/>
               </a:spcAft>
-              <a:defRPr sz="1400">
-                <a:solidFill>
-                  <a:srgbClr val="1F2937"/>
+              <a:defRPr sz="1300">
+                <a:solidFill>
+                  <a:srgbClr val="18202D"/>
                 </a:solidFill>
                 <a:latin typeface="Malgun Gothic"/>
               </a:defRPr>
             </a:pPr>
             <a:r>
-              <a:t>모델: HistGradientBoostingRegressor</a:t>
+              <a:t>실제 택시 호출량 데이터가 아님</a:t>
             </a:r>
           </a:p>
           <a:p>
             <a:pPr>
               <a:spcAft>
-                <a:spcPts val="600"/>
+                <a:spcPts val="800"/>
               </a:spcAft>
-              <a:defRPr sz="1400">
-                <a:solidFill>
-                  <a:srgbClr val="1F2937"/>
+              <a:defRPr sz="1300">
+                <a:solidFill>
+                  <a:srgbClr val="18202D"/>
                 </a:solidFill>
                 <a:latin typeface="Malgun Gothic"/>
               </a:defRPr>
             </a:pPr>
             <a:r>
-              <a:t>Train / Validation / Test 시간 순서 분리</a:t>
+              <a:t>대중교통 수요와 택시 수요는 완전히 같지 않음</a:t>
             </a:r>
           </a:p>
           <a:p>
             <a:pPr>
               <a:spcAft>
-                <a:spcPts val="600"/>
+                <a:spcPts val="800"/>
               </a:spcAft>
-              <a:defRPr sz="1400">
-                <a:solidFill>
-                  <a:srgbClr val="1F2937"/>
+              <a:defRPr sz="1300">
+                <a:solidFill>
+                  <a:srgbClr val="18202D"/>
                 </a:solidFill>
                 <a:latin typeface="Malgun Gothic"/>
               </a:defRPr>
             </a:pPr>
             <a:r>
-              <a:t>과거 수요 lag를 넣어 생활 패턴 반영</a:t>
-            </a:r>
-          </a:p>
-          <a:p>
-            <a:pPr>
-              <a:spcAft>
-                <a:spcPts val="600"/>
-              </a:spcAft>
-              <a:defRPr sz="1400">
-                <a:solidFill>
-                  <a:srgbClr val="1F2937"/>
-                </a:solidFill>
-                <a:latin typeface="Malgun Gothic"/>
-              </a:defRPr>
-            </a:pPr>
-            <a:r>
-              <a:t>결과는 대중교통 수요 proxy</a:t>
-            </a:r>
-          </a:p>
-        </p:txBody>
-      </p:sp>
-      <p:sp>
-        <p:nvSpPr>
-          <p:cNvPr id="9" name="TextBox 8"/>
-          <p:cNvSpPr txBox="1"/>
-          <p:nvPr/>
-        </p:nvSpPr>
-        <p:spPr>
-          <a:xfrm>
-            <a:off x="7936992" y="4754880"/>
-            <a:ext cx="1828800" cy="228600"/>
-          </a:xfrm>
-          <a:prstGeom prst="rect">
-            <a:avLst/>
-          </a:prstGeom>
-          <a:noFill/>
-        </p:spPr>
-        <p:txBody>
-          <a:bodyPr wrap="square" anchor="t" lIns="18288" rIns="18288" tIns="18288" bIns="18288">
-            <a:spAutoFit/>
-          </a:bodyPr>
-          <a:lstStyle/>
-          <a:p>
-            <a:pPr algn="l"/>
-            <a:r>
-              <a:rPr sz="1300" b="1">
-                <a:solidFill>
-                  <a:srgbClr val="16805F"/>
-                </a:solidFill>
-                <a:latin typeface="Malgun Gothic"/>
-              </a:rPr>
-              <a:t>말할 포인트</a:t>
-            </a:r>
-          </a:p>
-        </p:txBody>
-      </p:sp>
-      <p:sp>
-        <p:nvSpPr>
-          <p:cNvPr id="10" name="TextBox 9"/>
-          <p:cNvSpPr txBox="1"/>
-          <p:nvPr/>
-        </p:nvSpPr>
-        <p:spPr>
-          <a:xfrm>
-            <a:off x="7936992" y="5074920"/>
-            <a:ext cx="2743200" cy="457200"/>
-          </a:xfrm>
-          <a:prstGeom prst="rect">
-            <a:avLst/>
-          </a:prstGeom>
-          <a:noFill/>
-        </p:spPr>
-        <p:txBody>
-          <a:bodyPr wrap="square" anchor="t" lIns="18288" rIns="18288" tIns="18288" bIns="18288">
-            <a:spAutoFit/>
-          </a:bodyPr>
-          <a:lstStyle/>
-          <a:p>
-            <a:pPr algn="l"/>
-            <a:r>
-              <a:rPr sz="1200" b="0">
-                <a:solidFill>
-                  <a:srgbClr val="5A6577"/>
-                </a:solidFill>
-                <a:latin typeface="Malgun Gothic"/>
-              </a:rPr>
-              <a:t>정답 데이터가 택시 호출량은 아니므로, 지도 위 수요 신호로 해석합니다.</a:t>
-            </a:r>
-          </a:p>
-        </p:txBody>
-      </p:sp>
-      <p:sp>
-        <p:nvSpPr>
-          <p:cNvPr id="11" name="TextBox 10"/>
-          <p:cNvSpPr txBox="1"/>
-          <p:nvPr/>
-        </p:nvSpPr>
-        <p:spPr>
-          <a:xfrm>
-            <a:off x="502920" y="6446520"/>
-            <a:ext cx="5029200" cy="228600"/>
-          </a:xfrm>
-          <a:prstGeom prst="rect">
-            <a:avLst/>
-          </a:prstGeom>
-          <a:noFill/>
-        </p:spPr>
-        <p:txBody>
-          <a:bodyPr wrap="square" anchor="t" lIns="18288" rIns="18288" tIns="18288" bIns="18288">
-            <a:spAutoFit/>
-          </a:bodyPr>
-          <a:lstStyle/>
-          <a:p>
-            <a:pPr algn="l"/>
-            <a:r>
-              <a:rPr sz="900" b="0">
-                <a:solidFill>
-                  <a:srgbClr val="5A6577"/>
-                </a:solidFill>
-                <a:latin typeface="Malgun Gothic"/>
-              </a:rPr>
-              <a:t>공개 데이터 기반 근미래 이동 수요 예측</a:t>
-            </a:r>
-          </a:p>
-        </p:txBody>
-      </p:sp>
-    </p:spTree>
-  </p:cSld>
-  <p:clrMapOvr>
-    <a:masterClrMapping/>
-  </p:clrMapOvr>
-</p:sld>
-</file>
-
-<file path=ppt/slides/slide8.xml><?xml version="1.0" encoding="utf-8"?>
-<p:sld xmlns:a="http://schemas.openxmlformats.org/drawingml/2006/main" xmlns:p="http://schemas.openxmlformats.org/presentationml/2006/main" xmlns:r="http://schemas.openxmlformats.org/officeDocument/2006/relationships">
-  <p:cSld>
-    <p:bg>
-      <p:bgPr>
-        <a:solidFill>
-          <a:srgbClr val="F6F7F9"/>
-        </a:solidFill>
-        <a:effectLst/>
-      </p:bgPr>
-    </p:bg>
-    <p:spTree>
-      <p:nvGrpSpPr>
-        <p:cNvPr id="1" name=""/>
-        <p:cNvGrpSpPr/>
-        <p:nvPr/>
-      </p:nvGrpSpPr>
-      <p:grpSpPr/>
-      <p:sp>
-        <p:nvSpPr>
-          <p:cNvPr id="2" name="TextBox 1"/>
-          <p:cNvSpPr txBox="1"/>
-          <p:nvPr/>
-        </p:nvSpPr>
-        <p:spPr>
-          <a:xfrm>
-            <a:off x="502920" y="320040"/>
-            <a:ext cx="2743200" cy="274320"/>
-          </a:xfrm>
-          <a:prstGeom prst="rect">
-            <a:avLst/>
-          </a:prstGeom>
-          <a:noFill/>
-        </p:spPr>
-        <p:txBody>
-          <a:bodyPr wrap="square" anchor="t" lIns="18288" rIns="18288" tIns="18288" bIns="18288">
-            <a:spAutoFit/>
-          </a:bodyPr>
-          <a:lstStyle/>
-          <a:p>
-            <a:pPr algn="l"/>
-            <a:r>
-              <a:rPr sz="1200" b="1">
-                <a:solidFill>
-                  <a:srgbClr val="2563EB"/>
-                </a:solidFill>
-                <a:latin typeface="Malgun Gothic"/>
-              </a:rPr>
-              <a:t>A-Eye 중간발표</a:t>
-            </a:r>
-          </a:p>
-        </p:txBody>
-      </p:sp>
-      <p:sp>
-        <p:nvSpPr>
-          <p:cNvPr id="3" name="TextBox 2"/>
-          <p:cNvSpPr txBox="1"/>
-          <p:nvPr/>
-        </p:nvSpPr>
-        <p:spPr>
-          <a:xfrm>
-            <a:off x="502920" y="685800"/>
-            <a:ext cx="9875520" cy="621792"/>
-          </a:xfrm>
-          <a:prstGeom prst="rect">
-            <a:avLst/>
-          </a:prstGeom>
-          <a:noFill/>
-        </p:spPr>
-        <p:txBody>
-          <a:bodyPr wrap="square" anchor="t" lIns="18288" rIns="18288" tIns="18288" bIns="18288">
-            <a:spAutoFit/>
-          </a:bodyPr>
-          <a:lstStyle/>
-          <a:p>
-            <a:pPr algn="l"/>
-            <a:r>
-              <a:rPr sz="2800" b="1">
-                <a:solidFill>
-                  <a:srgbClr val="1F2937"/>
-                </a:solidFill>
-                <a:latin typeface="Malgun Gothic"/>
-              </a:rPr>
-              <a:t>학습 결과: 테스트 구간에서도 패턴을 안정적으로 따라갔습니다</a:t>
-            </a:r>
-          </a:p>
-        </p:txBody>
-      </p:sp>
-      <p:sp>
-        <p:nvSpPr>
-          <p:cNvPr id="4" name="Rectangle 3"/>
+              <a:t>날씨 영향은 요일/시간대보다 약하게 나타남</a:t>
+            </a:r>
+          </a:p>
+        </p:txBody>
+      </p:sp>
+      <p:sp>
+        <p:nvSpPr>
+          <p:cNvPr id="8" name="Rounded Rectangle 7"/>
           <p:cNvSpPr/>
           <p:nvPr/>
         </p:nvSpPr>
         <p:spPr>
           <a:xfrm>
-            <a:off x="502920" y="1810512"/>
-            <a:ext cx="11155680" cy="10972"/>
-          </a:xfrm>
-          <a:prstGeom prst="rect">
+            <a:off x="4416552" y="2240280"/>
+            <a:ext cx="3200400" cy="3246120"/>
+          </a:xfrm>
+          <a:prstGeom prst="roundRect">
             <a:avLst/>
           </a:prstGeom>
           <a:solidFill>
-            <a:srgbClr val="D8E1EC"/>
+            <a:srgbClr val="FFFFFF"/>
           </a:solidFill>
-          <a:ln>
-            <a:noFill/>
+          <a:ln w="12700">
+            <a:solidFill>
+              <a:srgbClr val="DAE2ED"/>
+            </a:solidFill>
           </a:ln>
         </p:spPr>
         <p:style>
@@ -8856,64 +6944,16 @@
           </a:p>
         </p:txBody>
       </p:sp>
-      <p:pic>
-        <p:nvPicPr>
-          <p:cNvPr id="5" name="Picture 4" descr="06_model_metrics_summary.png"/>
-          <p:cNvPicPr>
-            <a:picLocks noChangeAspect="1"/>
-          </p:cNvPicPr>
-          <p:nvPr/>
-        </p:nvPicPr>
-        <p:blipFill>
-          <a:blip r:embed="rId2"/>
-          <a:stretch>
-            <a:fillRect/>
-          </a:stretch>
-        </p:blipFill>
-        <p:spPr>
-          <a:xfrm>
-            <a:off x="502920" y="1901952"/>
-            <a:ext cx="5577840" cy="3416427"/>
-          </a:xfrm>
-          <a:prstGeom prst="rect">
-            <a:avLst/>
-          </a:prstGeom>
-        </p:spPr>
-      </p:pic>
-      <p:pic>
-        <p:nvPicPr>
-          <p:cNvPr id="6" name="Picture 5" descr="07_actual_vs_predicted_scatter.png"/>
-          <p:cNvPicPr>
-            <a:picLocks noChangeAspect="1"/>
-          </p:cNvPicPr>
-          <p:nvPr/>
-        </p:nvPicPr>
-        <p:blipFill>
-          <a:blip r:embed="rId3"/>
-          <a:stretch>
-            <a:fillRect/>
-          </a:stretch>
-        </p:blipFill>
-        <p:spPr>
-          <a:xfrm>
-            <a:off x="6309360" y="1901952"/>
-            <a:ext cx="5349240" cy="3276410"/>
-          </a:xfrm>
-          <a:prstGeom prst="rect">
-            <a:avLst/>
-          </a:prstGeom>
-        </p:spPr>
-      </p:pic>
-      <p:sp>
-        <p:nvSpPr>
-          <p:cNvPr id="7" name="TextBox 6"/>
+      <p:sp>
+        <p:nvSpPr>
+          <p:cNvPr id="9" name="TextBox 8"/>
           <p:cNvSpPr txBox="1"/>
           <p:nvPr/>
         </p:nvSpPr>
         <p:spPr>
           <a:xfrm>
-            <a:off x="502920" y="6446520"/>
-            <a:ext cx="5029200" cy="228600"/>
+            <a:off x="4672584" y="2578608"/>
+            <a:ext cx="2194560" cy="274320"/>
           </a:xfrm>
           <a:prstGeom prst="rect">
             <a:avLst/>
@@ -8921,60 +6961,34 @@
           <a:noFill/>
         </p:spPr>
         <p:txBody>
-          <a:bodyPr wrap="square" anchor="t" lIns="18288" rIns="18288" tIns="18288" bIns="18288">
+          <a:bodyPr wrap="square" lIns="18288" rIns="18288" tIns="18288" bIns="18288">
             <a:spAutoFit/>
           </a:bodyPr>
           <a:lstStyle/>
           <a:p>
             <a:pPr algn="l"/>
             <a:r>
-              <a:rPr sz="900" b="0">
-                <a:solidFill>
-                  <a:srgbClr val="5A6577"/>
+              <a:rPr sz="2000" b="1">
+                <a:solidFill>
+                  <a:srgbClr val="18202D"/>
                 </a:solidFill>
                 <a:latin typeface="Malgun Gothic"/>
               </a:rPr>
-              <a:t>공개 데이터 기반 근미래 이동 수요 예측</a:t>
-            </a:r>
-          </a:p>
-        </p:txBody>
-      </p:sp>
-    </p:spTree>
-  </p:cSld>
-  <p:clrMapOvr>
-    <a:masterClrMapping/>
-  </p:clrMapOvr>
-</p:sld>
-</file>
-
-<file path=ppt/slides/slide9.xml><?xml version="1.0" encoding="utf-8"?>
-<p:sld xmlns:a="http://schemas.openxmlformats.org/drawingml/2006/main" xmlns:p="http://schemas.openxmlformats.org/presentationml/2006/main" xmlns:r="http://schemas.openxmlformats.org/officeDocument/2006/relationships">
-  <p:cSld>
-    <p:bg>
-      <p:bgPr>
-        <a:solidFill>
-          <a:srgbClr val="F6F7F9"/>
-        </a:solidFill>
-        <a:effectLst/>
-      </p:bgPr>
-    </p:bg>
-    <p:spTree>
-      <p:nvGrpSpPr>
-        <p:cNvPr id="1" name=""/>
-        <p:cNvGrpSpPr/>
-        <p:nvPr/>
-      </p:nvGrpSpPr>
-      <p:grpSpPr/>
-      <p:sp>
-        <p:nvSpPr>
-          <p:cNvPr id="2" name="TextBox 1"/>
+              <a:t>다음 개선</a:t>
+            </a:r>
+          </a:p>
+        </p:txBody>
+      </p:sp>
+      <p:sp>
+        <p:nvSpPr>
+          <p:cNvPr id="10" name="TextBox 9"/>
           <p:cNvSpPr txBox="1"/>
           <p:nvPr/>
         </p:nvSpPr>
         <p:spPr>
           <a:xfrm>
-            <a:off x="502920" y="320040"/>
-            <a:ext cx="2743200" cy="274320"/>
+            <a:off x="4672584" y="3063240"/>
+            <a:ext cx="2560320" cy="1737360"/>
           </a:xfrm>
           <a:prstGeom prst="rect">
             <a:avLst/>
@@ -8982,78 +6996,81 @@
           <a:noFill/>
         </p:spPr>
         <p:txBody>
-          <a:bodyPr wrap="square" anchor="t" lIns="18288" rIns="18288" tIns="18288" bIns="18288">
+          <a:bodyPr wrap="square" lIns="18288" rIns="18288">
             <a:spAutoFit/>
           </a:bodyPr>
           <a:lstStyle/>
           <a:p>
-            <a:pPr algn="l"/>
-            <a:r>
-              <a:rPr sz="1200" b="1">
-                <a:solidFill>
-                  <a:srgbClr val="2563EB"/>
-                </a:solidFill>
-                <a:latin typeface="Malgun Gothic"/>
-              </a:rPr>
-              <a:t>A-Eye 중간발표</a:t>
-            </a:r>
-          </a:p>
-        </p:txBody>
-      </p:sp>
-      <p:sp>
-        <p:nvSpPr>
-          <p:cNvPr id="3" name="TextBox 2"/>
-          <p:cNvSpPr txBox="1"/>
-          <p:nvPr/>
-        </p:nvSpPr>
-        <p:spPr>
-          <a:xfrm>
-            <a:off x="502920" y="685800"/>
-            <a:ext cx="9875520" cy="621792"/>
-          </a:xfrm>
-          <a:prstGeom prst="rect">
-            <a:avLst/>
-          </a:prstGeom>
-          <a:noFill/>
-        </p:spPr>
-        <p:txBody>
-          <a:bodyPr wrap="square" anchor="t" lIns="18288" rIns="18288" tIns="18288" bIns="18288">
-            <a:spAutoFit/>
-          </a:bodyPr>
-          <a:lstStyle/>
-          <a:p>
-            <a:pPr algn="l"/>
-            <a:r>
-              <a:rPr sz="2800" b="1">
-                <a:solidFill>
-                  <a:srgbClr val="1F2937"/>
-                </a:solidFill>
-                <a:latin typeface="Malgun Gothic"/>
-              </a:rPr>
-              <a:t>예측 예시: 피크와 저점의 흐름을 따라가는지 확인</a:t>
-            </a:r>
-          </a:p>
-        </p:txBody>
-      </p:sp>
-      <p:sp>
-        <p:nvSpPr>
-          <p:cNvPr id="4" name="Rectangle 3"/>
+            <a:pPr>
+              <a:spcAft>
+                <a:spcPts val="800"/>
+              </a:spcAft>
+              <a:defRPr sz="1300">
+                <a:solidFill>
+                  <a:srgbClr val="18202D"/>
+                </a:solidFill>
+                <a:latin typeface="Malgun Gothic"/>
+              </a:defRPr>
+            </a:pPr>
+            <a:r>
+              <a:t>실제 호출/승하차 데이터 확보 시 보정</a:t>
+            </a:r>
+          </a:p>
+          <a:p>
+            <a:pPr>
+              <a:spcAft>
+                <a:spcPts val="800"/>
+              </a:spcAft>
+              <a:defRPr sz="1300">
+                <a:solidFill>
+                  <a:srgbClr val="18202D"/>
+                </a:solidFill>
+                <a:latin typeface="Malgun Gothic"/>
+              </a:defRPr>
+            </a:pPr>
+            <a:r>
+              <a:t>5분·15분 단위 예측으로 확장</a:t>
+            </a:r>
+          </a:p>
+          <a:p>
+            <a:pPr>
+              <a:spcAft>
+                <a:spcPts val="800"/>
+              </a:spcAft>
+              <a:defRPr sz="1300">
+                <a:solidFill>
+                  <a:srgbClr val="18202D"/>
+                </a:solidFill>
+                <a:latin typeface="Malgun Gothic"/>
+              </a:defRPr>
+            </a:pPr>
+            <a:r>
+              <a:t>지도에서 예측값과 신뢰도를 함께 표시</a:t>
+            </a:r>
+          </a:p>
+        </p:txBody>
+      </p:sp>
+      <p:sp>
+        <p:nvSpPr>
+          <p:cNvPr id="11" name="Rounded Rectangle 10"/>
           <p:cNvSpPr/>
           <p:nvPr/>
         </p:nvSpPr>
         <p:spPr>
           <a:xfrm>
-            <a:off x="502920" y="1810512"/>
-            <a:ext cx="11155680" cy="10972"/>
-          </a:xfrm>
-          <a:prstGeom prst="rect">
+            <a:off x="8119871" y="2240280"/>
+            <a:ext cx="3200400" cy="3246120"/>
+          </a:xfrm>
+          <a:prstGeom prst="roundRect">
             <a:avLst/>
           </a:prstGeom>
           <a:solidFill>
-            <a:srgbClr val="D8E1EC"/>
+            <a:srgbClr val="E8F0FE"/>
           </a:solidFill>
-          <a:ln>
-            <a:noFill/>
+          <a:ln w="12700">
+            <a:solidFill>
+              <a:srgbClr val="E8F0FE"/>
+            </a:solidFill>
           </a:ln>
         </p:spPr>
         <p:style>
@@ -9078,84 +7095,15 @@
           </a:p>
         </p:txBody>
       </p:sp>
-      <p:pic>
-        <p:nvPicPr>
-          <p:cNvPr id="5" name="Picture 4" descr="08_prediction_timeseries_sample.png"/>
-          <p:cNvPicPr>
-            <a:picLocks noChangeAspect="1"/>
-          </p:cNvPicPr>
-          <p:nvPr/>
-        </p:nvPicPr>
-        <p:blipFill>
-          <a:blip r:embed="rId2"/>
-          <a:stretch>
-            <a:fillRect/>
-          </a:stretch>
-        </p:blipFill>
-        <p:spPr>
-          <a:xfrm>
-            <a:off x="685800" y="1920240"/>
-            <a:ext cx="7315200" cy="4480560"/>
-          </a:xfrm>
-          <a:prstGeom prst="rect">
-            <a:avLst/>
-          </a:prstGeom>
-        </p:spPr>
-      </p:pic>
-      <p:sp>
-        <p:nvSpPr>
-          <p:cNvPr id="6" name="Rounded Rectangle 5"/>
-          <p:cNvSpPr/>
-          <p:nvPr/>
-        </p:nvSpPr>
-        <p:spPr>
-          <a:xfrm>
-            <a:off x="8366760" y="2148840"/>
-            <a:ext cx="2834640" cy="3063240"/>
-          </a:xfrm>
-          <a:prstGeom prst="roundRect">
-            <a:avLst/>
-          </a:prstGeom>
-          <a:solidFill>
-            <a:srgbClr val="FFFFFF"/>
-          </a:solidFill>
-          <a:ln w="12700">
-            <a:solidFill>
-              <a:srgbClr val="D8E1EC"/>
-            </a:solidFill>
-          </a:ln>
-        </p:spPr>
-        <p:style>
-          <a:lnRef idx="1">
-            <a:schemeClr val="accent1"/>
-          </a:lnRef>
-          <a:fillRef idx="3">
-            <a:schemeClr val="accent1"/>
-          </a:fillRef>
-          <a:effectRef idx="2">
-            <a:schemeClr val="accent1"/>
-          </a:effectRef>
-          <a:fontRef idx="minor">
-            <a:schemeClr val="lt1"/>
-          </a:fontRef>
-        </p:style>
-        <p:txBody>
-          <a:bodyPr rtlCol="0" anchor="ctr"/>
-          <a:lstStyle/>
-          <a:p>
-            <a:pPr algn="ctr"/>
-          </a:p>
-        </p:txBody>
-      </p:sp>
-      <p:sp>
-        <p:nvSpPr>
-          <p:cNvPr id="7" name="TextBox 6"/>
+      <p:sp>
+        <p:nvSpPr>
+          <p:cNvPr id="12" name="TextBox 11"/>
           <p:cNvSpPr txBox="1"/>
           <p:nvPr/>
         </p:nvSpPr>
         <p:spPr>
           <a:xfrm>
-            <a:off x="8641080" y="2450592"/>
+            <a:off x="8375903" y="2578608"/>
             <a:ext cx="2194560" cy="274320"/>
           </a:xfrm>
           <a:prstGeom prst="rect">
@@ -9164,34 +7112,34 @@
           <a:noFill/>
         </p:spPr>
         <p:txBody>
-          <a:bodyPr wrap="square" anchor="t" lIns="18288" rIns="18288" tIns="18288" bIns="18288">
+          <a:bodyPr wrap="square" lIns="18288" rIns="18288" tIns="18288" bIns="18288">
             <a:spAutoFit/>
           </a:bodyPr>
           <a:lstStyle/>
           <a:p>
             <a:pPr algn="l"/>
             <a:r>
-              <a:rPr sz="1800" b="1">
-                <a:solidFill>
-                  <a:srgbClr val="1F2937"/>
+              <a:rPr sz="2000" b="1">
+                <a:solidFill>
+                  <a:srgbClr val="2563EB"/>
                 </a:solidFill>
                 <a:latin typeface="Malgun Gothic"/>
               </a:rPr>
-              <a:t>이 그래프에서 볼 것</a:t>
-            </a:r>
-          </a:p>
-        </p:txBody>
-      </p:sp>
-      <p:sp>
-        <p:nvSpPr>
-          <p:cNvPr id="8" name="TextBox 7"/>
+              <a:t>중간 결론</a:t>
+            </a:r>
+          </a:p>
+        </p:txBody>
+      </p:sp>
+      <p:sp>
+        <p:nvSpPr>
+          <p:cNvPr id="13" name="TextBox 12"/>
           <p:cNvSpPr txBox="1"/>
           <p:nvPr/>
         </p:nvSpPr>
         <p:spPr>
           <a:xfrm>
-            <a:off x="8641080" y="2926080"/>
-            <a:ext cx="2240280" cy="1371600"/>
+            <a:off x="8375903" y="3063240"/>
+            <a:ext cx="2560320" cy="1737360"/>
           </a:xfrm>
           <a:prstGeom prst="rect">
             <a:avLst/>
@@ -9206,63 +7154,63 @@
           <a:p>
             <a:pPr>
               <a:spcAft>
-                <a:spcPts val="600"/>
+                <a:spcPts val="800"/>
               </a:spcAft>
               <a:defRPr sz="1300">
                 <a:solidFill>
-                  <a:srgbClr val="1F2937"/>
+                  <a:srgbClr val="18202D"/>
                 </a:solidFill>
                 <a:latin typeface="Malgun Gothic"/>
               </a:defRPr>
             </a:pPr>
             <a:r>
-              <a:t>예측선이 실제선과 같은 방향으로 움직이는지</a:t>
+              <a:t>공개 데이터만으로도 수요 신호를 만들 수 있음</a:t>
             </a:r>
           </a:p>
           <a:p>
             <a:pPr>
               <a:spcAft>
-                <a:spcPts val="600"/>
+                <a:spcPts val="800"/>
               </a:spcAft>
               <a:defRPr sz="1300">
                 <a:solidFill>
-                  <a:srgbClr val="1F2937"/>
+                  <a:srgbClr val="18202D"/>
                 </a:solidFill>
                 <a:latin typeface="Malgun Gothic"/>
               </a:defRPr>
             </a:pPr>
             <a:r>
-              <a:t>출퇴근 피크를 놓치지 않는지</a:t>
+              <a:t>수집→전처리→학습→서비스 연결 흐름을 확보</a:t>
             </a:r>
           </a:p>
           <a:p>
             <a:pPr>
               <a:spcAft>
-                <a:spcPts val="600"/>
+                <a:spcPts val="800"/>
               </a:spcAft>
               <a:defRPr sz="1300">
                 <a:solidFill>
-                  <a:srgbClr val="1F2937"/>
+                  <a:srgbClr val="18202D"/>
                 </a:solidFill>
                 <a:latin typeface="Malgun Gothic"/>
               </a:defRPr>
             </a:pPr>
             <a:r>
-              <a:t>낮은 수요 시간대에서 과하게 튀지 않는지</a:t>
-            </a:r>
-          </a:p>
-        </p:txBody>
-      </p:sp>
-      <p:sp>
-        <p:nvSpPr>
-          <p:cNvPr id="9" name="TextBox 8"/>
+              <a:t>A-Eye 지도에 붙일 기반을 만들었음</a:t>
+            </a:r>
+          </a:p>
+        </p:txBody>
+      </p:sp>
+      <p:sp>
+        <p:nvSpPr>
+          <p:cNvPr id="14" name="TextBox 13"/>
           <p:cNvSpPr txBox="1"/>
           <p:nvPr/>
         </p:nvSpPr>
         <p:spPr>
           <a:xfrm>
-            <a:off x="8641080" y="4617720"/>
-            <a:ext cx="2148840" cy="502920"/>
+            <a:off x="841248" y="6016752"/>
+            <a:ext cx="1463040" cy="201168"/>
           </a:xfrm>
           <a:prstGeom prst="rect">
             <a:avLst/>
@@ -9270,34 +7218,34 @@
           <a:noFill/>
         </p:spPr>
         <p:txBody>
-          <a:bodyPr wrap="square" anchor="t" lIns="18288" rIns="18288" tIns="18288" bIns="18288">
+          <a:bodyPr wrap="square" lIns="18288" rIns="18288" tIns="18288" bIns="18288">
             <a:spAutoFit/>
           </a:bodyPr>
           <a:lstStyle/>
           <a:p>
             <a:pPr algn="l"/>
             <a:r>
-              <a:rPr sz="1200" b="0">
-                <a:solidFill>
-                  <a:srgbClr val="5A6577"/>
+              <a:rPr sz="1200" b="1">
+                <a:solidFill>
+                  <a:srgbClr val="14805F"/>
                 </a:solidFill>
                 <a:latin typeface="Malgun Gothic"/>
               </a:rPr>
-              <a:t>한 시점의 숫자보다 흐름을 맞추는지 강조하면 좋습니다.</a:t>
-            </a:r>
-          </a:p>
-        </p:txBody>
-      </p:sp>
-      <p:sp>
-        <p:nvSpPr>
-          <p:cNvPr id="10" name="TextBox 9"/>
+              <a:t>마무리 문장</a:t>
+            </a:r>
+          </a:p>
+        </p:txBody>
+      </p:sp>
+      <p:sp>
+        <p:nvSpPr>
+          <p:cNvPr id="15" name="TextBox 14"/>
           <p:cNvSpPr txBox="1"/>
           <p:nvPr/>
         </p:nvSpPr>
         <p:spPr>
           <a:xfrm>
-            <a:off x="502920" y="6446520"/>
-            <a:ext cx="5029200" cy="228600"/>
+            <a:off x="1965960" y="5989320"/>
+            <a:ext cx="8686800" cy="237744"/>
           </a:xfrm>
           <a:prstGeom prst="rect">
             <a:avLst/>
@@ -9305,16 +7253,51 @@
           <a:noFill/>
         </p:spPr>
         <p:txBody>
-          <a:bodyPr wrap="square" anchor="t" lIns="18288" rIns="18288" tIns="18288" bIns="18288">
+          <a:bodyPr wrap="square" lIns="18288" rIns="18288" tIns="18288" bIns="18288">
             <a:spAutoFit/>
           </a:bodyPr>
           <a:lstStyle/>
           <a:p>
             <a:pPr algn="l"/>
             <a:r>
+              <a:rPr sz="1300" b="0">
+                <a:solidFill>
+                  <a:srgbClr val="18202D"/>
+                </a:solidFill>
+                <a:latin typeface="Malgun Gothic"/>
+              </a:rPr>
+              <a:t>이번 결과는 완성된 택시 수요 모델이 아니라, 공개 데이터로 근미래 이동 수요 신호를 만들 수 있음을 검증한 단계입니다.</a:t>
+            </a:r>
+          </a:p>
+        </p:txBody>
+      </p:sp>
+      <p:sp>
+        <p:nvSpPr>
+          <p:cNvPr id="16" name="TextBox 15"/>
+          <p:cNvSpPr txBox="1"/>
+          <p:nvPr/>
+        </p:nvSpPr>
+        <p:spPr>
+          <a:xfrm>
+            <a:off x="548640" y="6473952"/>
+            <a:ext cx="4572000" cy="201168"/>
+          </a:xfrm>
+          <a:prstGeom prst="rect">
+            <a:avLst/>
+          </a:prstGeom>
+          <a:noFill/>
+        </p:spPr>
+        <p:txBody>
+          <a:bodyPr wrap="square" lIns="18288" rIns="18288" tIns="18288" bIns="18288">
+            <a:spAutoFit/>
+          </a:bodyPr>
+          <a:lstStyle/>
+          <a:p>
+            <a:pPr algn="l"/>
+            <a:r>
               <a:rPr sz="900" b="0">
                 <a:solidFill>
-                  <a:srgbClr val="5A6577"/>
+                  <a:srgbClr val="525E70"/>
                 </a:solidFill>
                 <a:latin typeface="Malgun Gothic"/>
               </a:rPr>

--- a/public/a-eye-presentation/A-Eye_midterm_data_collection_forecast.pptx
+++ b/public/a-eye-presentation/A-Eye_midterm_data_collection_forecast.pptx
@@ -1629,15 +1629,10 @@
               <a:buNone/>
             </a:pPr>
             <a:r>
-              <a:rPr lang="en-US" sz="1100" b="1" dirty="0">
-                <a:solidFill>
-                  <a:srgbClr val="1A1A1A"/>
-                </a:solidFill>
-                <a:latin typeface="Arial" pitchFamily="34" charset="0"/>
-                <a:ea typeface="Arial" pitchFamily="34" charset="-122"/>
-                <a:cs typeface="Arial" pitchFamily="34" charset="-120"/>
-              </a:rPr>
-              <a:t>Three.js  ·  OpenStreetMap  ·  Cloudflare Pages  ·  PyTorch</a:t>
+              <a:rPr sz="1300">
+                <a:latin typeface="Malgun Gothic"/>
+              </a:rPr>
+              <a:t>Three.js  ·  OpenStreetMap  ·  Cloudflare Pages  ·  Colab/scikit-learn</a:t>
             </a:r>
             <a:endParaRPr lang="en-US" sz="1100" dirty="0"/>
           </a:p>
@@ -3064,10 +3059,7 @@
           <a:p>
             <a:pPr algn="l"/>
             <a:r>
-              <a:rPr sz="2400" b="1">
-                <a:solidFill>
-                  <a:srgbClr val="1A1A1A"/>
-                </a:solidFill>
+              <a:rPr sz="2500" b="1">
                 <a:latin typeface="Malgun Gothic"/>
               </a:rPr>
               <a:t>테스트 구간 실제값 vs 예측값</a:t>
@@ -3099,13 +3091,13 @@
           <a:p>
             <a:pPr algn="l"/>
             <a:r>
-              <a:rPr sz="1200" b="0">
-                <a:solidFill>
-                  <a:srgbClr val="5C5C5C"/>
+              <a:rPr sz="1150">
+                <a:solidFill>
+                  <a:srgbClr val="4B5563"/>
                 </a:solidFill>
                 <a:latin typeface="Malgun Gothic"/>
               </a:rPr>
-              <a:t>각 시점의 1시간 뒤 대중교통 승차량을 실제값과 예측값으로 비교</a:t>
+              <a:t>모델: HistGradientBoostingRegressor / Target: 1시간 뒤 동별 대중교통 승차량</a:t>
             </a:r>
           </a:p>
         </p:txBody>
@@ -3226,13 +3218,25 @@
           <a:p>
             <a:pPr algn="l"/>
             <a:r>
-              <a:rPr sz="919" b="1">
-                <a:solidFill>
-                  <a:srgbClr val="1A1A1A"/>
+              <a:rPr sz="919">
+                <a:solidFill>
+                  <a:srgbClr val="1F2937"/>
                 </a:solidFill>
                 <a:latin typeface="Malgun Gothic"/>
               </a:rPr>
-              <a:t>해석: x축은 실제 대중교통 승차량, y축은 예측 대중교통 승차량입니다. 점이 대각선에 가까울수록 실제값과 예측값이 가깝습니다.</a:t>
+              <a:t>Test 결과: MAE 165.7명, RMSE 393.7명, R² 0.9854.  x축은 실제 대중교통 승차량, y축은 예측값입니다.</a:t>
+            </a:r>
+          </a:p>
+          <a:p>
+            <a:pPr algn="l"/>
+            <a:r>
+              <a:rPr sz="919">
+                <a:solidFill>
+                  <a:srgbClr val="1F2937"/>
+                </a:solidFill>
+                <a:latin typeface="Malgun Gothic"/>
+              </a:rPr>
+              <a:t>출처: Colab 산출물 transit_test_predictions.csv / transit_model_metrics.json</a:t>
             </a:r>
           </a:p>
         </p:txBody>
@@ -3450,9 +3454,6 @@
             <a:pPr algn="l"/>
             <a:r>
               <a:rPr sz="2400" b="1">
-                <a:solidFill>
-                  <a:srgbClr val="1A1A1A"/>
-                </a:solidFill>
                 <a:latin typeface="Malgun Gothic"/>
               </a:rPr>
               <a:t>사이트에 붙인 결과와 다음 연결 방향</a:t>
@@ -3635,16 +3636,37 @@
               </a:lnSpc>
             </a:pPr>
             <a:r>
-              <a:rPr sz="1050" b="0">
-                <a:solidFill>
-                  <a:srgbClr val="1F2937"/>
-                </a:solidFill>
+              <a:rPr sz="1040">
                 <a:latin typeface="Malgun Gothic"/>
               </a:rPr>
-              <a:t>• 메인 지도 상단에 발표 자료 버튼 추가
-• /presentation에 데이터 출처와 모델 결과 정리
-• PPT 다운로드 링크 연결
-• Cloudflare 배포용 asset은 가볍게 유지</a:t>
+              <a:t>• 메인 지도 상단에 발표 자료 버튼 추가</a:t>
+            </a:r>
+          </a:p>
+          <a:p>
+            <a:pPr algn="l"/>
+            <a:r>
+              <a:rPr sz="1040">
+                <a:latin typeface="Malgun Gothic"/>
+              </a:rPr>
+              <a:t>• /presentation에 데이터 출처와 모델 결과 정리</a:t>
+            </a:r>
+          </a:p>
+          <a:p>
+            <a:pPr algn="l"/>
+            <a:r>
+              <a:rPr sz="1040">
+                <a:latin typeface="Malgun Gothic"/>
+              </a:rPr>
+              <a:t>• PPT 다운로드 링크 연결</a:t>
+            </a:r>
+          </a:p>
+          <a:p>
+            <a:pPr algn="l"/>
+            <a:r>
+              <a:rPr sz="1040">
+                <a:latin typeface="Malgun Gothic"/>
+              </a:rPr>
+              <a:t>• Cloudflare 배포용 asset은 가볍게 유지</a:t>
             </a:r>
           </a:p>
         </p:txBody>
@@ -3712,15 +3734,74 @@
               </a:lnSpc>
             </a:pPr>
             <a:r>
-              <a:rPr sz="1050" b="0">
-                <a:solidFill>
-                  <a:srgbClr val="1F2937"/>
-                </a:solidFill>
+              <a:rPr sz="1040">
                 <a:latin typeface="Malgun Gothic"/>
               </a:rPr>
-              <a:t>• 지도 위 동별 수요 색상/랭킹 overlay
-• 실시간 citydata와 예측값을 함께 표시
-• 실제 호출 데이터 확보 시 proxy 보정</a:t>
+              <a:t>• 지도 위 동별 수요 색상/랭킹 overlay</a:t>
+            </a:r>
+          </a:p>
+          <a:p>
+            <a:pPr algn="l"/>
+            <a:r>
+              <a:rPr sz="1040">
+                <a:latin typeface="Malgun Gothic"/>
+              </a:rPr>
+              <a:t>• 실시간 citydata와 예측값을 함께 표시</a:t>
+            </a:r>
+          </a:p>
+          <a:p>
+            <a:pPr algn="l"/>
+            <a:r>
+              <a:rPr sz="1040">
+                <a:latin typeface="Malgun Gothic"/>
+              </a:rPr>
+              <a:t>• 실제 택시 호출 데이터 확보 시 proxy 보정</a:t>
+            </a:r>
+          </a:p>
+        </p:txBody>
+      </p:sp>
+      <p:sp>
+        <p:nvSpPr>
+          <p:cNvPr id="14" name="TextBox 13"/>
+          <p:cNvSpPr txBox="1"/>
+          <p:nvPr/>
+        </p:nvSpPr>
+        <p:spPr>
+          <a:xfrm>
+            <a:off x="411480" y="4350000"/>
+            <a:ext cx="4389120" cy="420000"/>
+          </a:xfrm>
+          <a:prstGeom prst="rect">
+            <a:avLst/>
+          </a:prstGeom>
+          <a:noFill/>
+        </p:spPr>
+        <p:txBody>
+          <a:bodyPr wrap="none">
+            <a:spAutoFit/>
+          </a:bodyPr>
+          <a:lstStyle/>
+          <a:p>
+            <a:pPr/>
+            <a:r>
+              <a:rPr sz="869">
+                <a:solidFill>
+                  <a:srgbClr val="4B5563"/>
+                </a:solidFill>
+                <a:latin typeface="Malgun Gothic"/>
+              </a:rPr>
+              <a:t>이미지 설명: Colab 결과를 발표용으로 정리한 웹 화면입니다.</a:t>
+            </a:r>
+          </a:p>
+          <a:p>
+            <a:r>
+              <a:rPr sz="869">
+                <a:solidFill>
+                  <a:srgbClr val="4B5563"/>
+                </a:solidFill>
+                <a:latin typeface="Malgun Gothic"/>
+              </a:rPr>
+              <a:t>현재 예측값은 실제 택시 호출량이 아니라 대중교통 승차량 기반 proxy입니다.</a:t>
             </a:r>
           </a:p>
         </p:txBody>
@@ -3937,10 +4018,7 @@
           <a:p>
             <a:pPr algn="l"/>
             <a:r>
-              <a:rPr sz="2400" b="1">
-                <a:solidFill>
-                  <a:srgbClr val="1A1A1A"/>
-                </a:solidFill>
+              <a:rPr sz="2500" b="1">
                 <a:latin typeface="Malgun Gothic"/>
               </a:rPr>
               <a:t>한계와 다음 개선점</a:t>
@@ -4143,15 +4221,28 @@
               </a:lnSpc>
             </a:pPr>
             <a:r>
-              <a:rPr sz="1050" b="0">
-                <a:solidFill>
-                  <a:srgbClr val="1F2937"/>
-                </a:solidFill>
+              <a:rPr sz="1060">
                 <a:latin typeface="Malgun Gothic"/>
               </a:rPr>
-              <a:t>• 실제 택시 호출량 데이터가 아님
-• 대중교통 수요와 택시 수요는 완전히 같지 않음
-• 현재 결과는 이동 수요 proxy로 해석해야 함</a:t>
+              <a:t>• 실제 택시 호출량 데이터가 아님</a:t>
+            </a:r>
+          </a:p>
+          <a:p>
+            <a:pPr algn="l"/>
+            <a:r>
+              <a:rPr sz="1060">
+                <a:latin typeface="Malgun Gothic"/>
+              </a:rPr>
+              <a:t>• 대중교통 수요와 택시 수요는 완전히 같지 않음</a:t>
+            </a:r>
+          </a:p>
+          <a:p>
+            <a:pPr algn="l"/>
+            <a:r>
+              <a:rPr sz="1060">
+                <a:latin typeface="Malgun Gothic"/>
+              </a:rPr>
+              <a:t>• 현재 결과는 이동 수요 proxy로 해석해야 함</a:t>
             </a:r>
           </a:p>
         </p:txBody>
@@ -4351,15 +4442,28 @@
               </a:lnSpc>
             </a:pPr>
             <a:r>
-              <a:rPr sz="1050" b="0">
-                <a:solidFill>
-                  <a:srgbClr val="1F2937"/>
-                </a:solidFill>
+              <a:rPr sz="1060">
                 <a:latin typeface="Malgun Gothic"/>
               </a:rPr>
-              <a:t>• 실제 호출/승하차 데이터 확보 시 보정
-• 5분·15분 단위 예측으로 확장
-• 지도에서 수요와 신뢰도를 함께 표시</a:t>
+              <a:t>• 실제 호출/승하차 데이터 확보 시 보정</a:t>
+            </a:r>
+          </a:p>
+          <a:p>
+            <a:pPr algn="l"/>
+            <a:r>
+              <a:rPr sz="1060">
+                <a:latin typeface="Malgun Gothic"/>
+              </a:rPr>
+              <a:t>• 5분·15분 단위 예측으로 확장</a:t>
+            </a:r>
+          </a:p>
+          <a:p>
+            <a:pPr algn="l"/>
+            <a:r>
+              <a:rPr sz="1060">
+                <a:latin typeface="Malgun Gothic"/>
+              </a:rPr>
+              <a:t>• 지도에서 수요와 신뢰도를 함께 표시</a:t>
             </a:r>
           </a:p>
         </p:txBody>
@@ -4758,15 +4862,10 @@
               <a:buNone/>
             </a:pPr>
             <a:r>
-              <a:rPr lang="en-US" sz="1400" dirty="0">
-                <a:solidFill>
-                  <a:srgbClr val="FFCD00"/>
-                </a:solidFill>
-                <a:latin typeface="Arial" pitchFamily="34" charset="0"/>
-                <a:ea typeface="Arial" pitchFamily="34" charset="-122"/>
-                <a:cs typeface="Arial" pitchFamily="34" charset="-120"/>
-              </a:rPr>
-              <a:t>역삼동 · Digital Twin · 택시 수요 예측</a:t>
+              <a:rPr sz="1700">
+                <a:latin typeface="Malgun Gothic"/>
+              </a:rPr>
+              <a:t>역삼동 · Digital Twin · 이동 수요 proxy 예측</a:t>
             </a:r>
             <a:endParaRPr lang="en-US" sz="1400" dirty="0"/>
           </a:p>
@@ -5100,15 +5199,10 @@
               <a:buNone/>
             </a:pPr>
             <a:r>
-              <a:rPr lang="en-US" sz="3000" b="1" dirty="0">
-                <a:solidFill>
-                  <a:srgbClr val="1A1A1A"/>
-                </a:solidFill>
-                <a:latin typeface="Arial Black" pitchFamily="34" charset="0"/>
-                <a:ea typeface="Arial Black" pitchFamily="34" charset="-122"/>
-                <a:cs typeface="Arial Black" pitchFamily="34" charset="-120"/>
-              </a:rPr>
-              <a:t>발표 순서</a:t>
+              <a:rPr sz="2800" b="1">
+                <a:latin typeface="Malgun Gothic"/>
+              </a:rPr>
+              <a:t>발표 흐름</a:t>
             </a:r>
             <a:endParaRPr lang="en-US" sz="3000" dirty="0"/>
           </a:p>
@@ -5235,15 +5329,10 @@
               <a:buNone/>
             </a:pPr>
             <a:r>
-              <a:rPr lang="en-US" sz="1400" b="1" dirty="0">
-                <a:solidFill>
-                  <a:srgbClr val="FFFFFF"/>
-                </a:solidFill>
-                <a:latin typeface="Arial" pitchFamily="34" charset="0"/>
-                <a:ea typeface="Arial" pitchFamily="34" charset="-122"/>
-                <a:cs typeface="Arial" pitchFamily="34" charset="-120"/>
-              </a:rPr>
-              <a:t>프로젝트 개요</a:t>
+              <a:rPr sz="1500" b="1">
+                <a:latin typeface="Malgun Gothic"/>
+              </a:rPr>
+              <a:t>프로젝트 개요·변경점</a:t>
             </a:r>
             <a:endParaRPr lang="en-US" sz="1400" dirty="0"/>
           </a:p>
@@ -5274,15 +5363,10 @@
               <a:buNone/>
             </a:pPr>
             <a:r>
-              <a:rPr lang="en-US" sz="1100" dirty="0">
-                <a:solidFill>
-                  <a:srgbClr val="5C5C5C"/>
-                </a:solidFill>
-                <a:latin typeface="Arial" pitchFamily="34" charset="0"/>
-                <a:ea typeface="Arial" pitchFamily="34" charset="-122"/>
-                <a:cs typeface="Arial" pitchFamily="34" charset="-120"/>
-              </a:rPr>
-              <a:t>미션 목표 &amp; 팀 접근 방식</a:t>
+              <a:rPr sz="1050">
+                <a:latin typeface="Malgun Gothic"/>
+              </a:rPr>
+              <a:t>1~4: 문제 정의와 명세서 대비 변경</a:t>
             </a:r>
             <a:endParaRPr lang="en-US" sz="1100" dirty="0"/>
           </a:p>
@@ -5409,15 +5493,10 @@
               <a:buNone/>
             </a:pPr>
             <a:r>
-              <a:rPr lang="en-US" sz="1400" b="1" dirty="0">
-                <a:solidFill>
-                  <a:srgbClr val="1A1A1A"/>
-                </a:solidFill>
-                <a:latin typeface="Arial" pitchFamily="34" charset="0"/>
-                <a:ea typeface="Arial" pitchFamily="34" charset="-122"/>
-                <a:cs typeface="Arial" pitchFamily="34" charset="-120"/>
-              </a:rPr>
-              <a:t>명세서 대비 변경 사항</a:t>
+              <a:rPr sz="1500" b="1">
+                <a:latin typeface="Malgun Gothic"/>
+              </a:rPr>
+              <a:t>웹 구현·배포</a:t>
             </a:r>
             <a:endParaRPr lang="en-US" sz="1400" dirty="0"/>
           </a:p>
@@ -5448,15 +5527,10 @@
               <a:buNone/>
             </a:pPr>
             <a:r>
-              <a:rPr lang="en-US" sz="1100" dirty="0">
-                <a:solidFill>
-                  <a:srgbClr val="5C5C5C"/>
-                </a:solidFill>
-                <a:latin typeface="Arial" pitchFamily="34" charset="0"/>
-                <a:ea typeface="Arial" pitchFamily="34" charset="-122"/>
-                <a:cs typeface="Arial" pitchFamily="34" charset="-120"/>
-              </a:rPr>
-              <a:t>우리가 다르게 구현한 이유</a:t>
+              <a:rPr sz="1050">
+                <a:latin typeface="Malgun Gothic"/>
+              </a:rPr>
+              <a:t>5~8: Three.js·OSM·Cloudflare</a:t>
             </a:r>
             <a:endParaRPr lang="en-US" sz="1100" dirty="0"/>
           </a:p>
@@ -5583,15 +5657,10 @@
               <a:buNone/>
             </a:pPr>
             <a:r>
-              <a:rPr lang="en-US" sz="1400" b="1" dirty="0">
-                <a:solidFill>
-                  <a:srgbClr val="FFFFFF"/>
-                </a:solidFill>
-                <a:latin typeface="Arial" pitchFamily="34" charset="0"/>
-                <a:ea typeface="Arial" pitchFamily="34" charset="-122"/>
-                <a:cs typeface="Arial" pitchFamily="34" charset="-120"/>
-              </a:rPr>
-              <a:t>기술 스택 &amp; 구현</a:t>
+              <a:rPr sz="1500" b="1">
+                <a:latin typeface="Malgun Gothic"/>
+              </a:rPr>
+              <a:t>데이터 수집·학습</a:t>
             </a:r>
             <a:endParaRPr lang="en-US" sz="1400" dirty="0"/>
           </a:p>
@@ -5622,15 +5691,10 @@
               <a:buNone/>
             </a:pPr>
             <a:r>
-              <a:rPr lang="en-US" sz="1100" dirty="0">
-                <a:solidFill>
-                  <a:srgbClr val="5C5C5C"/>
-                </a:solidFill>
-                <a:latin typeface="Arial" pitchFamily="34" charset="0"/>
-                <a:ea typeface="Arial" pitchFamily="34" charset="-122"/>
-                <a:cs typeface="Arial" pitchFamily="34" charset="-120"/>
-              </a:rPr>
-              <a:t>Three.js · OSM · Cloudflare</a:t>
+              <a:rPr sz="1050">
+                <a:latin typeface="Malgun Gothic"/>
+              </a:rPr>
+              <a:t>9~11: 공개 데이터와 Colab 모델</a:t>
             </a:r>
             <a:endParaRPr lang="en-US" sz="1100" dirty="0"/>
           </a:p>
@@ -5757,15 +5821,10 @@
               <a:buNone/>
             </a:pPr>
             <a:r>
-              <a:rPr lang="en-US" sz="1400" b="1" dirty="0">
-                <a:solidFill>
-                  <a:srgbClr val="1A1A1A"/>
-                </a:solidFill>
-                <a:latin typeface="Arial" pitchFamily="34" charset="0"/>
-                <a:ea typeface="Arial" pitchFamily="34" charset="-122"/>
-                <a:cs typeface="Arial" pitchFamily="34" charset="-120"/>
-              </a:rPr>
-              <a:t>모듈별 결과</a:t>
+              <a:rPr sz="1500" b="1">
+                <a:latin typeface="Malgun Gothic"/>
+              </a:rPr>
+              <a:t>서비스 연결·다음 단계</a:t>
             </a:r>
             <a:endParaRPr lang="en-US" sz="1400" dirty="0"/>
           </a:p>
@@ -5796,15 +5855,10 @@
               <a:buNone/>
             </a:pPr>
             <a:r>
-              <a:rPr lang="en-US" sz="1100" dirty="0">
-                <a:solidFill>
-                  <a:srgbClr val="5C5C5C"/>
-                </a:solidFill>
-                <a:latin typeface="Arial" pitchFamily="34" charset="0"/>
-                <a:ea typeface="Arial" pitchFamily="34" charset="-122"/>
-                <a:cs typeface="Arial" pitchFamily="34" charset="-120"/>
-              </a:rPr>
-              <a:t>시뮬레이션 · 예측 · 배차</a:t>
+              <a:rPr sz="1050">
+                <a:latin typeface="Malgun Gothic"/>
+              </a:rPr>
+              <a:t>12~14: 사이트 반영과 개선 계획</a:t>
             </a:r>
             <a:endParaRPr lang="en-US" sz="1100" dirty="0"/>
           </a:p>
@@ -6180,51 +6234,30 @@
               <a:buNone/>
             </a:pPr>
             <a:r>
-              <a:rPr lang="en-US" sz="1200" dirty="0">
-                <a:solidFill>
-                  <a:srgbClr val="5C5C5C"/>
-                </a:solidFill>
-                <a:latin typeface="Arial" pitchFamily="34" charset="0"/>
-                <a:ea typeface="Arial" pitchFamily="34" charset="-122"/>
-                <a:cs typeface="Arial" pitchFamily="34" charset="-120"/>
+              <a:rPr sz="1350">
+                <a:latin typeface="Malgun Gothic"/>
               </a:rPr>
               <a:t>역삼동 실제 도로망을</a:t>
             </a:r>
             <a:endParaRPr lang="en-US" sz="1200" dirty="0"/>
           </a:p>
           <a:p>
-            <a:pPr marL="0" indent="0" algn="ctr">
-              <a:buNone/>
-            </a:pPr>
-            <a:r>
-              <a:rPr lang="en-US" sz="1200" dirty="0">
-                <a:solidFill>
-                  <a:srgbClr val="5C5C5C"/>
-                </a:solidFill>
-                <a:latin typeface="Arial" pitchFamily="34" charset="0"/>
-                <a:ea typeface="Arial" pitchFamily="34" charset="-122"/>
-                <a:cs typeface="Arial" pitchFamily="34" charset="-120"/>
+            <a:pPr algn="ctr"/>
+            <a:r>
+              <a:rPr sz="1350">
+                <a:latin typeface="Malgun Gothic"/>
               </a:rPr>
               <a:t>3D로 가상화한 환경에서</a:t>
             </a:r>
-            <a:endParaRPr lang="en-US" sz="1200" dirty="0"/>
-          </a:p>
-          <a:p>
-            <a:pPr marL="0" indent="0" algn="ctr">
-              <a:buNone/>
-            </a:pPr>
-            <a:r>
-              <a:rPr lang="en-US" sz="1200" dirty="0">
-                <a:solidFill>
-                  <a:srgbClr val="5C5C5C"/>
-                </a:solidFill>
-                <a:latin typeface="Arial" pitchFamily="34" charset="0"/>
-                <a:ea typeface="Arial" pitchFamily="34" charset="-122"/>
-                <a:cs typeface="Arial" pitchFamily="34" charset="-120"/>
-              </a:rPr>
-              <a:t>택시 수요·배차 시뮬레이션</a:t>
-            </a:r>
-            <a:endParaRPr lang="en-US" sz="1200" dirty="0"/>
+          </a:p>
+          <a:p>
+            <a:pPr algn="ctr"/>
+            <a:r>
+              <a:rPr sz="1350">
+                <a:latin typeface="Malgun Gothic"/>
+              </a:rPr>
+              <a:t>이동 수요·배차 시뮬레이션</a:t>
+            </a:r>
           </a:p>
         </p:txBody>
       </p:sp>
@@ -6398,51 +6431,30 @@
               <a:buNone/>
             </a:pPr>
             <a:r>
-              <a:rPr lang="en-US" sz="1200" dirty="0">
-                <a:solidFill>
-                  <a:srgbClr val="5C5C5C"/>
-                </a:solidFill>
-                <a:latin typeface="Arial" pitchFamily="34" charset="0"/>
-                <a:ea typeface="Arial" pitchFamily="34" charset="-122"/>
-                <a:cs typeface="Arial" pitchFamily="34" charset="-120"/>
-              </a:rPr>
-              <a:t>시공간 피처 기반</a:t>
+              <a:rPr sz="1300">
+                <a:latin typeface="Malgun Gothic"/>
+              </a:rPr>
+              <a:t>대중교통 승차량 기반</a:t>
             </a:r>
             <a:endParaRPr lang="en-US" sz="1200" dirty="0"/>
           </a:p>
           <a:p>
-            <a:pPr marL="0" indent="0" algn="ctr">
-              <a:buNone/>
-            </a:pPr>
-            <a:r>
-              <a:rPr lang="en-US" sz="1200" dirty="0">
-                <a:solidFill>
-                  <a:srgbClr val="5C5C5C"/>
-                </a:solidFill>
-                <a:latin typeface="Arial" pitchFamily="34" charset="0"/>
-                <a:ea typeface="Arial" pitchFamily="34" charset="-122"/>
-                <a:cs typeface="Arial" pitchFamily="34" charset="-120"/>
-              </a:rPr>
-              <a:t>LSTM/ConvLSTM 모델로</a:t>
-            </a:r>
-            <a:endParaRPr lang="en-US" sz="1200" dirty="0"/>
-          </a:p>
-          <a:p>
-            <a:pPr marL="0" indent="0" algn="ctr">
-              <a:buNone/>
-            </a:pPr>
-            <a:r>
-              <a:rPr lang="en-US" sz="1200" dirty="0">
-                <a:solidFill>
-                  <a:srgbClr val="5C5C5C"/>
-                </a:solidFill>
-                <a:latin typeface="Arial" pitchFamily="34" charset="0"/>
-                <a:ea typeface="Arial" pitchFamily="34" charset="-122"/>
-                <a:cs typeface="Arial" pitchFamily="34" charset="-120"/>
-              </a:rPr>
-              <a:t>30분 단위 호출 수 예측</a:t>
-            </a:r>
-            <a:endParaRPr lang="en-US" sz="1200" dirty="0"/>
+            <a:pPr algn="ctr"/>
+            <a:r>
+              <a:rPr sz="1300">
+                <a:latin typeface="Malgun Gothic"/>
+              </a:rPr>
+              <a:t>HistGradientBoosting 모델로</a:t>
+            </a:r>
+          </a:p>
+          <a:p>
+            <a:pPr algn="ctr"/>
+            <a:r>
+              <a:rPr sz="1300">
+                <a:latin typeface="Malgun Gothic"/>
+              </a:rPr>
+              <a:t>1시간 뒤 이동 수요 proxy 예측</a:t>
+            </a:r>
           </a:p>
         </p:txBody>
       </p:sp>
@@ -6577,15 +6589,10 @@
               <a:buNone/>
             </a:pPr>
             <a:r>
-              <a:rPr lang="en-US" sz="1600" b="1" dirty="0">
-                <a:solidFill>
-                  <a:srgbClr val="1A1A1A"/>
-                </a:solidFill>
-                <a:latin typeface="Arial Black" pitchFamily="34" charset="0"/>
-                <a:ea typeface="Arial Black" pitchFamily="34" charset="-122"/>
-                <a:cs typeface="Arial Black" pitchFamily="34" charset="-120"/>
-              </a:rPr>
-              <a:t>동적 배차</a:t>
+              <a:rPr sz="1800" b="1">
+                <a:latin typeface="Malgun Gothic"/>
+              </a:rPr>
+              <a:t>배차 연결</a:t>
             </a:r>
             <a:endParaRPr lang="en-US" sz="1600" dirty="0"/>
           </a:p>
@@ -6616,51 +6623,30 @@
               <a:buNone/>
             </a:pPr>
             <a:r>
-              <a:rPr lang="en-US" sz="1200" dirty="0">
-                <a:solidFill>
-                  <a:srgbClr val="5C5C5C"/>
-                </a:solidFill>
-                <a:latin typeface="Arial" pitchFamily="34" charset="0"/>
-                <a:ea typeface="Arial" pitchFamily="34" charset="-122"/>
-                <a:cs typeface="Arial" pitchFamily="34" charset="-120"/>
-              </a:rPr>
-              <a:t>수급 불균형 지표 계산 후</a:t>
+              <a:rPr sz="1300">
+                <a:latin typeface="Malgun Gothic"/>
+              </a:rPr>
+              <a:t>동별 수요 신호를 지도에 연결하고</a:t>
             </a:r>
             <a:endParaRPr lang="en-US" sz="1200" dirty="0"/>
           </a:p>
           <a:p>
-            <a:pPr marL="0" indent="0" algn="ctr">
-              <a:buNone/>
-            </a:pPr>
-            <a:r>
-              <a:rPr lang="en-US" sz="1200" dirty="0">
-                <a:solidFill>
-                  <a:srgbClr val="5C5C5C"/>
-                </a:solidFill>
-                <a:latin typeface="Arial" pitchFamily="34" charset="0"/>
-                <a:ea typeface="Arial" pitchFamily="34" charset="-122"/>
-                <a:cs typeface="Arial" pitchFamily="34" charset="-120"/>
-              </a:rPr>
-              <a:t>Surge Pricing 인센티브로</a:t>
-            </a:r>
-            <a:endParaRPr lang="en-US" sz="1200" dirty="0"/>
-          </a:p>
-          <a:p>
-            <a:pPr marL="0" indent="0" algn="ctr">
-              <a:buNone/>
-            </a:pPr>
-            <a:r>
-              <a:rPr lang="en-US" sz="1200" dirty="0">
-                <a:solidFill>
-                  <a:srgbClr val="5C5C5C"/>
-                </a:solidFill>
-                <a:latin typeface="Arial" pitchFamily="34" charset="0"/>
-                <a:ea typeface="Arial" pitchFamily="34" charset="-122"/>
-                <a:cs typeface="Arial" pitchFamily="34" charset="-120"/>
-              </a:rPr>
-              <a:t>빈 택시를 수요지로 유도</a:t>
-            </a:r>
-            <a:endParaRPr lang="en-US" sz="1200" dirty="0"/>
+            <a:pPr algn="ctr"/>
+            <a:r>
+              <a:rPr sz="1300">
+                <a:latin typeface="Malgun Gothic"/>
+              </a:rPr>
+              <a:t>향후 실제 호출 데이터 확보 시</a:t>
+            </a:r>
+          </a:p>
+          <a:p>
+            <a:pPr algn="ctr"/>
+            <a:r>
+              <a:rPr sz="1300">
+                <a:latin typeface="Malgun Gothic"/>
+              </a:rPr>
+              <a:t>배차 정책으로 확장</a:t>
+            </a:r>
           </a:p>
         </p:txBody>
       </p:sp>
@@ -7186,15 +7172,10 @@
               <a:buNone/>
             </a:pPr>
             <a:r>
-              <a:rPr lang="en-US" sz="1000" dirty="0">
-                <a:solidFill>
-                  <a:srgbClr val="5C5C5C"/>
-                </a:solidFill>
-                <a:latin typeface="Arial" pitchFamily="34" charset="0"/>
-                <a:ea typeface="Arial" pitchFamily="34" charset="-122"/>
-                <a:cs typeface="Arial" pitchFamily="34" charset="-120"/>
-              </a:rPr>
-              <a:t>실제 카카오T 수요가 집중되는 지역을 반영, 의미 있는 예측 가능</a:t>
+              <a:rPr sz="1050">
+                <a:latin typeface="Malgun Gothic"/>
+              </a:rPr>
+              <a:t>상업·업무 밀집 지역 특성을 반영해 더 현실적인 실험 가능</a:t>
             </a:r>
             <a:endParaRPr lang="en-US" sz="1000" dirty="0"/>
           </a:p>
@@ -10658,13 +10639,8 @@
               <a:buNone/>
             </a:pPr>
             <a:r>
-              <a:rPr lang="en-US" sz="2600" b="1" dirty="0">
-                <a:solidFill>
-                  <a:srgbClr val="1A1A1A"/>
-                </a:solidFill>
-                <a:latin typeface="Arial Black" pitchFamily="34" charset="0"/>
-                <a:ea typeface="Arial Black" pitchFamily="34" charset="-122"/>
-                <a:cs typeface="Arial Black" pitchFamily="34" charset="-120"/>
+              <a:rPr sz="2600" b="1">
+                <a:latin typeface="Malgun Gothic"/>
               </a:rPr>
               <a:t>4개 모듈 통합 아키텍처</a:t>
             </a:r>
@@ -11065,34 +11041,21 @@
               <a:buNone/>
             </a:pPr>
             <a:r>
-              <a:rPr lang="en-US" sz="1400" b="1" dirty="0">
-                <a:solidFill>
-                  <a:srgbClr val="FFFFFF"/>
-                </a:solidFill>
-                <a:latin typeface="Arial" pitchFamily="34" charset="0"/>
-                <a:ea typeface="Arial" pitchFamily="34" charset="-122"/>
-                <a:cs typeface="Arial" pitchFamily="34" charset="-120"/>
-              </a:rPr>
-              <a:t>시공간 데이터</a:t>
+              <a:rPr sz="1700" b="1">
+                <a:latin typeface="Malgun Gothic"/>
+              </a:rPr>
+              <a:t>공개 데이터</a:t>
             </a:r>
             <a:endParaRPr lang="en-US" sz="1400" dirty="0"/>
           </a:p>
           <a:p>
-            <a:pPr marL="0" indent="0" algn="ctr">
-              <a:buNone/>
-            </a:pPr>
-            <a:r>
-              <a:rPr lang="en-US" sz="1400" b="1" dirty="0">
-                <a:solidFill>
-                  <a:srgbClr val="FFFFFF"/>
-                </a:solidFill>
-                <a:latin typeface="Arial" pitchFamily="34" charset="0"/>
-                <a:ea typeface="Arial" pitchFamily="34" charset="-122"/>
-                <a:cs typeface="Arial" pitchFamily="34" charset="-120"/>
+            <a:pPr algn="ctr"/>
+            <a:r>
+              <a:rPr sz="1700" b="1">
+                <a:latin typeface="Malgun Gothic"/>
               </a:rPr>
               <a:t>전처리</a:t>
             </a:r>
-            <a:endParaRPr lang="en-US" sz="1400" dirty="0"/>
           </a:p>
         </p:txBody>
       </p:sp>
@@ -11146,34 +11109,21 @@
               <a:buNone/>
             </a:pPr>
             <a:r>
-              <a:rPr lang="en-US" sz="1100" dirty="0">
-                <a:solidFill>
-                  <a:srgbClr val="CCCCCC"/>
-                </a:solidFill>
-                <a:latin typeface="Arial" pitchFamily="34" charset="0"/>
-                <a:ea typeface="Arial" pitchFamily="34" charset="-122"/>
-                <a:cs typeface="Arial" pitchFamily="34" charset="-120"/>
-              </a:rPr>
-              <a:t>GPS→H3 격자</a:t>
+              <a:rPr sz="1150">
+                <a:latin typeface="Malgun Gothic"/>
+              </a:rPr>
+              <a:t>행정동·시간대 정렬</a:t>
             </a:r>
             <a:endParaRPr lang="en-US" sz="1100" dirty="0"/>
           </a:p>
           <a:p>
-            <a:pPr marL="0" indent="0" algn="ctr">
-              <a:buNone/>
-            </a:pPr>
-            <a:r>
-              <a:rPr lang="en-US" sz="1100" dirty="0">
-                <a:solidFill>
-                  <a:srgbClr val="CCCCCC"/>
-                </a:solidFill>
-                <a:latin typeface="Arial" pitchFamily="34" charset="0"/>
-                <a:ea typeface="Arial" pitchFamily="34" charset="-122"/>
-                <a:cs typeface="Arial" pitchFamily="34" charset="-120"/>
-              </a:rPr>
-              <a:t>Lag Feature 생성</a:t>
-            </a:r>
-            <a:endParaRPr lang="en-US" sz="1100" dirty="0"/>
+            <a:pPr algn="ctr"/>
+            <a:r>
+              <a:rPr sz="1150">
+                <a:latin typeface="Malgun Gothic"/>
+              </a:rPr>
+              <a:t>날씨·휴일·Lag Feature 생성</a:t>
+            </a:r>
           </a:p>
         </p:txBody>
       </p:sp>
@@ -11337,34 +11287,21 @@
               <a:buNone/>
             </a:pPr>
             <a:r>
-              <a:rPr lang="en-US" sz="1400" b="1" dirty="0">
-                <a:solidFill>
-                  <a:srgbClr val="FFFFFF"/>
-                </a:solidFill>
-                <a:latin typeface="Arial" pitchFamily="34" charset="0"/>
-                <a:ea typeface="Arial" pitchFamily="34" charset="-122"/>
-                <a:cs typeface="Arial" pitchFamily="34" charset="-120"/>
-              </a:rPr>
-              <a:t>수요 예측</a:t>
+              <a:rPr sz="1650" b="1">
+                <a:latin typeface="Malgun Gothic"/>
+              </a:rPr>
+              <a:t>이동 수요 proxy</a:t>
             </a:r>
             <a:endParaRPr lang="en-US" sz="1400" dirty="0"/>
           </a:p>
           <a:p>
-            <a:pPr marL="0" indent="0" algn="ctr">
-              <a:buNone/>
-            </a:pPr>
-            <a:r>
-              <a:rPr lang="en-US" sz="1400" b="1" dirty="0">
-                <a:solidFill>
-                  <a:srgbClr val="FFFFFF"/>
-                </a:solidFill>
-                <a:latin typeface="Arial" pitchFamily="34" charset="0"/>
-                <a:ea typeface="Arial" pitchFamily="34" charset="-122"/>
-                <a:cs typeface="Arial" pitchFamily="34" charset="-120"/>
-              </a:rPr>
-              <a:t>모델</a:t>
-            </a:r>
-            <a:endParaRPr lang="en-US" sz="1400" dirty="0"/>
+            <a:pPr algn="ctr"/>
+            <a:r>
+              <a:rPr sz="1650" b="1">
+                <a:latin typeface="Malgun Gothic"/>
+              </a:rPr>
+              <a:t>예측 모델</a:t>
+            </a:r>
           </a:p>
         </p:txBody>
       </p:sp>
@@ -11418,34 +11355,21 @@
               <a:buNone/>
             </a:pPr>
             <a:r>
-              <a:rPr lang="en-US" sz="1100" dirty="0">
-                <a:solidFill>
-                  <a:srgbClr val="CCCCCC"/>
-                </a:solidFill>
-                <a:latin typeface="Arial" pitchFamily="34" charset="0"/>
-                <a:ea typeface="Arial" pitchFamily="34" charset="-122"/>
-                <a:cs typeface="Arial" pitchFamily="34" charset="-120"/>
-              </a:rPr>
-              <a:t>ConvLSTM</a:t>
+              <a:rPr sz="1150">
+                <a:latin typeface="Malgun Gothic"/>
+              </a:rPr>
+              <a:t>HistGradientBoosting</a:t>
             </a:r>
             <a:endParaRPr lang="en-US" sz="1100" dirty="0"/>
           </a:p>
           <a:p>
-            <a:pPr marL="0" indent="0" algn="ctr">
-              <a:buNone/>
-            </a:pPr>
-            <a:r>
-              <a:rPr lang="en-US" sz="1100" dirty="0">
-                <a:solidFill>
-                  <a:srgbClr val="CCCCCC"/>
-                </a:solidFill>
-                <a:latin typeface="Arial" pitchFamily="34" charset="0"/>
-                <a:ea typeface="Arial" pitchFamily="34" charset="-122"/>
-                <a:cs typeface="Arial" pitchFamily="34" charset="-120"/>
-              </a:rPr>
-              <a:t>RMSE/MAPE 평가</a:t>
-            </a:r>
-            <a:endParaRPr lang="en-US" sz="1100" dirty="0"/>
+            <a:pPr algn="ctr"/>
+            <a:r>
+              <a:rPr sz="1150">
+                <a:latin typeface="Malgun Gothic"/>
+              </a:rPr>
+              <a:t>MAE 165.7 · R² 0.985</a:t>
+            </a:r>
           </a:p>
         </p:txBody>
       </p:sp>
@@ -11609,34 +11533,21 @@
               <a:buNone/>
             </a:pPr>
             <a:r>
-              <a:rPr lang="en-US" sz="1400" b="1" dirty="0">
-                <a:solidFill>
-                  <a:srgbClr val="FFFFFF"/>
-                </a:solidFill>
-                <a:latin typeface="Arial" pitchFamily="34" charset="0"/>
-                <a:ea typeface="Arial" pitchFamily="34" charset="-122"/>
-                <a:cs typeface="Arial" pitchFamily="34" charset="-120"/>
-              </a:rPr>
-              <a:t>동적 배차</a:t>
+              <a:rPr sz="1700" b="1">
+                <a:latin typeface="Malgun Gothic"/>
+              </a:rPr>
+              <a:t>서비스 연결</a:t>
             </a:r>
             <a:endParaRPr lang="en-US" sz="1400" dirty="0"/>
           </a:p>
           <a:p>
-            <a:pPr marL="0" indent="0" algn="ctr">
-              <a:buNone/>
-            </a:pPr>
-            <a:r>
-              <a:rPr lang="en-US" sz="1400" b="1" dirty="0">
-                <a:solidFill>
-                  <a:srgbClr val="FFFFFF"/>
-                </a:solidFill>
-                <a:latin typeface="Arial" pitchFamily="34" charset="0"/>
-                <a:ea typeface="Arial" pitchFamily="34" charset="-122"/>
-                <a:cs typeface="Arial" pitchFamily="34" charset="-120"/>
-              </a:rPr>
-              <a:t>인센티브</a:t>
-            </a:r>
-            <a:endParaRPr lang="en-US" sz="1400" dirty="0"/>
+            <a:pPr algn="ctr"/>
+            <a:r>
+              <a:rPr sz="1700" b="1">
+                <a:latin typeface="Malgun Gothic"/>
+              </a:rPr>
+              <a:t>지도 시각화</a:t>
+            </a:r>
           </a:p>
         </p:txBody>
       </p:sp>
@@ -11690,34 +11601,21 @@
               <a:buNone/>
             </a:pPr>
             <a:r>
-              <a:rPr lang="en-US" sz="1100" dirty="0">
-                <a:solidFill>
-                  <a:srgbClr val="CCCCCC"/>
-                </a:solidFill>
-                <a:latin typeface="Arial" pitchFamily="34" charset="0"/>
-                <a:ea typeface="Arial" pitchFamily="34" charset="-122"/>
-                <a:cs typeface="Arial" pitchFamily="34" charset="-120"/>
-              </a:rPr>
-              <a:t>Surge 알고리즘</a:t>
+              <a:rPr sz="1130">
+                <a:latin typeface="Malgun Gothic"/>
+              </a:rPr>
+              <a:t>동별 수요 랭킹·색상 overlay</a:t>
             </a:r>
             <a:endParaRPr lang="en-US" sz="1100" dirty="0"/>
           </a:p>
           <a:p>
-            <a:pPr marL="0" indent="0" algn="ctr">
-              <a:buNone/>
-            </a:pPr>
-            <a:r>
-              <a:rPr lang="en-US" sz="1100" dirty="0">
-                <a:solidFill>
-                  <a:srgbClr val="CCCCCC"/>
-                </a:solidFill>
-                <a:latin typeface="Arial" pitchFamily="34" charset="0"/>
-                <a:ea typeface="Arial" pitchFamily="34" charset="-122"/>
-                <a:cs typeface="Arial" pitchFamily="34" charset="-120"/>
-              </a:rPr>
-              <a:t>배차 시뮬레이션</a:t>
-            </a:r>
-            <a:endParaRPr lang="en-US" sz="1100" dirty="0"/>
+            <a:pPr algn="ctr"/>
+            <a:r>
+              <a:rPr sz="1130">
+                <a:latin typeface="Malgun Gothic"/>
+              </a:rPr>
+              <a:t>실제 호출 데이터 확보 시 보정</a:t>
+            </a:r>
           </a:p>
         </p:txBody>
       </p:sp>

--- a/public/a-eye-presentation/A-Eye_midterm_data_collection_forecast.pptx
+++ b/public/a-eye-presentation/A-Eye_midterm_data_collection_forecast.pptx
@@ -1629,10 +1629,15 @@
               <a:buNone/>
             </a:pPr>
             <a:r>
-              <a:rPr sz="1300">
-                <a:latin typeface="Malgun Gothic"/>
-              </a:rPr>
-              <a:t>Three.js  ·  OpenStreetMap  ·  Cloudflare Pages  ·  Colab/scikit-learn</a:t>
+              <a:rPr lang="en-US" sz="1100" b="1" dirty="0">
+                <a:solidFill>
+                  <a:srgbClr val="1A1A1A"/>
+                </a:solidFill>
+                <a:latin typeface="Arial" pitchFamily="34" charset="0"/>
+                <a:ea typeface="Arial" pitchFamily="34" charset="-122"/>
+                <a:cs typeface="Arial" pitchFamily="34" charset="-120"/>
+              </a:rPr>
+              <a:t>Three.js  ·  OpenStreetMap  ·  Cloudflare Pages  ·  scikit-learn</a:t>
             </a:r>
             <a:endParaRPr lang="en-US" sz="1100" dirty="0"/>
           </a:p>
@@ -3059,7 +3064,10 @@
           <a:p>
             <a:pPr algn="l"/>
             <a:r>
-              <a:rPr sz="2500" b="1">
+              <a:rPr sz="2400" b="1">
+                <a:solidFill>
+                  <a:srgbClr val="1A1A1A"/>
+                </a:solidFill>
                 <a:latin typeface="Malgun Gothic"/>
               </a:rPr>
               <a:t>테스트 구간 실제값 vs 예측값</a:t>
@@ -3091,13 +3099,13 @@
           <a:p>
             <a:pPr algn="l"/>
             <a:r>
-              <a:rPr sz="1150">
+              <a:rPr sz="1050">
                 <a:solidFill>
                   <a:srgbClr val="4B5563"/>
                 </a:solidFill>
                 <a:latin typeface="Malgun Gothic"/>
               </a:rPr>
-              <a:t>모델: HistGradientBoostingRegressor / Target: 1시간 뒤 동별 대중교통 승차량</a:t>
+              <a:t>Test  MAE 165.7 / RMSE 393.7 / R² 0.985 · 평균 실제값 2,099명 대비 오차 약 166명</a:t>
             </a:r>
           </a:p>
         </p:txBody>
@@ -3224,19 +3232,7 @@
                 </a:solidFill>
                 <a:latin typeface="Malgun Gothic"/>
               </a:rPr>
-              <a:t>Test 결과: MAE 165.7명, RMSE 393.7명, R² 0.9854.  x축은 실제 대중교통 승차량, y축은 예측값입니다.</a:t>
-            </a:r>
-          </a:p>
-          <a:p>
-            <a:pPr algn="l"/>
-            <a:r>
-              <a:rPr sz="919">
-                <a:solidFill>
-                  <a:srgbClr val="1F2937"/>
-                </a:solidFill>
-                <a:latin typeface="Malgun Gothic"/>
-              </a:rPr>
-              <a:t>출처: Colab 산출물 transit_test_predictions.csv / transit_model_metrics.json</a:t>
+              <a:t>해석: x축은 실제 대중교통 승차량, y축은 예측값입니다. 점이 대각선에 가까울수록 실제값과 예측값이 가깝습니다.</a:t>
             </a:r>
           </a:p>
         </p:txBody>
@@ -3454,9 +3450,12 @@
             <a:pPr algn="l"/>
             <a:r>
               <a:rPr sz="2400" b="1">
+                <a:solidFill>
+                  <a:srgbClr val="1A1A1A"/>
+                </a:solidFill>
                 <a:latin typeface="Malgun Gothic"/>
               </a:rPr>
-              <a:t>사이트에 붙인 결과와 다음 연결 방향</a:t>
+              <a:t>현재까지 한 것과 목표 프로토타입</a:t>
             </a:r>
           </a:p>
         </p:txBody>
@@ -3603,7 +3602,7 @@
                 </a:solidFill>
                 <a:latin typeface="Malgun Gothic"/>
               </a:rPr>
-              <a:t>현재 반영</a:t>
+              <a:t>현재 완료</a:t>
             </a:r>
           </a:p>
         </p:txBody>
@@ -3636,37 +3635,16 @@
               </a:lnSpc>
             </a:pPr>
             <a:r>
-              <a:rPr sz="1040">
+              <a:rPr sz="1050" b="0">
+                <a:solidFill>
+                  <a:srgbClr val="1F2937"/>
+                </a:solidFill>
                 <a:latin typeface="Malgun Gothic"/>
               </a:rPr>
-              <a:t>• 메인 지도 상단에 발표 자료 버튼 추가</a:t>
-            </a:r>
-          </a:p>
-          <a:p>
-            <a:pPr algn="l"/>
-            <a:r>
-              <a:rPr sz="1040">
-                <a:latin typeface="Malgun Gothic"/>
-              </a:rPr>
-              <a:t>• /presentation에 데이터 출처와 모델 결과 정리</a:t>
-            </a:r>
-          </a:p>
-          <a:p>
-            <a:pPr algn="l"/>
-            <a:r>
-              <a:rPr sz="1040">
-                <a:latin typeface="Malgun Gothic"/>
-              </a:rPr>
-              <a:t>• PPT 다운로드 링크 연결</a:t>
-            </a:r>
-          </a:p>
-          <a:p>
-            <a:pPr algn="l"/>
-            <a:r>
-              <a:rPr sz="1040">
-                <a:latin typeface="Malgun Gothic"/>
-              </a:rPr>
-              <a:t>• Cloudflare 배포용 asset은 가볍게 유지</a:t>
+              <a:t>• 메인 지도 상단에 발표 자료 버튼 추가
+• /presentation에 데이터 출처와 모델 결과 정리
+• PPT 다운로드 링크 연결
+• Cloudflare 배포용 asset은 가볍게 유지</a:t>
             </a:r>
           </a:p>
         </p:txBody>
@@ -3695,13 +3673,10 @@
           <a:p>
             <a:pPr algn="l"/>
             <a:r>
-              <a:rPr sz="1500" b="1">
-                <a:solidFill>
-                  <a:srgbClr val="3B82F6"/>
-                </a:solidFill>
+              <a:rPr sz="1150" b="1">
                 <a:latin typeface="Malgun Gothic"/>
               </a:rPr>
-              <a:t>다음 단계</a:t>
+              <a:t>목표 프로토타입 (좌측 히트맵)</a:t>
             </a:r>
           </a:p>
         </p:txBody>
@@ -3734,78 +3709,65 @@
               </a:lnSpc>
             </a:pPr>
             <a:r>
-              <a:rPr sz="1040">
+              <a:rPr sz="950">
                 <a:latin typeface="Malgun Gothic"/>
               </a:rPr>
-              <a:t>• 지도 위 동별 수요 색상/랭킹 overlay</a:t>
+              <a:t>• 동별 수요를 색상으로 표현한 히트맵</a:t>
             </a:r>
           </a:p>
           <a:p>
             <a:pPr algn="l"/>
             <a:r>
-              <a:rPr sz="1040">
+              <a:rPr sz="950">
                 <a:latin typeface="Malgun Gothic"/>
               </a:rPr>
-              <a:t>• 실시간 citydata와 예측값을 함께 표시</a:t>
+              <a:t>• 모델 결과 반영 시 역삼1동·논현1동·대치4동 등 상위 수요 표시</a:t>
             </a:r>
           </a:p>
           <a:p>
             <a:pPr algn="l"/>
             <a:r>
-              <a:rPr sz="1040">
+              <a:rPr sz="950">
                 <a:latin typeface="Malgun Gothic"/>
               </a:rPr>
-              <a:t>• 실제 택시 호출 데이터 확보 시 proxy 보정</a:t>
-            </a:r>
-          </a:p>
-        </p:txBody>
-      </p:sp>
-      <p:sp>
-        <p:nvSpPr>
-          <p:cNvPr id="14" name="TextBox 13"/>
-          <p:cNvSpPr txBox="1"/>
-          <p:nvPr/>
-        </p:nvSpPr>
-        <p:spPr>
-          <a:xfrm>
-            <a:off x="411480" y="4350000"/>
-            <a:ext cx="4389120" cy="420000"/>
-          </a:xfrm>
-          <a:prstGeom prst="rect">
-            <a:avLst/>
-          </a:prstGeom>
-          <a:noFill/>
-        </p:spPr>
-        <p:txBody>
-          <a:bodyPr wrap="none">
-            <a:spAutoFit/>
-          </a:bodyPr>
-          <a:lstStyle/>
-          <a:p>
-            <a:pPr/>
-            <a:r>
-              <a:rPr sz="869">
-                <a:solidFill>
-                  <a:srgbClr val="4B5563"/>
-                </a:solidFill>
+              <a:t>• 요일·시간·날씨 조건 반영 예정</a:t>
+            </a:r>
+          </a:p>
+          <a:p>
+            <a:pPr algn="l"/>
+            <a:r>
+              <a:rPr sz="950">
                 <a:latin typeface="Malgun Gothic"/>
               </a:rPr>
-              <a:t>이미지 설명: Colab 결과를 발표용으로 정리한 웹 화면입니다.</a:t>
-            </a:r>
-          </a:p>
-          <a:p>
-            <a:r>
-              <a:rPr sz="869">
-                <a:solidFill>
-                  <a:srgbClr val="4B5563"/>
-                </a:solidFill>
-                <a:latin typeface="Malgun Gothic"/>
-              </a:rPr>
-              <a:t>현재 예측값은 실제 택시 호출량이 아니라 대중교통 승차량 기반 proxy입니다.</a:t>
-            </a:r>
-          </a:p>
-        </p:txBody>
-      </p:sp>
+              <a:t>• 이걸 3D 지도 위에 올리는 게 다음 단계</a:t>
+            </a:r>
+          </a:p>
+        </p:txBody>
+      </p:sp>
+      <p:pic>
+        <p:nvPicPr>
+          <p:cNvPr id="20" name="heatmap"/>
+          <p:cNvPicPr>
+            <a:picLocks noChangeAspect="1"/>
+          </p:cNvPicPr>
+          <p:nvPr/>
+        </p:nvPicPr>
+        <p:blipFill>
+          <a:blip r:embed="rId3"/>
+          <a:stretch>
+            <a:fillRect/>
+          </a:stretch>
+        </p:blipFill>
+        <p:spPr>
+          <a:xfrm>
+            <a:off x="365760" y="1143000"/>
+            <a:ext cx="4114800" cy="2743200"/>
+          </a:xfrm>
+          <a:prstGeom prst="rect">
+            <a:avLst/>
+          </a:prstGeom>
+        </p:spPr>
+      </p:pic>
     </p:spTree>
     <p:extLst>
       <p:ext uri="{BB962C8B-B14F-4D97-AF65-F5344CB8AC3E}">
@@ -4018,7 +3980,10 @@
           <a:p>
             <a:pPr algn="l"/>
             <a:r>
-              <a:rPr sz="2500" b="1">
+              <a:rPr sz="2400" b="1">
+                <a:solidFill>
+                  <a:srgbClr val="1A1A1A"/>
+                </a:solidFill>
                 <a:latin typeface="Malgun Gothic"/>
               </a:rPr>
               <a:t>한계와 다음 개선점</a:t>
@@ -4221,28 +4186,15 @@
               </a:lnSpc>
             </a:pPr>
             <a:r>
-              <a:rPr sz="1060">
+              <a:rPr sz="1050" b="0">
+                <a:solidFill>
+                  <a:srgbClr val="1F2937"/>
+                </a:solidFill>
                 <a:latin typeface="Malgun Gothic"/>
               </a:rPr>
-              <a:t>• 실제 택시 호출량 데이터가 아님</a:t>
-            </a:r>
-          </a:p>
-          <a:p>
-            <a:pPr algn="l"/>
-            <a:r>
-              <a:rPr sz="1060">
-                <a:latin typeface="Malgun Gothic"/>
-              </a:rPr>
-              <a:t>• 대중교통 수요와 택시 수요는 완전히 같지 않음</a:t>
-            </a:r>
-          </a:p>
-          <a:p>
-            <a:pPr algn="l"/>
-            <a:r>
-              <a:rPr sz="1060">
-                <a:latin typeface="Malgun Gothic"/>
-              </a:rPr>
-              <a:t>• 현재 결과는 이동 수요 proxy로 해석해야 함</a:t>
+              <a:t>• 실제 택시 호출량 데이터가 아님
+• 대중교통 수요와 택시 수요는 완전히 같지 않음
+• 현재 결과는 이동 수요 proxy로 해석해야 함</a:t>
             </a:r>
           </a:p>
         </p:txBody>
@@ -4442,28 +4394,15 @@
               </a:lnSpc>
             </a:pPr>
             <a:r>
-              <a:rPr sz="1060">
+              <a:rPr sz="1050" b="0">
+                <a:solidFill>
+                  <a:srgbClr val="1F2937"/>
+                </a:solidFill>
                 <a:latin typeface="Malgun Gothic"/>
               </a:rPr>
-              <a:t>• 실제 호출/승하차 데이터 확보 시 보정</a:t>
-            </a:r>
-          </a:p>
-          <a:p>
-            <a:pPr algn="l"/>
-            <a:r>
-              <a:rPr sz="1060">
-                <a:latin typeface="Malgun Gothic"/>
-              </a:rPr>
-              <a:t>• 5분·15분 단위 예측으로 확장</a:t>
-            </a:r>
-          </a:p>
-          <a:p>
-            <a:pPr algn="l"/>
-            <a:r>
-              <a:rPr sz="1060">
-                <a:latin typeface="Malgun Gothic"/>
-              </a:rPr>
-              <a:t>• 지도에서 수요와 신뢰도를 함께 표시</a:t>
+              <a:t>• 실제 호출/승하차 데이터 확보 시 보정
+• 5분·15분 단위 예측으로 확장
+• 지도에서 수요와 신뢰도를 함께 표시</a:t>
             </a:r>
           </a:p>
         </p:txBody>
@@ -4968,7 +4907,7 @@
                 <a:ea typeface="Arial" pitchFamily="34" charset="-122"/>
                 <a:cs typeface="Arial" pitchFamily="34" charset="-120"/>
               </a:rPr>
-              <a:t>🌐  (배포 URL)</a:t>
+              <a:t>🌐  yeoksam-taxi.kenny31.workers.dev</a:t>
             </a:r>
             <a:endParaRPr lang="en-US" sz="1300" dirty="0"/>
           </a:p>
@@ -5366,7 +5305,7 @@
               <a:rPr sz="1050">
                 <a:latin typeface="Malgun Gothic"/>
               </a:rPr>
-              <a:t>1~4: 문제 정의와 명세서 대비 변경</a:t>
+              <a:t>1~4: 문제 정의와 범위 변경</a:t>
             </a:r>
             <a:endParaRPr lang="en-US" sz="1100" dirty="0"/>
           </a:p>
@@ -5496,7 +5435,7 @@
               <a:rPr sz="1500" b="1">
                 <a:latin typeface="Malgun Gothic"/>
               </a:rPr>
-              <a:t>웹 구현·배포</a:t>
+              <a:t>지도 구현·배포</a:t>
             </a:r>
             <a:endParaRPr lang="en-US" sz="1400" dirty="0"/>
           </a:p>
@@ -5530,7 +5469,7 @@
               <a:rPr sz="1050">
                 <a:latin typeface="Malgun Gothic"/>
               </a:rPr>
-              <a:t>5~8: Three.js·OSM·Cloudflare</a:t>
+              <a:t>5~8: OSM·Three.js·Cloudflare</a:t>
             </a:r>
             <a:endParaRPr lang="en-US" sz="1100" dirty="0"/>
           </a:p>
@@ -5660,7 +5599,7 @@
               <a:rPr sz="1500" b="1">
                 <a:latin typeface="Malgun Gothic"/>
               </a:rPr>
-              <a:t>데이터 수집·학습</a:t>
+              <a:t>데이터 수집·모델</a:t>
             </a:r>
             <a:endParaRPr lang="en-US" sz="1400" dirty="0"/>
           </a:p>
@@ -5694,7 +5633,7 @@
               <a:rPr sz="1050">
                 <a:latin typeface="Malgun Gothic"/>
               </a:rPr>
-              <a:t>9~11: 공개 데이터와 Colab 모델</a:t>
+              <a:t>9~11: proxy 데이터와 Colab 결과</a:t>
             </a:r>
             <a:endParaRPr lang="en-US" sz="1100" dirty="0"/>
           </a:p>
@@ -5824,7 +5763,7 @@
               <a:rPr sz="1500" b="1">
                 <a:latin typeface="Malgun Gothic"/>
               </a:rPr>
-              <a:t>서비스 연결·다음 단계</a:t>
+              <a:t>서비스 연결·한계</a:t>
             </a:r>
             <a:endParaRPr lang="en-US" sz="1400" dirty="0"/>
           </a:p>
@@ -5858,7 +5797,7 @@
               <a:rPr sz="1050">
                 <a:latin typeface="Malgun Gothic"/>
               </a:rPr>
-              <a:t>12~14: 사이트 반영과 개선 계획</a:t>
+              <a:t>12~14: 프로토타입과 다음 단계</a:t>
             </a:r>
             <a:endParaRPr lang="en-US" sz="1100" dirty="0"/>
           </a:p>
@@ -6234,17 +6173,17 @@
               <a:buNone/>
             </a:pPr>
             <a:r>
-              <a:rPr sz="1350">
+              <a:rPr sz="1300">
                 <a:latin typeface="Malgun Gothic"/>
               </a:rPr>
-              <a:t>역삼동 실제 도로망을</a:t>
+              <a:t>강남 9개 동 실제 도로망을</a:t>
             </a:r>
             <a:endParaRPr lang="en-US" sz="1200" dirty="0"/>
           </a:p>
           <a:p>
             <a:pPr algn="ctr"/>
             <a:r>
-              <a:rPr sz="1350">
+              <a:rPr sz="1300">
                 <a:latin typeface="Malgun Gothic"/>
               </a:rPr>
               <a:t>3D로 가상화한 환경에서</a:t>
@@ -6253,10 +6192,10 @@
           <a:p>
             <a:pPr algn="ctr"/>
             <a:r>
-              <a:rPr sz="1350">
+              <a:rPr sz="1300">
                 <a:latin typeface="Malgun Gothic"/>
               </a:rPr>
-              <a:t>이동 수요·배차 시뮬레이션</a:t>
+              <a:t>이동 수요·차량 흐름 시뮬레이션</a:t>
             </a:r>
           </a:p>
         </p:txBody>
@@ -6431,30 +6370,51 @@
               <a:buNone/>
             </a:pPr>
             <a:r>
-              <a:rPr sz="1300">
-                <a:latin typeface="Malgun Gothic"/>
-              </a:rPr>
-              <a:t>대중교통 승차량 기반</a:t>
+              <a:rPr lang="en-US" sz="1200" dirty="0">
+                <a:solidFill>
+                  <a:srgbClr val="5C5C5C"/>
+                </a:solidFill>
+                <a:latin typeface="Arial" pitchFamily="34" charset="0"/>
+                <a:ea typeface="Arial" pitchFamily="34" charset="-122"/>
+                <a:cs typeface="Arial" pitchFamily="34" charset="-120"/>
+              </a:rPr>
+              <a:t>시공간 피처 기반</a:t>
             </a:r>
             <a:endParaRPr lang="en-US" sz="1200" dirty="0"/>
           </a:p>
           <a:p>
-            <a:pPr algn="ctr"/>
-            <a:r>
-              <a:rPr sz="1300">
-                <a:latin typeface="Malgun Gothic"/>
+            <a:pPr marL="0" indent="0" algn="ctr">
+              <a:buNone/>
+            </a:pPr>
+            <a:r>
+              <a:rPr lang="en-US" sz="1200" dirty="0">
+                <a:solidFill>
+                  <a:srgbClr val="5C5C5C"/>
+                </a:solidFill>
+                <a:latin typeface="Arial" pitchFamily="34" charset="0"/>
+                <a:ea typeface="Arial" pitchFamily="34" charset="-122"/>
+                <a:cs typeface="Arial" pitchFamily="34" charset="-120"/>
               </a:rPr>
               <a:t>HistGradientBoosting 모델로</a:t>
             </a:r>
-          </a:p>
-          <a:p>
-            <a:pPr algn="ctr"/>
-            <a:r>
-              <a:rPr sz="1300">
-                <a:latin typeface="Malgun Gothic"/>
+            <a:endParaRPr lang="en-US" sz="1200" dirty="0"/>
+          </a:p>
+          <a:p>
+            <a:pPr marL="0" indent="0" algn="ctr">
+              <a:buNone/>
+            </a:pPr>
+            <a:r>
+              <a:rPr lang="en-US" sz="1200" dirty="0">
+                <a:solidFill>
+                  <a:srgbClr val="5C5C5C"/>
+                </a:solidFill>
+                <a:latin typeface="Arial" pitchFamily="34" charset="0"/>
+                <a:ea typeface="Arial" pitchFamily="34" charset="-122"/>
+                <a:cs typeface="Arial" pitchFamily="34" charset="-120"/>
               </a:rPr>
               <a:t>1시간 뒤 이동 수요 proxy 예측</a:t>
             </a:r>
+            <a:endParaRPr lang="en-US" sz="1200" dirty="0"/>
           </a:p>
         </p:txBody>
       </p:sp>
@@ -7133,15 +7093,10 @@
               <a:buNone/>
             </a:pPr>
             <a:r>
-              <a:rPr lang="en-US" sz="1100" dirty="0">
-                <a:solidFill>
-                  <a:srgbClr val="166534"/>
-                </a:solidFill>
-                <a:latin typeface="Arial" pitchFamily="34" charset="0"/>
-                <a:ea typeface="Arial" pitchFamily="34" charset="-122"/>
-                <a:cs typeface="Arial" pitchFamily="34" charset="-120"/>
-              </a:rPr>
-              <a:t>✓  역삼동 실제 행정구역</a:t>
+              <a:rPr sz="1400" b="1">
+                <a:latin typeface="Malgun Gothic"/>
+              </a:rPr>
+              <a:t>✓  역삼동 포함 강남 9개 행정동</a:t>
             </a:r>
             <a:endParaRPr lang="en-US" sz="1100" dirty="0"/>
           </a:p>
@@ -7175,7 +7130,7 @@
               <a:rPr sz="1050">
                 <a:latin typeface="Malgun Gothic"/>
               </a:rPr>
-              <a:t>상업·업무 밀집 지역 특성을 반영해 더 현실적인 실험 가능</a:t>
+              <a:t>강남권 이동 수요가 집중되는 실제 행정구역 반영, 의미 있는 예측 가능</a:t>
             </a:r>
             <a:endParaRPr lang="en-US" sz="1000" dirty="0"/>
           </a:p>
@@ -7464,15 +7419,10 @@
               <a:buNone/>
             </a:pPr>
             <a:r>
-              <a:rPr lang="en-US" sz="1000" dirty="0">
-                <a:solidFill>
-                  <a:srgbClr val="5C5C5C"/>
-                </a:solidFill>
-                <a:latin typeface="Arial" pitchFamily="34" charset="0"/>
-                <a:ea typeface="Arial" pitchFamily="34" charset="-122"/>
-                <a:cs typeface="Arial" pitchFamily="34" charset="-120"/>
-              </a:rPr>
-              <a:t>OpenStreetMap에서 역삼동 노드/엣지 추출 → 실제 도로 위상 반영</a:t>
+              <a:rPr sz="1050">
+                <a:latin typeface="Malgun Gothic"/>
+              </a:rPr>
+              <a:t>OpenStreetMap에서 강남 9개 동 도로 노드/엣지 추출 → 실제 도로 위상 반영</a:t>
             </a:r>
             <a:endParaRPr lang="en-US" sz="1000" dirty="0"/>
           </a:p>
@@ -8442,15 +8392,10 @@
               <a:buNone/>
             </a:pPr>
             <a:r>
-              <a:rPr lang="en-US" sz="1150" dirty="0">
-                <a:solidFill>
-                  <a:srgbClr val="FFCD00"/>
-                </a:solidFill>
-                <a:latin typeface="Consolas" pitchFamily="34" charset="0"/>
-                <a:ea typeface="Consolas" pitchFamily="34" charset="-122"/>
-                <a:cs typeface="Consolas" pitchFamily="34" charset="-120"/>
-              </a:rPr>
-              <a:t>① Overpass API → 역삼동 bbox 쿼리</a:t>
+              <a:rPr sz="1120">
+                <a:latin typeface="Malgun Gothic"/>
+              </a:rPr>
+              <a:t>① Overpass API → 강남 9개 동 boundary/bbox 쿼리</a:t>
             </a:r>
             <a:endParaRPr lang="en-US" sz="1150" dirty="0"/>
           </a:p>
@@ -8642,7 +8587,7 @@
                 <a:ea typeface="Consolas" pitchFamily="34" charset="-122"/>
                 <a:cs typeface="Consolas" pitchFamily="34" charset="-120"/>
               </a:rPr>
-              <a:t>④ Edge 연결 → 그래프 구조 (NetworkX)</a:t>
+              <a:t>④ Edge 연결 → 도로 그래프 JSON 구성</a:t>
             </a:r>
             <a:endParaRPr lang="en-US" sz="1150" dirty="0"/>
           </a:p>
@@ -8698,15 +8643,10 @@
               <a:buNone/>
             </a:pPr>
             <a:r>
-              <a:rPr lang="en-US" sz="1150" dirty="0">
-                <a:solidFill>
-                  <a:srgbClr val="FFFFFF"/>
-                </a:solidFill>
-                <a:latin typeface="Consolas" pitchFamily="34" charset="0"/>
-                <a:ea typeface="Consolas" pitchFamily="34" charset="-122"/>
-                <a:cs typeface="Consolas" pitchFamily="34" charset="-120"/>
-              </a:rPr>
-              <a:t>⑤ Three.js Line / TubeGeometry 렌더</a:t>
+              <a:rPr sz="1120">
+                <a:latin typeface="Malgun Gothic"/>
+              </a:rPr>
+              <a:t>⑤ Three.js InstancedMesh / LineSegments 렌더</a:t>
             </a:r>
             <a:endParaRPr lang="en-US" sz="1150" dirty="0"/>
           </a:p>
@@ -8946,15 +8886,10 @@
               <a:buNone/>
             </a:pPr>
             <a:r>
-              <a:rPr lang="en-US" sz="1100" dirty="0">
-                <a:solidFill>
-                  <a:srgbClr val="2D2D2D"/>
-                </a:solidFill>
-                <a:latin typeface="Arial" pitchFamily="34" charset="0"/>
-                <a:ea typeface="Arial" pitchFamily="34" charset="-122"/>
-                <a:cs typeface="Arial" pitchFamily="34" charset="-120"/>
-              </a:rPr>
-              <a:t>역삼동 3D 지도 + 조명 설정</a:t>
+              <a:rPr sz="1050">
+                <a:latin typeface="Malgun Gothic"/>
+              </a:rPr>
+              <a:t>강남 9개 동 3D 지도 + 조명 설정</a:t>
             </a:r>
             <a:endParaRPr lang="en-US" sz="1100" dirty="0"/>
           </a:p>
@@ -10639,8 +10574,13 @@
               <a:buNone/>
             </a:pPr>
             <a:r>
-              <a:rPr sz="2600" b="1">
-                <a:latin typeface="Malgun Gothic"/>
+              <a:rPr lang="en-US" sz="2600" b="1" dirty="0">
+                <a:solidFill>
+                  <a:srgbClr val="1A1A1A"/>
+                </a:solidFill>
+                <a:latin typeface="Arial Black" pitchFamily="34" charset="0"/>
+                <a:ea typeface="Arial Black" pitchFamily="34" charset="-122"/>
+                <a:cs typeface="Arial Black" pitchFamily="34" charset="-120"/>
               </a:rPr>
               <a:t>4개 모듈 통합 아키텍처</a:t>
             </a:r>
@@ -10850,32 +10790,10 @@
               <a:buNone/>
             </a:pPr>
             <a:r>
-              <a:rPr lang="en-US" sz="1100" dirty="0">
-                <a:solidFill>
-                  <a:srgbClr val="CCCCCC"/>
-                </a:solidFill>
-                <a:latin typeface="Arial" pitchFamily="34" charset="0"/>
-                <a:ea typeface="Arial" pitchFamily="34" charset="-122"/>
-                <a:cs typeface="Arial" pitchFamily="34" charset="-120"/>
-              </a:rPr>
-              <a:t>Three.js · OSM</a:t>
-            </a:r>
-            <a:endParaRPr lang="en-US" sz="1100" dirty="0"/>
-          </a:p>
-          <a:p>
-            <a:pPr marL="0" indent="0" algn="ctr">
-              <a:buNone/>
-            </a:pPr>
-            <a:r>
-              <a:rPr lang="en-US" sz="1100" dirty="0">
-                <a:solidFill>
-                  <a:srgbClr val="CCCCCC"/>
-                </a:solidFill>
-                <a:latin typeface="Arial" pitchFamily="34" charset="0"/>
-                <a:ea typeface="Arial" pitchFamily="34" charset="-122"/>
-                <a:cs typeface="Arial" pitchFamily="34" charset="-120"/>
-              </a:rPr>
-              <a:t>역삼동 3D 환경</a:t>
+              <a:rPr sz="1080">
+                <a:latin typeface="Malgun Gothic"/>
+              </a:rPr>
+              <a:t>Three.js · OSM | 강남 9개 동 3D 환경</a:t>
             </a:r>
             <a:endParaRPr lang="en-US" sz="1100" dirty="0"/>
           </a:p>
@@ -11041,21 +10959,34 @@
               <a:buNone/>
             </a:pPr>
             <a:r>
-              <a:rPr sz="1700" b="1">
-                <a:latin typeface="Malgun Gothic"/>
-              </a:rPr>
-              <a:t>공개 데이터</a:t>
+              <a:rPr lang="en-US" sz="1400" b="1" dirty="0">
+                <a:solidFill>
+                  <a:srgbClr val="FFFFFF"/>
+                </a:solidFill>
+                <a:latin typeface="Arial" pitchFamily="34" charset="0"/>
+                <a:ea typeface="Arial" pitchFamily="34" charset="-122"/>
+                <a:cs typeface="Arial" pitchFamily="34" charset="-120"/>
+              </a:rPr>
+              <a:t>시공간 데이터</a:t>
             </a:r>
             <a:endParaRPr lang="en-US" sz="1400" dirty="0"/>
           </a:p>
           <a:p>
-            <a:pPr algn="ctr"/>
-            <a:r>
-              <a:rPr sz="1700" b="1">
-                <a:latin typeface="Malgun Gothic"/>
+            <a:pPr marL="0" indent="0" algn="ctr">
+              <a:buNone/>
+            </a:pPr>
+            <a:r>
+              <a:rPr lang="en-US" sz="1400" b="1" dirty="0">
+                <a:solidFill>
+                  <a:srgbClr val="FFFFFF"/>
+                </a:solidFill>
+                <a:latin typeface="Arial" pitchFamily="34" charset="0"/>
+                <a:ea typeface="Arial" pitchFamily="34" charset="-122"/>
+                <a:cs typeface="Arial" pitchFamily="34" charset="-120"/>
               </a:rPr>
               <a:t>전처리</a:t>
             </a:r>
+            <a:endParaRPr lang="en-US" sz="1400" dirty="0"/>
           </a:p>
         </p:txBody>
       </p:sp>
@@ -11109,21 +11040,34 @@
               <a:buNone/>
             </a:pPr>
             <a:r>
-              <a:rPr sz="1150">
-                <a:latin typeface="Malgun Gothic"/>
-              </a:rPr>
-              <a:t>행정동·시간대 정렬</a:t>
+              <a:rPr lang="en-US" sz="1100" dirty="0">
+                <a:solidFill>
+                  <a:srgbClr val="CCCCCC"/>
+                </a:solidFill>
+                <a:latin typeface="Arial" pitchFamily="34" charset="0"/>
+                <a:ea typeface="Arial" pitchFamily="34" charset="-122"/>
+                <a:cs typeface="Arial" pitchFamily="34" charset="-120"/>
+              </a:rPr>
+              <a:t>행정동 단위 OD</a:t>
             </a:r>
             <a:endParaRPr lang="en-US" sz="1100" dirty="0"/>
           </a:p>
           <a:p>
-            <a:pPr algn="ctr"/>
-            <a:r>
-              <a:rPr sz="1150">
-                <a:latin typeface="Malgun Gothic"/>
-              </a:rPr>
-              <a:t>날씨·휴일·Lag Feature 생성</a:t>
-            </a:r>
+            <a:pPr marL="0" indent="0" algn="ctr">
+              <a:buNone/>
+            </a:pPr>
+            <a:r>
+              <a:rPr lang="en-US" sz="1100" dirty="0">
+                <a:solidFill>
+                  <a:srgbClr val="CCCCCC"/>
+                </a:solidFill>
+                <a:latin typeface="Arial" pitchFamily="34" charset="0"/>
+                <a:ea typeface="Arial" pitchFamily="34" charset="-122"/>
+                <a:cs typeface="Arial" pitchFamily="34" charset="-120"/>
+              </a:rPr>
+              <a:t>Lag Feature 생성</a:t>
+            </a:r>
+            <a:endParaRPr lang="en-US" sz="1100" dirty="0"/>
           </a:p>
         </p:txBody>
       </p:sp>
@@ -11368,7 +11312,7 @@
               <a:rPr sz="1150">
                 <a:latin typeface="Malgun Gothic"/>
               </a:rPr>
-              <a:t>MAE 165.7 · R² 0.985</a:t>
+              <a:t>MAE/RMSE/R² 평가</a:t>
             </a:r>
           </a:p>
         </p:txBody>
@@ -11546,7 +11490,7 @@
               <a:rPr sz="1700" b="1">
                 <a:latin typeface="Malgun Gothic"/>
               </a:rPr>
-              <a:t>지도 시각화</a:t>
+              <a:t>다음 단계</a:t>
             </a:r>
           </a:p>
         </p:txBody>
@@ -11604,7 +11548,7 @@
               <a:rPr sz="1130">
                 <a:latin typeface="Malgun Gothic"/>
               </a:rPr>
-              <a:t>동별 수요 랭킹·색상 overlay</a:t>
+              <a:t>지도 overlay</a:t>
             </a:r>
             <a:endParaRPr lang="en-US" sz="1100" dirty="0"/>
           </a:p>
@@ -12012,16 +11956,37 @@
               </a:lnSpc>
             </a:pPr>
             <a:r>
-              <a:rPr sz="1050" b="0">
-                <a:solidFill>
-                  <a:srgbClr val="1F2937"/>
-                </a:solidFill>
+              <a:rPr sz="1019">
                 <a:latin typeface="Malgun Gothic"/>
               </a:rPr>
-              <a:t>• OSM 기반 도로/건물/행정동 시각화
-• 택시와 일반 교통 흐름 애니메이션
-• 날씨·시간·수요 시나리오 전환
-• 발표 자료 페이지와 바로 연결</a:t>
+              <a:t>• OSM 기반 도로/건물/행정동 시각화</a:t>
+            </a:r>
+          </a:p>
+          <a:p>
+            <a:pPr algn="l"/>
+            <a:r>
+              <a:rPr sz="1019">
+                <a:latin typeface="Malgun Gothic"/>
+              </a:rPr>
+              <a:t>• 택시와 일반 교통 흐름 애니메이션</a:t>
+            </a:r>
+          </a:p>
+          <a:p>
+            <a:pPr algn="l"/>
+            <a:r>
+              <a:rPr sz="1019">
+                <a:latin typeface="Malgun Gothic"/>
+              </a:rPr>
+              <a:t>• 날씨·시간·수요 시나리오 전환</a:t>
+            </a:r>
+          </a:p>
+          <a:p>
+            <a:pPr algn="l"/>
+            <a:r>
+              <a:rPr sz="1019">
+                <a:latin typeface="Malgun Gothic"/>
+              </a:rPr>
+              <a:t>• 발표 자료 페이지와 바로 연결</a:t>
             </a:r>
           </a:p>
         </p:txBody>
@@ -12323,7 +12288,7 @@
                 </a:solidFill>
                 <a:latin typeface="Malgun Gothic"/>
               </a:rPr>
-              <a:t>데이터 수집 개선: 생활인구 proxy에서 대중교통 proxy로 확장</a:t>
+              <a:t>데이터 수집 개선: 생활인구 proxy에서 대중교통 proxy로 전환</a:t>
             </a:r>
           </a:p>
         </p:txBody>

--- a/public/a-eye-presentation/A-Eye_midterm_data_collection_forecast.pptx
+++ b/public/a-eye-presentation/A-Eye_midterm_data_collection_forecast.pptx
@@ -1629,15 +1629,10 @@
               <a:buNone/>
             </a:pPr>
             <a:r>
-              <a:rPr lang="en-US" sz="1100" b="1" dirty="0">
-                <a:solidFill>
-                  <a:srgbClr val="1A1A1A"/>
-                </a:solidFill>
-                <a:latin typeface="Arial" pitchFamily="34" charset="0"/>
-                <a:ea typeface="Arial" pitchFamily="34" charset="-122"/>
-                <a:cs typeface="Arial" pitchFamily="34" charset="-120"/>
-              </a:rPr>
-              <a:t>Three.js  ·  OpenStreetMap  ·  Cloudflare Pages  ·  scikit-learn</a:t>
+              <a:rPr sz="1300">
+                <a:latin typeface="Malgun Gothic"/>
+              </a:rPr>
+              <a:t>Three.js  ·  OpenStreetMap  ·  Cloudflare Workers  ·  scikit-learn</a:t>
             </a:r>
             <a:endParaRPr lang="en-US" sz="1100" dirty="0"/>
           </a:p>
@@ -2043,13 +2038,10 @@
           <a:p>
             <a:pPr algn="ctr"/>
             <a:r>
-              <a:rPr sz="950" b="0">
-                <a:solidFill>
-                  <a:srgbClr val="5C5C5C"/>
-                </a:solidFill>
+              <a:rPr sz="1100">
                 <a:latin typeface="Malgun Gothic"/>
               </a:rPr>
-              <a:t>학습 row</a:t>
+              <a:t>모델 row</a:t>
             </a:r>
           </a:p>
         </p:txBody>
@@ -7969,15 +7961,10 @@
               <a:buNone/>
             </a:pPr>
             <a:r>
-              <a:rPr lang="en-US" sz="1100" dirty="0">
-                <a:solidFill>
-                  <a:srgbClr val="166534"/>
-                </a:solidFill>
-                <a:latin typeface="Arial" pitchFamily="34" charset="0"/>
-                <a:ea typeface="Arial" pitchFamily="34" charset="-122"/>
-                <a:cs typeface="Arial" pitchFamily="34" charset="-120"/>
-              </a:rPr>
-              <a:t>✓  Cloudflare Pages</a:t>
+              <a:rPr sz="1400" b="1">
+                <a:latin typeface="Malgun Gothic"/>
+              </a:rPr>
+              <a:t>✓  Cloudflare Workers</a:t>
             </a:r>
             <a:endParaRPr lang="en-US" sz="1100" dirty="0"/>
           </a:p>
@@ -9593,15 +9580,10 @@
               <a:buNone/>
             </a:pPr>
             <a:r>
-              <a:rPr lang="en-US" sz="2600" b="1" dirty="0">
-                <a:solidFill>
-                  <a:srgbClr val="1A1A1A"/>
-                </a:solidFill>
-                <a:latin typeface="Arial Black" pitchFamily="34" charset="0"/>
-                <a:ea typeface="Arial Black" pitchFamily="34" charset="-122"/>
-                <a:cs typeface="Arial Black" pitchFamily="34" charset="-120"/>
-              </a:rPr>
-              <a:t>Cloudflare Pages 배포</a:t>
+              <a:rPr sz="2800" b="1">
+                <a:latin typeface="Malgun Gothic"/>
+              </a:rPr>
+              <a:t>Cloudflare Workers 배포</a:t>
             </a:r>
             <a:endParaRPr lang="en-US" sz="2600" dirty="0"/>
           </a:p>
@@ -9900,15 +9882,10 @@
               <a:buNone/>
             </a:pPr>
             <a:r>
-              <a:rPr lang="en-US" sz="1200" b="1" dirty="0">
-                <a:solidFill>
-                  <a:srgbClr val="FFFFFF"/>
-                </a:solidFill>
-                <a:latin typeface="Arial" pitchFamily="34" charset="0"/>
-                <a:ea typeface="Arial" pitchFamily="34" charset="-122"/>
-                <a:cs typeface="Arial" pitchFamily="34" charset="-120"/>
-              </a:rPr>
-              <a:t>CF Pages 빌드</a:t>
+              <a:rPr sz="1500" b="1">
+                <a:latin typeface="Malgun Gothic"/>
+              </a:rPr>
+              <a:t>OpenNext 빌드</a:t>
             </a:r>
             <a:endParaRPr lang="en-US" sz="1200" dirty="0"/>
           </a:p>
@@ -10073,15 +10050,10 @@
               <a:buNone/>
             </a:pPr>
             <a:r>
-              <a:rPr lang="en-US" sz="1200" b="1" dirty="0">
-                <a:solidFill>
-                  <a:srgbClr val="FFFFFF"/>
-                </a:solidFill>
-                <a:latin typeface="Arial" pitchFamily="34" charset="0"/>
-                <a:ea typeface="Arial" pitchFamily="34" charset="-122"/>
-                <a:cs typeface="Arial" pitchFamily="34" charset="-120"/>
-              </a:rPr>
-              <a:t>CDN 글로벌 배포</a:t>
+              <a:rPr sz="1500" b="1">
+                <a:latin typeface="Malgun Gothic"/>
+              </a:rPr>
+              <a:t>Cloudflare 배포</a:t>
             </a:r>
             <a:endParaRPr lang="en-US" sz="1200" dirty="0"/>
           </a:p>
@@ -12059,13 +12031,10 @@
           <a:p>
             <a:pPr algn="ctr"/>
             <a:r>
-              <a:rPr sz="850" b="1">
-                <a:solidFill>
-                  <a:srgbClr val="FFFFFF"/>
-                </a:solidFill>
+              <a:rPr sz="1100" b="1">
                 <a:latin typeface="Malgun Gothic"/>
               </a:rPr>
-              <a:t>Three.js · Next.js · Cloudflare Pages</a:t>
+              <a:t>Three.js · Next.js · Cloudflare Workers</a:t>
             </a:r>
           </a:p>
         </p:txBody>

--- a/public/a-eye-presentation/A-Eye_midterm_data_collection_forecast.pptx
+++ b/public/a-eye-presentation/A-Eye_midterm_data_collection_forecast.pptx
@@ -1379,6 +1379,13 @@
             <a:prstDash val="solid"/>
           </a:ln>
         </p:spPr>
+        <p:txBody>
+          <a:bodyPr/>
+          <a:lstStyle/>
+          <a:p>
+            <a:endParaRPr lang="ko-KR" altLang="en-US"/>
+          </a:p>
+        </p:txBody>
       </p:sp>
       <p:sp>
         <p:nvSpPr>
@@ -1404,6 +1411,13 @@
             <a:prstDash val="solid"/>
           </a:ln>
         </p:spPr>
+        <p:txBody>
+          <a:bodyPr/>
+          <a:lstStyle/>
+          <a:p>
+            <a:endParaRPr lang="ko-KR" altLang="en-US"/>
+          </a:p>
+        </p:txBody>
       </p:sp>
       <p:pic>
         <p:nvPicPr>
@@ -1464,7 +1478,7 @@
                 <a:ea typeface="Arial Black" pitchFamily="34" charset="-122"/>
                 <a:cs typeface="Arial Black" pitchFamily="34" charset="-120"/>
               </a:rPr>
-              <a:t>kakao</a:t>
+              <a:t>Kakao mobility</a:t>
             </a:r>
             <a:endParaRPr lang="en-US" sz="1800" dirty="0"/>
           </a:p>
@@ -1495,15 +1509,26 @@
               <a:buNone/>
             </a:pPr>
             <a:r>
-              <a:rPr lang="en-US" sz="1200" kern="0" spc="300" dirty="0">
+              <a:rPr lang="ko-KR" altLang="en-US" sz="1200" kern="0" spc="300" dirty="0">
                 <a:solidFill>
-                  <a:srgbClr val="5C5C5C"/>
+                  <a:srgbClr val="AAAAAA"/>
                 </a:solidFill>
                 <a:latin typeface="Arial" pitchFamily="34" charset="0"/>
                 <a:ea typeface="Arial" pitchFamily="34" charset="-122"/>
                 <a:cs typeface="Arial" pitchFamily="34" charset="-120"/>
               </a:rPr>
-              <a:t>mobility  capstone</a:t>
+              <a:t xml:space="preserve">서강대학교 </a:t>
+            </a:r>
+            <a:r>
+              <a:rPr lang="ko-KR" altLang="en-US" sz="1200" kern="0" spc="300" dirty="0" err="1">
+                <a:solidFill>
+                  <a:srgbClr val="AAAAAA"/>
+                </a:solidFill>
+                <a:latin typeface="Arial" pitchFamily="34" charset="0"/>
+                <a:ea typeface="Arial" pitchFamily="34" charset="-122"/>
+                <a:cs typeface="Arial" pitchFamily="34" charset="-120"/>
+              </a:rPr>
+              <a:t>캡스톤디자인</a:t>
             </a:r>
             <a:endParaRPr lang="en-US" sz="1200" dirty="0"/>
           </a:p>
@@ -1629,10 +1654,16 @@
               <a:buNone/>
             </a:pPr>
             <a:r>
-              <a:rPr sz="1300">
+              <a:rPr lang="en-US" sz="1300" dirty="0">
                 <a:latin typeface="Malgun Gothic"/>
               </a:rPr>
-              <a:t>Three.js  ·  OpenStreetMap  ·  Cloudflare Workers  ·  scikit-learn</a:t>
+              <a:t>Track 3 AI 5</a:t>
+            </a:r>
+            <a:r>
+              <a:rPr lang="ko-KR" altLang="en-US" sz="1300" dirty="0">
+                <a:latin typeface="Malgun Gothic"/>
+              </a:rPr>
+              <a:t>조</a:t>
             </a:r>
             <a:endParaRPr lang="en-US" sz="1100" dirty="0"/>
           </a:p>
@@ -3668,7 +3699,7 @@
               <a:rPr sz="1150" b="1">
                 <a:latin typeface="Malgun Gothic"/>
               </a:rPr>
-              <a:t>목표 프로토타입 (좌측 히트맵)</a:t>
+              <a:t>목표 프로토타입</a:t>
             </a:r>
           </a:p>
         </p:txBody>
@@ -3713,7 +3744,7 @@
               <a:rPr sz="950">
                 <a:latin typeface="Malgun Gothic"/>
               </a:rPr>
-              <a:t>• 모델 결과 반영 시 역삼1동·논현1동·대치4동 등 상위 수요 표시</a:t>
+              <a:t>• 역삼1동·논현1동·대치4동 등 상위 수요 표시</a:t>
             </a:r>
           </a:p>
           <a:p>
@@ -4185,8 +4216,8 @@
                 <a:latin typeface="Malgun Gothic"/>
               </a:rPr>
               <a:t>• 실제 택시 호출량 데이터가 아님
-• 대중교통 수요와 택시 수요는 완전히 같지 않음
-• 현재 결과는 이동 수요 proxy로 해석해야 함</a:t>
+• 대중교통 수요 ≠ 택시 수요
+• 이동 수요 proxy로 해석 필요</a:t>
             </a:r>
           </a:p>
         </p:txBody>
@@ -4392,9 +4423,9 @@
                 </a:solidFill>
                 <a:latin typeface="Malgun Gothic"/>
               </a:rPr>
-              <a:t>• 실제 호출/승하차 데이터 확보 시 보정
+              <a:t>• 실제 호출 데이터 확보 시 보정
 • 5분·15분 단위 예측으로 확장
-• 지도에서 수요와 신뢰도를 함께 표시</a:t>
+• 지도 위 수요·신뢰도 함께 표시</a:t>
             </a:r>
           </a:p>
         </p:txBody>
@@ -4600,8 +4631,8 @@
                 </a:solidFill>
                 <a:latin typeface="Malgun Gothic"/>
               </a:rPr>
-              <a:t>• 공개 데이터만으로도 수요 신호를 만들 수 있음
-• 수집→전처리→학습→서비스 연결 흐름 확보
+              <a:t>• 공개 데이터로 수요 신호 생성
+• 수집→학습→서비스 흐름 확보
 • 웹 기반 시연 환경까지 연결 완료</a:t>
             </a:r>
           </a:p>
@@ -4704,6 +4735,13 @@
             <a:prstDash val="solid"/>
           </a:ln>
         </p:spPr>
+        <p:txBody>
+          <a:bodyPr/>
+          <a:lstStyle/>
+          <a:p>
+            <a:endParaRPr lang="ko-KR" altLang="en-US"/>
+          </a:p>
+        </p:txBody>
       </p:sp>
       <p:pic>
         <p:nvPicPr>
@@ -4794,6 +4832,9 @@
             </a:pPr>
             <a:r>
               <a:rPr sz="1700">
+                <a:solidFill>
+                  <a:srgbClr val="BBBBBB"/>
+                </a:solidFill>
                 <a:latin typeface="Malgun Gothic"/>
               </a:rPr>
               <a:t>역삼동 · Digital Twin · 이동 수요 proxy 예측</a:t>
@@ -4817,15 +4858,22 @@
             <a:avLst/>
           </a:prstGeom>
           <a:solidFill>
-            <a:srgbClr val="5C5C5C"/>
+            <a:srgbClr val="AAAAAA"/>
           </a:solidFill>
           <a:ln w="12700">
             <a:solidFill>
-              <a:srgbClr val="5C5C5C"/>
+              <a:srgbClr val="AAAAAA"/>
             </a:solidFill>
             <a:prstDash val="solid"/>
           </a:ln>
         </p:spPr>
+        <p:txBody>
+          <a:bodyPr/>
+          <a:lstStyle/>
+          <a:p>
+            <a:endParaRPr lang="ko-KR" altLang="en-US"/>
+          </a:p>
+        </p:txBody>
       </p:sp>
       <p:sp>
         <p:nvSpPr>
@@ -4854,7 +4902,7 @@
             <a:r>
               <a:rPr lang="en-US" sz="1300" dirty="0">
                 <a:solidFill>
-                  <a:srgbClr val="5C5C5C"/>
+                  <a:srgbClr val="AAAAAA"/>
                 </a:solidFill>
                 <a:latin typeface="Arial" pitchFamily="34" charset="0"/>
                 <a:ea typeface="Arial" pitchFamily="34" charset="-122"/>
@@ -4893,7 +4941,7 @@
             <a:r>
               <a:rPr lang="en-US" sz="1300" dirty="0">
                 <a:solidFill>
-                  <a:srgbClr val="5C5C5C"/>
+                  <a:srgbClr val="AAAAAA"/>
                 </a:solidFill>
                 <a:latin typeface="Arial" pitchFamily="34" charset="0"/>
                 <a:ea typeface="Arial" pitchFamily="34" charset="-122"/>
@@ -4953,854 +5001,1020 @@
 </file>
 
 <file path=ppt/slides/slide2.xml><?xml version="1.0" encoding="utf-8"?>
-<p:sld xmlns:a="http://schemas.openxmlformats.org/drawingml/2006/main" xmlns:r="http://schemas.openxmlformats.org/officeDocument/2006/relationships" xmlns:p="http://schemas.openxmlformats.org/presentationml/2006/main">
-  <p:cSld name="Slide 2">
-    <p:bg>
-      <p:bgPr>
-        <a:solidFill>
-          <a:srgbClr val="FFFFFF"/>
-        </a:solidFill>
-        <a:effectLst/>
-      </p:bgPr>
-    </p:bg>
-    <p:spTree>
-      <p:nvGrpSpPr>
-        <p:cNvPr id="1" name=""/>
-        <p:cNvGrpSpPr/>
-        <p:nvPr/>
-      </p:nvGrpSpPr>
-      <p:grpSpPr>
-        <a:xfrm>
-          <a:off x="0" y="0"/>
-          <a:ext cx="0" cy="0"/>
-          <a:chOff x="0" y="0"/>
-          <a:chExt cx="0" cy="0"/>
-        </a:xfrm>
-      </p:grpSpPr>
-      <p:sp>
-        <p:nvSpPr>
-          <p:cNvPr id="2" name="Shape 0"/>
-          <p:cNvSpPr/>
-          <p:nvPr/>
-        </p:nvSpPr>
-        <p:spPr>
-          <a:xfrm>
-            <a:off x="0" y="0"/>
-            <a:ext cx="9144000" cy="594360"/>
-          </a:xfrm>
-          <a:prstGeom prst="rect">
-            <a:avLst/>
-          </a:prstGeom>
-          <a:solidFill>
-            <a:srgbClr val="1A1A1A"/>
-          </a:solidFill>
-          <a:ln w="12700">
-            <a:solidFill>
-              <a:srgbClr val="1A1A1A"/>
-            </a:solidFill>
-            <a:prstDash val="solid"/>
-          </a:ln>
-        </p:spPr>
-      </p:sp>
-      <p:sp>
-        <p:nvSpPr>
-          <p:cNvPr id="3" name="Text 1"/>
-          <p:cNvSpPr/>
-          <p:nvPr/>
-        </p:nvSpPr>
-        <p:spPr>
-          <a:xfrm>
-            <a:off x="365760" y="91440"/>
-            <a:ext cx="4572000" cy="411480"/>
-          </a:xfrm>
-          <a:prstGeom prst="rect">
-            <a:avLst/>
-          </a:prstGeom>
-          <a:noFill/>
-          <a:ln/>
-        </p:spPr>
-        <p:txBody>
-          <a:bodyPr wrap="square" lIns="0" tIns="0" rIns="0" bIns="0" rtlCol="0" anchor="ctr"/>
-          <a:lstStyle/>
-          <a:p>
-            <a:pPr marL="0" indent="0">
-              <a:buNone/>
-            </a:pPr>
-            <a:r>
-              <a:rPr lang="en-US" sz="1300" b="1" dirty="0">
-                <a:solidFill>
-                  <a:srgbClr val="FFCD00"/>
-                </a:solidFill>
-                <a:latin typeface="Arial Black" pitchFamily="34" charset="0"/>
-                <a:ea typeface="Arial Black" pitchFamily="34" charset="-122"/>
-                <a:cs typeface="Arial Black" pitchFamily="34" charset="-120"/>
-              </a:rPr>
-              <a:t>역삼 택시  ·  Digital Twin</a:t>
-            </a:r>
-            <a:endParaRPr lang="en-US" sz="1300" dirty="0"/>
-          </a:p>
-        </p:txBody>
-      </p:sp>
-      <p:sp>
-        <p:nvSpPr>
-          <p:cNvPr id="4" name="Text 2"/>
-          <p:cNvSpPr/>
-          <p:nvPr/>
-        </p:nvSpPr>
-        <p:spPr>
-          <a:xfrm>
-            <a:off x="6400800" y="91440"/>
-            <a:ext cx="2560320" cy="411480"/>
-          </a:xfrm>
-          <a:prstGeom prst="rect">
-            <a:avLst/>
-          </a:prstGeom>
-          <a:noFill/>
-          <a:ln/>
-        </p:spPr>
-        <p:txBody>
-          <a:bodyPr wrap="square" lIns="0" tIns="0" rIns="0" bIns="0" rtlCol="0" anchor="ctr"/>
-          <a:lstStyle/>
-          <a:p>
-            <a:pPr marL="0" indent="0" algn="r">
-              <a:buNone/>
-            </a:pPr>
-            <a:r>
-              <a:rPr lang="en-US" sz="1200" dirty="0">
-                <a:solidFill>
-                  <a:srgbClr val="FFFFFF"/>
-                </a:solidFill>
-                <a:latin typeface="Arial" pitchFamily="34" charset="0"/>
-                <a:ea typeface="Arial" pitchFamily="34" charset="-122"/>
-                <a:cs typeface="Arial" pitchFamily="34" charset="-120"/>
-              </a:rPr>
-              <a:t>목차</a:t>
-            </a:r>
-            <a:endParaRPr lang="en-US" sz="1200" dirty="0"/>
-          </a:p>
-        </p:txBody>
-      </p:sp>
-      <p:sp>
-        <p:nvSpPr>
-          <p:cNvPr id="5" name="Shape 3"/>
-          <p:cNvSpPr/>
-          <p:nvPr/>
-        </p:nvSpPr>
-        <p:spPr>
-          <a:xfrm>
-            <a:off x="0" y="4892040"/>
-            <a:ext cx="9144000" cy="256032"/>
-          </a:xfrm>
-          <a:prstGeom prst="rect">
-            <a:avLst/>
-          </a:prstGeom>
-          <a:solidFill>
-            <a:srgbClr val="FFCD00"/>
-          </a:solidFill>
-          <a:ln w="12700">
-            <a:solidFill>
-              <a:srgbClr val="FFCD00"/>
-            </a:solidFill>
-            <a:prstDash val="solid"/>
-          </a:ln>
-        </p:spPr>
-      </p:sp>
-      <p:sp>
-        <p:nvSpPr>
-          <p:cNvPr id="6" name="Text 4"/>
-          <p:cNvSpPr/>
-          <p:nvPr/>
-        </p:nvSpPr>
-        <p:spPr>
-          <a:xfrm>
-            <a:off x="457200" y="777240"/>
-            <a:ext cx="8229600" cy="640080"/>
-          </a:xfrm>
-          <a:prstGeom prst="rect">
-            <a:avLst/>
-          </a:prstGeom>
-          <a:noFill/>
-          <a:ln/>
-        </p:spPr>
-        <p:txBody>
-          <a:bodyPr wrap="square" lIns="0" tIns="0" rIns="0" bIns="0" rtlCol="0" anchor="ctr"/>
-          <a:lstStyle/>
-          <a:p>
-            <a:pPr marL="0" indent="0">
-              <a:buNone/>
-            </a:pPr>
-            <a:r>
-              <a:rPr sz="2800" b="1">
-                <a:latin typeface="Malgun Gothic"/>
-              </a:rPr>
-              <a:t>발표 흐름</a:t>
-            </a:r>
-            <a:endParaRPr lang="en-US" sz="3000" dirty="0"/>
-          </a:p>
-        </p:txBody>
-      </p:sp>
-      <p:sp>
-        <p:nvSpPr>
-          <p:cNvPr id="7" name="Shape 5"/>
-          <p:cNvSpPr/>
-          <p:nvPr/>
-        </p:nvSpPr>
-        <p:spPr>
-          <a:xfrm>
-            <a:off x="365760" y="1691640"/>
-            <a:ext cx="3977640" cy="1188720"/>
-          </a:xfrm>
-          <a:prstGeom prst="rect">
-            <a:avLst/>
-          </a:prstGeom>
-          <a:solidFill>
-            <a:srgbClr val="1A1A1A"/>
-          </a:solidFill>
-          <a:ln w="12700">
-            <a:solidFill>
-              <a:srgbClr val="1A1A1A"/>
-            </a:solidFill>
-            <a:prstDash val="solid"/>
-          </a:ln>
-          <a:effectLst>
-            <a:outerShdw blurRad="101600" dist="25400" dir="8100000" algn="bl" rotWithShape="0">
-              <a:srgbClr val="000000">
-                <a:alpha val="12000"/>
-              </a:srgbClr>
-            </a:outerShdw>
-          </a:effectLst>
-        </p:spPr>
-      </p:sp>
-      <p:sp>
-        <p:nvSpPr>
-          <p:cNvPr id="8" name="Shape 6"/>
-          <p:cNvSpPr/>
-          <p:nvPr/>
-        </p:nvSpPr>
-        <p:spPr>
-          <a:xfrm>
-            <a:off x="365760" y="1691640"/>
-            <a:ext cx="3977640" cy="91440"/>
-          </a:xfrm>
-          <a:prstGeom prst="rect">
-            <a:avLst/>
-          </a:prstGeom>
-          <a:solidFill>
-            <a:srgbClr val="FFCD00"/>
-          </a:solidFill>
-          <a:ln w="12700">
-            <a:solidFill>
-              <a:srgbClr val="FFCD00"/>
-            </a:solidFill>
-            <a:prstDash val="solid"/>
-          </a:ln>
-        </p:spPr>
-      </p:sp>
-      <p:sp>
-        <p:nvSpPr>
-          <p:cNvPr id="9" name="Text 7"/>
-          <p:cNvSpPr/>
-          <p:nvPr/>
-        </p:nvSpPr>
-        <p:spPr>
-          <a:xfrm>
-            <a:off x="530352" y="1783080"/>
-            <a:ext cx="822960" cy="502920"/>
-          </a:xfrm>
-          <a:prstGeom prst="rect">
-            <a:avLst/>
-          </a:prstGeom>
-          <a:noFill/>
-          <a:ln/>
-        </p:spPr>
-        <p:txBody>
-          <a:bodyPr wrap="square" lIns="0" tIns="0" rIns="0" bIns="0" rtlCol="0" anchor="ctr"/>
-          <a:lstStyle/>
-          <a:p>
-            <a:pPr marL="0" indent="0">
-              <a:buNone/>
-            </a:pPr>
-            <a:r>
-              <a:rPr lang="en-US" sz="3000" b="1" dirty="0">
-                <a:solidFill>
-                  <a:srgbClr val="FFCD00"/>
-                </a:solidFill>
-                <a:latin typeface="Arial Black" pitchFamily="34" charset="0"/>
-                <a:ea typeface="Arial Black" pitchFamily="34" charset="-122"/>
-                <a:cs typeface="Arial Black" pitchFamily="34" charset="-120"/>
-              </a:rPr>
-              <a:t>01</a:t>
-            </a:r>
-            <a:endParaRPr lang="en-US" sz="3000" dirty="0"/>
-          </a:p>
-        </p:txBody>
-      </p:sp>
-      <p:sp>
-        <p:nvSpPr>
-          <p:cNvPr id="10" name="Text 8"/>
-          <p:cNvSpPr/>
-          <p:nvPr/>
-        </p:nvSpPr>
-        <p:spPr>
-          <a:xfrm>
-            <a:off x="530352" y="2286000"/>
-            <a:ext cx="3566160" cy="320040"/>
-          </a:xfrm>
-          <a:prstGeom prst="rect">
-            <a:avLst/>
-          </a:prstGeom>
-          <a:noFill/>
-          <a:ln/>
-        </p:spPr>
-        <p:txBody>
-          <a:bodyPr wrap="square" lIns="0" tIns="0" rIns="0" bIns="0" rtlCol="0" anchor="ctr"/>
-          <a:lstStyle/>
-          <a:p>
-            <a:pPr marL="0" indent="0">
-              <a:buNone/>
-            </a:pPr>
-            <a:r>
-              <a:rPr sz="1500" b="1">
-                <a:latin typeface="Malgun Gothic"/>
-              </a:rPr>
-              <a:t>프로젝트 개요·변경점</a:t>
-            </a:r>
-            <a:endParaRPr lang="en-US" sz="1400" dirty="0"/>
-          </a:p>
-        </p:txBody>
-      </p:sp>
-      <p:sp>
-        <p:nvSpPr>
-          <p:cNvPr id="11" name="Text 9"/>
-          <p:cNvSpPr/>
-          <p:nvPr/>
-        </p:nvSpPr>
-        <p:spPr>
-          <a:xfrm>
-            <a:off x="530352" y="2587752"/>
-            <a:ext cx="3566160" cy="256032"/>
-          </a:xfrm>
-          <a:prstGeom prst="rect">
-            <a:avLst/>
-          </a:prstGeom>
-          <a:noFill/>
-          <a:ln/>
-        </p:spPr>
-        <p:txBody>
-          <a:bodyPr wrap="square" lIns="0" tIns="0" rIns="0" bIns="0" rtlCol="0" anchor="ctr"/>
-          <a:lstStyle/>
-          <a:p>
-            <a:pPr marL="0" indent="0">
-              <a:buNone/>
-            </a:pPr>
-            <a:r>
-              <a:rPr sz="1050">
-                <a:latin typeface="Malgun Gothic"/>
-              </a:rPr>
-              <a:t>1~4: 문제 정의와 범위 변경</a:t>
-            </a:r>
-            <a:endParaRPr lang="en-US" sz="1100" dirty="0"/>
-          </a:p>
-        </p:txBody>
-      </p:sp>
-      <p:sp>
-        <p:nvSpPr>
-          <p:cNvPr id="12" name="Shape 10"/>
-          <p:cNvSpPr/>
-          <p:nvPr/>
-        </p:nvSpPr>
-        <p:spPr>
-          <a:xfrm>
-            <a:off x="4754880" y="1691640"/>
-            <a:ext cx="3977640" cy="1188720"/>
-          </a:xfrm>
-          <a:prstGeom prst="rect">
-            <a:avLst/>
-          </a:prstGeom>
-          <a:solidFill>
-            <a:srgbClr val="F2F2F2"/>
-          </a:solidFill>
-          <a:ln w="12700">
-            <a:solidFill>
-              <a:srgbClr val="F2F2F2"/>
-            </a:solidFill>
-            <a:prstDash val="solid"/>
-          </a:ln>
-          <a:effectLst>
-            <a:outerShdw blurRad="101600" dist="25400" dir="8100000" algn="bl" rotWithShape="0">
-              <a:srgbClr val="000000">
-                <a:alpha val="12000"/>
-              </a:srgbClr>
-            </a:outerShdw>
-          </a:effectLst>
-        </p:spPr>
-      </p:sp>
-      <p:sp>
-        <p:nvSpPr>
-          <p:cNvPr id="13" name="Shape 11"/>
-          <p:cNvSpPr/>
-          <p:nvPr/>
-        </p:nvSpPr>
-        <p:spPr>
-          <a:xfrm>
-            <a:off x="4754880" y="1691640"/>
-            <a:ext cx="3977640" cy="91440"/>
-          </a:xfrm>
-          <a:prstGeom prst="rect">
-            <a:avLst/>
-          </a:prstGeom>
-          <a:solidFill>
-            <a:srgbClr val="FFCD00"/>
-          </a:solidFill>
-          <a:ln w="12700">
-            <a:solidFill>
-              <a:srgbClr val="FFCD00"/>
-            </a:solidFill>
-            <a:prstDash val="solid"/>
-          </a:ln>
-        </p:spPr>
-      </p:sp>
-      <p:sp>
-        <p:nvSpPr>
-          <p:cNvPr id="14" name="Text 12"/>
-          <p:cNvSpPr/>
-          <p:nvPr/>
-        </p:nvSpPr>
-        <p:spPr>
-          <a:xfrm>
-            <a:off x="4919472" y="1783080"/>
-            <a:ext cx="822960" cy="502920"/>
-          </a:xfrm>
-          <a:prstGeom prst="rect">
-            <a:avLst/>
-          </a:prstGeom>
-          <a:noFill/>
-          <a:ln/>
-        </p:spPr>
-        <p:txBody>
-          <a:bodyPr wrap="square" lIns="0" tIns="0" rIns="0" bIns="0" rtlCol="0" anchor="ctr"/>
-          <a:lstStyle/>
-          <a:p>
-            <a:pPr marL="0" indent="0">
-              <a:buNone/>
-            </a:pPr>
-            <a:r>
-              <a:rPr lang="en-US" sz="3000" b="1" dirty="0">
-                <a:solidFill>
-                  <a:srgbClr val="1A1A1A"/>
-                </a:solidFill>
-                <a:latin typeface="Arial Black" pitchFamily="34" charset="0"/>
-                <a:ea typeface="Arial Black" pitchFamily="34" charset="-122"/>
-                <a:cs typeface="Arial Black" pitchFamily="34" charset="-120"/>
-              </a:rPr>
-              <a:t>02</a:t>
-            </a:r>
-            <a:endParaRPr lang="en-US" sz="3000" dirty="0"/>
-          </a:p>
-        </p:txBody>
-      </p:sp>
-      <p:sp>
-        <p:nvSpPr>
-          <p:cNvPr id="15" name="Text 13"/>
-          <p:cNvSpPr/>
-          <p:nvPr/>
-        </p:nvSpPr>
-        <p:spPr>
-          <a:xfrm>
-            <a:off x="4919472" y="2286000"/>
-            <a:ext cx="3566160" cy="320040"/>
-          </a:xfrm>
-          <a:prstGeom prst="rect">
-            <a:avLst/>
-          </a:prstGeom>
-          <a:noFill/>
-          <a:ln/>
-        </p:spPr>
-        <p:txBody>
-          <a:bodyPr wrap="square" lIns="0" tIns="0" rIns="0" bIns="0" rtlCol="0" anchor="ctr"/>
-          <a:lstStyle/>
-          <a:p>
-            <a:pPr marL="0" indent="0">
-              <a:buNone/>
-            </a:pPr>
-            <a:r>
-              <a:rPr sz="1500" b="1">
-                <a:latin typeface="Malgun Gothic"/>
-              </a:rPr>
-              <a:t>지도 구현·배포</a:t>
-            </a:r>
-            <a:endParaRPr lang="en-US" sz="1400" dirty="0"/>
-          </a:p>
-        </p:txBody>
-      </p:sp>
-      <p:sp>
-        <p:nvSpPr>
-          <p:cNvPr id="16" name="Text 14"/>
-          <p:cNvSpPr/>
-          <p:nvPr/>
-        </p:nvSpPr>
-        <p:spPr>
-          <a:xfrm>
-            <a:off x="4919472" y="2587752"/>
-            <a:ext cx="3566160" cy="256032"/>
-          </a:xfrm>
-          <a:prstGeom prst="rect">
-            <a:avLst/>
-          </a:prstGeom>
-          <a:noFill/>
-          <a:ln/>
-        </p:spPr>
-        <p:txBody>
-          <a:bodyPr wrap="square" lIns="0" tIns="0" rIns="0" bIns="0" rtlCol="0" anchor="ctr"/>
-          <a:lstStyle/>
-          <a:p>
-            <a:pPr marL="0" indent="0">
-              <a:buNone/>
-            </a:pPr>
-            <a:r>
-              <a:rPr sz="1050">
-                <a:latin typeface="Malgun Gothic"/>
-              </a:rPr>
-              <a:t>5~8: OSM·Three.js·Cloudflare</a:t>
-            </a:r>
-            <a:endParaRPr lang="en-US" sz="1100" dirty="0"/>
-          </a:p>
-        </p:txBody>
-      </p:sp>
-      <p:sp>
-        <p:nvSpPr>
-          <p:cNvPr id="17" name="Shape 15"/>
-          <p:cNvSpPr/>
-          <p:nvPr/>
-        </p:nvSpPr>
-        <p:spPr>
-          <a:xfrm>
-            <a:off x="365760" y="3108960"/>
-            <a:ext cx="3977640" cy="1188720"/>
-          </a:xfrm>
-          <a:prstGeom prst="rect">
-            <a:avLst/>
-          </a:prstGeom>
-          <a:solidFill>
-            <a:srgbClr val="1A1A1A"/>
-          </a:solidFill>
-          <a:ln w="12700">
-            <a:solidFill>
-              <a:srgbClr val="1A1A1A"/>
-            </a:solidFill>
-            <a:prstDash val="solid"/>
-          </a:ln>
-          <a:effectLst>
-            <a:outerShdw blurRad="101600" dist="25400" dir="8100000" algn="bl" rotWithShape="0">
-              <a:srgbClr val="000000">
-                <a:alpha val="12000"/>
-              </a:srgbClr>
-            </a:outerShdw>
-          </a:effectLst>
-        </p:spPr>
-      </p:sp>
-      <p:sp>
-        <p:nvSpPr>
-          <p:cNvPr id="18" name="Shape 16"/>
-          <p:cNvSpPr/>
-          <p:nvPr/>
-        </p:nvSpPr>
-        <p:spPr>
-          <a:xfrm>
-            <a:off x="365760" y="3108960"/>
-            <a:ext cx="3977640" cy="91440"/>
-          </a:xfrm>
-          <a:prstGeom prst="rect">
-            <a:avLst/>
-          </a:prstGeom>
-          <a:solidFill>
-            <a:srgbClr val="FFCD00"/>
-          </a:solidFill>
-          <a:ln w="12700">
-            <a:solidFill>
-              <a:srgbClr val="FFCD00"/>
-            </a:solidFill>
-            <a:prstDash val="solid"/>
-          </a:ln>
-        </p:spPr>
-      </p:sp>
-      <p:sp>
-        <p:nvSpPr>
-          <p:cNvPr id="19" name="Text 17"/>
-          <p:cNvSpPr/>
-          <p:nvPr/>
-        </p:nvSpPr>
-        <p:spPr>
-          <a:xfrm>
-            <a:off x="530352" y="3200400"/>
-            <a:ext cx="822960" cy="502920"/>
-          </a:xfrm>
-          <a:prstGeom prst="rect">
-            <a:avLst/>
-          </a:prstGeom>
-          <a:noFill/>
-          <a:ln/>
-        </p:spPr>
-        <p:txBody>
-          <a:bodyPr wrap="square" lIns="0" tIns="0" rIns="0" bIns="0" rtlCol="0" anchor="ctr"/>
-          <a:lstStyle/>
-          <a:p>
-            <a:pPr marL="0" indent="0">
-              <a:buNone/>
-            </a:pPr>
-            <a:r>
-              <a:rPr lang="en-US" sz="3000" b="1" dirty="0">
-                <a:solidFill>
-                  <a:srgbClr val="FFCD00"/>
-                </a:solidFill>
-                <a:latin typeface="Arial Black" pitchFamily="34" charset="0"/>
-                <a:ea typeface="Arial Black" pitchFamily="34" charset="-122"/>
-                <a:cs typeface="Arial Black" pitchFamily="34" charset="-120"/>
-              </a:rPr>
-              <a:t>03</a:t>
-            </a:r>
-            <a:endParaRPr lang="en-US" sz="3000" dirty="0"/>
-          </a:p>
-        </p:txBody>
-      </p:sp>
-      <p:sp>
-        <p:nvSpPr>
-          <p:cNvPr id="20" name="Text 18"/>
-          <p:cNvSpPr/>
-          <p:nvPr/>
-        </p:nvSpPr>
-        <p:spPr>
-          <a:xfrm>
-            <a:off x="530352" y="3703320"/>
-            <a:ext cx="3566160" cy="320040"/>
-          </a:xfrm>
-          <a:prstGeom prst="rect">
-            <a:avLst/>
-          </a:prstGeom>
-          <a:noFill/>
-          <a:ln/>
-        </p:spPr>
-        <p:txBody>
-          <a:bodyPr wrap="square" lIns="0" tIns="0" rIns="0" bIns="0" rtlCol="0" anchor="ctr"/>
-          <a:lstStyle/>
-          <a:p>
-            <a:pPr marL="0" indent="0">
-              <a:buNone/>
-            </a:pPr>
-            <a:r>
-              <a:rPr sz="1500" b="1">
-                <a:latin typeface="Malgun Gothic"/>
-              </a:rPr>
-              <a:t>데이터 수집·모델</a:t>
-            </a:r>
-            <a:endParaRPr lang="en-US" sz="1400" dirty="0"/>
-          </a:p>
-        </p:txBody>
-      </p:sp>
-      <p:sp>
-        <p:nvSpPr>
-          <p:cNvPr id="21" name="Text 19"/>
-          <p:cNvSpPr/>
-          <p:nvPr/>
-        </p:nvSpPr>
-        <p:spPr>
-          <a:xfrm>
-            <a:off x="530352" y="4005072"/>
-            <a:ext cx="3566160" cy="256032"/>
-          </a:xfrm>
-          <a:prstGeom prst="rect">
-            <a:avLst/>
-          </a:prstGeom>
-          <a:noFill/>
-          <a:ln/>
-        </p:spPr>
-        <p:txBody>
-          <a:bodyPr wrap="square" lIns="0" tIns="0" rIns="0" bIns="0" rtlCol="0" anchor="ctr"/>
-          <a:lstStyle/>
-          <a:p>
-            <a:pPr marL="0" indent="0">
-              <a:buNone/>
-            </a:pPr>
-            <a:r>
-              <a:rPr sz="1050">
-                <a:latin typeface="Malgun Gothic"/>
-              </a:rPr>
-              <a:t>9~11: proxy 데이터와 Colab 결과</a:t>
-            </a:r>
-            <a:endParaRPr lang="en-US" sz="1100" dirty="0"/>
-          </a:p>
-        </p:txBody>
-      </p:sp>
-      <p:sp>
-        <p:nvSpPr>
-          <p:cNvPr id="22" name="Shape 20"/>
-          <p:cNvSpPr/>
-          <p:nvPr/>
-        </p:nvSpPr>
-        <p:spPr>
-          <a:xfrm>
-            <a:off x="4754880" y="3108960"/>
-            <a:ext cx="3977640" cy="1188720"/>
-          </a:xfrm>
-          <a:prstGeom prst="rect">
-            <a:avLst/>
-          </a:prstGeom>
-          <a:solidFill>
-            <a:srgbClr val="F2F2F2"/>
-          </a:solidFill>
-          <a:ln w="12700">
-            <a:solidFill>
-              <a:srgbClr val="F2F2F2"/>
-            </a:solidFill>
-            <a:prstDash val="solid"/>
-          </a:ln>
-          <a:effectLst>
-            <a:outerShdw blurRad="101600" dist="25400" dir="8100000" algn="bl" rotWithShape="0">
-              <a:srgbClr val="000000">
-                <a:alpha val="12000"/>
-              </a:srgbClr>
-            </a:outerShdw>
-          </a:effectLst>
-        </p:spPr>
-      </p:sp>
-      <p:sp>
-        <p:nvSpPr>
-          <p:cNvPr id="23" name="Shape 21"/>
-          <p:cNvSpPr/>
-          <p:nvPr/>
-        </p:nvSpPr>
-        <p:spPr>
-          <a:xfrm>
-            <a:off x="4754880" y="3108960"/>
-            <a:ext cx="3977640" cy="91440"/>
-          </a:xfrm>
-          <a:prstGeom prst="rect">
-            <a:avLst/>
-          </a:prstGeom>
-          <a:solidFill>
-            <a:srgbClr val="FFCD00"/>
-          </a:solidFill>
-          <a:ln w="12700">
-            <a:solidFill>
-              <a:srgbClr val="FFCD00"/>
-            </a:solidFill>
-            <a:prstDash val="solid"/>
-          </a:ln>
-        </p:spPr>
-      </p:sp>
-      <p:sp>
-        <p:nvSpPr>
-          <p:cNvPr id="24" name="Text 22"/>
-          <p:cNvSpPr/>
-          <p:nvPr/>
-        </p:nvSpPr>
-        <p:spPr>
-          <a:xfrm>
-            <a:off x="4919472" y="3200400"/>
-            <a:ext cx="822960" cy="502920"/>
-          </a:xfrm>
-          <a:prstGeom prst="rect">
-            <a:avLst/>
-          </a:prstGeom>
-          <a:noFill/>
-          <a:ln/>
-        </p:spPr>
-        <p:txBody>
-          <a:bodyPr wrap="square" lIns="0" tIns="0" rIns="0" bIns="0" rtlCol="0" anchor="ctr"/>
-          <a:lstStyle/>
-          <a:p>
-            <a:pPr marL="0" indent="0">
-              <a:buNone/>
-            </a:pPr>
-            <a:r>
-              <a:rPr lang="en-US" sz="3000" b="1" dirty="0">
-                <a:solidFill>
-                  <a:srgbClr val="1A1A1A"/>
-                </a:solidFill>
-                <a:latin typeface="Arial Black" pitchFamily="34" charset="0"/>
-                <a:ea typeface="Arial Black" pitchFamily="34" charset="-122"/>
-                <a:cs typeface="Arial Black" pitchFamily="34" charset="-120"/>
-              </a:rPr>
-              <a:t>04</a:t>
-            </a:r>
-            <a:endParaRPr lang="en-US" sz="3000" dirty="0"/>
-          </a:p>
-        </p:txBody>
-      </p:sp>
-      <p:sp>
-        <p:nvSpPr>
-          <p:cNvPr id="25" name="Text 23"/>
-          <p:cNvSpPr/>
-          <p:nvPr/>
-        </p:nvSpPr>
-        <p:spPr>
-          <a:xfrm>
-            <a:off x="4919472" y="3703320"/>
-            <a:ext cx="3566160" cy="320040"/>
-          </a:xfrm>
-          <a:prstGeom prst="rect">
-            <a:avLst/>
-          </a:prstGeom>
-          <a:noFill/>
-          <a:ln/>
-        </p:spPr>
-        <p:txBody>
-          <a:bodyPr wrap="square" lIns="0" tIns="0" rIns="0" bIns="0" rtlCol="0" anchor="ctr"/>
-          <a:lstStyle/>
-          <a:p>
-            <a:pPr marL="0" indent="0">
-              <a:buNone/>
-            </a:pPr>
-            <a:r>
-              <a:rPr sz="1500" b="1">
-                <a:latin typeface="Malgun Gothic"/>
-              </a:rPr>
-              <a:t>서비스 연결·한계</a:t>
-            </a:r>
-            <a:endParaRPr lang="en-US" sz="1400" dirty="0"/>
-          </a:p>
-        </p:txBody>
-      </p:sp>
-      <p:sp>
-        <p:nvSpPr>
-          <p:cNvPr id="26" name="Text 24"/>
-          <p:cNvSpPr/>
-          <p:nvPr/>
-        </p:nvSpPr>
-        <p:spPr>
-          <a:xfrm>
-            <a:off x="4919472" y="4005072"/>
-            <a:ext cx="3566160" cy="256032"/>
-          </a:xfrm>
-          <a:prstGeom prst="rect">
-            <a:avLst/>
-          </a:prstGeom>
-          <a:noFill/>
-          <a:ln/>
-        </p:spPr>
-        <p:txBody>
-          <a:bodyPr wrap="square" lIns="0" tIns="0" rIns="0" bIns="0" rtlCol="0" anchor="ctr"/>
-          <a:lstStyle/>
-          <a:p>
-            <a:pPr marL="0" indent="0">
-              <a:buNone/>
-            </a:pPr>
-            <a:r>
-              <a:rPr sz="1050">
-                <a:latin typeface="Malgun Gothic"/>
-              </a:rPr>
-              <a:t>12~14: 프로토타입과 다음 단계</a:t>
-            </a:r>
-            <a:endParaRPr lang="en-US" sz="1100" dirty="0"/>
-          </a:p>
-        </p:txBody>
-      </p:sp>
-    </p:spTree>
-  </p:cSld>
-  <p:clrMapOvr>
-    <a:masterClrMapping/>
-  </p:clrMapOvr>
-</p:sld>
+<ns0:sld xmlns:ns0="http://schemas.openxmlformats.org/presentationml/2006/main" xmlns:ns1="http://schemas.openxmlformats.org/drawingml/2006/main">
+  <ns0:cSld name="Slide 2">
+    <ns0:bg>
+      <ns0:bgPr>
+        <ns1:solidFill>
+          <ns1:srgbClr val="FFFFFF"/>
+        </ns1:solidFill>
+        <ns1:effectLst/>
+      </ns0:bgPr>
+    </ns0:bg>
+    <ns0:spTree>
+      <ns0:nvGrpSpPr>
+        <ns0:cNvPr id="1" name=""/>
+        <ns0:cNvGrpSpPr/>
+        <ns0:nvPr/>
+      </ns0:nvGrpSpPr>
+      <ns0:grpSpPr>
+        <ns1:xfrm>
+          <ns1:off x="0" y="0"/>
+          <ns1:ext cx="0" cy="0"/>
+          <ns1:chOff x="0" y="0"/>
+          <ns1:chExt cx="0" cy="0"/>
+        </ns1:xfrm>
+      </ns0:grpSpPr>
+      <ns0:sp>
+        <ns0:nvSpPr>
+          <ns0:cNvPr id="2" name="Shape 0"/>
+          <ns0:cNvSpPr/>
+          <ns0:nvPr/>
+        </ns0:nvSpPr>
+        <ns0:spPr>
+          <ns1:xfrm>
+            <ns1:off x="0" y="0"/>
+            <ns1:ext cx="9144000" cy="594360"/>
+          </ns1:xfrm>
+          <ns1:prstGeom prst="rect">
+            <ns1:avLst/>
+          </ns1:prstGeom>
+          <ns1:solidFill>
+            <ns1:srgbClr val="1A1A1A"/>
+          </ns1:solidFill>
+          <ns1:ln w="12700">
+            <ns1:solidFill>
+              <ns1:srgbClr val="1A1A1A"/>
+            </ns1:solidFill>
+            <ns1:prstDash val="solid"/>
+          </ns1:ln>
+        </ns0:spPr>
+        <ns0:txBody>
+          <ns1:bodyPr/>
+          <ns1:lstStyle/>
+          <ns1:p>
+            <ns1:endParaRPr lang="ko-KR" altLang="en-US"/>
+          </ns1:p>
+        </ns0:txBody>
+      </ns0:sp>
+      <ns0:sp>
+        <ns0:nvSpPr>
+          <ns0:cNvPr id="3" name="Text 1"/>
+          <ns0:cNvSpPr/>
+          <ns0:nvPr/>
+        </ns0:nvSpPr>
+        <ns0:spPr>
+          <ns1:xfrm>
+            <ns1:off x="365760" y="91440"/>
+            <ns1:ext cx="4572000" cy="411480"/>
+          </ns1:xfrm>
+          <ns1:prstGeom prst="rect">
+            <ns1:avLst/>
+          </ns1:prstGeom>
+          <ns1:noFill/>
+          <ns1:ln/>
+        </ns0:spPr>
+        <ns0:txBody>
+          <ns1:bodyPr wrap="square" lIns="0" tIns="0" rIns="0" bIns="0" rtlCol="0" anchor="ctr"/>
+          <ns1:lstStyle/>
+          <ns1:p>
+            <ns1:pPr marL="0" indent="0">
+              <ns1:buNone/>
+            </ns1:pPr>
+            <ns1:r>
+              <ns1:rPr lang="en-US" sz="1300" b="1" dirty="0">
+                <ns1:solidFill>
+                  <ns1:srgbClr val="FFCD00"/>
+                </ns1:solidFill>
+                <ns1:latin typeface="Arial Black" pitchFamily="34" charset="0"/>
+                <ns1:ea typeface="Arial Black" pitchFamily="34" charset="-122"/>
+                <ns1:cs typeface="Arial Black" pitchFamily="34" charset="-120"/>
+              </ns1:rPr>
+              <ns1:t>역삼 택시  ·  Digital Twin</ns1:t>
+            </ns1:r>
+            <ns1:endParaRPr lang="en-US" sz="1300" dirty="0"/>
+          </ns1:p>
+        </ns0:txBody>
+      </ns0:sp>
+      <ns0:sp>
+        <ns0:nvSpPr>
+          <ns0:cNvPr id="4" name="Text 2"/>
+          <ns0:cNvSpPr/>
+          <ns0:nvPr/>
+        </ns0:nvSpPr>
+        <ns0:spPr>
+          <ns1:xfrm>
+            <ns1:off x="6400800" y="91440"/>
+            <ns1:ext cx="2560320" cy="411480"/>
+          </ns1:xfrm>
+          <ns1:prstGeom prst="rect">
+            <ns1:avLst/>
+          </ns1:prstGeom>
+          <ns1:noFill/>
+          <ns1:ln/>
+        </ns0:spPr>
+        <ns0:txBody>
+          <ns1:bodyPr wrap="square" lIns="0" tIns="0" rIns="0" bIns="0" rtlCol="0" anchor="ctr"/>
+          <ns1:lstStyle/>
+          <ns1:p>
+            <ns1:pPr marL="0" indent="0" algn="r">
+              <ns1:buNone/>
+            </ns1:pPr>
+            <ns1:r>
+              <ns1:rPr lang="en-US" sz="1200" dirty="0">
+                <ns1:solidFill>
+                  <ns1:srgbClr val="FFFFFF"/>
+                </ns1:solidFill>
+                <ns1:latin typeface="Arial" pitchFamily="34" charset="0"/>
+                <ns1:ea typeface="Arial" pitchFamily="34" charset="-122"/>
+                <ns1:cs typeface="Arial" pitchFamily="34" charset="-120"/>
+              </ns1:rPr>
+              <ns1:t>목차</ns1:t>
+            </ns1:r>
+            <ns1:endParaRPr lang="en-US" sz="1200" dirty="0"/>
+          </ns1:p>
+        </ns0:txBody>
+      </ns0:sp>
+      <ns0:sp>
+        <ns0:nvSpPr>
+          <ns0:cNvPr id="5" name="Shape 3"/>
+          <ns0:cNvSpPr/>
+          <ns0:nvPr/>
+        </ns0:nvSpPr>
+        <ns0:spPr>
+          <ns1:xfrm>
+            <ns1:off x="0" y="4892040"/>
+            <ns1:ext cx="9144000" cy="256032"/>
+          </ns1:xfrm>
+          <ns1:prstGeom prst="rect">
+            <ns1:avLst/>
+          </ns1:prstGeom>
+          <ns1:solidFill>
+            <ns1:srgbClr val="FFCD00"/>
+          </ns1:solidFill>
+          <ns1:ln w="12700">
+            <ns1:solidFill>
+              <ns1:srgbClr val="FFCD00"/>
+            </ns1:solidFill>
+            <ns1:prstDash val="solid"/>
+          </ns1:ln>
+        </ns0:spPr>
+        <ns0:txBody>
+          <ns1:bodyPr/>
+          <ns1:lstStyle/>
+          <ns1:p>
+            <ns1:endParaRPr lang="ko-KR" altLang="en-US"/>
+          </ns1:p>
+        </ns0:txBody>
+      </ns0:sp>
+      <ns0:sp>
+        <ns0:nvSpPr>
+          <ns0:cNvPr id="6" name="Text 4"/>
+          <ns0:cNvSpPr/>
+          <ns0:nvPr/>
+        </ns0:nvSpPr>
+        <ns0:spPr>
+          <ns1:xfrm>
+            <ns1:off x="457200" y="777240"/>
+            <ns1:ext cx="8229600" cy="640080"/>
+          </ns1:xfrm>
+          <ns1:prstGeom prst="rect">
+            <ns1:avLst/>
+          </ns1:prstGeom>
+          <ns1:noFill/>
+          <ns1:ln/>
+        </ns0:spPr>
+        <ns0:txBody>
+          <ns1:bodyPr wrap="square" lIns="0" tIns="0" rIns="0" bIns="0" rtlCol="0" anchor="ctr"/>
+          <ns1:lstStyle/>
+          <ns1:p>
+            <ns1:pPr marL="0" indent="0">
+              <ns1:buNone/>
+            </ns1:pPr>
+            <ns1:r>
+              <ns1:rPr sz="2800" b="1">
+                <ns1:solidFill>
+                  <ns1:srgbClr val="1A1A1A"/>
+                </ns1:solidFill>
+                <ns1:latin typeface="Malgun Gothic"/>
+              </ns1:rPr>
+              <ns1:t>발표 흐름</ns1:t>
+            </ns1:r>
+            <ns1:endParaRPr lang="en-US" sz="3000" dirty="0"/>
+          </ns1:p>
+        </ns0:txBody>
+      </ns0:sp>
+      <ns0:sp>
+        <ns0:nvSpPr>
+          <ns0:cNvPr id="7" name="Shape 5"/>
+          <ns0:cNvSpPr/>
+          <ns0:nvPr/>
+        </ns0:nvSpPr>
+        <ns0:spPr>
+          <ns1:xfrm>
+            <ns1:off x="365760" y="1691640"/>
+            <ns1:ext cx="3977640" cy="1188720"/>
+          </ns1:xfrm>
+          <ns1:prstGeom prst="rect">
+            <ns1:avLst/>
+          </ns1:prstGeom>
+          <ns1:solidFill>
+            <ns1:srgbClr val="1A1A1A"/>
+          </ns1:solidFill>
+          <ns1:ln w="12700">
+            <ns1:solidFill>
+              <ns1:srgbClr val="1A1A1A"/>
+            </ns1:solidFill>
+            <ns1:prstDash val="solid"/>
+          </ns1:ln>
+          <ns1:effectLst>
+            <ns1:outerShdw blurRad="101600" dist="25400" dir="8100000" algn="bl" rotWithShape="0">
+              <ns1:srgbClr val="000000">
+                <ns1:alpha val="12000"/>
+              </ns1:srgbClr>
+            </ns1:outerShdw>
+          </ns1:effectLst>
+        </ns0:spPr>
+        <ns0:txBody>
+          <ns1:bodyPr/>
+          <ns1:lstStyle/>
+          <ns1:p>
+            <ns1:endParaRPr lang="ko-KR" altLang="en-US"/>
+          </ns1:p>
+        </ns0:txBody>
+      </ns0:sp>
+      <ns0:sp>
+        <ns0:nvSpPr>
+          <ns0:cNvPr id="8" name="Shape 6"/>
+          <ns0:cNvSpPr/>
+          <ns0:nvPr/>
+        </ns0:nvSpPr>
+        <ns0:spPr>
+          <ns1:xfrm>
+            <ns1:off x="365760" y="1691640"/>
+            <ns1:ext cx="3977640" cy="91440"/>
+          </ns1:xfrm>
+          <ns1:prstGeom prst="rect">
+            <ns1:avLst/>
+          </ns1:prstGeom>
+          <ns1:solidFill>
+            <ns1:srgbClr val="FFCD00"/>
+          </ns1:solidFill>
+          <ns1:ln w="12700">
+            <ns1:solidFill>
+              <ns1:srgbClr val="FFCD00"/>
+            </ns1:solidFill>
+            <ns1:prstDash val="solid"/>
+          </ns1:ln>
+        </ns0:spPr>
+        <ns0:txBody>
+          <ns1:bodyPr/>
+          <ns1:lstStyle/>
+          <ns1:p>
+            <ns1:endParaRPr lang="ko-KR" altLang="en-US"/>
+          </ns1:p>
+        </ns0:txBody>
+      </ns0:sp>
+      <ns0:sp>
+        <ns0:nvSpPr>
+          <ns0:cNvPr id="9" name="Text 7"/>
+          <ns0:cNvSpPr/>
+          <ns0:nvPr/>
+        </ns0:nvSpPr>
+        <ns0:spPr>
+          <ns1:xfrm>
+            <ns1:off x="530352" y="1783080"/>
+            <ns1:ext cx="822960" cy="502920"/>
+          </ns1:xfrm>
+          <ns1:prstGeom prst="rect">
+            <ns1:avLst/>
+          </ns1:prstGeom>
+          <ns1:noFill/>
+          <ns1:ln/>
+        </ns0:spPr>
+        <ns0:txBody>
+          <ns1:bodyPr wrap="square" lIns="0" tIns="0" rIns="0" bIns="0" rtlCol="0" anchor="ctr"/>
+          <ns1:lstStyle/>
+          <ns1:p>
+            <ns1:pPr marL="0" indent="0">
+              <ns1:buNone/>
+            </ns1:pPr>
+            <ns1:r>
+              <ns1:rPr lang="en-US" sz="3000" b="1" dirty="0">
+                <ns1:solidFill>
+                  <ns1:srgbClr val="FFCD00"/>
+                </ns1:solidFill>
+                <ns1:latin typeface="Arial Black" pitchFamily="34" charset="0"/>
+                <ns1:ea typeface="Arial Black" pitchFamily="34" charset="-122"/>
+                <ns1:cs typeface="Arial Black" pitchFamily="34" charset="-120"/>
+              </ns1:rPr>
+              <ns1:t>01</ns1:t>
+            </ns1:r>
+            <ns1:endParaRPr lang="en-US" sz="3000" dirty="0"/>
+          </ns1:p>
+        </ns0:txBody>
+      </ns0:sp>
+      <ns0:sp>
+        <ns0:nvSpPr>
+          <ns0:cNvPr id="10" name="Text 8"/>
+          <ns0:cNvSpPr/>
+          <ns0:nvPr/>
+        </ns0:nvSpPr>
+        <ns0:spPr>
+          <ns1:xfrm>
+            <ns1:off x="530352" y="2286000"/>
+            <ns1:ext cx="3566160" cy="320040"/>
+          </ns1:xfrm>
+          <ns1:prstGeom prst="rect">
+            <ns1:avLst/>
+          </ns1:prstGeom>
+          <ns1:noFill/>
+          <ns1:ln/>
+        </ns0:spPr>
+        <ns0:txBody>
+          <ns1:bodyPr wrap="square" lIns="0" tIns="0" rIns="0" bIns="0" rtlCol="0" anchor="ctr"/>
+          <ns1:lstStyle/>
+          <ns1:p>
+            <ns1:pPr marL="0" indent="0">
+              <ns1:buNone/>
+            </ns1:pPr>
+            <ns1:r>
+              <ns1:rPr sz="1500" b="1" dirty="0" err="1">
+                <ns1:solidFill>
+                  <ns1:srgbClr val="FFFFFF"/>
+                </ns1:solidFill>
+                <ns1:latin typeface="Malgun Gothic"/>
+              </ns1:rPr>
+              <ns1:t>프로젝트</ns1:t>
+            </ns1:r>
+            <ns1:r>
+              <ns1:rPr sz="1500" b="1" dirty="0">
+                <ns1:solidFill>
+                  <ns1:srgbClr val="FFFFFF"/>
+                </ns1:solidFill>
+                <ns1:latin typeface="Malgun Gothic"/>
+              </ns1:rPr>
+              <ns1:t xml:space="preserve"> </ns1:t>
+            </ns1:r>
+            <ns1:r>
+              <ns1:rPr sz="1500" b="1" dirty="0" err="1">
+                <ns1:solidFill>
+                  <ns1:srgbClr val="FFFFFF"/>
+                </ns1:solidFill>
+                <ns1:latin typeface="Malgun Gothic"/>
+              </ns1:rPr>
+              <ns1:t>개요·변경점</ns1:t>
+            </ns1:r>
+            <ns1:endParaRPr lang="en-US" sz="1400" dirty="0"/>
+          </ns1:p>
+        </ns0:txBody>
+      </ns0:sp>
+      <ns0:sp>
+        <ns0:nvSpPr>
+          <ns0:cNvPr id="11" name="Text 9"/>
+          <ns0:cNvSpPr/>
+          <ns0:nvPr/>
+        </ns0:nvSpPr>
+        <ns0:spPr>
+          <ns1:xfrm>
+            <ns1:off x="530352" y="2587752"/>
+            <ns1:ext cx="3566160" cy="256032"/>
+          </ns1:xfrm>
+          <ns1:prstGeom prst="rect">
+            <ns1:avLst/>
+          </ns1:prstGeom>
+          <ns1:noFill/>
+          <ns1:ln/>
+        </ns0:spPr>
+        <ns0:txBody>
+          <ns1:bodyPr wrap="square" lIns="0" tIns="0" rIns="0" bIns="0" rtlCol="0" anchor="ctr"/>
+          <ns1:lstStyle/>
+          <ns1:p>
+            <ns1:pPr marL="0" indent="0">
+              <ns1:buNone/>
+            </ns1:pPr>
+            <ns1:r>
+              <ns1:rPr sz="1050" dirty="0">
+                <ns1:solidFill>
+                  <ns1:srgbClr val="AAAAAA"/>
+                </ns1:solidFill>
+                <ns1:latin typeface="Malgun Gothic"/>
+              </ns1:rPr>
+              <ns1:t xml:space="preserve">1~4: </ns1:t>
+            </ns1:r>
+            <ns1:r>
+              <ns1:rPr sz="1050" dirty="0" err="1">
+                <ns1:solidFill>
+                  <ns1:srgbClr val="AAAAAA"/>
+                </ns1:solidFill>
+                <ns1:latin typeface="Malgun Gothic"/>
+              </ns1:rPr>
+              <ns1:t>문제</ns1:t>
+            </ns1:r>
+            <ns1:r>
+              <ns1:rPr sz="1050" dirty="0">
+                <ns1:solidFill>
+                  <ns1:srgbClr val="AAAAAA"/>
+                </ns1:solidFill>
+                <ns1:latin typeface="Malgun Gothic"/>
+              </ns1:rPr>
+              <ns1:t xml:space="preserve"> </ns1:t>
+            </ns1:r>
+            <ns1:r>
+              <ns1:rPr sz="1050" dirty="0" err="1">
+                <ns1:solidFill>
+                  <ns1:srgbClr val="AAAAAA"/>
+                </ns1:solidFill>
+                <ns1:latin typeface="Malgun Gothic"/>
+              </ns1:rPr>
+              <ns1:t>정의와</ns1:t>
+            </ns1:r>
+            <ns1:r>
+              <ns1:rPr sz="1050" dirty="0">
+                <ns1:solidFill>
+                  <ns1:srgbClr val="AAAAAA"/>
+                </ns1:solidFill>
+                <ns1:latin typeface="Malgun Gothic"/>
+              </ns1:rPr>
+              <ns1:t xml:space="preserve"> </ns1:t>
+            </ns1:r>
+            <ns1:r>
+              <ns1:rPr sz="1050" dirty="0" err="1">
+                <ns1:solidFill>
+                  <ns1:srgbClr val="AAAAAA"/>
+                </ns1:solidFill>
+                <ns1:latin typeface="Malgun Gothic"/>
+              </ns1:rPr>
+              <ns1:t>범위</ns1:t>
+            </ns1:r>
+            <ns1:r>
+              <ns1:rPr sz="1050" dirty="0">
+                <ns1:solidFill>
+                  <ns1:srgbClr val="AAAAAA"/>
+                </ns1:solidFill>
+                <ns1:latin typeface="Malgun Gothic"/>
+              </ns1:rPr>
+              <ns1:t xml:space="preserve"> </ns1:t>
+            </ns1:r>
+            <ns1:r>
+              <ns1:rPr sz="1050" dirty="0" err="1">
+                <ns1:solidFill>
+                  <ns1:srgbClr val="AAAAAA"/>
+                </ns1:solidFill>
+                <ns1:latin typeface="Malgun Gothic"/>
+              </ns1:rPr>
+              <ns1:t>변경</ns1:t>
+            </ns1:r>
+            <ns1:endParaRPr lang="en-US" sz="1100" dirty="0"/>
+          </ns1:p>
+        </ns0:txBody>
+      </ns0:sp>
+      <ns0:sp>
+        <ns0:nvSpPr>
+          <ns0:cNvPr id="12" name="Shape 10"/>
+          <ns0:cNvSpPr/>
+          <ns0:nvPr/>
+        </ns0:nvSpPr>
+        <ns0:spPr>
+          <ns1:xfrm>
+            <ns1:off x="4754880" y="1691640"/>
+            <ns1:ext cx="3977640" cy="1188720"/>
+          </ns1:xfrm>
+          <ns1:prstGeom prst="rect">
+            <ns1:avLst/>
+          </ns1:prstGeom>
+          <ns1:solidFill>
+            <ns1:srgbClr val="F2F2F2"/>
+          </ns1:solidFill>
+          <ns1:ln w="12700">
+            <ns1:solidFill>
+              <ns1:srgbClr val="F2F2F2"/>
+            </ns1:solidFill>
+            <ns1:prstDash val="solid"/>
+          </ns1:ln>
+          <ns1:effectLst>
+            <ns1:outerShdw blurRad="101600" dist="25400" dir="8100000" algn="bl" rotWithShape="0">
+              <ns1:srgbClr val="000000">
+                <ns1:alpha val="12000"/>
+              </ns1:srgbClr>
+            </ns1:outerShdw>
+          </ns1:effectLst>
+        </ns0:spPr>
+        <ns0:txBody>
+          <ns1:bodyPr/>
+          <ns1:lstStyle/>
+          <ns1:p>
+            <ns1:endParaRPr lang="ko-KR" altLang="en-US"/>
+          </ns1:p>
+        </ns0:txBody>
+      </ns0:sp>
+      <ns0:sp>
+        <ns0:nvSpPr>
+          <ns0:cNvPr id="13" name="Shape 11"/>
+          <ns0:cNvSpPr/>
+          <ns0:nvPr/>
+        </ns0:nvSpPr>
+        <ns0:spPr>
+          <ns1:xfrm>
+            <ns1:off x="4754880" y="1691640"/>
+            <ns1:ext cx="3977640" cy="91440"/>
+          </ns1:xfrm>
+          <ns1:prstGeom prst="rect">
+            <ns1:avLst/>
+          </ns1:prstGeom>
+          <ns1:solidFill>
+            <ns1:srgbClr val="FFCD00"/>
+          </ns1:solidFill>
+          <ns1:ln w="12700">
+            <ns1:solidFill>
+              <ns1:srgbClr val="FFCD00"/>
+            </ns1:solidFill>
+            <ns1:prstDash val="solid"/>
+          </ns1:ln>
+        </ns0:spPr>
+        <ns0:txBody>
+          <ns1:bodyPr/>
+          <ns1:lstStyle/>
+          <ns1:p>
+            <ns1:endParaRPr lang="ko-KR" altLang="en-US"/>
+          </ns1:p>
+        </ns0:txBody>
+      </ns0:sp>
+      <ns0:sp>
+        <ns0:nvSpPr>
+          <ns0:cNvPr id="14" name="Text 12"/>
+          <ns0:cNvSpPr/>
+          <ns0:nvPr/>
+        </ns0:nvSpPr>
+        <ns0:spPr>
+          <ns1:xfrm>
+            <ns1:off x="4919472" y="1783080"/>
+            <ns1:ext cx="822960" cy="502920"/>
+          </ns1:xfrm>
+          <ns1:prstGeom prst="rect">
+            <ns1:avLst/>
+          </ns1:prstGeom>
+          <ns1:noFill/>
+          <ns1:ln/>
+        </ns0:spPr>
+        <ns0:txBody>
+          <ns1:bodyPr wrap="square" lIns="0" tIns="0" rIns="0" bIns="0" rtlCol="0" anchor="ctr"/>
+          <ns1:lstStyle/>
+          <ns1:p>
+            <ns1:pPr marL="0" indent="0">
+              <ns1:buNone/>
+            </ns1:pPr>
+            <ns1:r>
+              <ns1:rPr lang="en-US" sz="3000" b="1" dirty="0">
+                <ns1:solidFill>
+                  <ns1:srgbClr val="1A1A1A"/>
+                </ns1:solidFill>
+                <ns1:latin typeface="Arial Black" pitchFamily="34" charset="0"/>
+                <ns1:ea typeface="Arial Black" pitchFamily="34" charset="-122"/>
+                <ns1:cs typeface="Arial Black" pitchFamily="34" charset="-120"/>
+              </ns1:rPr>
+              <ns1:t>02</ns1:t>
+            </ns1:r>
+            <ns1:endParaRPr lang="en-US" sz="3000" dirty="0"/>
+          </ns1:p>
+        </ns0:txBody>
+      </ns0:sp>
+      <ns0:sp>
+        <ns0:nvSpPr>
+          <ns0:cNvPr id="15" name="Text 13"/>
+          <ns0:cNvSpPr/>
+          <ns0:nvPr/>
+        </ns0:nvSpPr>
+        <ns0:spPr>
+          <ns1:xfrm>
+            <ns1:off x="4919472" y="2286000"/>
+            <ns1:ext cx="3566160" cy="320040"/>
+          </ns1:xfrm>
+          <ns1:prstGeom prst="rect">
+            <ns1:avLst/>
+          </ns1:prstGeom>
+          <ns1:noFill/>
+          <ns1:ln/>
+        </ns0:spPr>
+        <ns0:txBody>
+          <ns1:bodyPr wrap="square" lIns="0" tIns="0" rIns="0" bIns="0" rtlCol="0" anchor="ctr"/>
+          <ns1:lstStyle/>
+          <ns1:p>
+            <ns1:pPr marL="0" indent="0">
+              <ns1:buNone/>
+            </ns1:pPr>
+            <ns1:r>
+              <ns1:rPr sz="1500" b="1">
+                <ns1:latin typeface="Malgun Gothic"/>
+              </ns1:rPr>
+              <ns1:t>지도 구현·배포</ns1:t>
+            </ns1:r>
+            <ns1:endParaRPr lang="en-US" sz="1400" dirty="0"/>
+          </ns1:p>
+        </ns0:txBody>
+      </ns0:sp>
+      <ns0:sp>
+        <ns0:nvSpPr>
+          <ns0:cNvPr id="16" name="Text 14"/>
+          <ns0:cNvSpPr/>
+          <ns0:nvPr/>
+        </ns0:nvSpPr>
+        <ns0:spPr>
+          <ns1:xfrm>
+            <ns1:off x="4919472" y="2587752"/>
+            <ns1:ext cx="3566160" cy="256032"/>
+          </ns1:xfrm>
+          <ns1:prstGeom prst="rect">
+            <ns1:avLst/>
+          </ns1:prstGeom>
+          <ns1:noFill/>
+          <ns1:ln/>
+        </ns0:spPr>
+        <ns0:txBody>
+          <ns1:bodyPr wrap="square" lIns="0" tIns="0" rIns="0" bIns="0" rtlCol="0" anchor="ctr"/>
+          <ns1:lstStyle/>
+          <ns1:p>
+            <ns1:pPr marL="0" indent="0">
+              <ns1:buNone/>
+            </ns1:pPr>
+            <ns1:r>
+              <ns1:rPr sz="1050">
+                <ns1:latin typeface="Malgun Gothic"/>
+              </ns1:rPr>
+              <ns1:t>5~8: OSM·Three.js·Cloudflare</ns1:t>
+            </ns1:r>
+            <ns1:endParaRPr lang="en-US" sz="1100" dirty="0"/>
+          </ns1:p>
+        </ns0:txBody>
+      </ns0:sp>
+      <ns0:sp>
+        <ns0:nvSpPr>
+          <ns0:cNvPr id="17" name="Shape 15"/>
+          <ns0:cNvSpPr/>
+          <ns0:nvPr/>
+        </ns0:nvSpPr>
+        <ns0:spPr>
+          <ns1:xfrm>
+            <ns1:off x="365760" y="3108960"/>
+            <ns1:ext cx="3977640" cy="1188720"/>
+          </ns1:xfrm>
+          <ns1:prstGeom prst="rect">
+            <ns1:avLst/>
+          </ns1:prstGeom>
+          <ns1:solidFill>
+            <ns1:srgbClr val="1A1A1A"/>
+          </ns1:solidFill>
+          <ns1:ln w="12700">
+            <ns1:solidFill>
+              <ns1:srgbClr val="1A1A1A"/>
+            </ns1:solidFill>
+            <ns1:prstDash val="solid"/>
+          </ns1:ln>
+          <ns1:effectLst>
+            <ns1:outerShdw blurRad="101600" dist="25400" dir="8100000" algn="bl" rotWithShape="0">
+              <ns1:srgbClr val="000000">
+                <ns1:alpha val="12000"/>
+              </ns1:srgbClr>
+            </ns1:outerShdw>
+          </ns1:effectLst>
+        </ns0:spPr>
+        <ns0:txBody>
+          <ns1:bodyPr/>
+          <ns1:lstStyle/>
+          <ns1:p>
+            <ns1:endParaRPr lang="ko-KR" altLang="en-US"/>
+          </ns1:p>
+        </ns0:txBody>
+      </ns0:sp>
+      <ns0:sp>
+        <ns0:nvSpPr>
+          <ns0:cNvPr id="18" name="Shape 16"/>
+          <ns0:cNvSpPr/>
+          <ns0:nvPr/>
+        </ns0:nvSpPr>
+        <ns0:spPr>
+          <ns1:xfrm>
+            <ns1:off x="365760" y="3108960"/>
+            <ns1:ext cx="3977640" cy="91440"/>
+          </ns1:xfrm>
+          <ns1:prstGeom prst="rect">
+            <ns1:avLst/>
+          </ns1:prstGeom>
+          <ns1:solidFill>
+            <ns1:srgbClr val="FFCD00"/>
+          </ns1:solidFill>
+          <ns1:ln w="12700">
+            <ns1:solidFill>
+              <ns1:srgbClr val="FFCD00"/>
+            </ns1:solidFill>
+            <ns1:prstDash val="solid"/>
+          </ns1:ln>
+        </ns0:spPr>
+        <ns0:txBody>
+          <ns1:bodyPr/>
+          <ns1:lstStyle/>
+          <ns1:p>
+            <ns1:endParaRPr lang="ko-KR" altLang="en-US"/>
+          </ns1:p>
+        </ns0:txBody>
+      </ns0:sp>
+      <ns0:sp>
+        <ns0:nvSpPr>
+          <ns0:cNvPr id="19" name="Text 17"/>
+          <ns0:cNvSpPr/>
+          <ns0:nvPr/>
+        </ns0:nvSpPr>
+        <ns0:spPr>
+          <ns1:xfrm>
+            <ns1:off x="530352" y="3200400"/>
+            <ns1:ext cx="822960" cy="502920"/>
+          </ns1:xfrm>
+          <ns1:prstGeom prst="rect">
+            <ns1:avLst/>
+          </ns1:prstGeom>
+          <ns1:noFill/>
+          <ns1:ln/>
+        </ns0:spPr>
+        <ns0:txBody>
+          <ns1:bodyPr wrap="square" lIns="0" tIns="0" rIns="0" bIns="0" rtlCol="0" anchor="ctr"/>
+          <ns1:lstStyle/>
+          <ns1:p>
+            <ns1:pPr marL="0" indent="0">
+              <ns1:buNone/>
+            </ns1:pPr>
+            <ns1:r>
+              <ns1:rPr lang="en-US" sz="3000" b="1" dirty="0">
+                <ns1:solidFill>
+                  <ns1:srgbClr val="FFCD00"/>
+                </ns1:solidFill>
+                <ns1:latin typeface="Arial Black" pitchFamily="34" charset="0"/>
+                <ns1:ea typeface="Arial Black" pitchFamily="34" charset="-122"/>
+                <ns1:cs typeface="Arial Black" pitchFamily="34" charset="-120"/>
+              </ns1:rPr>
+              <ns1:t>03</ns1:t>
+            </ns1:r>
+            <ns1:endParaRPr lang="en-US" sz="3000" dirty="0"/>
+          </ns1:p>
+        </ns0:txBody>
+      </ns0:sp>
+      <ns0:sp>
+        <ns0:nvSpPr>
+          <ns0:cNvPr id="20" name="Text 18"/>
+          <ns0:cNvSpPr/>
+          <ns0:nvPr/>
+        </ns0:nvSpPr>
+        <ns0:spPr>
+          <ns1:xfrm>
+            <ns1:off x="530352" y="3703320"/>
+            <ns1:ext cx="3566160" cy="320040"/>
+          </ns1:xfrm>
+          <ns1:prstGeom prst="rect">
+            <ns1:avLst/>
+          </ns1:prstGeom>
+          <ns1:noFill/>
+          <ns1:ln/>
+        </ns0:spPr>
+        <ns0:txBody>
+          <ns1:bodyPr wrap="square" lIns="0" tIns="0" rIns="0" bIns="0" rtlCol="0" anchor="ctr"/>
+          <ns1:lstStyle/>
+          <ns1:p>
+            <ns1:pPr marL="0" indent="0">
+              <ns1:buNone/>
+            </ns1:pPr>
+            <ns1:r>
+              <ns1:rPr sz="1500" b="1">
+                <ns1:solidFill>
+                  <ns1:srgbClr val="FFFFFF"/>
+                </ns1:solidFill>
+                <ns1:latin typeface="Malgun Gothic"/>
+              </ns1:rPr>
+              <ns1:t>데이터 수집·모델</ns1:t>
+            </ns1:r>
+            <ns1:endParaRPr lang="en-US" sz="1400" dirty="0"/>
+          </ns1:p>
+        </ns0:txBody>
+      </ns0:sp>
+      <ns0:sp>
+        <ns0:nvSpPr>
+          <ns0:cNvPr id="21" name="Text 19"/>
+          <ns0:cNvSpPr/>
+          <ns0:nvPr/>
+        </ns0:nvSpPr>
+        <ns0:spPr>
+          <ns1:xfrm>
+            <ns1:off x="530352" y="4005072"/>
+            <ns1:ext cx="3566160" cy="256032"/>
+          </ns1:xfrm>
+          <ns1:prstGeom prst="rect">
+            <ns1:avLst/>
+          </ns1:prstGeom>
+          <ns1:noFill/>
+          <ns1:ln/>
+        </ns0:spPr>
+        <ns0:txBody>
+          <ns1:bodyPr wrap="square" lIns="0" tIns="0" rIns="0" bIns="0" rtlCol="0" anchor="ctr"/>
+          <ns1:lstStyle/>
+          <ns1:p>
+            <ns1:pPr marL="0" indent="0">
+              <ns1:buNone/>
+            </ns1:pPr>
+            <ns1:r>
+              <ns1:rPr sz="1050">
+                <ns1:solidFill>
+                  <ns1:srgbClr val="AAAAAA"/>
+                </ns1:solidFill>
+                <ns1:latin typeface="Malgun Gothic"/>
+              </ns1:rPr>
+              <ns1:t>9~11: proxy 데이터와 Colab 결과</ns1:t>
+            </ns1:r>
+            <ns1:endParaRPr lang="en-US" sz="1100" dirty="0"/>
+          </ns1:p>
+        </ns0:txBody>
+      </ns0:sp>
+      <ns0:sp>
+        <ns0:nvSpPr>
+          <ns0:cNvPr id="22" name="Shape 20"/>
+          <ns0:cNvSpPr/>
+          <ns0:nvPr/>
+        </ns0:nvSpPr>
+        <ns0:spPr>
+          <ns1:xfrm>
+            <ns1:off x="4754880" y="3108960"/>
+            <ns1:ext cx="3977640" cy="1188720"/>
+          </ns1:xfrm>
+          <ns1:prstGeom prst="rect">
+            <ns1:avLst/>
+          </ns1:prstGeom>
+          <ns1:solidFill>
+            <ns1:srgbClr val="F2F2F2"/>
+          </ns1:solidFill>
+          <ns1:ln w="12700">
+            <ns1:solidFill>
+              <ns1:srgbClr val="F2F2F2"/>
+            </ns1:solidFill>
+            <ns1:prstDash val="solid"/>
+          </ns1:ln>
+          <ns1:effectLst>
+            <ns1:outerShdw blurRad="101600" dist="25400" dir="8100000" algn="bl" rotWithShape="0">
+              <ns1:srgbClr val="000000">
+                <ns1:alpha val="12000"/>
+              </ns1:srgbClr>
+            </ns1:outerShdw>
+          </ns1:effectLst>
+        </ns0:spPr>
+        <ns0:txBody>
+          <ns1:bodyPr/>
+          <ns1:lstStyle/>
+          <ns1:p>
+            <ns1:endParaRPr lang="ko-KR" altLang="en-US"/>
+          </ns1:p>
+        </ns0:txBody>
+      </ns0:sp>
+      <ns0:sp>
+        <ns0:nvSpPr>
+          <ns0:cNvPr id="23" name="Shape 21"/>
+          <ns0:cNvSpPr/>
+          <ns0:nvPr/>
+        </ns0:nvSpPr>
+        <ns0:spPr>
+          <ns1:xfrm>
+            <ns1:off x="4754880" y="3108960"/>
+            <ns1:ext cx="3977640" cy="91440"/>
+          </ns1:xfrm>
+          <ns1:prstGeom prst="rect">
+            <ns1:avLst/>
+          </ns1:prstGeom>
+          <ns1:solidFill>
+            <ns1:srgbClr val="FFCD00"/>
+          </ns1:solidFill>
+          <ns1:ln w="12700">
+            <ns1:solidFill>
+              <ns1:srgbClr val="FFCD00"/>
+            </ns1:solidFill>
+            <ns1:prstDash val="solid"/>
+          </ns1:ln>
+        </ns0:spPr>
+        <ns0:txBody>
+          <ns1:bodyPr/>
+          <ns1:lstStyle/>
+          <ns1:p>
+            <ns1:endParaRPr lang="ko-KR" altLang="en-US"/>
+          </ns1:p>
+        </ns0:txBody>
+      </ns0:sp>
+      <ns0:sp>
+        <ns0:nvSpPr>
+          <ns0:cNvPr id="24" name="Text 22"/>
+          <ns0:cNvSpPr/>
+          <ns0:nvPr/>
+        </ns0:nvSpPr>
+        <ns0:spPr>
+          <ns1:xfrm>
+            <ns1:off x="4919472" y="3200400"/>
+            <ns1:ext cx="822960" cy="502920"/>
+          </ns1:xfrm>
+          <ns1:prstGeom prst="rect">
+            <ns1:avLst/>
+          </ns1:prstGeom>
+          <ns1:noFill/>
+          <ns1:ln/>
+        </ns0:spPr>
+        <ns0:txBody>
+          <ns1:bodyPr wrap="square" lIns="0" tIns="0" rIns="0" bIns="0" rtlCol="0" anchor="ctr"/>
+          <ns1:lstStyle/>
+          <ns1:p>
+            <ns1:pPr marL="0" indent="0">
+              <ns1:buNone/>
+            </ns1:pPr>
+            <ns1:r>
+              <ns1:rPr lang="en-US" sz="3000" b="1" dirty="0">
+                <ns1:solidFill>
+                  <ns1:srgbClr val="1A1A1A"/>
+                </ns1:solidFill>
+                <ns1:latin typeface="Arial Black" pitchFamily="34" charset="0"/>
+                <ns1:ea typeface="Arial Black" pitchFamily="34" charset="-122"/>
+                <ns1:cs typeface="Arial Black" pitchFamily="34" charset="-120"/>
+              </ns1:rPr>
+              <ns1:t>04</ns1:t>
+            </ns1:r>
+            <ns1:endParaRPr lang="en-US" sz="3000" dirty="0"/>
+          </ns1:p>
+        </ns0:txBody>
+      </ns0:sp>
+      <ns0:sp>
+        <ns0:nvSpPr>
+          <ns0:cNvPr id="25" name="Text 23"/>
+          <ns0:cNvSpPr/>
+          <ns0:nvPr/>
+        </ns0:nvSpPr>
+        <ns0:spPr>
+          <ns1:xfrm>
+            <ns1:off x="4919472" y="3703320"/>
+            <ns1:ext cx="3566160" cy="320040"/>
+          </ns1:xfrm>
+          <ns1:prstGeom prst="rect">
+            <ns1:avLst/>
+          </ns1:prstGeom>
+          <ns1:noFill/>
+          <ns1:ln/>
+        </ns0:spPr>
+        <ns0:txBody>
+          <ns1:bodyPr wrap="square" lIns="0" tIns="0" rIns="0" bIns="0" rtlCol="0" anchor="ctr"/>
+          <ns1:lstStyle/>
+          <ns1:p>
+            <ns1:pPr marL="0" indent="0">
+              <ns1:buNone/>
+            </ns1:pPr>
+            <ns1:r>
+              <ns1:rPr sz="1500" b="1">
+                <ns1:latin typeface="Malgun Gothic"/>
+              </ns1:rPr>
+              <ns1:t>서비스 연결·한계</ns1:t>
+            </ns1:r>
+            <ns1:endParaRPr lang="en-US" sz="1400" dirty="0"/>
+          </ns1:p>
+        </ns0:txBody>
+      </ns0:sp>
+      <ns0:sp>
+        <ns0:nvSpPr>
+          <ns0:cNvPr id="26" name="Text 24"/>
+          <ns0:cNvSpPr/>
+          <ns0:nvPr/>
+        </ns0:nvSpPr>
+        <ns0:spPr>
+          <ns1:xfrm>
+            <ns1:off x="4919472" y="4005072"/>
+            <ns1:ext cx="3566160" cy="256032"/>
+          </ns1:xfrm>
+          <ns1:prstGeom prst="rect">
+            <ns1:avLst/>
+          </ns1:prstGeom>
+          <ns1:noFill/>
+          <ns1:ln/>
+        </ns0:spPr>
+        <ns0:txBody>
+          <ns1:bodyPr wrap="square" lIns="0" tIns="0" rIns="0" bIns="0" rtlCol="0" anchor="ctr"/>
+          <ns1:lstStyle/>
+          <ns1:p>
+            <ns1:pPr marL="0" indent="0">
+              <ns1:buNone/>
+            </ns1:pPr>
+            <ns1:r>
+              <ns1:rPr sz="1050">
+                <ns1:latin typeface="Malgun Gothic"/>
+              </ns1:rPr>
+              <ns1:t>12~14: 프로토타입과 다음 단계</ns1:t>
+            </ns1:r>
+            <ns1:endParaRPr lang="en-US" sz="1100" dirty="0"/>
+          </ns1:p>
+        </ns0:txBody>
+      </ns0:sp>
+    </ns0:spTree>
+  </ns0:cSld>
+  <ns0:clrMapOvr>
+    <ns1:masterClrMapping/>
+  </ns0:clrMapOvr>
+</ns0:sld>
 </file>
 
 <file path=ppt/slides/slide3.xml><?xml version="1.0" encoding="utf-8"?>
@@ -5852,6 +6066,13 @@
             <a:prstDash val="solid"/>
           </a:ln>
         </p:spPr>
+        <p:txBody>
+          <a:bodyPr/>
+          <a:lstStyle/>
+          <a:p>
+            <a:endParaRPr lang="ko-KR" altLang="en-US"/>
+          </a:p>
+        </p:txBody>
       </p:sp>
       <p:sp>
         <p:nvSpPr>
@@ -5955,6 +6176,13 @@
             <a:prstDash val="solid"/>
           </a:ln>
         </p:spPr>
+        <p:txBody>
+          <a:bodyPr/>
+          <a:lstStyle/>
+          <a:p>
+            <a:endParaRPr lang="ko-KR" altLang="en-US"/>
+          </a:p>
+        </p:txBody>
       </p:sp>
       <p:sp>
         <p:nvSpPr>
@@ -6026,6 +6254,13 @@
             </a:outerShdw>
           </a:effectLst>
         </p:spPr>
+        <p:txBody>
+          <a:bodyPr/>
+          <a:lstStyle/>
+          <a:p>
+            <a:endParaRPr lang="ko-KR" altLang="en-US"/>
+          </a:p>
+        </p:txBody>
       </p:sp>
       <p:sp>
         <p:nvSpPr>
@@ -6051,6 +6286,13 @@
             <a:prstDash val="solid"/>
           </a:ln>
         </p:spPr>
+        <p:txBody>
+          <a:bodyPr/>
+          <a:lstStyle/>
+          <a:p>
+            <a:endParaRPr lang="ko-KR" altLang="en-US"/>
+          </a:p>
+        </p:txBody>
       </p:sp>
       <p:sp>
         <p:nvSpPr>
@@ -6076,6 +6318,13 @@
             <a:prstDash val="solid"/>
           </a:ln>
         </p:spPr>
+        <p:txBody>
+          <a:bodyPr/>
+          <a:lstStyle/>
+          <a:p>
+            <a:endParaRPr lang="ko-KR" altLang="en-US"/>
+          </a:p>
+        </p:txBody>
       </p:sp>
       <p:pic>
         <p:nvPicPr>
@@ -6223,6 +6472,13 @@
             </a:outerShdw>
           </a:effectLst>
         </p:spPr>
+        <p:txBody>
+          <a:bodyPr/>
+          <a:lstStyle/>
+          <a:p>
+            <a:endParaRPr lang="ko-KR" altLang="en-US"/>
+          </a:p>
+        </p:txBody>
       </p:sp>
       <p:sp>
         <p:nvSpPr>
@@ -6248,6 +6504,13 @@
             <a:prstDash val="solid"/>
           </a:ln>
         </p:spPr>
+        <p:txBody>
+          <a:bodyPr/>
+          <a:lstStyle/>
+          <a:p>
+            <a:endParaRPr lang="ko-KR" altLang="en-US"/>
+          </a:p>
+        </p:txBody>
       </p:sp>
       <p:sp>
         <p:nvSpPr>
@@ -6273,6 +6536,13 @@
             <a:prstDash val="solid"/>
           </a:ln>
         </p:spPr>
+        <p:txBody>
+          <a:bodyPr/>
+          <a:lstStyle/>
+          <a:p>
+            <a:endParaRPr lang="ko-KR" altLang="en-US"/>
+          </a:p>
+        </p:txBody>
       </p:sp>
       <p:pic>
         <p:nvPicPr>
@@ -6441,6 +6711,13 @@
             </a:outerShdw>
           </a:effectLst>
         </p:spPr>
+        <p:txBody>
+          <a:bodyPr/>
+          <a:lstStyle/>
+          <a:p>
+            <a:endParaRPr lang="ko-KR" altLang="en-US"/>
+          </a:p>
+        </p:txBody>
       </p:sp>
       <p:sp>
         <p:nvSpPr>
@@ -6466,6 +6743,13 @@
             <a:prstDash val="solid"/>
           </a:ln>
         </p:spPr>
+        <p:txBody>
+          <a:bodyPr/>
+          <a:lstStyle/>
+          <a:p>
+            <a:endParaRPr lang="ko-KR" altLang="en-US"/>
+          </a:p>
+        </p:txBody>
       </p:sp>
       <p:sp>
         <p:nvSpPr>
@@ -6491,6 +6775,13 @@
             <a:prstDash val="solid"/>
           </a:ln>
         </p:spPr>
+        <p:txBody>
+          <a:bodyPr/>
+          <a:lstStyle/>
+          <a:p>
+            <a:endParaRPr lang="ko-KR" altLang="en-US"/>
+          </a:p>
+        </p:txBody>
       </p:sp>
       <p:pic>
         <p:nvPicPr>
@@ -6659,6 +6950,13 @@
             <a:prstDash val="solid"/>
           </a:ln>
         </p:spPr>
+        <p:txBody>
+          <a:bodyPr/>
+          <a:lstStyle/>
+          <a:p>
+            <a:endParaRPr lang="ko-KR" altLang="en-US"/>
+          </a:p>
+        </p:txBody>
       </p:sp>
       <p:sp>
         <p:nvSpPr>
@@ -6762,6 +7060,13 @@
             <a:prstDash val="solid"/>
           </a:ln>
         </p:spPr>
+        <p:txBody>
+          <a:bodyPr/>
+          <a:lstStyle/>
+          <a:p>
+            <a:endParaRPr lang="ko-KR" altLang="en-US"/>
+          </a:p>
+        </p:txBody>
       </p:sp>
       <p:sp>
         <p:nvSpPr>
@@ -6865,6 +7170,13 @@
             <a:prstDash val="solid"/>
           </a:ln>
         </p:spPr>
+        <p:txBody>
+          <a:bodyPr/>
+          <a:lstStyle/>
+          <a:p>
+            <a:endParaRPr lang="ko-KR" altLang="en-US"/>
+          </a:p>
+        </p:txBody>
       </p:sp>
       <p:sp>
         <p:nvSpPr>
@@ -6892,6 +7204,13 @@
             <a:prstDash val="solid"/>
           </a:ln>
         </p:spPr>
+        <p:txBody>
+          <a:bodyPr/>
+          <a:lstStyle/>
+          <a:p>
+            <a:endParaRPr lang="ko-KR" altLang="en-US"/>
+          </a:p>
+        </p:txBody>
       </p:sp>
       <p:sp>
         <p:nvSpPr>
@@ -6956,6 +7275,13 @@
             <a:prstDash val="solid"/>
           </a:ln>
         </p:spPr>
+        <p:txBody>
+          <a:bodyPr/>
+          <a:lstStyle/>
+          <a:p>
+            <a:endParaRPr lang="ko-KR" altLang="en-US"/>
+          </a:p>
+        </p:txBody>
       </p:sp>
       <p:sp>
         <p:nvSpPr>
@@ -7059,6 +7385,13 @@
             <a:prstDash val="solid"/>
           </a:ln>
         </p:spPr>
+        <p:txBody>
+          <a:bodyPr/>
+          <a:lstStyle/>
+          <a:p>
+            <a:endParaRPr lang="ko-KR" altLang="en-US"/>
+          </a:p>
+        </p:txBody>
       </p:sp>
       <p:sp>
         <p:nvSpPr>
@@ -7088,7 +7421,7 @@
               <a:rPr sz="1400" b="1">
                 <a:latin typeface="Malgun Gothic"/>
               </a:rPr>
-              <a:t>✓  역삼동 포함 강남 9개 행정동</a:t>
+              <a:t>✓  강남 9개 행정동</a:t>
             </a:r>
             <a:endParaRPr lang="en-US" sz="1100" dirty="0"/>
           </a:p>
@@ -7152,6 +7485,13 @@
             <a:prstDash val="solid"/>
           </a:ln>
         </p:spPr>
+        <p:txBody>
+          <a:bodyPr/>
+          <a:lstStyle/>
+          <a:p>
+            <a:endParaRPr lang="ko-KR" altLang="en-US"/>
+          </a:p>
+        </p:txBody>
       </p:sp>
       <p:sp>
         <p:nvSpPr>
@@ -7179,6 +7519,13 @@
             <a:prstDash val="solid"/>
           </a:ln>
         </p:spPr>
+        <p:txBody>
+          <a:bodyPr/>
+          <a:lstStyle/>
+          <a:p>
+            <a:endParaRPr lang="ko-KR" altLang="en-US"/>
+          </a:p>
+        </p:txBody>
       </p:sp>
       <p:sp>
         <p:nvSpPr>
@@ -7243,6 +7590,13 @@
             <a:prstDash val="solid"/>
           </a:ln>
         </p:spPr>
+        <p:txBody>
+          <a:bodyPr/>
+          <a:lstStyle/>
+          <a:p>
+            <a:endParaRPr lang="ko-KR" altLang="en-US"/>
+          </a:p>
+        </p:txBody>
       </p:sp>
       <p:sp>
         <p:nvSpPr>
@@ -7346,6 +7700,13 @@
             <a:prstDash val="solid"/>
           </a:ln>
         </p:spPr>
+        <p:txBody>
+          <a:bodyPr/>
+          <a:lstStyle/>
+          <a:p>
+            <a:endParaRPr lang="ko-KR" altLang="en-US"/>
+          </a:p>
+        </p:txBody>
       </p:sp>
       <p:sp>
         <p:nvSpPr>
@@ -7414,7 +7775,7 @@
               <a:rPr sz="1050">
                 <a:latin typeface="Malgun Gothic"/>
               </a:rPr>
-              <a:t>OpenStreetMap에서 강남 9개 동 도로 노드/엣지 추출 → 실제 도로 위상 반영</a:t>
+              <a:t>OSM 노드/엣지 추출 → 실제 도로 위상 반영</a:t>
             </a:r>
             <a:endParaRPr lang="en-US" sz="1000" dirty="0"/>
           </a:p>
@@ -7444,6 +7805,13 @@
             <a:prstDash val="solid"/>
           </a:ln>
         </p:spPr>
+        <p:txBody>
+          <a:bodyPr/>
+          <a:lstStyle/>
+          <a:p>
+            <a:endParaRPr lang="ko-KR" altLang="en-US"/>
+          </a:p>
+        </p:txBody>
       </p:sp>
       <p:sp>
         <p:nvSpPr>
@@ -7471,6 +7839,13 @@
             <a:prstDash val="solid"/>
           </a:ln>
         </p:spPr>
+        <p:txBody>
+          <a:bodyPr/>
+          <a:lstStyle/>
+          <a:p>
+            <a:endParaRPr lang="ko-KR" altLang="en-US"/>
+          </a:p>
+        </p:txBody>
       </p:sp>
       <p:sp>
         <p:nvSpPr>
@@ -7535,6 +7910,13 @@
             <a:prstDash val="solid"/>
           </a:ln>
         </p:spPr>
+        <p:txBody>
+          <a:bodyPr/>
+          <a:lstStyle/>
+          <a:p>
+            <a:endParaRPr lang="ko-KR" altLang="en-US"/>
+          </a:p>
+        </p:txBody>
       </p:sp>
       <p:sp>
         <p:nvSpPr>
@@ -7638,6 +8020,13 @@
             <a:prstDash val="solid"/>
           </a:ln>
         </p:spPr>
+        <p:txBody>
+          <a:bodyPr/>
+          <a:lstStyle/>
+          <a:p>
+            <a:endParaRPr lang="ko-KR" altLang="en-US"/>
+          </a:p>
+        </p:txBody>
       </p:sp>
       <p:sp>
         <p:nvSpPr>
@@ -7711,7 +8100,7 @@
                 <a:ea typeface="Arial" pitchFamily="34" charset="-122"/>
                 <a:cs typeface="Arial" pitchFamily="34" charset="-120"/>
               </a:rPr>
-              <a:t>별도 설치 없이 브라우저에서 바로 시연 가능, 발표·공유 용이</a:t>
+              <a:t>별도 설치 없이 바로 시연, 발표·공유 용이</a:t>
             </a:r>
             <a:endParaRPr lang="en-US" sz="1000" dirty="0"/>
           </a:p>
@@ -7741,6 +8130,13 @@
             <a:prstDash val="solid"/>
           </a:ln>
         </p:spPr>
+        <p:txBody>
+          <a:bodyPr/>
+          <a:lstStyle/>
+          <a:p>
+            <a:endParaRPr lang="ko-KR" altLang="en-US"/>
+          </a:p>
+        </p:txBody>
       </p:sp>
       <p:sp>
         <p:nvSpPr>
@@ -7768,6 +8164,13 @@
             <a:prstDash val="solid"/>
           </a:ln>
         </p:spPr>
+        <p:txBody>
+          <a:bodyPr/>
+          <a:lstStyle/>
+          <a:p>
+            <a:endParaRPr lang="ko-KR" altLang="en-US"/>
+          </a:p>
+        </p:txBody>
       </p:sp>
       <p:sp>
         <p:nvSpPr>
@@ -7832,6 +8235,13 @@
             <a:prstDash val="solid"/>
           </a:ln>
         </p:spPr>
+        <p:txBody>
+          <a:bodyPr/>
+          <a:lstStyle/>
+          <a:p>
+            <a:endParaRPr lang="ko-KR" altLang="en-US"/>
+          </a:p>
+        </p:txBody>
       </p:sp>
       <p:sp>
         <p:nvSpPr>
@@ -7935,6 +8345,13 @@
             <a:prstDash val="solid"/>
           </a:ln>
         </p:spPr>
+        <p:txBody>
+          <a:bodyPr/>
+          <a:lstStyle/>
+          <a:p>
+            <a:endParaRPr lang="ko-KR" altLang="en-US"/>
+          </a:p>
+        </p:txBody>
       </p:sp>
       <p:sp>
         <p:nvSpPr>
@@ -7957,16 +8374,9 @@
           <a:bodyPr wrap="square" lIns="0" tIns="0" rIns="0" bIns="0" rtlCol="0" anchor="ctr"/>
           <a:lstStyle/>
           <a:p>
-            <a:pPr marL="0" indent="0">
-              <a:buNone/>
-            </a:pPr>
-            <a:r>
-              <a:rPr sz="1400" b="1">
-                <a:latin typeface="Malgun Gothic"/>
-              </a:rPr>
+            <a:r>
               <a:t>✓  Cloudflare Workers</a:t>
             </a:r>
-            <a:endParaRPr lang="en-US" sz="1100" dirty="0"/>
           </a:p>
         </p:txBody>
       </p:sp>
@@ -8003,7 +8413,7 @@
                 <a:ea typeface="Arial" pitchFamily="34" charset="-122"/>
                 <a:cs typeface="Arial" pitchFamily="34" charset="-120"/>
               </a:rPr>
-              <a:t>팀원·리뷰어 누구나 URL 하나로 즉시 접속 가능한 라이브 데모</a:t>
+              <a:t>URL 하나로 즉시 접속 가능한 라이브 데모</a:t>
             </a:r>
             <a:endParaRPr lang="en-US" sz="1000" dirty="0"/>
           </a:p>
@@ -8018,1388 +8428,1541 @@
 </file>
 
 <file path=ppt/slides/slide5.xml><?xml version="1.0" encoding="utf-8"?>
-<p:sld xmlns:a="http://schemas.openxmlformats.org/drawingml/2006/main" xmlns:r="http://schemas.openxmlformats.org/officeDocument/2006/relationships" xmlns:p="http://schemas.openxmlformats.org/presentationml/2006/main">
-  <p:cSld name="Slide 5">
-    <p:bg>
-      <p:bgPr>
-        <a:solidFill>
-          <a:srgbClr val="FFFFFF"/>
-        </a:solidFill>
-        <a:effectLst/>
-      </p:bgPr>
-    </p:bg>
-    <p:spTree>
-      <p:nvGrpSpPr>
-        <p:cNvPr id="1" name=""/>
-        <p:cNvGrpSpPr/>
-        <p:nvPr/>
-      </p:nvGrpSpPr>
-      <p:grpSpPr>
-        <a:xfrm>
-          <a:off x="0" y="0"/>
-          <a:ext cx="0" cy="0"/>
-          <a:chOff x="0" y="0"/>
-          <a:chExt cx="0" cy="0"/>
-        </a:xfrm>
-      </p:grpSpPr>
-      <p:sp>
-        <p:nvSpPr>
-          <p:cNvPr id="2" name="Shape 0"/>
-          <p:cNvSpPr/>
-          <p:nvPr/>
-        </p:nvSpPr>
-        <p:spPr>
-          <a:xfrm>
-            <a:off x="0" y="0"/>
-            <a:ext cx="9144000" cy="594360"/>
-          </a:xfrm>
-          <a:prstGeom prst="rect">
-            <a:avLst/>
-          </a:prstGeom>
-          <a:solidFill>
-            <a:srgbClr val="1A1A1A"/>
-          </a:solidFill>
-          <a:ln w="12700">
-            <a:solidFill>
-              <a:srgbClr val="1A1A1A"/>
-            </a:solidFill>
-            <a:prstDash val="solid"/>
-          </a:ln>
-        </p:spPr>
-      </p:sp>
-      <p:sp>
-        <p:nvSpPr>
-          <p:cNvPr id="3" name="Text 1"/>
-          <p:cNvSpPr/>
-          <p:nvPr/>
-        </p:nvSpPr>
-        <p:spPr>
-          <a:xfrm>
-            <a:off x="365760" y="91440"/>
-            <a:ext cx="4572000" cy="411480"/>
-          </a:xfrm>
-          <a:prstGeom prst="rect">
-            <a:avLst/>
-          </a:prstGeom>
-          <a:noFill/>
-          <a:ln/>
-        </p:spPr>
-        <p:txBody>
-          <a:bodyPr wrap="square" lIns="0" tIns="0" rIns="0" bIns="0" rtlCol="0" anchor="ctr"/>
-          <a:lstStyle/>
-          <a:p>
-            <a:pPr marL="0" indent="0">
-              <a:buNone/>
-            </a:pPr>
-            <a:r>
-              <a:rPr lang="en-US" sz="1300" b="1" dirty="0">
-                <a:solidFill>
-                  <a:srgbClr val="FFCD00"/>
-                </a:solidFill>
-                <a:latin typeface="Arial Black" pitchFamily="34" charset="0"/>
-                <a:ea typeface="Arial Black" pitchFamily="34" charset="-122"/>
-                <a:cs typeface="Arial Black" pitchFamily="34" charset="-120"/>
-              </a:rPr>
-              <a:t>역삼 택시  ·  Digital Twin</a:t>
-            </a:r>
-            <a:endParaRPr lang="en-US" sz="1300" dirty="0"/>
-          </a:p>
-        </p:txBody>
-      </p:sp>
-      <p:sp>
-        <p:nvSpPr>
-          <p:cNvPr id="4" name="Text 2"/>
-          <p:cNvSpPr/>
-          <p:nvPr/>
-        </p:nvSpPr>
-        <p:spPr>
-          <a:xfrm>
-            <a:off x="6400800" y="91440"/>
-            <a:ext cx="2560320" cy="411480"/>
-          </a:xfrm>
-          <a:prstGeom prst="rect">
-            <a:avLst/>
-          </a:prstGeom>
-          <a:noFill/>
-          <a:ln/>
-        </p:spPr>
-        <p:txBody>
-          <a:bodyPr wrap="square" lIns="0" tIns="0" rIns="0" bIns="0" rtlCol="0" anchor="ctr"/>
-          <a:lstStyle/>
-          <a:p>
-            <a:pPr marL="0" indent="0" algn="r">
-              <a:buNone/>
-            </a:pPr>
-            <a:r>
-              <a:rPr lang="en-US" sz="1200" dirty="0">
-                <a:solidFill>
-                  <a:srgbClr val="FFFFFF"/>
-                </a:solidFill>
-                <a:latin typeface="Arial" pitchFamily="34" charset="0"/>
-                <a:ea typeface="Arial" pitchFamily="34" charset="-122"/>
-                <a:cs typeface="Arial" pitchFamily="34" charset="-120"/>
-              </a:rPr>
-              <a:t>기술 구현</a:t>
-            </a:r>
-            <a:endParaRPr lang="en-US" sz="1200" dirty="0"/>
-          </a:p>
-        </p:txBody>
-      </p:sp>
-      <p:sp>
-        <p:nvSpPr>
-          <p:cNvPr id="5" name="Shape 3"/>
-          <p:cNvSpPr/>
-          <p:nvPr/>
-        </p:nvSpPr>
-        <p:spPr>
-          <a:xfrm>
-            <a:off x="0" y="4892040"/>
-            <a:ext cx="9144000" cy="256032"/>
-          </a:xfrm>
-          <a:prstGeom prst="rect">
-            <a:avLst/>
-          </a:prstGeom>
-          <a:solidFill>
-            <a:srgbClr val="FFCD00"/>
-          </a:solidFill>
-          <a:ln w="12700">
-            <a:solidFill>
-              <a:srgbClr val="FFCD00"/>
-            </a:solidFill>
-            <a:prstDash val="solid"/>
-          </a:ln>
-        </p:spPr>
-      </p:sp>
-      <p:sp>
-        <p:nvSpPr>
-          <p:cNvPr id="6" name="Text 4"/>
-          <p:cNvSpPr/>
-          <p:nvPr/>
-        </p:nvSpPr>
-        <p:spPr>
-          <a:xfrm>
-            <a:off x="457200" y="777240"/>
-            <a:ext cx="8229600" cy="594360"/>
-          </a:xfrm>
-          <a:prstGeom prst="rect">
-            <a:avLst/>
-          </a:prstGeom>
-          <a:noFill/>
-          <a:ln/>
-        </p:spPr>
-        <p:txBody>
-          <a:bodyPr wrap="square" lIns="0" tIns="0" rIns="0" bIns="0" rtlCol="0" anchor="ctr"/>
-          <a:lstStyle/>
-          <a:p>
-            <a:pPr marL="0" indent="0">
-              <a:buNone/>
-            </a:pPr>
-            <a:r>
-              <a:rPr lang="en-US" sz="2600" b="1" dirty="0">
-                <a:solidFill>
-                  <a:srgbClr val="1A1A1A"/>
-                </a:solidFill>
-                <a:latin typeface="Arial Black" pitchFamily="34" charset="0"/>
-                <a:ea typeface="Arial Black" pitchFamily="34" charset="-122"/>
-                <a:cs typeface="Arial Black" pitchFamily="34" charset="-120"/>
-              </a:rPr>
-              <a:t>Three.js + OpenStreetMap 구현</a:t>
-            </a:r>
-            <a:endParaRPr lang="en-US" sz="2600" dirty="0"/>
-          </a:p>
-        </p:txBody>
-      </p:sp>
-      <p:sp>
-        <p:nvSpPr>
-          <p:cNvPr id="7" name="Shape 5"/>
-          <p:cNvSpPr/>
-          <p:nvPr/>
-        </p:nvSpPr>
-        <p:spPr>
-          <a:xfrm>
-            <a:off x="365760" y="1508760"/>
-            <a:ext cx="3931920" cy="3337560"/>
-          </a:xfrm>
-          <a:prstGeom prst="rect">
-            <a:avLst/>
-          </a:prstGeom>
-          <a:solidFill>
-            <a:srgbClr val="1A1A1A"/>
-          </a:solidFill>
-          <a:ln w="12700">
-            <a:solidFill>
-              <a:srgbClr val="1A1A1A"/>
-            </a:solidFill>
-            <a:prstDash val="solid"/>
-          </a:ln>
-          <a:effectLst>
-            <a:outerShdw blurRad="101600" dist="25400" dir="8100000" algn="bl" rotWithShape="0">
-              <a:srgbClr val="000000">
-                <a:alpha val="12000"/>
-              </a:srgbClr>
-            </a:outerShdw>
-          </a:effectLst>
-        </p:spPr>
-      </p:sp>
-      <p:sp>
-        <p:nvSpPr>
-          <p:cNvPr id="8" name="Shape 6"/>
-          <p:cNvSpPr/>
-          <p:nvPr/>
-        </p:nvSpPr>
-        <p:spPr>
-          <a:xfrm>
-            <a:off x="365760" y="1508760"/>
-            <a:ext cx="3931920" cy="91440"/>
-          </a:xfrm>
-          <a:prstGeom prst="rect">
-            <a:avLst/>
-          </a:prstGeom>
-          <a:solidFill>
-            <a:srgbClr val="FFCD00"/>
-          </a:solidFill>
-          <a:ln w="12700">
-            <a:solidFill>
-              <a:srgbClr val="FFCD00"/>
-            </a:solidFill>
-            <a:prstDash val="solid"/>
-          </a:ln>
-        </p:spPr>
-      </p:sp>
-      <p:pic>
-        <p:nvPicPr>
-          <p:cNvPr id="9" name="Image 0" descr="preencoded.png"/>
-          <p:cNvPicPr>
-            <a:picLocks noChangeAspect="1"/>
-          </p:cNvPicPr>
-          <p:nvPr/>
-        </p:nvPicPr>
-        <p:blipFill>
-          <a:blip r:embed="rId3"/>
-          <a:stretch>
-            <a:fillRect/>
-          </a:stretch>
-        </p:blipFill>
-        <p:spPr>
-          <a:xfrm>
-            <a:off x="502920" y="1645920"/>
-            <a:ext cx="502920" cy="502920"/>
-          </a:xfrm>
-          <a:prstGeom prst="rect">
-            <a:avLst/>
-          </a:prstGeom>
-        </p:spPr>
-      </p:pic>
-      <p:sp>
-        <p:nvSpPr>
-          <p:cNvPr id="10" name="Text 7"/>
-          <p:cNvSpPr/>
-          <p:nvPr/>
-        </p:nvSpPr>
-        <p:spPr>
-          <a:xfrm>
-            <a:off x="1051560" y="1709928"/>
-            <a:ext cx="3108960" cy="365760"/>
-          </a:xfrm>
-          <a:prstGeom prst="rect">
-            <a:avLst/>
-          </a:prstGeom>
-          <a:noFill/>
-          <a:ln/>
-        </p:spPr>
-        <p:txBody>
-          <a:bodyPr wrap="square" lIns="0" tIns="0" rIns="0" bIns="0" rtlCol="0" anchor="ctr"/>
-          <a:lstStyle/>
-          <a:p>
-            <a:pPr marL="0" indent="0">
-              <a:buNone/>
-            </a:pPr>
-            <a:r>
-              <a:rPr lang="en-US" sz="1400" b="1" dirty="0">
-                <a:solidFill>
-                  <a:srgbClr val="FFCD00"/>
-                </a:solidFill>
-                <a:latin typeface="Arial" pitchFamily="34" charset="0"/>
-                <a:ea typeface="Arial" pitchFamily="34" charset="-122"/>
-                <a:cs typeface="Arial" pitchFamily="34" charset="-120"/>
-              </a:rPr>
-              <a:t>OSM 도로 데이터 파이프라인</a:t>
-            </a:r>
-            <a:endParaRPr lang="en-US" sz="1400" dirty="0"/>
-          </a:p>
-        </p:txBody>
-      </p:sp>
-      <p:sp>
-        <p:nvSpPr>
-          <p:cNvPr id="11" name="Shape 8"/>
-          <p:cNvSpPr/>
-          <p:nvPr/>
-        </p:nvSpPr>
-        <p:spPr>
-          <a:xfrm>
-            <a:off x="548640" y="2212848"/>
-            <a:ext cx="3566160" cy="402336"/>
-          </a:xfrm>
-          <a:prstGeom prst="rect">
-            <a:avLst/>
-          </a:prstGeom>
-          <a:solidFill>
-            <a:srgbClr val="111827"/>
-          </a:solidFill>
-          <a:ln w="12700">
-            <a:solidFill>
-              <a:srgbClr val="374151"/>
-            </a:solidFill>
-            <a:prstDash val="solid"/>
-          </a:ln>
-        </p:spPr>
-      </p:sp>
-      <p:sp>
-        <p:nvSpPr>
-          <p:cNvPr id="12" name="Text 9"/>
-          <p:cNvSpPr/>
-          <p:nvPr/>
-        </p:nvSpPr>
-        <p:spPr>
-          <a:xfrm>
-            <a:off x="640080" y="2212848"/>
-            <a:ext cx="3474720" cy="402336"/>
-          </a:xfrm>
-          <a:prstGeom prst="rect">
-            <a:avLst/>
-          </a:prstGeom>
-          <a:noFill/>
-          <a:ln/>
-        </p:spPr>
-        <p:txBody>
-          <a:bodyPr wrap="square" lIns="0" tIns="0" rIns="0" bIns="0" rtlCol="0" anchor="ctr"/>
-          <a:lstStyle/>
-          <a:p>
-            <a:pPr marL="0" indent="0">
-              <a:buNone/>
-            </a:pPr>
-            <a:r>
-              <a:rPr sz="1120">
-                <a:latin typeface="Malgun Gothic"/>
-              </a:rPr>
-              <a:t>① Overpass API → 강남 9개 동 boundary/bbox 쿼리</a:t>
-            </a:r>
-            <a:endParaRPr lang="en-US" sz="1150" dirty="0"/>
-          </a:p>
-        </p:txBody>
-      </p:sp>
-      <p:sp>
-        <p:nvSpPr>
-          <p:cNvPr id="13" name="Shape 10"/>
-          <p:cNvSpPr/>
-          <p:nvPr/>
-        </p:nvSpPr>
-        <p:spPr>
-          <a:xfrm>
-            <a:off x="548640" y="2697480"/>
-            <a:ext cx="3566160" cy="402336"/>
-          </a:xfrm>
-          <a:prstGeom prst="rect">
-            <a:avLst/>
-          </a:prstGeom>
-          <a:solidFill>
-            <a:srgbClr val="111827"/>
-          </a:solidFill>
-          <a:ln w="12700">
-            <a:solidFill>
-              <a:srgbClr val="374151"/>
-            </a:solidFill>
-            <a:prstDash val="solid"/>
-          </a:ln>
-        </p:spPr>
-      </p:sp>
-      <p:sp>
-        <p:nvSpPr>
-          <p:cNvPr id="14" name="Text 11"/>
-          <p:cNvSpPr/>
-          <p:nvPr/>
-        </p:nvSpPr>
-        <p:spPr>
-          <a:xfrm>
-            <a:off x="640080" y="2697480"/>
-            <a:ext cx="3474720" cy="402336"/>
-          </a:xfrm>
-          <a:prstGeom prst="rect">
-            <a:avLst/>
-          </a:prstGeom>
-          <a:noFill/>
-          <a:ln/>
-        </p:spPr>
-        <p:txBody>
-          <a:bodyPr wrap="square" lIns="0" tIns="0" rIns="0" bIns="0" rtlCol="0" anchor="ctr"/>
-          <a:lstStyle/>
-          <a:p>
-            <a:pPr marL="0" indent="0">
-              <a:buNone/>
-            </a:pPr>
-            <a:r>
-              <a:rPr lang="en-US" sz="1150" dirty="0">
-                <a:solidFill>
-                  <a:srgbClr val="FFFFFF"/>
-                </a:solidFill>
-                <a:latin typeface="Consolas" pitchFamily="34" charset="0"/>
-                <a:ea typeface="Consolas" pitchFamily="34" charset="-122"/>
-                <a:cs typeface="Consolas" pitchFamily="34" charset="-120"/>
-              </a:rPr>
-              <a:t>② Way(도로) 필터링 → highway 태그</a:t>
-            </a:r>
-            <a:endParaRPr lang="en-US" sz="1150" dirty="0"/>
-          </a:p>
-        </p:txBody>
-      </p:sp>
-      <p:sp>
-        <p:nvSpPr>
-          <p:cNvPr id="15" name="Shape 12"/>
-          <p:cNvSpPr/>
-          <p:nvPr/>
-        </p:nvSpPr>
-        <p:spPr>
-          <a:xfrm>
-            <a:off x="548640" y="3182112"/>
-            <a:ext cx="3566160" cy="402336"/>
-          </a:xfrm>
-          <a:prstGeom prst="rect">
-            <a:avLst/>
-          </a:prstGeom>
-          <a:solidFill>
-            <a:srgbClr val="111827"/>
-          </a:solidFill>
-          <a:ln w="12700">
-            <a:solidFill>
-              <a:srgbClr val="374151"/>
-            </a:solidFill>
-            <a:prstDash val="solid"/>
-          </a:ln>
-        </p:spPr>
-      </p:sp>
-      <p:sp>
-        <p:nvSpPr>
-          <p:cNvPr id="16" name="Text 13"/>
-          <p:cNvSpPr/>
-          <p:nvPr/>
-        </p:nvSpPr>
-        <p:spPr>
-          <a:xfrm>
-            <a:off x="640080" y="3182112"/>
-            <a:ext cx="3474720" cy="402336"/>
-          </a:xfrm>
-          <a:prstGeom prst="rect">
-            <a:avLst/>
-          </a:prstGeom>
-          <a:noFill/>
-          <a:ln/>
-        </p:spPr>
-        <p:txBody>
-          <a:bodyPr wrap="square" lIns="0" tIns="0" rIns="0" bIns="0" rtlCol="0" anchor="ctr"/>
-          <a:lstStyle/>
-          <a:p>
-            <a:pPr marL="0" indent="0">
-              <a:buNone/>
-            </a:pPr>
-            <a:r>
-              <a:rPr lang="en-US" sz="1150" dirty="0">
-                <a:solidFill>
-                  <a:srgbClr val="FFFFFF"/>
-                </a:solidFill>
-                <a:latin typeface="Consolas" pitchFamily="34" charset="0"/>
-                <a:ea typeface="Consolas" pitchFamily="34" charset="-122"/>
-                <a:cs typeface="Consolas" pitchFamily="34" charset="-120"/>
-              </a:rPr>
-              <a:t>③ Node 좌표 추출 → lat/lon → 3D (x,z)</a:t>
-            </a:r>
-            <a:endParaRPr lang="en-US" sz="1150" dirty="0"/>
-          </a:p>
-        </p:txBody>
-      </p:sp>
-      <p:sp>
-        <p:nvSpPr>
-          <p:cNvPr id="17" name="Shape 14"/>
-          <p:cNvSpPr/>
-          <p:nvPr/>
-        </p:nvSpPr>
-        <p:spPr>
-          <a:xfrm>
-            <a:off x="548640" y="3666744"/>
-            <a:ext cx="3566160" cy="402336"/>
-          </a:xfrm>
-          <a:prstGeom prst="rect">
-            <a:avLst/>
-          </a:prstGeom>
-          <a:solidFill>
-            <a:srgbClr val="111827"/>
-          </a:solidFill>
-          <a:ln w="12700">
-            <a:solidFill>
-              <a:srgbClr val="374151"/>
-            </a:solidFill>
-            <a:prstDash val="solid"/>
-          </a:ln>
-        </p:spPr>
-      </p:sp>
-      <p:sp>
-        <p:nvSpPr>
-          <p:cNvPr id="18" name="Text 15"/>
-          <p:cNvSpPr/>
-          <p:nvPr/>
-        </p:nvSpPr>
-        <p:spPr>
-          <a:xfrm>
-            <a:off x="640080" y="3666744"/>
-            <a:ext cx="3474720" cy="402336"/>
-          </a:xfrm>
-          <a:prstGeom prst="rect">
-            <a:avLst/>
-          </a:prstGeom>
-          <a:noFill/>
-          <a:ln/>
-        </p:spPr>
-        <p:txBody>
-          <a:bodyPr wrap="square" lIns="0" tIns="0" rIns="0" bIns="0" rtlCol="0" anchor="ctr"/>
-          <a:lstStyle/>
-          <a:p>
-            <a:pPr marL="0" indent="0">
-              <a:buNone/>
-            </a:pPr>
-            <a:r>
-              <a:rPr lang="en-US" sz="1150" dirty="0">
-                <a:solidFill>
-                  <a:srgbClr val="FFFFFF"/>
-                </a:solidFill>
-                <a:latin typeface="Consolas" pitchFamily="34" charset="0"/>
-                <a:ea typeface="Consolas" pitchFamily="34" charset="-122"/>
-                <a:cs typeface="Consolas" pitchFamily="34" charset="-120"/>
-              </a:rPr>
-              <a:t>④ Edge 연결 → 도로 그래프 JSON 구성</a:t>
-            </a:r>
-            <a:endParaRPr lang="en-US" sz="1150" dirty="0"/>
-          </a:p>
-        </p:txBody>
-      </p:sp>
-      <p:sp>
-        <p:nvSpPr>
-          <p:cNvPr id="19" name="Shape 16"/>
-          <p:cNvSpPr/>
-          <p:nvPr/>
-        </p:nvSpPr>
-        <p:spPr>
-          <a:xfrm>
-            <a:off x="548640" y="4151376"/>
-            <a:ext cx="3566160" cy="402336"/>
-          </a:xfrm>
-          <a:prstGeom prst="rect">
-            <a:avLst/>
-          </a:prstGeom>
-          <a:solidFill>
-            <a:srgbClr val="111827"/>
-          </a:solidFill>
-          <a:ln w="12700">
-            <a:solidFill>
-              <a:srgbClr val="374151"/>
-            </a:solidFill>
-            <a:prstDash val="solid"/>
-          </a:ln>
-        </p:spPr>
-      </p:sp>
-      <p:sp>
-        <p:nvSpPr>
-          <p:cNvPr id="20" name="Text 17"/>
-          <p:cNvSpPr/>
-          <p:nvPr/>
-        </p:nvSpPr>
-        <p:spPr>
-          <a:xfrm>
-            <a:off x="640080" y="4151376"/>
-            <a:ext cx="3474720" cy="402336"/>
-          </a:xfrm>
-          <a:prstGeom prst="rect">
-            <a:avLst/>
-          </a:prstGeom>
-          <a:noFill/>
-          <a:ln/>
-        </p:spPr>
-        <p:txBody>
-          <a:bodyPr wrap="square" lIns="0" tIns="0" rIns="0" bIns="0" rtlCol="0" anchor="ctr"/>
-          <a:lstStyle/>
-          <a:p>
-            <a:pPr marL="0" indent="0">
-              <a:buNone/>
-            </a:pPr>
-            <a:r>
-              <a:rPr sz="1120">
-                <a:latin typeface="Malgun Gothic"/>
-              </a:rPr>
-              <a:t>⑤ Three.js InstancedMesh / LineSegments 렌더</a:t>
-            </a:r>
-            <a:endParaRPr lang="en-US" sz="1150" dirty="0"/>
-          </a:p>
-        </p:txBody>
-      </p:sp>
-      <p:sp>
-        <p:nvSpPr>
-          <p:cNvPr id="21" name="Shape 18"/>
-          <p:cNvSpPr/>
-          <p:nvPr/>
-        </p:nvSpPr>
-        <p:spPr>
-          <a:xfrm>
-            <a:off x="4572000" y="1508760"/>
-            <a:ext cx="4206240" cy="3337560"/>
-          </a:xfrm>
-          <a:prstGeom prst="rect">
-            <a:avLst/>
-          </a:prstGeom>
-          <a:solidFill>
-            <a:srgbClr val="F2F2F2"/>
-          </a:solidFill>
-          <a:ln w="12700">
-            <a:solidFill>
-              <a:srgbClr val="F2F2F2"/>
-            </a:solidFill>
-            <a:prstDash val="solid"/>
-          </a:ln>
-          <a:effectLst>
-            <a:outerShdw blurRad="101600" dist="25400" dir="8100000" algn="bl" rotWithShape="0">
-              <a:srgbClr val="000000">
-                <a:alpha val="12000"/>
-              </a:srgbClr>
-            </a:outerShdw>
-          </a:effectLst>
-        </p:spPr>
-      </p:sp>
-      <p:sp>
-        <p:nvSpPr>
-          <p:cNvPr id="22" name="Shape 19"/>
-          <p:cNvSpPr/>
-          <p:nvPr/>
-        </p:nvSpPr>
-        <p:spPr>
-          <a:xfrm>
-            <a:off x="4572000" y="1508760"/>
-            <a:ext cx="4206240" cy="91440"/>
-          </a:xfrm>
-          <a:prstGeom prst="rect">
-            <a:avLst/>
-          </a:prstGeom>
-          <a:solidFill>
-            <a:srgbClr val="3B82F6"/>
-          </a:solidFill>
-          <a:ln w="12700">
-            <a:solidFill>
-              <a:srgbClr val="3B82F6"/>
-            </a:solidFill>
-            <a:prstDash val="solid"/>
-          </a:ln>
-        </p:spPr>
-      </p:sp>
-      <p:pic>
-        <p:nvPicPr>
-          <p:cNvPr id="23" name="Image 1" descr="preencoded.png"/>
-          <p:cNvPicPr>
-            <a:picLocks noChangeAspect="1"/>
-          </p:cNvPicPr>
-          <p:nvPr/>
-        </p:nvPicPr>
-        <p:blipFill>
-          <a:blip r:embed="rId4"/>
-          <a:stretch>
-            <a:fillRect/>
-          </a:stretch>
-        </p:blipFill>
-        <p:spPr>
-          <a:xfrm>
-            <a:off x="4709160" y="1645920"/>
-            <a:ext cx="475488" cy="475488"/>
-          </a:xfrm>
-          <a:prstGeom prst="rect">
-            <a:avLst/>
-          </a:prstGeom>
-        </p:spPr>
-      </p:pic>
-      <p:sp>
-        <p:nvSpPr>
-          <p:cNvPr id="24" name="Text 20"/>
-          <p:cNvSpPr/>
-          <p:nvPr/>
-        </p:nvSpPr>
-        <p:spPr>
-          <a:xfrm>
-            <a:off x="5230368" y="1709928"/>
-            <a:ext cx="3383280" cy="365760"/>
-          </a:xfrm>
-          <a:prstGeom prst="rect">
-            <a:avLst/>
-          </a:prstGeom>
-          <a:noFill/>
-          <a:ln/>
-        </p:spPr>
-        <p:txBody>
-          <a:bodyPr wrap="square" lIns="0" tIns="0" rIns="0" bIns="0" rtlCol="0" anchor="ctr"/>
-          <a:lstStyle/>
-          <a:p>
-            <a:pPr marL="0" indent="0">
-              <a:buNone/>
-            </a:pPr>
-            <a:r>
-              <a:rPr lang="en-US" sz="1400" b="1" dirty="0">
-                <a:solidFill>
-                  <a:srgbClr val="1D4ED8"/>
-                </a:solidFill>
-                <a:latin typeface="Arial" pitchFamily="34" charset="0"/>
-                <a:ea typeface="Arial" pitchFamily="34" charset="-122"/>
-                <a:cs typeface="Arial" pitchFamily="34" charset="-120"/>
-              </a:rPr>
-              <a:t>Three.js 시뮬레이션 구성요소</a:t>
-            </a:r>
-            <a:endParaRPr lang="en-US" sz="1400" dirty="0"/>
-          </a:p>
-        </p:txBody>
-      </p:sp>
-      <p:sp>
-        <p:nvSpPr>
-          <p:cNvPr id="25" name="Shape 21"/>
-          <p:cNvSpPr/>
-          <p:nvPr/>
-        </p:nvSpPr>
-        <p:spPr>
-          <a:xfrm>
-            <a:off x="4709160" y="2212848"/>
-            <a:ext cx="3840480" cy="402336"/>
-          </a:xfrm>
-          <a:prstGeom prst="rect">
-            <a:avLst/>
-          </a:prstGeom>
-          <a:solidFill>
-            <a:srgbClr val="FFFFFF"/>
-          </a:solidFill>
-          <a:ln w="12700">
-            <a:solidFill>
-              <a:srgbClr val="E5E7EB"/>
-            </a:solidFill>
-            <a:prstDash val="solid"/>
-          </a:ln>
-        </p:spPr>
-      </p:sp>
-      <p:sp>
-        <p:nvSpPr>
-          <p:cNvPr id="26" name="Shape 22"/>
-          <p:cNvSpPr/>
-          <p:nvPr/>
-        </p:nvSpPr>
-        <p:spPr>
-          <a:xfrm>
-            <a:off x="4709160" y="2212848"/>
-            <a:ext cx="73152" cy="402336"/>
-          </a:xfrm>
-          <a:prstGeom prst="rect">
-            <a:avLst/>
-          </a:prstGeom>
-          <a:solidFill>
-            <a:srgbClr val="3B82F6"/>
-          </a:solidFill>
-          <a:ln w="12700">
-            <a:solidFill>
-              <a:srgbClr val="3B82F6"/>
-            </a:solidFill>
-            <a:prstDash val="solid"/>
-          </a:ln>
-        </p:spPr>
-      </p:sp>
-      <p:sp>
-        <p:nvSpPr>
-          <p:cNvPr id="27" name="Text 23"/>
-          <p:cNvSpPr/>
-          <p:nvPr/>
-        </p:nvSpPr>
-        <p:spPr>
-          <a:xfrm>
-            <a:off x="4864608" y="2212848"/>
-            <a:ext cx="1005840" cy="402336"/>
-          </a:xfrm>
-          <a:prstGeom prst="rect">
-            <a:avLst/>
-          </a:prstGeom>
-          <a:noFill/>
-          <a:ln/>
-        </p:spPr>
-        <p:txBody>
-          <a:bodyPr wrap="square" lIns="0" tIns="0" rIns="0" bIns="0" rtlCol="0" anchor="ctr"/>
-          <a:lstStyle/>
-          <a:p>
-            <a:pPr marL="0" indent="0">
-              <a:buNone/>
-            </a:pPr>
-            <a:r>
-              <a:rPr lang="en-US" sz="1100" b="1" dirty="0">
-                <a:solidFill>
-                  <a:srgbClr val="1D4ED8"/>
-                </a:solidFill>
-                <a:latin typeface="Consolas" pitchFamily="34" charset="0"/>
-                <a:ea typeface="Consolas" pitchFamily="34" charset="-122"/>
-                <a:cs typeface="Consolas" pitchFamily="34" charset="-120"/>
-              </a:rPr>
-              <a:t>Scene</a:t>
-            </a:r>
-            <a:endParaRPr lang="en-US" sz="1100" dirty="0"/>
-          </a:p>
-        </p:txBody>
-      </p:sp>
-      <p:sp>
-        <p:nvSpPr>
-          <p:cNvPr id="28" name="Text 24"/>
-          <p:cNvSpPr/>
-          <p:nvPr/>
-        </p:nvSpPr>
-        <p:spPr>
-          <a:xfrm>
-            <a:off x="5925312" y="2212848"/>
-            <a:ext cx="2560320" cy="402336"/>
-          </a:xfrm>
-          <a:prstGeom prst="rect">
-            <a:avLst/>
-          </a:prstGeom>
-          <a:noFill/>
-          <a:ln/>
-        </p:spPr>
-        <p:txBody>
-          <a:bodyPr wrap="square" lIns="0" tIns="0" rIns="0" bIns="0" rtlCol="0" anchor="ctr"/>
-          <a:lstStyle/>
-          <a:p>
-            <a:pPr marL="0" indent="0">
-              <a:buNone/>
-            </a:pPr>
-            <a:r>
-              <a:rPr sz="1050">
-                <a:latin typeface="Malgun Gothic"/>
-              </a:rPr>
-              <a:t>강남 9개 동 3D 지도 + 조명 설정</a:t>
-            </a:r>
-            <a:endParaRPr lang="en-US" sz="1100" dirty="0"/>
-          </a:p>
-        </p:txBody>
-      </p:sp>
-      <p:sp>
-        <p:nvSpPr>
-          <p:cNvPr id="29" name="Shape 25"/>
-          <p:cNvSpPr/>
-          <p:nvPr/>
-        </p:nvSpPr>
-        <p:spPr>
-          <a:xfrm>
-            <a:off x="4709160" y="2697480"/>
-            <a:ext cx="3840480" cy="402336"/>
-          </a:xfrm>
-          <a:prstGeom prst="rect">
-            <a:avLst/>
-          </a:prstGeom>
-          <a:solidFill>
-            <a:srgbClr val="FFFFFF"/>
-          </a:solidFill>
-          <a:ln w="12700">
-            <a:solidFill>
-              <a:srgbClr val="E5E7EB"/>
-            </a:solidFill>
-            <a:prstDash val="solid"/>
-          </a:ln>
-        </p:spPr>
-      </p:sp>
-      <p:sp>
-        <p:nvSpPr>
-          <p:cNvPr id="30" name="Shape 26"/>
-          <p:cNvSpPr/>
-          <p:nvPr/>
-        </p:nvSpPr>
-        <p:spPr>
-          <a:xfrm>
-            <a:off x="4709160" y="2697480"/>
-            <a:ext cx="73152" cy="402336"/>
-          </a:xfrm>
-          <a:prstGeom prst="rect">
-            <a:avLst/>
-          </a:prstGeom>
-          <a:solidFill>
-            <a:srgbClr val="3B82F6"/>
-          </a:solidFill>
-          <a:ln w="12700">
-            <a:solidFill>
-              <a:srgbClr val="3B82F6"/>
-            </a:solidFill>
-            <a:prstDash val="solid"/>
-          </a:ln>
-        </p:spPr>
-      </p:sp>
-      <p:sp>
-        <p:nvSpPr>
-          <p:cNvPr id="31" name="Text 27"/>
-          <p:cNvSpPr/>
-          <p:nvPr/>
-        </p:nvSpPr>
-        <p:spPr>
-          <a:xfrm>
-            <a:off x="4864608" y="2697480"/>
-            <a:ext cx="1005840" cy="402336"/>
-          </a:xfrm>
-          <a:prstGeom prst="rect">
-            <a:avLst/>
-          </a:prstGeom>
-          <a:noFill/>
-          <a:ln/>
-        </p:spPr>
-        <p:txBody>
-          <a:bodyPr wrap="square" lIns="0" tIns="0" rIns="0" bIns="0" rtlCol="0" anchor="ctr"/>
-          <a:lstStyle/>
-          <a:p>
-            <a:pPr marL="0" indent="0">
-              <a:buNone/>
-            </a:pPr>
-            <a:r>
-              <a:rPr lang="en-US" sz="1100" b="1" dirty="0">
-                <a:solidFill>
-                  <a:srgbClr val="1D4ED8"/>
-                </a:solidFill>
-                <a:latin typeface="Consolas" pitchFamily="34" charset="0"/>
-                <a:ea typeface="Consolas" pitchFamily="34" charset="-122"/>
-                <a:cs typeface="Consolas" pitchFamily="34" charset="-120"/>
-              </a:rPr>
-              <a:t>Road</a:t>
-            </a:r>
-            <a:endParaRPr lang="en-US" sz="1100" dirty="0"/>
-          </a:p>
-        </p:txBody>
-      </p:sp>
-      <p:sp>
-        <p:nvSpPr>
-          <p:cNvPr id="32" name="Text 28"/>
-          <p:cNvSpPr/>
-          <p:nvPr/>
-        </p:nvSpPr>
-        <p:spPr>
-          <a:xfrm>
-            <a:off x="5925312" y="2697480"/>
-            <a:ext cx="2560320" cy="402336"/>
-          </a:xfrm>
-          <a:prstGeom prst="rect">
-            <a:avLst/>
-          </a:prstGeom>
-          <a:noFill/>
-          <a:ln/>
-        </p:spPr>
-        <p:txBody>
-          <a:bodyPr wrap="square" lIns="0" tIns="0" rIns="0" bIns="0" rtlCol="0" anchor="ctr"/>
-          <a:lstStyle/>
-          <a:p>
-            <a:pPr marL="0" indent="0">
-              <a:buNone/>
-            </a:pPr>
-            <a:r>
-              <a:rPr lang="en-US" sz="1100" dirty="0">
-                <a:solidFill>
-                  <a:srgbClr val="2D2D2D"/>
-                </a:solidFill>
-                <a:latin typeface="Arial" pitchFamily="34" charset="0"/>
-                <a:ea typeface="Arial" pitchFamily="34" charset="-122"/>
-                <a:cs typeface="Arial" pitchFamily="34" charset="-120"/>
-              </a:rPr>
-              <a:t>OSM 엣지 → LineSegments 렌더</a:t>
-            </a:r>
-            <a:endParaRPr lang="en-US" sz="1100" dirty="0"/>
-          </a:p>
-        </p:txBody>
-      </p:sp>
-      <p:sp>
-        <p:nvSpPr>
-          <p:cNvPr id="33" name="Shape 29"/>
-          <p:cNvSpPr/>
-          <p:nvPr/>
-        </p:nvSpPr>
-        <p:spPr>
-          <a:xfrm>
-            <a:off x="4709160" y="3182112"/>
-            <a:ext cx="3840480" cy="402336"/>
-          </a:xfrm>
-          <a:prstGeom prst="rect">
-            <a:avLst/>
-          </a:prstGeom>
-          <a:solidFill>
-            <a:srgbClr val="FFFFFF"/>
-          </a:solidFill>
-          <a:ln w="12700">
-            <a:solidFill>
-              <a:srgbClr val="E5E7EB"/>
-            </a:solidFill>
-            <a:prstDash val="solid"/>
-          </a:ln>
-        </p:spPr>
-      </p:sp>
-      <p:sp>
-        <p:nvSpPr>
-          <p:cNvPr id="34" name="Shape 30"/>
-          <p:cNvSpPr/>
-          <p:nvPr/>
-        </p:nvSpPr>
-        <p:spPr>
-          <a:xfrm>
-            <a:off x="4709160" y="3182112"/>
-            <a:ext cx="73152" cy="402336"/>
-          </a:xfrm>
-          <a:prstGeom prst="rect">
-            <a:avLst/>
-          </a:prstGeom>
-          <a:solidFill>
-            <a:srgbClr val="3B82F6"/>
-          </a:solidFill>
-          <a:ln w="12700">
-            <a:solidFill>
-              <a:srgbClr val="3B82F6"/>
-            </a:solidFill>
-            <a:prstDash val="solid"/>
-          </a:ln>
-        </p:spPr>
-      </p:sp>
-      <p:sp>
-        <p:nvSpPr>
-          <p:cNvPr id="35" name="Text 31"/>
-          <p:cNvSpPr/>
-          <p:nvPr/>
-        </p:nvSpPr>
-        <p:spPr>
-          <a:xfrm>
-            <a:off x="4864608" y="3182112"/>
-            <a:ext cx="1005840" cy="402336"/>
-          </a:xfrm>
-          <a:prstGeom prst="rect">
-            <a:avLst/>
-          </a:prstGeom>
-          <a:noFill/>
-          <a:ln/>
-        </p:spPr>
-        <p:txBody>
-          <a:bodyPr wrap="square" lIns="0" tIns="0" rIns="0" bIns="0" rtlCol="0" anchor="ctr"/>
-          <a:lstStyle/>
-          <a:p>
-            <a:pPr marL="0" indent="0">
-              <a:buNone/>
-            </a:pPr>
-            <a:r>
-              <a:rPr lang="en-US" sz="1100" b="1" dirty="0">
-                <a:solidFill>
-                  <a:srgbClr val="1D4ED8"/>
-                </a:solidFill>
-                <a:latin typeface="Consolas" pitchFamily="34" charset="0"/>
-                <a:ea typeface="Consolas" pitchFamily="34" charset="-122"/>
-                <a:cs typeface="Consolas" pitchFamily="34" charset="-120"/>
-              </a:rPr>
-              <a:t>Taxi</a:t>
-            </a:r>
-            <a:endParaRPr lang="en-US" sz="1100" dirty="0"/>
-          </a:p>
-        </p:txBody>
-      </p:sp>
-      <p:sp>
-        <p:nvSpPr>
-          <p:cNvPr id="36" name="Text 32"/>
-          <p:cNvSpPr/>
-          <p:nvPr/>
-        </p:nvSpPr>
-        <p:spPr>
-          <a:xfrm>
-            <a:off x="5925312" y="3182112"/>
-            <a:ext cx="2560320" cy="402336"/>
-          </a:xfrm>
-          <a:prstGeom prst="rect">
-            <a:avLst/>
-          </a:prstGeom>
-          <a:noFill/>
-          <a:ln/>
-        </p:spPr>
-        <p:txBody>
-          <a:bodyPr wrap="square" lIns="0" tIns="0" rIns="0" bIns="0" rtlCol="0" anchor="ctr"/>
-          <a:lstStyle/>
-          <a:p>
-            <a:pPr marL="0" indent="0">
-              <a:buNone/>
-            </a:pPr>
-            <a:r>
-              <a:rPr lang="en-US" sz="1100" dirty="0">
-                <a:solidFill>
-                  <a:srgbClr val="2D2D2D"/>
-                </a:solidFill>
-                <a:latin typeface="Arial" pitchFamily="34" charset="0"/>
-                <a:ea typeface="Arial" pitchFamily="34" charset="-122"/>
-                <a:cs typeface="Arial" pitchFamily="34" charset="-120"/>
-              </a:rPr>
-              <a:t>BoxGeometry + 경로 애니메이션</a:t>
-            </a:r>
-            <a:endParaRPr lang="en-US" sz="1100" dirty="0"/>
-          </a:p>
-        </p:txBody>
-      </p:sp>
-      <p:sp>
-        <p:nvSpPr>
-          <p:cNvPr id="37" name="Shape 33"/>
-          <p:cNvSpPr/>
-          <p:nvPr/>
-        </p:nvSpPr>
-        <p:spPr>
-          <a:xfrm>
-            <a:off x="4709160" y="3666744"/>
-            <a:ext cx="3840480" cy="402336"/>
-          </a:xfrm>
-          <a:prstGeom prst="rect">
-            <a:avLst/>
-          </a:prstGeom>
-          <a:solidFill>
-            <a:srgbClr val="FFFFFF"/>
-          </a:solidFill>
-          <a:ln w="12700">
-            <a:solidFill>
-              <a:srgbClr val="E5E7EB"/>
-            </a:solidFill>
-            <a:prstDash val="solid"/>
-          </a:ln>
-        </p:spPr>
-      </p:sp>
-      <p:sp>
-        <p:nvSpPr>
-          <p:cNvPr id="38" name="Shape 34"/>
-          <p:cNvSpPr/>
-          <p:nvPr/>
-        </p:nvSpPr>
-        <p:spPr>
-          <a:xfrm>
-            <a:off x="4709160" y="3666744"/>
-            <a:ext cx="73152" cy="402336"/>
-          </a:xfrm>
-          <a:prstGeom prst="rect">
-            <a:avLst/>
-          </a:prstGeom>
-          <a:solidFill>
-            <a:srgbClr val="3B82F6"/>
-          </a:solidFill>
-          <a:ln w="12700">
-            <a:solidFill>
-              <a:srgbClr val="3B82F6"/>
-            </a:solidFill>
-            <a:prstDash val="solid"/>
-          </a:ln>
-        </p:spPr>
-      </p:sp>
-      <p:sp>
-        <p:nvSpPr>
-          <p:cNvPr id="39" name="Text 35"/>
-          <p:cNvSpPr/>
-          <p:nvPr/>
-        </p:nvSpPr>
-        <p:spPr>
-          <a:xfrm>
-            <a:off x="4864608" y="3666744"/>
-            <a:ext cx="1005840" cy="402336"/>
-          </a:xfrm>
-          <a:prstGeom prst="rect">
-            <a:avLst/>
-          </a:prstGeom>
-          <a:noFill/>
-          <a:ln/>
-        </p:spPr>
-        <p:txBody>
-          <a:bodyPr wrap="square" lIns="0" tIns="0" rIns="0" bIns="0" rtlCol="0" anchor="ctr"/>
-          <a:lstStyle/>
-          <a:p>
-            <a:pPr marL="0" indent="0">
-              <a:buNone/>
-            </a:pPr>
-            <a:r>
-              <a:rPr lang="en-US" sz="1100" b="1" dirty="0">
-                <a:solidFill>
-                  <a:srgbClr val="1D4ED8"/>
-                </a:solidFill>
-                <a:latin typeface="Consolas" pitchFamily="34" charset="0"/>
-                <a:ea typeface="Consolas" pitchFamily="34" charset="-122"/>
-                <a:cs typeface="Consolas" pitchFamily="34" charset="-120"/>
-              </a:rPr>
-              <a:t>Demand</a:t>
-            </a:r>
-            <a:endParaRPr lang="en-US" sz="1100" dirty="0"/>
-          </a:p>
-        </p:txBody>
-      </p:sp>
-      <p:sp>
-        <p:nvSpPr>
-          <p:cNvPr id="40" name="Text 36"/>
-          <p:cNvSpPr/>
-          <p:nvPr/>
-        </p:nvSpPr>
-        <p:spPr>
-          <a:xfrm>
-            <a:off x="5925312" y="3666744"/>
-            <a:ext cx="2560320" cy="402336"/>
-          </a:xfrm>
-          <a:prstGeom prst="rect">
-            <a:avLst/>
-          </a:prstGeom>
-          <a:noFill/>
-          <a:ln/>
-        </p:spPr>
-        <p:txBody>
-          <a:bodyPr wrap="square" lIns="0" tIns="0" rIns="0" bIns="0" rtlCol="0" anchor="ctr"/>
-          <a:lstStyle/>
-          <a:p>
-            <a:pPr marL="0" indent="0">
-              <a:buNone/>
-            </a:pPr>
-            <a:r>
-              <a:rPr lang="en-US" sz="1100" dirty="0">
-                <a:solidFill>
-                  <a:srgbClr val="2D2D2D"/>
-                </a:solidFill>
-                <a:latin typeface="Arial" pitchFamily="34" charset="0"/>
-                <a:ea typeface="Arial" pitchFamily="34" charset="-122"/>
-                <a:cs typeface="Arial" pitchFamily="34" charset="-120"/>
-              </a:rPr>
-              <a:t>히트맵 레이어 (수요 시각화)</a:t>
-            </a:r>
-            <a:endParaRPr lang="en-US" sz="1100" dirty="0"/>
-          </a:p>
-        </p:txBody>
-      </p:sp>
-      <p:sp>
-        <p:nvSpPr>
-          <p:cNvPr id="41" name="Shape 37"/>
-          <p:cNvSpPr/>
-          <p:nvPr/>
-        </p:nvSpPr>
-        <p:spPr>
-          <a:xfrm>
-            <a:off x="4709160" y="4151376"/>
-            <a:ext cx="3840480" cy="402336"/>
-          </a:xfrm>
-          <a:prstGeom prst="rect">
-            <a:avLst/>
-          </a:prstGeom>
-          <a:solidFill>
-            <a:srgbClr val="FFFFFF"/>
-          </a:solidFill>
-          <a:ln w="12700">
-            <a:solidFill>
-              <a:srgbClr val="E5E7EB"/>
-            </a:solidFill>
-            <a:prstDash val="solid"/>
-          </a:ln>
-        </p:spPr>
-      </p:sp>
-      <p:sp>
-        <p:nvSpPr>
-          <p:cNvPr id="42" name="Shape 38"/>
-          <p:cNvSpPr/>
-          <p:nvPr/>
-        </p:nvSpPr>
-        <p:spPr>
-          <a:xfrm>
-            <a:off x="4709160" y="4151376"/>
-            <a:ext cx="73152" cy="402336"/>
-          </a:xfrm>
-          <a:prstGeom prst="rect">
-            <a:avLst/>
-          </a:prstGeom>
-          <a:solidFill>
-            <a:srgbClr val="3B82F6"/>
-          </a:solidFill>
-          <a:ln w="12700">
-            <a:solidFill>
-              <a:srgbClr val="3B82F6"/>
-            </a:solidFill>
-            <a:prstDash val="solid"/>
-          </a:ln>
-        </p:spPr>
-      </p:sp>
-      <p:sp>
-        <p:nvSpPr>
-          <p:cNvPr id="43" name="Text 39"/>
-          <p:cNvSpPr/>
-          <p:nvPr/>
-        </p:nvSpPr>
-        <p:spPr>
-          <a:xfrm>
-            <a:off x="4864608" y="4151376"/>
-            <a:ext cx="1005840" cy="402336"/>
-          </a:xfrm>
-          <a:prstGeom prst="rect">
-            <a:avLst/>
-          </a:prstGeom>
-          <a:noFill/>
-          <a:ln/>
-        </p:spPr>
-        <p:txBody>
-          <a:bodyPr wrap="square" lIns="0" tIns="0" rIns="0" bIns="0" rtlCol="0" anchor="ctr"/>
-          <a:lstStyle/>
-          <a:p>
-            <a:pPr marL="0" indent="0">
-              <a:buNone/>
-            </a:pPr>
-            <a:r>
-              <a:rPr lang="en-US" sz="1100" b="1" dirty="0">
-                <a:solidFill>
-                  <a:srgbClr val="1D4ED8"/>
-                </a:solidFill>
-                <a:latin typeface="Consolas" pitchFamily="34" charset="0"/>
-                <a:ea typeface="Consolas" pitchFamily="34" charset="-122"/>
-                <a:cs typeface="Consolas" pitchFamily="34" charset="-120"/>
-              </a:rPr>
-              <a:t>Camera</a:t>
-            </a:r>
-            <a:endParaRPr lang="en-US" sz="1100" dirty="0"/>
-          </a:p>
-        </p:txBody>
-      </p:sp>
-      <p:sp>
-        <p:nvSpPr>
-          <p:cNvPr id="44" name="Text 40"/>
-          <p:cNvSpPr/>
-          <p:nvPr/>
-        </p:nvSpPr>
-        <p:spPr>
-          <a:xfrm>
-            <a:off x="5925312" y="4151376"/>
-            <a:ext cx="2560320" cy="402336"/>
-          </a:xfrm>
-          <a:prstGeom prst="rect">
-            <a:avLst/>
-          </a:prstGeom>
-          <a:noFill/>
-          <a:ln/>
-        </p:spPr>
-        <p:txBody>
-          <a:bodyPr wrap="square" lIns="0" tIns="0" rIns="0" bIns="0" rtlCol="0" anchor="ctr"/>
-          <a:lstStyle/>
-          <a:p>
-            <a:pPr marL="0" indent="0">
-              <a:buNone/>
-            </a:pPr>
-            <a:r>
-              <a:rPr lang="en-US" sz="1100" dirty="0">
-                <a:solidFill>
-                  <a:srgbClr val="2D2D2D"/>
-                </a:solidFill>
-                <a:latin typeface="Arial" pitchFamily="34" charset="0"/>
-                <a:ea typeface="Arial" pitchFamily="34" charset="-122"/>
-                <a:cs typeface="Arial" pitchFamily="34" charset="-120"/>
-              </a:rPr>
-              <a:t>OrbitControls — 마우스 회전/줌</a:t>
-            </a:r>
-            <a:endParaRPr lang="en-US" sz="1100" dirty="0"/>
-          </a:p>
-        </p:txBody>
-      </p:sp>
-    </p:spTree>
-  </p:cSld>
-  <p:clrMapOvr>
-    <a:masterClrMapping/>
-  </p:clrMapOvr>
-</p:sld>
+<ns0:sld xmlns:ns0="http://schemas.openxmlformats.org/presentationml/2006/main" xmlns:ns1="http://schemas.openxmlformats.org/drawingml/2006/main" xmlns:ns2="http://schemas.openxmlformats.org/officeDocument/2006/relationships">
+  <ns0:cSld name="Slide 5">
+    <ns0:bg>
+      <ns0:bgPr>
+        <ns1:solidFill>
+          <ns1:srgbClr val="FFFFFF"/>
+        </ns1:solidFill>
+        <ns1:effectLst/>
+      </ns0:bgPr>
+    </ns0:bg>
+    <ns0:spTree>
+      <ns0:nvGrpSpPr>
+        <ns0:cNvPr id="1" name=""/>
+        <ns0:cNvGrpSpPr/>
+        <ns0:nvPr/>
+      </ns0:nvGrpSpPr>
+      <ns0:grpSpPr>
+        <ns1:xfrm>
+          <ns1:off x="0" y="0"/>
+          <ns1:ext cx="0" cy="0"/>
+          <ns1:chOff x="0" y="0"/>
+          <ns1:chExt cx="0" cy="0"/>
+        </ns1:xfrm>
+      </ns0:grpSpPr>
+      <ns0:sp>
+        <ns0:nvSpPr>
+          <ns0:cNvPr id="2" name="Shape 0"/>
+          <ns0:cNvSpPr/>
+          <ns0:nvPr/>
+        </ns0:nvSpPr>
+        <ns0:spPr>
+          <ns1:xfrm>
+            <ns1:off x="0" y="0"/>
+            <ns1:ext cx="9144000" cy="594360"/>
+          </ns1:xfrm>
+          <ns1:prstGeom prst="rect">
+            <ns1:avLst/>
+          </ns1:prstGeom>
+          <ns1:solidFill>
+            <ns1:srgbClr val="1A1A1A"/>
+          </ns1:solidFill>
+          <ns1:ln w="12700">
+            <ns1:solidFill>
+              <ns1:srgbClr val="1A1A1A"/>
+            </ns1:solidFill>
+            <ns1:prstDash val="solid"/>
+          </ns1:ln>
+        </ns0:spPr>
+        <ns0:txBody>
+          <ns1:bodyPr/>
+          <ns1:lstStyle/>
+          <ns1:p>
+            <ns1:endParaRPr lang="ko-KR" altLang="en-US"/>
+          </ns1:p>
+        </ns0:txBody>
+      </ns0:sp>
+      <ns0:sp>
+        <ns0:nvSpPr>
+          <ns0:cNvPr id="3" name="Text 1"/>
+          <ns0:cNvSpPr/>
+          <ns0:nvPr/>
+        </ns0:nvSpPr>
+        <ns0:spPr>
+          <ns1:xfrm>
+            <ns1:off x="365760" y="91440"/>
+            <ns1:ext cx="4572000" cy="411480"/>
+          </ns1:xfrm>
+          <ns1:prstGeom prst="rect">
+            <ns1:avLst/>
+          </ns1:prstGeom>
+          <ns1:noFill/>
+          <ns1:ln/>
+        </ns0:spPr>
+        <ns0:txBody>
+          <ns1:bodyPr wrap="square" lIns="0" tIns="0" rIns="0" bIns="0" rtlCol="0" anchor="ctr"/>
+          <ns1:lstStyle/>
+          <ns1:p>
+            <ns1:pPr marL="0" indent="0">
+              <ns1:buNone/>
+            </ns1:pPr>
+            <ns1:r>
+              <ns1:rPr lang="en-US" sz="1300" b="1" dirty="0">
+                <ns1:solidFill>
+                  <ns1:srgbClr val="FFCD00"/>
+                </ns1:solidFill>
+                <ns1:latin typeface="Arial Black" pitchFamily="34" charset="0"/>
+                <ns1:ea typeface="Arial Black" pitchFamily="34" charset="-122"/>
+                <ns1:cs typeface="Arial Black" pitchFamily="34" charset="-120"/>
+              </ns1:rPr>
+              <ns1:t>역삼 택시  ·  Digital Twin</ns1:t>
+            </ns1:r>
+            <ns1:endParaRPr lang="en-US" sz="1300" dirty="0"/>
+          </ns1:p>
+        </ns0:txBody>
+      </ns0:sp>
+      <ns0:sp>
+        <ns0:nvSpPr>
+          <ns0:cNvPr id="4" name="Text 2"/>
+          <ns0:cNvSpPr/>
+          <ns0:nvPr/>
+        </ns0:nvSpPr>
+        <ns0:spPr>
+          <ns1:xfrm>
+            <ns1:off x="6400800" y="91440"/>
+            <ns1:ext cx="2560320" cy="411480"/>
+          </ns1:xfrm>
+          <ns1:prstGeom prst="rect">
+            <ns1:avLst/>
+          </ns1:prstGeom>
+          <ns1:noFill/>
+          <ns1:ln/>
+        </ns0:spPr>
+        <ns0:txBody>
+          <ns1:bodyPr wrap="square" lIns="0" tIns="0" rIns="0" bIns="0" rtlCol="0" anchor="ctr"/>
+          <ns1:lstStyle/>
+          <ns1:p>
+            <ns1:pPr marL="0" indent="0" algn="r">
+              <ns1:buNone/>
+            </ns1:pPr>
+            <ns1:r>
+              <ns1:rPr lang="en-US" sz="1200" dirty="0">
+                <ns1:solidFill>
+                  <ns1:srgbClr val="FFFFFF"/>
+                </ns1:solidFill>
+                <ns1:latin typeface="Arial" pitchFamily="34" charset="0"/>
+                <ns1:ea typeface="Arial" pitchFamily="34" charset="-122"/>
+                <ns1:cs typeface="Arial" pitchFamily="34" charset="-120"/>
+              </ns1:rPr>
+              <ns1:t>기술 구현</ns1:t>
+            </ns1:r>
+            <ns1:endParaRPr lang="en-US" sz="1200" dirty="0"/>
+          </ns1:p>
+        </ns0:txBody>
+      </ns0:sp>
+      <ns0:sp>
+        <ns0:nvSpPr>
+          <ns0:cNvPr id="5" name="Shape 3"/>
+          <ns0:cNvSpPr/>
+          <ns0:nvPr/>
+        </ns0:nvSpPr>
+        <ns0:spPr>
+          <ns1:xfrm>
+            <ns1:off x="0" y="4892040"/>
+            <ns1:ext cx="9144000" cy="256032"/>
+          </ns1:xfrm>
+          <ns1:prstGeom prst="rect">
+            <ns1:avLst/>
+          </ns1:prstGeom>
+          <ns1:solidFill>
+            <ns1:srgbClr val="FFCD00"/>
+          </ns1:solidFill>
+          <ns1:ln w="12700">
+            <ns1:solidFill>
+              <ns1:srgbClr val="FFCD00"/>
+            </ns1:solidFill>
+            <ns1:prstDash val="solid"/>
+          </ns1:ln>
+        </ns0:spPr>
+        <ns0:txBody>
+          <ns1:bodyPr/>
+          <ns1:lstStyle/>
+          <ns1:p>
+            <ns1:endParaRPr lang="ko-KR" altLang="en-US"/>
+          </ns1:p>
+        </ns0:txBody>
+      </ns0:sp>
+      <ns0:sp>
+        <ns0:nvSpPr>
+          <ns0:cNvPr id="6" name="Text 4"/>
+          <ns0:cNvSpPr/>
+          <ns0:nvPr/>
+        </ns0:nvSpPr>
+        <ns0:spPr>
+          <ns1:xfrm>
+            <ns1:off x="457200" y="777240"/>
+            <ns1:ext cx="8229600" cy="594360"/>
+          </ns1:xfrm>
+          <ns1:prstGeom prst="rect">
+            <ns1:avLst/>
+          </ns1:prstGeom>
+          <ns1:noFill/>
+          <ns1:ln/>
+        </ns0:spPr>
+        <ns0:txBody>
+          <ns1:bodyPr wrap="square" lIns="0" tIns="0" rIns="0" bIns="0" rtlCol="0" anchor="ctr"/>
+          <ns1:lstStyle/>
+          <ns1:p>
+            <ns1:pPr marL="0" indent="0">
+              <ns1:buNone/>
+            </ns1:pPr>
+            <ns1:r>
+              <ns1:rPr lang="en-US" sz="2600" b="1" dirty="0">
+                <ns1:solidFill>
+                  <ns1:srgbClr val="1A1A1A"/>
+                </ns1:solidFill>
+                <ns1:latin typeface="Arial Black" pitchFamily="34" charset="0"/>
+                <ns1:ea typeface="Arial Black" pitchFamily="34" charset="-122"/>
+                <ns1:cs typeface="Arial Black" pitchFamily="34" charset="-120"/>
+              </ns1:rPr>
+              <ns1:t>Three.js + OpenStreetMap 구현</ns1:t>
+            </ns1:r>
+            <ns1:endParaRPr lang="en-US" sz="2600" dirty="0"/>
+          </ns1:p>
+        </ns0:txBody>
+      </ns0:sp>
+      <ns0:sp>
+        <ns0:nvSpPr>
+          <ns0:cNvPr id="7" name="Shape 5"/>
+          <ns0:cNvSpPr/>
+          <ns0:nvPr/>
+        </ns0:nvSpPr>
+        <ns0:spPr>
+          <ns1:xfrm>
+            <ns1:off x="365760" y="1508760"/>
+            <ns1:ext cx="3931920" cy="3337560"/>
+          </ns1:xfrm>
+          <ns1:prstGeom prst="rect">
+            <ns1:avLst/>
+          </ns1:prstGeom>
+          <ns1:solidFill>
+            <ns1:srgbClr val="1A1A1A"/>
+          </ns1:solidFill>
+          <ns1:ln w="12700">
+            <ns1:solidFill>
+              <ns1:srgbClr val="1A1A1A"/>
+            </ns1:solidFill>
+            <ns1:prstDash val="solid"/>
+          </ns1:ln>
+          <ns1:effectLst>
+            <ns1:outerShdw blurRad="101600" dist="25400" dir="8100000" algn="bl" rotWithShape="0">
+              <ns1:srgbClr val="000000">
+                <ns1:alpha val="12000"/>
+              </ns1:srgbClr>
+            </ns1:outerShdw>
+          </ns1:effectLst>
+        </ns0:spPr>
+        <ns0:txBody>
+          <ns1:bodyPr/>
+          <ns1:lstStyle/>
+          <ns1:p>
+            <ns1:endParaRPr lang="ko-KR" altLang="en-US"/>
+          </ns1:p>
+        </ns0:txBody>
+      </ns0:sp>
+      <ns0:sp>
+        <ns0:nvSpPr>
+          <ns0:cNvPr id="8" name="Shape 6"/>
+          <ns0:cNvSpPr/>
+          <ns0:nvPr/>
+        </ns0:nvSpPr>
+        <ns0:spPr>
+          <ns1:xfrm>
+            <ns1:off x="365760" y="1508760"/>
+            <ns1:ext cx="3931920" cy="91440"/>
+          </ns1:xfrm>
+          <ns1:prstGeom prst="rect">
+            <ns1:avLst/>
+          </ns1:prstGeom>
+          <ns1:solidFill>
+            <ns1:srgbClr val="FFCD00"/>
+          </ns1:solidFill>
+          <ns1:ln w="12700">
+            <ns1:solidFill>
+              <ns1:srgbClr val="FFCD00"/>
+            </ns1:solidFill>
+            <ns1:prstDash val="solid"/>
+          </ns1:ln>
+        </ns0:spPr>
+        <ns0:txBody>
+          <ns1:bodyPr/>
+          <ns1:lstStyle/>
+          <ns1:p>
+            <ns1:endParaRPr lang="ko-KR" altLang="en-US"/>
+          </ns1:p>
+        </ns0:txBody>
+      </ns0:sp>
+      <ns0:pic>
+        <ns0:nvPicPr>
+          <ns0:cNvPr id="9" name="Image 0" descr="preencoded.png"/>
+          <ns0:cNvPicPr>
+            <ns1:picLocks noChangeAspect="1"/>
+          </ns0:cNvPicPr>
+          <ns0:nvPr/>
+        </ns0:nvPicPr>
+        <ns0:blipFill>
+          <ns1:blip ns2:embed="rId3"/>
+          <ns1:stretch>
+            <ns1:fillRect/>
+          </ns1:stretch>
+        </ns0:blipFill>
+        <ns0:spPr>
+          <ns1:xfrm>
+            <ns1:off x="502920" y="1645920"/>
+            <ns1:ext cx="502920" cy="502920"/>
+          </ns1:xfrm>
+          <ns1:prstGeom prst="rect">
+            <ns1:avLst/>
+          </ns1:prstGeom>
+        </ns0:spPr>
+      </ns0:pic>
+      <ns0:sp>
+        <ns0:nvSpPr>
+          <ns0:cNvPr id="10" name="Text 7"/>
+          <ns0:cNvSpPr/>
+          <ns0:nvPr/>
+        </ns0:nvSpPr>
+        <ns0:spPr>
+          <ns1:xfrm>
+            <ns1:off x="1051560" y="1709928"/>
+            <ns1:ext cx="3108960" cy="365760"/>
+          </ns1:xfrm>
+          <ns1:prstGeom prst="rect">
+            <ns1:avLst/>
+          </ns1:prstGeom>
+          <ns1:noFill/>
+          <ns1:ln/>
+        </ns0:spPr>
+        <ns0:txBody>
+          <ns1:bodyPr wrap="square" lIns="0" tIns="0" rIns="0" bIns="0" rtlCol="0" anchor="ctr"/>
+          <ns1:lstStyle/>
+          <ns1:p>
+            <ns1:pPr marL="0" indent="0">
+              <ns1:buNone/>
+            </ns1:pPr>
+            <ns1:r>
+              <ns1:rPr lang="en-US" sz="1400" b="1" dirty="0">
+                <ns1:solidFill>
+                  <ns1:srgbClr val="FFCD00"/>
+                </ns1:solidFill>
+                <ns1:latin typeface="Arial" pitchFamily="34" charset="0"/>
+                <ns1:ea typeface="Arial" pitchFamily="34" charset="-122"/>
+                <ns1:cs typeface="Arial" pitchFamily="34" charset="-120"/>
+              </ns1:rPr>
+              <ns1:t>OSM 도로 데이터 파이프라인</ns1:t>
+            </ns1:r>
+            <ns1:endParaRPr lang="en-US" sz="1400" dirty="0"/>
+          </ns1:p>
+        </ns0:txBody>
+      </ns0:sp>
+      <ns0:sp>
+        <ns0:nvSpPr>
+          <ns0:cNvPr id="11" name="Shape 8"/>
+          <ns0:cNvSpPr/>
+          <ns0:nvPr/>
+        </ns0:nvSpPr>
+        <ns0:spPr>
+          <ns1:xfrm>
+            <ns1:off x="548640" y="2212848"/>
+            <ns1:ext cx="3566160" cy="402336"/>
+          </ns1:xfrm>
+          <ns1:prstGeom prst="rect">
+            <ns1:avLst/>
+          </ns1:prstGeom>
+          <ns1:solidFill>
+            <ns1:srgbClr val="111827"/>
+          </ns1:solidFill>
+          <ns1:ln w="12700">
+            <ns1:solidFill>
+              <ns1:srgbClr val="374151"/>
+            </ns1:solidFill>
+            <ns1:prstDash val="solid"/>
+          </ns1:ln>
+        </ns0:spPr>
+        <ns0:txBody>
+          <ns1:bodyPr/>
+          <ns1:lstStyle/>
+          <ns1:p>
+            <ns1:endParaRPr lang="ko-KR" altLang="en-US"/>
+          </ns1:p>
+        </ns0:txBody>
+      </ns0:sp>
+      <ns0:sp>
+        <ns0:nvSpPr>
+          <ns0:cNvPr id="12" name="Text 9"/>
+          <ns0:cNvSpPr/>
+          <ns0:nvPr/>
+        </ns0:nvSpPr>
+        <ns0:spPr>
+          <ns1:xfrm>
+            <ns1:off x="640080" y="2212848"/>
+            <ns1:ext cx="3474720" cy="402336"/>
+          </ns1:xfrm>
+          <ns1:prstGeom prst="rect">
+            <ns1:avLst/>
+          </ns1:prstGeom>
+          <ns1:noFill/>
+          <ns1:ln/>
+        </ns0:spPr>
+        <ns0:txBody>
+          <ns1:bodyPr wrap="square" lIns="0" tIns="0" rIns="0" bIns="0" rtlCol="0" anchor="ctr"/>
+          <ns1:lstStyle/>
+          <ns1:p>
+            <ns1:pPr marL="0" indent="0">
+              <ns1:buNone/>
+            </ns1:pPr>
+            <ns1:r>
+              <ns1:rPr sz="1120">
+                <ns1:solidFill>
+                  <ns1:srgbClr val="FFFFFF"/>
+                </ns1:solidFill>
+                <ns1:latin typeface="Malgun Gothic"/>
+              </ns1:rPr>
+              <ns1:t>① Overpass API → 강남 9개 동 bbox 쿼리</ns1:t>
+            </ns1:r>
+            <ns1:endParaRPr lang="en-US" sz="1150" dirty="0"/>
+          </ns1:p>
+        </ns0:txBody>
+      </ns0:sp>
+      <ns0:sp>
+        <ns0:nvSpPr>
+          <ns0:cNvPr id="13" name="Shape 10"/>
+          <ns0:cNvSpPr/>
+          <ns0:nvPr/>
+        </ns0:nvSpPr>
+        <ns0:spPr>
+          <ns1:xfrm>
+            <ns1:off x="548640" y="2697480"/>
+            <ns1:ext cx="3566160" cy="402336"/>
+          </ns1:xfrm>
+          <ns1:prstGeom prst="rect">
+            <ns1:avLst/>
+          </ns1:prstGeom>
+          <ns1:solidFill>
+            <ns1:srgbClr val="111827"/>
+          </ns1:solidFill>
+          <ns1:ln w="12700">
+            <ns1:solidFill>
+              <ns1:srgbClr val="374151"/>
+            </ns1:solidFill>
+            <ns1:prstDash val="solid"/>
+          </ns1:ln>
+        </ns0:spPr>
+        <ns0:txBody>
+          <ns1:bodyPr/>
+          <ns1:lstStyle/>
+          <ns1:p>
+            <ns1:endParaRPr lang="ko-KR" altLang="en-US"/>
+          </ns1:p>
+        </ns0:txBody>
+      </ns0:sp>
+      <ns0:sp>
+        <ns0:nvSpPr>
+          <ns0:cNvPr id="14" name="Text 11"/>
+          <ns0:cNvSpPr/>
+          <ns0:nvPr/>
+        </ns0:nvSpPr>
+        <ns0:spPr>
+          <ns1:xfrm>
+            <ns1:off x="640080" y="2697480"/>
+            <ns1:ext cx="3474720" cy="402336"/>
+          </ns1:xfrm>
+          <ns1:prstGeom prst="rect">
+            <ns1:avLst/>
+          </ns1:prstGeom>
+          <ns1:noFill/>
+          <ns1:ln/>
+        </ns0:spPr>
+        <ns0:txBody>
+          <ns1:bodyPr wrap="square" lIns="0" tIns="0" rIns="0" bIns="0" rtlCol="0" anchor="ctr"/>
+          <ns1:lstStyle/>
+          <ns1:p>
+            <ns1:pPr marL="0" indent="0">
+              <ns1:buNone/>
+            </ns1:pPr>
+            <ns1:r>
+              <ns1:rPr lang="en-US" sz="1150" dirty="0">
+                <ns1:solidFill>
+                  <ns1:srgbClr val="FFFFFF"/>
+                </ns1:solidFill>
+                <ns1:latin typeface="Consolas" pitchFamily="34" charset="0"/>
+                <ns1:ea typeface="Consolas" pitchFamily="34" charset="-122"/>
+                <ns1:cs typeface="Consolas" pitchFamily="34" charset="-120"/>
+              </ns1:rPr>
+              <ns1:t>② Way(도로) 필터링 → highway 태그</ns1:t>
+            </ns1:r>
+            <ns1:endParaRPr lang="en-US" sz="1150" dirty="0"/>
+          </ns1:p>
+        </ns0:txBody>
+      </ns0:sp>
+      <ns0:sp>
+        <ns0:nvSpPr>
+          <ns0:cNvPr id="15" name="Shape 12"/>
+          <ns0:cNvSpPr/>
+          <ns0:nvPr/>
+        </ns0:nvSpPr>
+        <ns0:spPr>
+          <ns1:xfrm>
+            <ns1:off x="548640" y="3182112"/>
+            <ns1:ext cx="3566160" cy="402336"/>
+          </ns1:xfrm>
+          <ns1:prstGeom prst="rect">
+            <ns1:avLst/>
+          </ns1:prstGeom>
+          <ns1:solidFill>
+            <ns1:srgbClr val="111827"/>
+          </ns1:solidFill>
+          <ns1:ln w="12700">
+            <ns1:solidFill>
+              <ns1:srgbClr val="374151"/>
+            </ns1:solidFill>
+            <ns1:prstDash val="solid"/>
+          </ns1:ln>
+        </ns0:spPr>
+        <ns0:txBody>
+          <ns1:bodyPr/>
+          <ns1:lstStyle/>
+          <ns1:p>
+            <ns1:endParaRPr lang="ko-KR" altLang="en-US"/>
+          </ns1:p>
+        </ns0:txBody>
+      </ns0:sp>
+      <ns0:sp>
+        <ns0:nvSpPr>
+          <ns0:cNvPr id="16" name="Text 13"/>
+          <ns0:cNvSpPr/>
+          <ns0:nvPr/>
+        </ns0:nvSpPr>
+        <ns0:spPr>
+          <ns1:xfrm>
+            <ns1:off x="640080" y="3182112"/>
+            <ns1:ext cx="3474720" cy="402336"/>
+          </ns1:xfrm>
+          <ns1:prstGeom prst="rect">
+            <ns1:avLst/>
+          </ns1:prstGeom>
+          <ns1:noFill/>
+          <ns1:ln/>
+        </ns0:spPr>
+        <ns0:txBody>
+          <ns1:bodyPr wrap="square" lIns="0" tIns="0" rIns="0" bIns="0" rtlCol="0" anchor="ctr"/>
+          <ns1:lstStyle/>
+          <ns1:p>
+            <ns1:pPr marL="0" indent="0">
+              <ns1:buNone/>
+            </ns1:pPr>
+            <ns1:r>
+              <ns1:rPr lang="en-US" sz="1150" dirty="0">
+                <ns1:solidFill>
+                  <ns1:srgbClr val="FFFFFF"/>
+                </ns1:solidFill>
+                <ns1:latin typeface="Consolas" pitchFamily="34" charset="0"/>
+                <ns1:ea typeface="Consolas" pitchFamily="34" charset="-122"/>
+                <ns1:cs typeface="Consolas" pitchFamily="34" charset="-120"/>
+              </ns1:rPr>
+              <ns1:t>③ Node 좌표 추출 → lat/lon → 3D (x,z)</ns1:t>
+            </ns1:r>
+            <ns1:endParaRPr lang="en-US" sz="1150" dirty="0"/>
+          </ns1:p>
+        </ns0:txBody>
+      </ns0:sp>
+      <ns0:sp>
+        <ns0:nvSpPr>
+          <ns0:cNvPr id="17" name="Shape 14"/>
+          <ns0:cNvSpPr/>
+          <ns0:nvPr/>
+        </ns0:nvSpPr>
+        <ns0:spPr>
+          <ns1:xfrm>
+            <ns1:off x="548640" y="3666744"/>
+            <ns1:ext cx="3566160" cy="402336"/>
+          </ns1:xfrm>
+          <ns1:prstGeom prst="rect">
+            <ns1:avLst/>
+          </ns1:prstGeom>
+          <ns1:solidFill>
+            <ns1:srgbClr val="111827"/>
+          </ns1:solidFill>
+          <ns1:ln w="12700">
+            <ns1:solidFill>
+              <ns1:srgbClr val="374151"/>
+            </ns1:solidFill>
+            <ns1:prstDash val="solid"/>
+          </ns1:ln>
+        </ns0:spPr>
+        <ns0:txBody>
+          <ns1:bodyPr/>
+          <ns1:lstStyle/>
+          <ns1:p>
+            <ns1:endParaRPr lang="ko-KR" altLang="en-US"/>
+          </ns1:p>
+        </ns0:txBody>
+      </ns0:sp>
+      <ns0:sp>
+        <ns0:nvSpPr>
+          <ns0:cNvPr id="18" name="Text 15"/>
+          <ns0:cNvSpPr/>
+          <ns0:nvPr/>
+        </ns0:nvSpPr>
+        <ns0:spPr>
+          <ns1:xfrm>
+            <ns1:off x="640080" y="3666744"/>
+            <ns1:ext cx="3474720" cy="402336"/>
+          </ns1:xfrm>
+          <ns1:prstGeom prst="rect">
+            <ns1:avLst/>
+          </ns1:prstGeom>
+          <ns1:noFill/>
+          <ns1:ln/>
+        </ns0:spPr>
+        <ns0:txBody>
+          <ns1:bodyPr wrap="square" lIns="0" tIns="0" rIns="0" bIns="0" rtlCol="0" anchor="ctr"/>
+          <ns1:lstStyle/>
+          <ns1:p>
+            <ns1:pPr marL="0" indent="0">
+              <ns1:buNone/>
+            </ns1:pPr>
+            <ns1:r>
+              <ns1:rPr lang="en-US" sz="1150" dirty="0">
+                <ns1:solidFill>
+                  <ns1:srgbClr val="FFFFFF"/>
+                </ns1:solidFill>
+                <ns1:latin typeface="Consolas" pitchFamily="34" charset="0"/>
+                <ns1:ea typeface="Consolas" pitchFamily="34" charset="-122"/>
+                <ns1:cs typeface="Consolas" pitchFamily="34" charset="-120"/>
+              </ns1:rPr>
+              <ns1:t>④ Edge 연결 → 도로 그래프 JSON 구성</ns1:t>
+            </ns1:r>
+            <ns1:endParaRPr lang="en-US" sz="1150" dirty="0"/>
+          </ns1:p>
+        </ns0:txBody>
+      </ns0:sp>
+      <ns0:sp>
+        <ns0:nvSpPr>
+          <ns0:cNvPr id="19" name="Shape 16"/>
+          <ns0:cNvSpPr/>
+          <ns0:nvPr/>
+        </ns0:nvSpPr>
+        <ns0:spPr>
+          <ns1:xfrm>
+            <ns1:off x="548640" y="4151376"/>
+            <ns1:ext cx="3566160" cy="402336"/>
+          </ns1:xfrm>
+          <ns1:prstGeom prst="rect">
+            <ns1:avLst/>
+          </ns1:prstGeom>
+          <ns1:solidFill>
+            <ns1:srgbClr val="111827"/>
+          </ns1:solidFill>
+          <ns1:ln w="12700">
+            <ns1:solidFill>
+              <ns1:srgbClr val="374151"/>
+            </ns1:solidFill>
+            <ns1:prstDash val="solid"/>
+          </ns1:ln>
+        </ns0:spPr>
+        <ns0:txBody>
+          <ns1:bodyPr/>
+          <ns1:lstStyle/>
+          <ns1:p>
+            <ns1:endParaRPr lang="ko-KR" altLang="en-US"/>
+          </ns1:p>
+        </ns0:txBody>
+      </ns0:sp>
+      <ns0:sp>
+        <ns0:nvSpPr>
+          <ns0:cNvPr id="20" name="Text 17"/>
+          <ns0:cNvSpPr/>
+          <ns0:nvPr/>
+        </ns0:nvSpPr>
+        <ns0:spPr>
+          <ns1:xfrm>
+            <ns1:off x="640080" y="4151376"/>
+            <ns1:ext cx="3474720" cy="402336"/>
+          </ns1:xfrm>
+          <ns1:prstGeom prst="rect">
+            <ns1:avLst/>
+          </ns1:prstGeom>
+          <ns1:noFill/>
+          <ns1:ln/>
+        </ns0:spPr>
+        <ns0:txBody>
+          <ns1:bodyPr wrap="square" lIns="0" tIns="0" rIns="0" bIns="0" rtlCol="0" anchor="ctr"/>
+          <ns1:lstStyle/>
+          <ns1:p>
+            <ns1:pPr marL="0" indent="0">
+              <ns1:buNone/>
+            </ns1:pPr>
+            <ns1:r>
+              <ns1:rPr sz="1120">
+                <ns1:solidFill>
+                  <ns1:srgbClr val="FFFFFF"/>
+                </ns1:solidFill>
+                <ns1:latin typeface="Malgun Gothic"/>
+              </ns1:rPr>
+              <ns1:t>⑤ Three.js InstancedMesh / LineSegments 렌더</ns1:t>
+            </ns1:r>
+            <ns1:endParaRPr lang="en-US" sz="1150" dirty="0"/>
+          </ns1:p>
+        </ns0:txBody>
+      </ns0:sp>
+      <ns0:sp>
+        <ns0:nvSpPr>
+          <ns0:cNvPr id="21" name="Shape 18"/>
+          <ns0:cNvSpPr/>
+          <ns0:nvPr/>
+        </ns0:nvSpPr>
+        <ns0:spPr>
+          <ns1:xfrm>
+            <ns1:off x="4572000" y="1508760"/>
+            <ns1:ext cx="4206240" cy="3337560"/>
+          </ns1:xfrm>
+          <ns1:prstGeom prst="rect">
+            <ns1:avLst/>
+          </ns1:prstGeom>
+          <ns1:solidFill>
+            <ns1:srgbClr val="F2F2F2"/>
+          </ns1:solidFill>
+          <ns1:ln w="12700">
+            <ns1:solidFill>
+              <ns1:srgbClr val="F2F2F2"/>
+            </ns1:solidFill>
+            <ns1:prstDash val="solid"/>
+          </ns1:ln>
+          <ns1:effectLst>
+            <ns1:outerShdw blurRad="101600" dist="25400" dir="8100000" algn="bl" rotWithShape="0">
+              <ns1:srgbClr val="000000">
+                <ns1:alpha val="12000"/>
+              </ns1:srgbClr>
+            </ns1:outerShdw>
+          </ns1:effectLst>
+        </ns0:spPr>
+        <ns0:txBody>
+          <ns1:bodyPr/>
+          <ns1:lstStyle/>
+          <ns1:p>
+            <ns1:endParaRPr lang="ko-KR" altLang="en-US"/>
+          </ns1:p>
+        </ns0:txBody>
+      </ns0:sp>
+      <ns0:sp>
+        <ns0:nvSpPr>
+          <ns0:cNvPr id="22" name="Shape 19"/>
+          <ns0:cNvSpPr/>
+          <ns0:nvPr/>
+        </ns0:nvSpPr>
+        <ns0:spPr>
+          <ns1:xfrm>
+            <ns1:off x="4572000" y="1508760"/>
+            <ns1:ext cx="4206240" cy="91440"/>
+          </ns1:xfrm>
+          <ns1:prstGeom prst="rect">
+            <ns1:avLst/>
+          </ns1:prstGeom>
+          <ns1:solidFill>
+            <ns1:srgbClr val="3B82F6"/>
+          </ns1:solidFill>
+          <ns1:ln w="12700">
+            <ns1:solidFill>
+              <ns1:srgbClr val="3B82F6"/>
+            </ns1:solidFill>
+            <ns1:prstDash val="solid"/>
+          </ns1:ln>
+        </ns0:spPr>
+        <ns0:txBody>
+          <ns1:bodyPr/>
+          <ns1:lstStyle/>
+          <ns1:p>
+            <ns1:endParaRPr lang="ko-KR" altLang="en-US"/>
+          </ns1:p>
+        </ns0:txBody>
+      </ns0:sp>
+      <ns0:pic>
+        <ns0:nvPicPr>
+          <ns0:cNvPr id="23" name="Image 1" descr="preencoded.png"/>
+          <ns0:cNvPicPr>
+            <ns1:picLocks noChangeAspect="1"/>
+          </ns0:cNvPicPr>
+          <ns0:nvPr/>
+        </ns0:nvPicPr>
+        <ns0:blipFill>
+          <ns1:blip ns2:embed="rId4"/>
+          <ns1:stretch>
+            <ns1:fillRect/>
+          </ns1:stretch>
+        </ns0:blipFill>
+        <ns0:spPr>
+          <ns1:xfrm>
+            <ns1:off x="4709160" y="1645920"/>
+            <ns1:ext cx="475488" cy="475488"/>
+          </ns1:xfrm>
+          <ns1:prstGeom prst="rect">
+            <ns1:avLst/>
+          </ns1:prstGeom>
+        </ns0:spPr>
+      </ns0:pic>
+      <ns0:sp>
+        <ns0:nvSpPr>
+          <ns0:cNvPr id="24" name="Text 20"/>
+          <ns0:cNvSpPr/>
+          <ns0:nvPr/>
+        </ns0:nvSpPr>
+        <ns0:spPr>
+          <ns1:xfrm>
+            <ns1:off x="5230368" y="1709928"/>
+            <ns1:ext cx="3383280" cy="365760"/>
+          </ns1:xfrm>
+          <ns1:prstGeom prst="rect">
+            <ns1:avLst/>
+          </ns1:prstGeom>
+          <ns1:noFill/>
+          <ns1:ln/>
+        </ns0:spPr>
+        <ns0:txBody>
+          <ns1:bodyPr wrap="square" lIns="0" tIns="0" rIns="0" bIns="0" rtlCol="0" anchor="ctr"/>
+          <ns1:lstStyle/>
+          <ns1:p>
+            <ns1:pPr marL="0" indent="0">
+              <ns1:buNone/>
+            </ns1:pPr>
+            <ns1:r>
+              <ns1:rPr lang="en-US" sz="1400" b="1" dirty="0">
+                <ns1:solidFill>
+                  <ns1:srgbClr val="1D4ED8"/>
+                </ns1:solidFill>
+                <ns1:latin typeface="Arial" pitchFamily="34" charset="0"/>
+                <ns1:ea typeface="Arial" pitchFamily="34" charset="-122"/>
+                <ns1:cs typeface="Arial" pitchFamily="34" charset="-120"/>
+              </ns1:rPr>
+              <ns1:t>Three.js 시뮬레이션 구성요소</ns1:t>
+            </ns1:r>
+            <ns1:endParaRPr lang="en-US" sz="1400" dirty="0"/>
+          </ns1:p>
+        </ns0:txBody>
+      </ns0:sp>
+      <ns0:sp>
+        <ns0:nvSpPr>
+          <ns0:cNvPr id="25" name="Shape 21"/>
+          <ns0:cNvSpPr/>
+          <ns0:nvPr/>
+        </ns0:nvSpPr>
+        <ns0:spPr>
+          <ns1:xfrm>
+            <ns1:off x="4709160" y="2212848"/>
+            <ns1:ext cx="3840480" cy="402336"/>
+          </ns1:xfrm>
+          <ns1:prstGeom prst="rect">
+            <ns1:avLst/>
+          </ns1:prstGeom>
+          <ns1:solidFill>
+            <ns1:srgbClr val="FFFFFF"/>
+          </ns1:solidFill>
+          <ns1:ln w="12700">
+            <ns1:solidFill>
+              <ns1:srgbClr val="E5E7EB"/>
+            </ns1:solidFill>
+            <ns1:prstDash val="solid"/>
+          </ns1:ln>
+        </ns0:spPr>
+        <ns0:txBody>
+          <ns1:bodyPr/>
+          <ns1:lstStyle/>
+          <ns1:p>
+            <ns1:endParaRPr lang="ko-KR" altLang="en-US"/>
+          </ns1:p>
+        </ns0:txBody>
+      </ns0:sp>
+      <ns0:sp>
+        <ns0:nvSpPr>
+          <ns0:cNvPr id="26" name="Shape 22"/>
+          <ns0:cNvSpPr/>
+          <ns0:nvPr/>
+        </ns0:nvSpPr>
+        <ns0:spPr>
+          <ns1:xfrm>
+            <ns1:off x="4709160" y="2212848"/>
+            <ns1:ext cx="73152" cy="402336"/>
+          </ns1:xfrm>
+          <ns1:prstGeom prst="rect">
+            <ns1:avLst/>
+          </ns1:prstGeom>
+          <ns1:solidFill>
+            <ns1:srgbClr val="3B82F6"/>
+          </ns1:solidFill>
+          <ns1:ln w="12700">
+            <ns1:solidFill>
+              <ns1:srgbClr val="3B82F6"/>
+            </ns1:solidFill>
+            <ns1:prstDash val="solid"/>
+          </ns1:ln>
+        </ns0:spPr>
+        <ns0:txBody>
+          <ns1:bodyPr/>
+          <ns1:lstStyle/>
+          <ns1:p>
+            <ns1:endParaRPr lang="ko-KR" altLang="en-US"/>
+          </ns1:p>
+        </ns0:txBody>
+      </ns0:sp>
+      <ns0:sp>
+        <ns0:nvSpPr>
+          <ns0:cNvPr id="27" name="Text 23"/>
+          <ns0:cNvSpPr/>
+          <ns0:nvPr/>
+        </ns0:nvSpPr>
+        <ns0:spPr>
+          <ns1:xfrm>
+            <ns1:off x="4864608" y="2212848"/>
+            <ns1:ext cx="1005840" cy="402336"/>
+          </ns1:xfrm>
+          <ns1:prstGeom prst="rect">
+            <ns1:avLst/>
+          </ns1:prstGeom>
+          <ns1:noFill/>
+          <ns1:ln/>
+        </ns0:spPr>
+        <ns0:txBody>
+          <ns1:bodyPr wrap="square" lIns="0" tIns="0" rIns="0" bIns="0" rtlCol="0" anchor="ctr"/>
+          <ns1:lstStyle/>
+          <ns1:p>
+            <ns1:pPr marL="0" indent="0">
+              <ns1:buNone/>
+            </ns1:pPr>
+            <ns1:r>
+              <ns1:rPr lang="en-US" sz="1100" b="1" dirty="0">
+                <ns1:solidFill>
+                  <ns1:srgbClr val="1D4ED8"/>
+                </ns1:solidFill>
+                <ns1:latin typeface="Consolas" pitchFamily="34" charset="0"/>
+                <ns1:ea typeface="Consolas" pitchFamily="34" charset="-122"/>
+                <ns1:cs typeface="Consolas" pitchFamily="34" charset="-120"/>
+              </ns1:rPr>
+              <ns1:t>Scene</ns1:t>
+            </ns1:r>
+            <ns1:endParaRPr lang="en-US" sz="1100" dirty="0"/>
+          </ns1:p>
+        </ns0:txBody>
+      </ns0:sp>
+      <ns0:sp>
+        <ns0:nvSpPr>
+          <ns0:cNvPr id="28" name="Text 24"/>
+          <ns0:cNvSpPr/>
+          <ns0:nvPr/>
+        </ns0:nvSpPr>
+        <ns0:spPr>
+          <ns1:xfrm>
+            <ns1:off x="5925312" y="2212848"/>
+            <ns1:ext cx="2560320" cy="402336"/>
+          </ns1:xfrm>
+          <ns1:prstGeom prst="rect">
+            <ns1:avLst/>
+          </ns1:prstGeom>
+          <ns1:noFill/>
+          <ns1:ln/>
+        </ns0:spPr>
+        <ns0:txBody>
+          <ns1:bodyPr wrap="square" lIns="0" tIns="0" rIns="0" bIns="0" rtlCol="0" anchor="ctr"/>
+          <ns1:lstStyle/>
+          <ns1:p>
+            <ns1:pPr marL="0" indent="0">
+              <ns1:buNone/>
+            </ns1:pPr>
+            <ns1:r>
+              <ns1:rPr sz="1050">
+                <ns1:latin typeface="Malgun Gothic"/>
+              </ns1:rPr>
+              <ns1:t>강남 9개 동 3D 지도 + 조명 설정</ns1:t>
+            </ns1:r>
+            <ns1:endParaRPr lang="en-US" sz="1100" dirty="0"/>
+          </ns1:p>
+        </ns0:txBody>
+      </ns0:sp>
+      <ns0:sp>
+        <ns0:nvSpPr>
+          <ns0:cNvPr id="29" name="Shape 25"/>
+          <ns0:cNvSpPr/>
+          <ns0:nvPr/>
+        </ns0:nvSpPr>
+        <ns0:spPr>
+          <ns1:xfrm>
+            <ns1:off x="4709160" y="2697480"/>
+            <ns1:ext cx="3840480" cy="402336"/>
+          </ns1:xfrm>
+          <ns1:prstGeom prst="rect">
+            <ns1:avLst/>
+          </ns1:prstGeom>
+          <ns1:solidFill>
+            <ns1:srgbClr val="FFFFFF"/>
+          </ns1:solidFill>
+          <ns1:ln w="12700">
+            <ns1:solidFill>
+              <ns1:srgbClr val="E5E7EB"/>
+            </ns1:solidFill>
+            <ns1:prstDash val="solid"/>
+          </ns1:ln>
+        </ns0:spPr>
+        <ns0:txBody>
+          <ns1:bodyPr/>
+          <ns1:lstStyle/>
+          <ns1:p>
+            <ns1:endParaRPr lang="ko-KR" altLang="en-US"/>
+          </ns1:p>
+        </ns0:txBody>
+      </ns0:sp>
+      <ns0:sp>
+        <ns0:nvSpPr>
+          <ns0:cNvPr id="30" name="Shape 26"/>
+          <ns0:cNvSpPr/>
+          <ns0:nvPr/>
+        </ns0:nvSpPr>
+        <ns0:spPr>
+          <ns1:xfrm>
+            <ns1:off x="4709160" y="2697480"/>
+            <ns1:ext cx="73152" cy="402336"/>
+          </ns1:xfrm>
+          <ns1:prstGeom prst="rect">
+            <ns1:avLst/>
+          </ns1:prstGeom>
+          <ns1:solidFill>
+            <ns1:srgbClr val="3B82F6"/>
+          </ns1:solidFill>
+          <ns1:ln w="12700">
+            <ns1:solidFill>
+              <ns1:srgbClr val="3B82F6"/>
+            </ns1:solidFill>
+            <ns1:prstDash val="solid"/>
+          </ns1:ln>
+        </ns0:spPr>
+        <ns0:txBody>
+          <ns1:bodyPr/>
+          <ns1:lstStyle/>
+          <ns1:p>
+            <ns1:endParaRPr lang="ko-KR" altLang="en-US"/>
+          </ns1:p>
+        </ns0:txBody>
+      </ns0:sp>
+      <ns0:sp>
+        <ns0:nvSpPr>
+          <ns0:cNvPr id="31" name="Text 27"/>
+          <ns0:cNvSpPr/>
+          <ns0:nvPr/>
+        </ns0:nvSpPr>
+        <ns0:spPr>
+          <ns1:xfrm>
+            <ns1:off x="4864608" y="2697480"/>
+            <ns1:ext cx="1005840" cy="402336"/>
+          </ns1:xfrm>
+          <ns1:prstGeom prst="rect">
+            <ns1:avLst/>
+          </ns1:prstGeom>
+          <ns1:noFill/>
+          <ns1:ln/>
+        </ns0:spPr>
+        <ns0:txBody>
+          <ns1:bodyPr wrap="square" lIns="0" tIns="0" rIns="0" bIns="0" rtlCol="0" anchor="ctr"/>
+          <ns1:lstStyle/>
+          <ns1:p>
+            <ns1:pPr marL="0" indent="0">
+              <ns1:buNone/>
+            </ns1:pPr>
+            <ns1:r>
+              <ns1:rPr lang="en-US" sz="1100" b="1" dirty="0">
+                <ns1:solidFill>
+                  <ns1:srgbClr val="1D4ED8"/>
+                </ns1:solidFill>
+                <ns1:latin typeface="Consolas" pitchFamily="34" charset="0"/>
+                <ns1:ea typeface="Consolas" pitchFamily="34" charset="-122"/>
+                <ns1:cs typeface="Consolas" pitchFamily="34" charset="-120"/>
+              </ns1:rPr>
+              <ns1:t>Road</ns1:t>
+            </ns1:r>
+            <ns1:endParaRPr lang="en-US" sz="1100" dirty="0"/>
+          </ns1:p>
+        </ns0:txBody>
+      </ns0:sp>
+      <ns0:sp>
+        <ns0:nvSpPr>
+          <ns0:cNvPr id="32" name="Text 28"/>
+          <ns0:cNvSpPr/>
+          <ns0:nvPr/>
+        </ns0:nvSpPr>
+        <ns0:spPr>
+          <ns1:xfrm>
+            <ns1:off x="5925312" y="2697480"/>
+            <ns1:ext cx="2560320" cy="402336"/>
+          </ns1:xfrm>
+          <ns1:prstGeom prst="rect">
+            <ns1:avLst/>
+          </ns1:prstGeom>
+          <ns1:noFill/>
+          <ns1:ln/>
+        </ns0:spPr>
+        <ns0:txBody>
+          <ns1:bodyPr wrap="square" lIns="0" tIns="0" rIns="0" bIns="0" rtlCol="0" anchor="ctr"/>
+          <ns1:lstStyle/>
+          <ns1:p>
+            <ns1:pPr marL="0" indent="0">
+              <ns1:buNone/>
+            </ns1:pPr>
+            <ns1:r>
+              <ns1:rPr lang="en-US" sz="1100" dirty="0">
+                <ns1:solidFill>
+                  <ns1:srgbClr val="2D2D2D"/>
+                </ns1:solidFill>
+                <ns1:latin typeface="Arial" pitchFamily="34" charset="0"/>
+                <ns1:ea typeface="Arial" pitchFamily="34" charset="-122"/>
+                <ns1:cs typeface="Arial" pitchFamily="34" charset="-120"/>
+              </ns1:rPr>
+              <ns1:t>OSM 엣지 → LineSegments 렌더</ns1:t>
+            </ns1:r>
+            <ns1:endParaRPr lang="en-US" sz="1100" dirty="0"/>
+          </ns1:p>
+        </ns0:txBody>
+      </ns0:sp>
+      <ns0:sp>
+        <ns0:nvSpPr>
+          <ns0:cNvPr id="33" name="Shape 29"/>
+          <ns0:cNvSpPr/>
+          <ns0:nvPr/>
+        </ns0:nvSpPr>
+        <ns0:spPr>
+          <ns1:xfrm>
+            <ns1:off x="4709160" y="3182112"/>
+            <ns1:ext cx="3840480" cy="402336"/>
+          </ns1:xfrm>
+          <ns1:prstGeom prst="rect">
+            <ns1:avLst/>
+          </ns1:prstGeom>
+          <ns1:solidFill>
+            <ns1:srgbClr val="FFFFFF"/>
+          </ns1:solidFill>
+          <ns1:ln w="12700">
+            <ns1:solidFill>
+              <ns1:srgbClr val="E5E7EB"/>
+            </ns1:solidFill>
+            <ns1:prstDash val="solid"/>
+          </ns1:ln>
+        </ns0:spPr>
+        <ns0:txBody>
+          <ns1:bodyPr/>
+          <ns1:lstStyle/>
+          <ns1:p>
+            <ns1:endParaRPr lang="ko-KR" altLang="en-US"/>
+          </ns1:p>
+        </ns0:txBody>
+      </ns0:sp>
+      <ns0:sp>
+        <ns0:nvSpPr>
+          <ns0:cNvPr id="34" name="Shape 30"/>
+          <ns0:cNvSpPr/>
+          <ns0:nvPr/>
+        </ns0:nvSpPr>
+        <ns0:spPr>
+          <ns1:xfrm>
+            <ns1:off x="4709160" y="3182112"/>
+            <ns1:ext cx="73152" cy="402336"/>
+          </ns1:xfrm>
+          <ns1:prstGeom prst="rect">
+            <ns1:avLst/>
+          </ns1:prstGeom>
+          <ns1:solidFill>
+            <ns1:srgbClr val="3B82F6"/>
+          </ns1:solidFill>
+          <ns1:ln w="12700">
+            <ns1:solidFill>
+              <ns1:srgbClr val="3B82F6"/>
+            </ns1:solidFill>
+            <ns1:prstDash val="solid"/>
+          </ns1:ln>
+        </ns0:spPr>
+        <ns0:txBody>
+          <ns1:bodyPr/>
+          <ns1:lstStyle/>
+          <ns1:p>
+            <ns1:endParaRPr lang="ko-KR" altLang="en-US"/>
+          </ns1:p>
+        </ns0:txBody>
+      </ns0:sp>
+      <ns0:sp>
+        <ns0:nvSpPr>
+          <ns0:cNvPr id="35" name="Text 31"/>
+          <ns0:cNvSpPr/>
+          <ns0:nvPr/>
+        </ns0:nvSpPr>
+        <ns0:spPr>
+          <ns1:xfrm>
+            <ns1:off x="4864608" y="3182112"/>
+            <ns1:ext cx="1005840" cy="402336"/>
+          </ns1:xfrm>
+          <ns1:prstGeom prst="rect">
+            <ns1:avLst/>
+          </ns1:prstGeom>
+          <ns1:noFill/>
+          <ns1:ln/>
+        </ns0:spPr>
+        <ns0:txBody>
+          <ns1:bodyPr wrap="square" lIns="0" tIns="0" rIns="0" bIns="0" rtlCol="0" anchor="ctr"/>
+          <ns1:lstStyle/>
+          <ns1:p>
+            <ns1:pPr marL="0" indent="0">
+              <ns1:buNone/>
+            </ns1:pPr>
+            <ns1:r>
+              <ns1:rPr lang="en-US" sz="1100" b="1" dirty="0">
+                <ns1:solidFill>
+                  <ns1:srgbClr val="1D4ED8"/>
+                </ns1:solidFill>
+                <ns1:latin typeface="Consolas" pitchFamily="34" charset="0"/>
+                <ns1:ea typeface="Consolas" pitchFamily="34" charset="-122"/>
+                <ns1:cs typeface="Consolas" pitchFamily="34" charset="-120"/>
+              </ns1:rPr>
+              <ns1:t>Taxi</ns1:t>
+            </ns1:r>
+            <ns1:endParaRPr lang="en-US" sz="1100" dirty="0"/>
+          </ns1:p>
+        </ns0:txBody>
+      </ns0:sp>
+      <ns0:sp>
+        <ns0:nvSpPr>
+          <ns0:cNvPr id="36" name="Text 32"/>
+          <ns0:cNvSpPr/>
+          <ns0:nvPr/>
+        </ns0:nvSpPr>
+        <ns0:spPr>
+          <ns1:xfrm>
+            <ns1:off x="5925312" y="3182112"/>
+            <ns1:ext cx="2560320" cy="402336"/>
+          </ns1:xfrm>
+          <ns1:prstGeom prst="rect">
+            <ns1:avLst/>
+          </ns1:prstGeom>
+          <ns1:noFill/>
+          <ns1:ln/>
+        </ns0:spPr>
+        <ns0:txBody>
+          <ns1:bodyPr wrap="square" lIns="0" tIns="0" rIns="0" bIns="0" rtlCol="0" anchor="ctr"/>
+          <ns1:lstStyle/>
+          <ns1:p>
+            <ns1:pPr marL="0" indent="0">
+              <ns1:buNone/>
+            </ns1:pPr>
+            <ns1:r>
+              <ns1:rPr lang="en-US" sz="1100" dirty="0">
+                <ns1:solidFill>
+                  <ns1:srgbClr val="2D2D2D"/>
+                </ns1:solidFill>
+                <ns1:latin typeface="Arial" pitchFamily="34" charset="0"/>
+                <ns1:ea typeface="Arial" pitchFamily="34" charset="-122"/>
+                <ns1:cs typeface="Arial" pitchFamily="34" charset="-120"/>
+              </ns1:rPr>
+              <ns1:t>BoxGeometry + 경로 애니메이션</ns1:t>
+            </ns1:r>
+            <ns1:endParaRPr lang="en-US" sz="1100" dirty="0"/>
+          </ns1:p>
+        </ns0:txBody>
+      </ns0:sp>
+      <ns0:sp>
+        <ns0:nvSpPr>
+          <ns0:cNvPr id="37" name="Shape 33"/>
+          <ns0:cNvSpPr/>
+          <ns0:nvPr/>
+        </ns0:nvSpPr>
+        <ns0:spPr>
+          <ns1:xfrm>
+            <ns1:off x="4709160" y="3666744"/>
+            <ns1:ext cx="3840480" cy="402336"/>
+          </ns1:xfrm>
+          <ns1:prstGeom prst="rect">
+            <ns1:avLst/>
+          </ns1:prstGeom>
+          <ns1:solidFill>
+            <ns1:srgbClr val="FFFFFF"/>
+          </ns1:solidFill>
+          <ns1:ln w="12700">
+            <ns1:solidFill>
+              <ns1:srgbClr val="E5E7EB"/>
+            </ns1:solidFill>
+            <ns1:prstDash val="solid"/>
+          </ns1:ln>
+        </ns0:spPr>
+        <ns0:txBody>
+          <ns1:bodyPr/>
+          <ns1:lstStyle/>
+          <ns1:p>
+            <ns1:endParaRPr lang="ko-KR" altLang="en-US"/>
+          </ns1:p>
+        </ns0:txBody>
+      </ns0:sp>
+      <ns0:sp>
+        <ns0:nvSpPr>
+          <ns0:cNvPr id="38" name="Shape 34"/>
+          <ns0:cNvSpPr/>
+          <ns0:nvPr/>
+        </ns0:nvSpPr>
+        <ns0:spPr>
+          <ns1:xfrm>
+            <ns1:off x="4709160" y="3666744"/>
+            <ns1:ext cx="73152" cy="402336"/>
+          </ns1:xfrm>
+          <ns1:prstGeom prst="rect">
+            <ns1:avLst/>
+          </ns1:prstGeom>
+          <ns1:solidFill>
+            <ns1:srgbClr val="3B82F6"/>
+          </ns1:solidFill>
+          <ns1:ln w="12700">
+            <ns1:solidFill>
+              <ns1:srgbClr val="3B82F6"/>
+            </ns1:solidFill>
+            <ns1:prstDash val="solid"/>
+          </ns1:ln>
+        </ns0:spPr>
+        <ns0:txBody>
+          <ns1:bodyPr/>
+          <ns1:lstStyle/>
+          <ns1:p>
+            <ns1:endParaRPr lang="ko-KR" altLang="en-US"/>
+          </ns1:p>
+        </ns0:txBody>
+      </ns0:sp>
+      <ns0:sp>
+        <ns0:nvSpPr>
+          <ns0:cNvPr id="39" name="Text 35"/>
+          <ns0:cNvSpPr/>
+          <ns0:nvPr/>
+        </ns0:nvSpPr>
+        <ns0:spPr>
+          <ns1:xfrm>
+            <ns1:off x="4864608" y="3666744"/>
+            <ns1:ext cx="1005840" cy="402336"/>
+          </ns1:xfrm>
+          <ns1:prstGeom prst="rect">
+            <ns1:avLst/>
+          </ns1:prstGeom>
+          <ns1:noFill/>
+          <ns1:ln/>
+        </ns0:spPr>
+        <ns0:txBody>
+          <ns1:bodyPr wrap="square" lIns="0" tIns="0" rIns="0" bIns="0" rtlCol="0" anchor="ctr"/>
+          <ns1:lstStyle/>
+          <ns1:p>
+            <ns1:pPr marL="0" indent="0">
+              <ns1:buNone/>
+            </ns1:pPr>
+            <ns1:r>
+              <ns1:rPr lang="en-US" sz="1100" b="1" dirty="0">
+                <ns1:solidFill>
+                  <ns1:srgbClr val="1D4ED8"/>
+                </ns1:solidFill>
+                <ns1:latin typeface="Consolas" pitchFamily="34" charset="0"/>
+                <ns1:ea typeface="Consolas" pitchFamily="34" charset="-122"/>
+                <ns1:cs typeface="Consolas" pitchFamily="34" charset="-120"/>
+              </ns1:rPr>
+              <ns1:t>Demand</ns1:t>
+            </ns1:r>
+            <ns1:endParaRPr lang="en-US" sz="1100" dirty="0"/>
+          </ns1:p>
+        </ns0:txBody>
+      </ns0:sp>
+      <ns0:sp>
+        <ns0:nvSpPr>
+          <ns0:cNvPr id="40" name="Text 36"/>
+          <ns0:cNvSpPr/>
+          <ns0:nvPr/>
+        </ns0:nvSpPr>
+        <ns0:spPr>
+          <ns1:xfrm>
+            <ns1:off x="5925312" y="3666744"/>
+            <ns1:ext cx="2560320" cy="402336"/>
+          </ns1:xfrm>
+          <ns1:prstGeom prst="rect">
+            <ns1:avLst/>
+          </ns1:prstGeom>
+          <ns1:noFill/>
+          <ns1:ln/>
+        </ns0:spPr>
+        <ns0:txBody>
+          <ns1:bodyPr wrap="square" lIns="0" tIns="0" rIns="0" bIns="0" rtlCol="0" anchor="ctr"/>
+          <ns1:lstStyle/>
+          <ns1:p>
+            <ns1:pPr marL="0" indent="0">
+              <ns1:buNone/>
+            </ns1:pPr>
+            <ns1:r>
+              <ns1:rPr lang="en-US" sz="1100" dirty="0">
+                <ns1:solidFill>
+                  <ns1:srgbClr val="2D2D2D"/>
+                </ns1:solidFill>
+                <ns1:latin typeface="Arial" pitchFamily="34" charset="0"/>
+                <ns1:ea typeface="Arial" pitchFamily="34" charset="-122"/>
+                <ns1:cs typeface="Arial" pitchFamily="34" charset="-120"/>
+              </ns1:rPr>
+              <ns1:t>히트맵 레이어 (수요 시각화)</ns1:t>
+            </ns1:r>
+            <ns1:endParaRPr lang="en-US" sz="1100" dirty="0"/>
+          </ns1:p>
+        </ns0:txBody>
+      </ns0:sp>
+      <ns0:sp>
+        <ns0:nvSpPr>
+          <ns0:cNvPr id="41" name="Shape 37"/>
+          <ns0:cNvSpPr/>
+          <ns0:nvPr/>
+        </ns0:nvSpPr>
+        <ns0:spPr>
+          <ns1:xfrm>
+            <ns1:off x="4709160" y="4151376"/>
+            <ns1:ext cx="3840480" cy="402336"/>
+          </ns1:xfrm>
+          <ns1:prstGeom prst="rect">
+            <ns1:avLst/>
+          </ns1:prstGeom>
+          <ns1:solidFill>
+            <ns1:srgbClr val="FFFFFF"/>
+          </ns1:solidFill>
+          <ns1:ln w="12700">
+            <ns1:solidFill>
+              <ns1:srgbClr val="E5E7EB"/>
+            </ns1:solidFill>
+            <ns1:prstDash val="solid"/>
+          </ns1:ln>
+        </ns0:spPr>
+        <ns0:txBody>
+          <ns1:bodyPr/>
+          <ns1:lstStyle/>
+          <ns1:p>
+            <ns1:endParaRPr lang="ko-KR" altLang="en-US"/>
+          </ns1:p>
+        </ns0:txBody>
+      </ns0:sp>
+      <ns0:sp>
+        <ns0:nvSpPr>
+          <ns0:cNvPr id="42" name="Shape 38"/>
+          <ns0:cNvSpPr/>
+          <ns0:nvPr/>
+        </ns0:nvSpPr>
+        <ns0:spPr>
+          <ns1:xfrm>
+            <ns1:off x="4709160" y="4151376"/>
+            <ns1:ext cx="73152" cy="402336"/>
+          </ns1:xfrm>
+          <ns1:prstGeom prst="rect">
+            <ns1:avLst/>
+          </ns1:prstGeom>
+          <ns1:solidFill>
+            <ns1:srgbClr val="3B82F6"/>
+          </ns1:solidFill>
+          <ns1:ln w="12700">
+            <ns1:solidFill>
+              <ns1:srgbClr val="3B82F6"/>
+            </ns1:solidFill>
+            <ns1:prstDash val="solid"/>
+          </ns1:ln>
+        </ns0:spPr>
+        <ns0:txBody>
+          <ns1:bodyPr/>
+          <ns1:lstStyle/>
+          <ns1:p>
+            <ns1:endParaRPr lang="ko-KR" altLang="en-US"/>
+          </ns1:p>
+        </ns0:txBody>
+      </ns0:sp>
+      <ns0:sp>
+        <ns0:nvSpPr>
+          <ns0:cNvPr id="43" name="Text 39"/>
+          <ns0:cNvSpPr/>
+          <ns0:nvPr/>
+        </ns0:nvSpPr>
+        <ns0:spPr>
+          <ns1:xfrm>
+            <ns1:off x="4864608" y="4151376"/>
+            <ns1:ext cx="1005840" cy="402336"/>
+          </ns1:xfrm>
+          <ns1:prstGeom prst="rect">
+            <ns1:avLst/>
+          </ns1:prstGeom>
+          <ns1:noFill/>
+          <ns1:ln/>
+        </ns0:spPr>
+        <ns0:txBody>
+          <ns1:bodyPr wrap="square" lIns="0" tIns="0" rIns="0" bIns="0" rtlCol="0" anchor="ctr"/>
+          <ns1:lstStyle/>
+          <ns1:p>
+            <ns1:pPr marL="0" indent="0">
+              <ns1:buNone/>
+            </ns1:pPr>
+            <ns1:r>
+              <ns1:rPr lang="en-US" sz="1100" b="1" dirty="0">
+                <ns1:solidFill>
+                  <ns1:srgbClr val="1D4ED8"/>
+                </ns1:solidFill>
+                <ns1:latin typeface="Consolas" pitchFamily="34" charset="0"/>
+                <ns1:ea typeface="Consolas" pitchFamily="34" charset="-122"/>
+                <ns1:cs typeface="Consolas" pitchFamily="34" charset="-120"/>
+              </ns1:rPr>
+              <ns1:t>Camera</ns1:t>
+            </ns1:r>
+            <ns1:endParaRPr lang="en-US" sz="1100" dirty="0"/>
+          </ns1:p>
+        </ns0:txBody>
+      </ns0:sp>
+      <ns0:sp>
+        <ns0:nvSpPr>
+          <ns0:cNvPr id="44" name="Text 40"/>
+          <ns0:cNvSpPr/>
+          <ns0:nvPr/>
+        </ns0:nvSpPr>
+        <ns0:spPr>
+          <ns1:xfrm>
+            <ns1:off x="5925312" y="4151376"/>
+            <ns1:ext cx="2560320" cy="402336"/>
+          </ns1:xfrm>
+          <ns1:prstGeom prst="rect">
+            <ns1:avLst/>
+          </ns1:prstGeom>
+          <ns1:noFill/>
+          <ns1:ln/>
+        </ns0:spPr>
+        <ns0:txBody>
+          <ns1:bodyPr wrap="square" lIns="0" tIns="0" rIns="0" bIns="0" rtlCol="0" anchor="ctr"/>
+          <ns1:lstStyle/>
+          <ns1:p>
+            <ns1:pPr marL="0" indent="0">
+              <ns1:buNone/>
+            </ns1:pPr>
+            <ns1:r>
+              <ns1:rPr lang="en-US" sz="1100" dirty="0">
+                <ns1:solidFill>
+                  <ns1:srgbClr val="2D2D2D"/>
+                </ns1:solidFill>
+                <ns1:latin typeface="Arial" pitchFamily="34" charset="0"/>
+                <ns1:ea typeface="Arial" pitchFamily="34" charset="-122"/>
+                <ns1:cs typeface="Arial" pitchFamily="34" charset="-120"/>
+              </ns1:rPr>
+              <ns1:t>OrbitControls — 마우스 회전/줌</ns1:t>
+            </ns1:r>
+            <ns1:endParaRPr lang="en-US" sz="1100" dirty="0"/>
+          </ns1:p>
+        </ns0:txBody>
+      </ns0:sp>
+    </ns0:spTree>
+  </ns0:cSld>
+  <ns0:clrMapOvr>
+    <ns1:masterClrMapping/>
+  </ns0:clrMapOvr>
+</ns0:sld>
 </file>
 
 <file path=ppt/slides/slide6.xml><?xml version="1.0" encoding="utf-8"?>
@@ -9451,6 +10014,13 @@
             <a:prstDash val="solid"/>
           </a:ln>
         </p:spPr>
+        <p:txBody>
+          <a:bodyPr/>
+          <a:lstStyle/>
+          <a:p>
+            <a:endParaRPr lang="ko-KR" altLang="en-US"/>
+          </a:p>
+        </p:txBody>
       </p:sp>
       <p:sp>
         <p:nvSpPr>
@@ -9554,6 +10124,13 @@
             <a:prstDash val="solid"/>
           </a:ln>
         </p:spPr>
+        <p:txBody>
+          <a:bodyPr/>
+          <a:lstStyle/>
+          <a:p>
+            <a:endParaRPr lang="ko-KR" altLang="en-US"/>
+          </a:p>
+        </p:txBody>
       </p:sp>
       <p:sp>
         <p:nvSpPr>
@@ -9616,7 +10193,7 @@
             <a:r>
               <a:rPr lang="en-US" sz="1200" dirty="0">
                 <a:solidFill>
-                  <a:srgbClr val="5C5C5C"/>
+                  <a:srgbClr val="AAAAAA"/>
                 </a:solidFill>
                 <a:latin typeface="Arial" pitchFamily="34" charset="0"/>
                 <a:ea typeface="Arial" pitchFamily="34" charset="-122"/>
@@ -9659,6 +10236,13 @@
             </a:outerShdw>
           </a:effectLst>
         </p:spPr>
+        <p:txBody>
+          <a:bodyPr/>
+          <a:lstStyle/>
+          <a:p>
+            <a:endParaRPr lang="ko-KR" altLang="en-US"/>
+          </a:p>
+        </p:txBody>
       </p:sp>
       <p:pic>
         <p:nvPicPr>
@@ -9750,7 +10334,7 @@
             <a:r>
               <a:rPr lang="en-US" sz="1050" dirty="0">
                 <a:solidFill>
-                  <a:srgbClr val="5C5C5C"/>
+                  <a:srgbClr val="AAAAAA"/>
                 </a:solidFill>
                 <a:latin typeface="Arial" pitchFamily="34" charset="0"/>
                 <a:ea typeface="Arial" pitchFamily="34" charset="-122"/>
@@ -9832,6 +10416,13 @@
             </a:outerShdw>
           </a:effectLst>
         </p:spPr>
+        <p:txBody>
+          <a:bodyPr/>
+          <a:lstStyle/>
+          <a:p>
+            <a:endParaRPr lang="ko-KR" altLang="en-US"/>
+          </a:p>
+        </p:txBody>
       </p:sp>
       <p:pic>
         <p:nvPicPr>
@@ -10000,6 +10591,13 @@
             </a:outerShdw>
           </a:effectLst>
         </p:spPr>
+        <p:txBody>
+          <a:bodyPr/>
+          <a:lstStyle/>
+          <a:p>
+            <a:endParaRPr lang="ko-KR" altLang="en-US"/>
+          </a:p>
+        </p:txBody>
       </p:sp>
       <p:pic>
         <p:nvPicPr>
@@ -10086,7 +10684,7 @@
             <a:r>
               <a:rPr lang="en-US" sz="1050" dirty="0">
                 <a:solidFill>
-                  <a:srgbClr val="5C5C5C"/>
+                  <a:srgbClr val="AAAAAA"/>
                 </a:solidFill>
                 <a:latin typeface="Arial" pitchFamily="34" charset="0"/>
                 <a:ea typeface="Arial" pitchFamily="34" charset="-122"/>
@@ -10168,6 +10766,13 @@
             </a:outerShdw>
           </a:effectLst>
         </p:spPr>
+        <p:txBody>
+          <a:bodyPr/>
+          <a:lstStyle/>
+          <a:p>
+            <a:endParaRPr lang="ko-KR" altLang="en-US"/>
+          </a:p>
+        </p:txBody>
       </p:sp>
       <p:pic>
         <p:nvPicPr>
@@ -10259,7 +10864,7 @@
             <a:r>
               <a:rPr lang="en-US" sz="1050" dirty="0">
                 <a:solidFill>
-                  <a:srgbClr val="5C5C5C"/>
+                  <a:srgbClr val="AAAAAA"/>
                 </a:solidFill>
                 <a:latin typeface="Arial" pitchFamily="34" charset="0"/>
                 <a:ea typeface="Arial" pitchFamily="34" charset="-122"/>
@@ -10295,6 +10900,13 @@
             <a:prstDash val="solid"/>
           </a:ln>
         </p:spPr>
+        <p:txBody>
+          <a:bodyPr/>
+          <a:lstStyle/>
+          <a:p>
+            <a:endParaRPr lang="ko-KR" altLang="en-US"/>
+          </a:p>
+        </p:txBody>
       </p:sp>
       <p:sp>
         <p:nvSpPr>
@@ -10320,6 +10932,13 @@
             <a:prstDash val="solid"/>
           </a:ln>
         </p:spPr>
+        <p:txBody>
+          <a:bodyPr/>
+          <a:lstStyle/>
+          <a:p>
+            <a:endParaRPr lang="ko-KR" altLang="en-US"/>
+          </a:p>
+        </p:txBody>
       </p:sp>
       <p:sp>
         <p:nvSpPr>
@@ -10417,6 +11036,13 @@
             <a:prstDash val="solid"/>
           </a:ln>
         </p:spPr>
+        <p:txBody>
+          <a:bodyPr/>
+          <a:lstStyle/>
+          <a:p>
+            <a:endParaRPr lang="ko-KR" altLang="en-US"/>
+          </a:p>
+        </p:txBody>
       </p:sp>
       <p:sp>
         <p:nvSpPr>
@@ -10520,6 +11146,13 @@
             <a:prstDash val="solid"/>
           </a:ln>
         </p:spPr>
+        <p:txBody>
+          <a:bodyPr/>
+          <a:lstStyle/>
+          <a:p>
+            <a:endParaRPr lang="ko-KR" altLang="en-US"/>
+          </a:p>
+        </p:txBody>
       </p:sp>
       <p:sp>
         <p:nvSpPr>
@@ -10591,6 +11224,13 @@
             </a:outerShdw>
           </a:effectLst>
         </p:spPr>
+        <p:txBody>
+          <a:bodyPr/>
+          <a:lstStyle/>
+          <a:p>
+            <a:endParaRPr lang="ko-KR" altLang="en-US"/>
+          </a:p>
+        </p:txBody>
       </p:sp>
       <p:sp>
         <p:nvSpPr>
@@ -10616,6 +11256,13 @@
             <a:prstDash val="solid"/>
           </a:ln>
         </p:spPr>
+        <p:txBody>
+          <a:bodyPr/>
+          <a:lstStyle/>
+          <a:p>
+            <a:endParaRPr lang="ko-KR" altLang="en-US"/>
+          </a:p>
+        </p:txBody>
       </p:sp>
       <p:sp>
         <p:nvSpPr>
@@ -10736,6 +11383,13 @@
             <a:prstDash val="solid"/>
           </a:ln>
         </p:spPr>
+        <p:txBody>
+          <a:bodyPr/>
+          <a:lstStyle/>
+          <a:p>
+            <a:endParaRPr lang="ko-KR" altLang="en-US"/>
+          </a:p>
+        </p:txBody>
       </p:sp>
       <p:sp>
         <p:nvSpPr>
@@ -10763,6 +11417,9 @@
             </a:pPr>
             <a:r>
               <a:rPr sz="1080">
+                <a:solidFill>
+                  <a:srgbClr val="AAAAAA"/>
+                </a:solidFill>
                 <a:latin typeface="Malgun Gothic"/>
               </a:rPr>
               <a:t>Three.js · OSM | 강남 9개 동 3D 환경</a:t>
@@ -10841,6 +11498,13 @@
             </a:outerShdw>
           </a:effectLst>
         </p:spPr>
+        <p:txBody>
+          <a:bodyPr/>
+          <a:lstStyle/>
+          <a:p>
+            <a:endParaRPr lang="ko-KR" altLang="en-US"/>
+          </a:p>
+        </p:txBody>
       </p:sp>
       <p:sp>
         <p:nvSpPr>
@@ -10866,6 +11530,13 @@
             <a:prstDash val="solid"/>
           </a:ln>
         </p:spPr>
+        <p:txBody>
+          <a:bodyPr/>
+          <a:lstStyle/>
+          <a:p>
+            <a:endParaRPr lang="ko-KR" altLang="en-US"/>
+          </a:p>
+        </p:txBody>
       </p:sp>
       <p:sp>
         <p:nvSpPr>
@@ -10986,6 +11657,13 @@
             <a:prstDash val="solid"/>
           </a:ln>
         </p:spPr>
+        <p:txBody>
+          <a:bodyPr/>
+          <a:lstStyle/>
+          <a:p>
+            <a:endParaRPr lang="ko-KR" altLang="en-US"/>
+          </a:p>
+        </p:txBody>
       </p:sp>
       <p:sp>
         <p:nvSpPr>
@@ -11113,6 +11791,13 @@
             </a:outerShdw>
           </a:effectLst>
         </p:spPr>
+        <p:txBody>
+          <a:bodyPr/>
+          <a:lstStyle/>
+          <a:p>
+            <a:endParaRPr lang="ko-KR" altLang="en-US"/>
+          </a:p>
+        </p:txBody>
       </p:sp>
       <p:sp>
         <p:nvSpPr>
@@ -11138,6 +11823,13 @@
             <a:prstDash val="solid"/>
           </a:ln>
         </p:spPr>
+        <p:txBody>
+          <a:bodyPr/>
+          <a:lstStyle/>
+          <a:p>
+            <a:endParaRPr lang="ko-KR" altLang="en-US"/>
+          </a:p>
+        </p:txBody>
       </p:sp>
       <p:sp>
         <p:nvSpPr>
@@ -11245,6 +11937,13 @@
             <a:prstDash val="solid"/>
           </a:ln>
         </p:spPr>
+        <p:txBody>
+          <a:bodyPr/>
+          <a:lstStyle/>
+          <a:p>
+            <a:endParaRPr lang="ko-KR" altLang="en-US"/>
+          </a:p>
+        </p:txBody>
       </p:sp>
       <p:sp>
         <p:nvSpPr>
@@ -11359,6 +12058,13 @@
             </a:outerShdw>
           </a:effectLst>
         </p:spPr>
+        <p:txBody>
+          <a:bodyPr/>
+          <a:lstStyle/>
+          <a:p>
+            <a:endParaRPr lang="ko-KR" altLang="en-US"/>
+          </a:p>
+        </p:txBody>
       </p:sp>
       <p:sp>
         <p:nvSpPr>
@@ -11384,6 +12090,13 @@
             <a:prstDash val="solid"/>
           </a:ln>
         </p:spPr>
+        <p:txBody>
+          <a:bodyPr/>
+          <a:lstStyle/>
+          <a:p>
+            <a:endParaRPr lang="ko-KR" altLang="en-US"/>
+          </a:p>
+        </p:txBody>
       </p:sp>
       <p:sp>
         <p:nvSpPr>
@@ -11491,6 +12204,13 @@
             <a:prstDash val="solid"/>
           </a:ln>
         </p:spPr>
+        <p:txBody>
+          <a:bodyPr/>
+          <a:lstStyle/>
+          <a:p>
+            <a:endParaRPr lang="ko-KR" altLang="en-US"/>
+          </a:p>
+        </p:txBody>
       </p:sp>
       <p:sp>
         <p:nvSpPr>
@@ -11931,7 +12651,7 @@
               <a:rPr sz="1019">
                 <a:latin typeface="Malgun Gothic"/>
               </a:rPr>
-              <a:t>• OSM 기반 도로/건물/행정동 시각화</a:t>
+              <a:t>• OSM 도로·건물·행정동 시각화</a:t>
             </a:r>
           </a:p>
           <a:p>
@@ -12032,6 +12752,9 @@
             <a:pPr algn="ctr"/>
             <a:r>
               <a:rPr sz="1100" b="1">
+                <a:solidFill>
+                  <a:srgbClr val="FFFFFF"/>
+                </a:solidFill>
                 <a:latin typeface="Malgun Gothic"/>
               </a:rPr>
               <a:t>Three.js · Next.js · Cloudflare Workers</a:t>
@@ -12257,7 +12980,7 @@
                 </a:solidFill>
                 <a:latin typeface="Malgun Gothic"/>
               </a:rPr>
-              <a:t>데이터 수집 개선: 생활인구 proxy에서 대중교통 proxy로 전환</a:t>
+              <a:t>데이터 수집: 생활인구 proxy → 대중교통 proxy 전환</a:t>
             </a:r>
           </a:p>
         </p:txBody>
